--- a/Docs/Презентация системы кафе.pptx
+++ b/Docs/Презентация системы кафе.pptx
@@ -9,15 +9,15 @@
   </p:notesMasterIdLst>
   <p:sldIdLst>
     <p:sldId id="256" r:id="rId2"/>
-    <p:sldId id="306" r:id="rId3"/>
-    <p:sldId id="258" r:id="rId4"/>
-    <p:sldId id="262" r:id="rId5"/>
+    <p:sldId id="262" r:id="rId3"/>
+    <p:sldId id="306" r:id="rId4"/>
+    <p:sldId id="258" r:id="rId5"/>
     <p:sldId id="259" r:id="rId6"/>
-    <p:sldId id="281" r:id="rId7"/>
-    <p:sldId id="263" r:id="rId8"/>
-    <p:sldId id="264" r:id="rId9"/>
-    <p:sldId id="305" r:id="rId10"/>
-    <p:sldId id="276" r:id="rId11"/>
+    <p:sldId id="263" r:id="rId7"/>
+    <p:sldId id="264" r:id="rId8"/>
+    <p:sldId id="305" r:id="rId9"/>
+    <p:sldId id="276" r:id="rId10"/>
+    <p:sldId id="281" r:id="rId11"/>
     <p:sldId id="288" r:id="rId12"/>
   </p:sldIdLst>
   <p:sldSz cx="9144000" cy="5143500" type="screen16x9"/>
@@ -35,7 +35,6 @@
     <p:embeddedFont>
       <p:font typeface="Montserrat ExtraLight" panose="00000300000000000000" pitchFamily="2" charset="-52"/>
       <p:regular r:id="rId17"/>
-      <p:italic r:id="rId18"/>
     </p:embeddedFont>
   </p:embeddedFontLst>
   <p:defaultTextStyle>
@@ -825,7 +824,7 @@
   <p:cSld>
     <p:spTree>
       <p:nvGrpSpPr>
-        <p:cNvPr id="1" name="Shape 1999"/>
+        <p:cNvPr id="1" name="Shape 2093"/>
         <p:cNvGrpSpPr/>
         <p:nvPr/>
       </p:nvGrpSpPr>
@@ -839,7 +838,7 @@
       </p:grpSpPr>
       <p:sp>
         <p:nvSpPr>
-          <p:cNvPr id="2000" name="Google Shape;2000;g7f9262ee2f_0_26289:notes"/>
+          <p:cNvPr id="2094" name="Google Shape;2094;g7f9262ee2f_0_26352:notes"/>
           <p:cNvSpPr>
             <a:spLocks noGrp="1" noRot="1" noChangeAspect="1"/>
           </p:cNvSpPr>
@@ -880,7 +879,7 @@
       </p:sp>
       <p:sp>
         <p:nvSpPr>
-          <p:cNvPr id="2001" name="Google Shape;2001;g7f9262ee2f_0_26289:notes"/>
+          <p:cNvPr id="2095" name="Google Shape;2095;g7f9262ee2f_0_26352:notes"/>
           <p:cNvSpPr txBox="1">
             <a:spLocks noGrp="1"/>
           </p:cNvSpPr>
@@ -1029,6 +1028,110 @@
 </file>
 
 <file path=ppt/notesSlides/notesSlide2.xml><?xml version="1.0" encoding="utf-8"?>
+<p:notes xmlns:a="http://schemas.openxmlformats.org/drawingml/2006/main" xmlns:r="http://schemas.openxmlformats.org/officeDocument/2006/relationships" xmlns:p="http://schemas.openxmlformats.org/presentationml/2006/main" showMasterSp="0" showMasterPhAnim="0">
+  <p:cSld>
+    <p:spTree>
+      <p:nvGrpSpPr>
+        <p:cNvPr id="1" name="Shape 210"/>
+        <p:cNvGrpSpPr/>
+        <p:nvPr/>
+      </p:nvGrpSpPr>
+      <p:grpSpPr>
+        <a:xfrm>
+          <a:off x="0" y="0"/>
+          <a:ext cx="0" cy="0"/>
+          <a:chOff x="0" y="0"/>
+          <a:chExt cx="0" cy="0"/>
+        </a:xfrm>
+      </p:grpSpPr>
+      <p:sp>
+        <p:nvSpPr>
+          <p:cNvPr id="211" name="Google Shape;211;g7290233416_0_12:notes"/>
+          <p:cNvSpPr>
+            <a:spLocks noGrp="1" noRot="1" noChangeAspect="1"/>
+          </p:cNvSpPr>
+          <p:nvPr>
+            <p:ph type="sldImg" idx="2"/>
+          </p:nvPr>
+        </p:nvSpPr>
+        <p:spPr>
+          <a:xfrm>
+            <a:off x="381000" y="685800"/>
+            <a:ext cx="6096000" cy="3429000"/>
+          </a:xfrm>
+          <a:custGeom>
+            <a:avLst/>
+            <a:gdLst/>
+            <a:ahLst/>
+            <a:cxnLst/>
+            <a:rect l="l" t="t" r="r" b="b"/>
+            <a:pathLst>
+              <a:path w="120000" h="120000" extrusionOk="0">
+                <a:moveTo>
+                  <a:pt x="0" y="0"/>
+                </a:moveTo>
+                <a:lnTo>
+                  <a:pt x="120000" y="0"/>
+                </a:lnTo>
+                <a:lnTo>
+                  <a:pt x="120000" y="120000"/>
+                </a:lnTo>
+                <a:lnTo>
+                  <a:pt x="0" y="120000"/>
+                </a:lnTo>
+                <a:close/>
+              </a:path>
+            </a:pathLst>
+          </a:custGeom>
+        </p:spPr>
+      </p:sp>
+      <p:sp>
+        <p:nvSpPr>
+          <p:cNvPr id="212" name="Google Shape;212;g7290233416_0_12:notes"/>
+          <p:cNvSpPr txBox="1">
+            <a:spLocks noGrp="1"/>
+          </p:cNvSpPr>
+          <p:nvPr>
+            <p:ph type="body" idx="1"/>
+          </p:nvPr>
+        </p:nvSpPr>
+        <p:spPr>
+          <a:xfrm>
+            <a:off x="685800" y="4343400"/>
+            <a:ext cx="5486400" cy="4114800"/>
+          </a:xfrm>
+          <a:prstGeom prst="rect">
+            <a:avLst/>
+          </a:prstGeom>
+        </p:spPr>
+        <p:txBody>
+          <a:bodyPr spcFirstLastPara="1" wrap="square" lIns="91425" tIns="91425" rIns="91425" bIns="91425" anchor="t" anchorCtr="0">
+            <a:noAutofit/>
+          </a:bodyPr>
+          <a:lstStyle/>
+          <a:p>
+            <a:pPr marL="0" lvl="0" indent="0" algn="l" rtl="0">
+              <a:spcBef>
+                <a:spcPts val="0"/>
+              </a:spcBef>
+              <a:spcAft>
+                <a:spcPts val="0"/>
+              </a:spcAft>
+              <a:buNone/>
+            </a:pPr>
+            <a:endParaRPr/>
+          </a:p>
+        </p:txBody>
+      </p:sp>
+    </p:spTree>
+  </p:cSld>
+  <p:clrMapOvr>
+    <a:masterClrMapping/>
+  </p:clrMapOvr>
+</p:notes>
+</file>
+
+<file path=ppt/notesSlides/notesSlide3.xml><?xml version="1.0" encoding="utf-8"?>
 <p:notes xmlns:a="http://schemas.openxmlformats.org/drawingml/2006/main" xmlns:r="http://schemas.openxmlformats.org/officeDocument/2006/relationships" xmlns:p="http://schemas.openxmlformats.org/presentationml/2006/main" showMasterSp="0" showMasterPhAnim="0">
   <p:cSld>
     <p:spTree>
@@ -1155,7 +1258,7 @@
 </p:notes>
 </file>
 
-<file path=ppt/notesSlides/notesSlide3.xml><?xml version="1.0" encoding="utf-8"?>
+<file path=ppt/notesSlides/notesSlide4.xml><?xml version="1.0" encoding="utf-8"?>
 <p:notes xmlns:a="http://schemas.openxmlformats.org/drawingml/2006/main" xmlns:r="http://schemas.openxmlformats.org/officeDocument/2006/relationships" xmlns:p="http://schemas.openxmlformats.org/presentationml/2006/main" showMasterSp="0" showMasterPhAnim="0">
   <p:cSld>
     <p:spTree>
@@ -1216,110 +1319,6 @@
       <p:sp>
         <p:nvSpPr>
           <p:cNvPr id="176" name="Google Shape;176;g7f9262ee2f_0_26276:notes"/>
-          <p:cNvSpPr txBox="1">
-            <a:spLocks noGrp="1"/>
-          </p:cNvSpPr>
-          <p:nvPr>
-            <p:ph type="body" idx="1"/>
-          </p:nvPr>
-        </p:nvSpPr>
-        <p:spPr>
-          <a:xfrm>
-            <a:off x="685800" y="4343400"/>
-            <a:ext cx="5486400" cy="4114800"/>
-          </a:xfrm>
-          <a:prstGeom prst="rect">
-            <a:avLst/>
-          </a:prstGeom>
-        </p:spPr>
-        <p:txBody>
-          <a:bodyPr spcFirstLastPara="1" wrap="square" lIns="91425" tIns="91425" rIns="91425" bIns="91425" anchor="t" anchorCtr="0">
-            <a:noAutofit/>
-          </a:bodyPr>
-          <a:lstStyle/>
-          <a:p>
-            <a:pPr marL="0" lvl="0" indent="0" algn="l" rtl="0">
-              <a:spcBef>
-                <a:spcPts val="0"/>
-              </a:spcBef>
-              <a:spcAft>
-                <a:spcPts val="0"/>
-              </a:spcAft>
-              <a:buNone/>
-            </a:pPr>
-            <a:endParaRPr/>
-          </a:p>
-        </p:txBody>
-      </p:sp>
-    </p:spTree>
-  </p:cSld>
-  <p:clrMapOvr>
-    <a:masterClrMapping/>
-  </p:clrMapOvr>
-</p:notes>
-</file>
-
-<file path=ppt/notesSlides/notesSlide4.xml><?xml version="1.0" encoding="utf-8"?>
-<p:notes xmlns:a="http://schemas.openxmlformats.org/drawingml/2006/main" xmlns:r="http://schemas.openxmlformats.org/officeDocument/2006/relationships" xmlns:p="http://schemas.openxmlformats.org/presentationml/2006/main" showMasterSp="0" showMasterPhAnim="0">
-  <p:cSld>
-    <p:spTree>
-      <p:nvGrpSpPr>
-        <p:cNvPr id="1" name="Shape 210"/>
-        <p:cNvGrpSpPr/>
-        <p:nvPr/>
-      </p:nvGrpSpPr>
-      <p:grpSpPr>
-        <a:xfrm>
-          <a:off x="0" y="0"/>
-          <a:ext cx="0" cy="0"/>
-          <a:chOff x="0" y="0"/>
-          <a:chExt cx="0" cy="0"/>
-        </a:xfrm>
-      </p:grpSpPr>
-      <p:sp>
-        <p:nvSpPr>
-          <p:cNvPr id="211" name="Google Shape;211;g7290233416_0_12:notes"/>
-          <p:cNvSpPr>
-            <a:spLocks noGrp="1" noRot="1" noChangeAspect="1"/>
-          </p:cNvSpPr>
-          <p:nvPr>
-            <p:ph type="sldImg" idx="2"/>
-          </p:nvPr>
-        </p:nvSpPr>
-        <p:spPr>
-          <a:xfrm>
-            <a:off x="381000" y="685800"/>
-            <a:ext cx="6096000" cy="3429000"/>
-          </a:xfrm>
-          <a:custGeom>
-            <a:avLst/>
-            <a:gdLst/>
-            <a:ahLst/>
-            <a:cxnLst/>
-            <a:rect l="l" t="t" r="r" b="b"/>
-            <a:pathLst>
-              <a:path w="120000" h="120000" extrusionOk="0">
-                <a:moveTo>
-                  <a:pt x="0" y="0"/>
-                </a:moveTo>
-                <a:lnTo>
-                  <a:pt x="120000" y="0"/>
-                </a:lnTo>
-                <a:lnTo>
-                  <a:pt x="120000" y="120000"/>
-                </a:lnTo>
-                <a:lnTo>
-                  <a:pt x="0" y="120000"/>
-                </a:lnTo>
-                <a:close/>
-              </a:path>
-            </a:pathLst>
-          </a:custGeom>
-        </p:spPr>
-      </p:sp>
-      <p:sp>
-        <p:nvSpPr>
-          <p:cNvPr id="212" name="Google Shape;212;g7290233416_0_12:notes"/>
           <p:cNvSpPr txBox="1">
             <a:spLocks noGrp="1"/>
           </p:cNvSpPr>
@@ -1472,110 +1471,6 @@
   <p:cSld>
     <p:spTree>
       <p:nvGrpSpPr>
-        <p:cNvPr id="1" name="Shape 2093"/>
-        <p:cNvGrpSpPr/>
-        <p:nvPr/>
-      </p:nvGrpSpPr>
-      <p:grpSpPr>
-        <a:xfrm>
-          <a:off x="0" y="0"/>
-          <a:ext cx="0" cy="0"/>
-          <a:chOff x="0" y="0"/>
-          <a:chExt cx="0" cy="0"/>
-        </a:xfrm>
-      </p:grpSpPr>
-      <p:sp>
-        <p:nvSpPr>
-          <p:cNvPr id="2094" name="Google Shape;2094;g7f9262ee2f_0_26352:notes"/>
-          <p:cNvSpPr>
-            <a:spLocks noGrp="1" noRot="1" noChangeAspect="1"/>
-          </p:cNvSpPr>
-          <p:nvPr>
-            <p:ph type="sldImg" idx="2"/>
-          </p:nvPr>
-        </p:nvSpPr>
-        <p:spPr>
-          <a:xfrm>
-            <a:off x="381000" y="685800"/>
-            <a:ext cx="6096000" cy="3429000"/>
-          </a:xfrm>
-          <a:custGeom>
-            <a:avLst/>
-            <a:gdLst/>
-            <a:ahLst/>
-            <a:cxnLst/>
-            <a:rect l="l" t="t" r="r" b="b"/>
-            <a:pathLst>
-              <a:path w="120000" h="120000" extrusionOk="0">
-                <a:moveTo>
-                  <a:pt x="0" y="0"/>
-                </a:moveTo>
-                <a:lnTo>
-                  <a:pt x="120000" y="0"/>
-                </a:lnTo>
-                <a:lnTo>
-                  <a:pt x="120000" y="120000"/>
-                </a:lnTo>
-                <a:lnTo>
-                  <a:pt x="0" y="120000"/>
-                </a:lnTo>
-                <a:close/>
-              </a:path>
-            </a:pathLst>
-          </a:custGeom>
-        </p:spPr>
-      </p:sp>
-      <p:sp>
-        <p:nvSpPr>
-          <p:cNvPr id="2095" name="Google Shape;2095;g7f9262ee2f_0_26352:notes"/>
-          <p:cNvSpPr txBox="1">
-            <a:spLocks noGrp="1"/>
-          </p:cNvSpPr>
-          <p:nvPr>
-            <p:ph type="body" idx="1"/>
-          </p:nvPr>
-        </p:nvSpPr>
-        <p:spPr>
-          <a:xfrm>
-            <a:off x="685800" y="4343400"/>
-            <a:ext cx="5486400" cy="4114800"/>
-          </a:xfrm>
-          <a:prstGeom prst="rect">
-            <a:avLst/>
-          </a:prstGeom>
-        </p:spPr>
-        <p:txBody>
-          <a:bodyPr spcFirstLastPara="1" wrap="square" lIns="91425" tIns="91425" rIns="91425" bIns="91425" anchor="t" anchorCtr="0">
-            <a:noAutofit/>
-          </a:bodyPr>
-          <a:lstStyle/>
-          <a:p>
-            <a:pPr marL="0" lvl="0" indent="0" algn="l" rtl="0">
-              <a:spcBef>
-                <a:spcPts val="0"/>
-              </a:spcBef>
-              <a:spcAft>
-                <a:spcPts val="0"/>
-              </a:spcAft>
-              <a:buNone/>
-            </a:pPr>
-            <a:endParaRPr/>
-          </a:p>
-        </p:txBody>
-      </p:sp>
-    </p:spTree>
-  </p:cSld>
-  <p:clrMapOvr>
-    <a:masterClrMapping/>
-  </p:clrMapOvr>
-</p:notes>
-</file>
-
-<file path=ppt/notesSlides/notesSlide7.xml><?xml version="1.0" encoding="utf-8"?>
-<p:notes xmlns:a="http://schemas.openxmlformats.org/drawingml/2006/main" xmlns:r="http://schemas.openxmlformats.org/officeDocument/2006/relationships" xmlns:p="http://schemas.openxmlformats.org/presentationml/2006/main" showMasterSp="0" showMasterPhAnim="0">
-  <p:cSld>
-    <p:spTree>
-      <p:nvGrpSpPr>
         <p:cNvPr id="1" name="Shape 217"/>
         <p:cNvGrpSpPr/>
         <p:nvPr/>
@@ -1675,7 +1570,7 @@
 </p:notes>
 </file>
 
-<file path=ppt/notesSlides/notesSlide8.xml><?xml version="1.0" encoding="utf-8"?>
+<file path=ppt/notesSlides/notesSlide7.xml><?xml version="1.0" encoding="utf-8"?>
 <p:notes xmlns:a="http://schemas.openxmlformats.org/drawingml/2006/main" xmlns:r="http://schemas.openxmlformats.org/officeDocument/2006/relationships" xmlns:p="http://schemas.openxmlformats.org/presentationml/2006/main" showMasterSp="0" showMasterPhAnim="0">
   <p:cSld>
     <p:spTree>
@@ -1779,7 +1674,7 @@
 </p:notes>
 </file>
 
-<file path=ppt/notesSlides/notesSlide9.xml><?xml version="1.0" encoding="utf-8"?>
+<file path=ppt/notesSlides/notesSlide8.xml><?xml version="1.0" encoding="utf-8"?>
 <p:notes xmlns:a="http://schemas.openxmlformats.org/drawingml/2006/main" xmlns:r="http://schemas.openxmlformats.org/officeDocument/2006/relationships" xmlns:p="http://schemas.openxmlformats.org/presentationml/2006/main" showMasterSp="0" showMasterPhAnim="0">
   <p:cSld>
     <p:spTree>
@@ -1899,6 +1794,110 @@
         <p14:creationId xmlns:p14="http://schemas.microsoft.com/office/powerpoint/2010/main" val="1346213620"/>
       </p:ext>
     </p:extLst>
+  </p:cSld>
+  <p:clrMapOvr>
+    <a:masterClrMapping/>
+  </p:clrMapOvr>
+</p:notes>
+</file>
+
+<file path=ppt/notesSlides/notesSlide9.xml><?xml version="1.0" encoding="utf-8"?>
+<p:notes xmlns:a="http://schemas.openxmlformats.org/drawingml/2006/main" xmlns:r="http://schemas.openxmlformats.org/officeDocument/2006/relationships" xmlns:p="http://schemas.openxmlformats.org/presentationml/2006/main" showMasterSp="0" showMasterPhAnim="0">
+  <p:cSld>
+    <p:spTree>
+      <p:nvGrpSpPr>
+        <p:cNvPr id="1" name="Shape 1999"/>
+        <p:cNvGrpSpPr/>
+        <p:nvPr/>
+      </p:nvGrpSpPr>
+      <p:grpSpPr>
+        <a:xfrm>
+          <a:off x="0" y="0"/>
+          <a:ext cx="0" cy="0"/>
+          <a:chOff x="0" y="0"/>
+          <a:chExt cx="0" cy="0"/>
+        </a:xfrm>
+      </p:grpSpPr>
+      <p:sp>
+        <p:nvSpPr>
+          <p:cNvPr id="2000" name="Google Shape;2000;g7f9262ee2f_0_26289:notes"/>
+          <p:cNvSpPr>
+            <a:spLocks noGrp="1" noRot="1" noChangeAspect="1"/>
+          </p:cNvSpPr>
+          <p:nvPr>
+            <p:ph type="sldImg" idx="2"/>
+          </p:nvPr>
+        </p:nvSpPr>
+        <p:spPr>
+          <a:xfrm>
+            <a:off x="381000" y="685800"/>
+            <a:ext cx="6096000" cy="3429000"/>
+          </a:xfrm>
+          <a:custGeom>
+            <a:avLst/>
+            <a:gdLst/>
+            <a:ahLst/>
+            <a:cxnLst/>
+            <a:rect l="l" t="t" r="r" b="b"/>
+            <a:pathLst>
+              <a:path w="120000" h="120000" extrusionOk="0">
+                <a:moveTo>
+                  <a:pt x="0" y="0"/>
+                </a:moveTo>
+                <a:lnTo>
+                  <a:pt x="120000" y="0"/>
+                </a:lnTo>
+                <a:lnTo>
+                  <a:pt x="120000" y="120000"/>
+                </a:lnTo>
+                <a:lnTo>
+                  <a:pt x="0" y="120000"/>
+                </a:lnTo>
+                <a:close/>
+              </a:path>
+            </a:pathLst>
+          </a:custGeom>
+        </p:spPr>
+      </p:sp>
+      <p:sp>
+        <p:nvSpPr>
+          <p:cNvPr id="2001" name="Google Shape;2001;g7f9262ee2f_0_26289:notes"/>
+          <p:cNvSpPr txBox="1">
+            <a:spLocks noGrp="1"/>
+          </p:cNvSpPr>
+          <p:nvPr>
+            <p:ph type="body" idx="1"/>
+          </p:nvPr>
+        </p:nvSpPr>
+        <p:spPr>
+          <a:xfrm>
+            <a:off x="685800" y="4343400"/>
+            <a:ext cx="5486400" cy="4114800"/>
+          </a:xfrm>
+          <a:prstGeom prst="rect">
+            <a:avLst/>
+          </a:prstGeom>
+        </p:spPr>
+        <p:txBody>
+          <a:bodyPr spcFirstLastPara="1" wrap="square" lIns="91425" tIns="91425" rIns="91425" bIns="91425" anchor="t" anchorCtr="0">
+            <a:noAutofit/>
+          </a:bodyPr>
+          <a:lstStyle/>
+          <a:p>
+            <a:pPr marL="0" lvl="0" indent="0" algn="l" rtl="0">
+              <a:spcBef>
+                <a:spcPts val="0"/>
+              </a:spcBef>
+              <a:spcAft>
+                <a:spcPts val="0"/>
+              </a:spcAft>
+              <a:buNone/>
+            </a:pPr>
+            <a:endParaRPr/>
+          </a:p>
+        </p:txBody>
+      </p:sp>
+    </p:spTree>
   </p:cSld>
   <p:clrMapOvr>
     <a:masterClrMapping/>
@@ -14388,7 +14387,7 @@
   <p:cSld>
     <p:spTree>
       <p:nvGrpSpPr>
-        <p:cNvPr id="1" name="Shape 2002"/>
+        <p:cNvPr id="1" name="Shape 2096"/>
         <p:cNvGrpSpPr/>
         <p:nvPr/>
       </p:nvGrpSpPr>
@@ -14402,7 +14401,7 @@
       </p:grpSpPr>
       <p:sp>
         <p:nvSpPr>
-          <p:cNvPr id="2003" name="Google Shape;2003;p58"/>
+          <p:cNvPr id="2097" name="Google Shape;2097;p63"/>
           <p:cNvSpPr txBox="1">
             <a:spLocks noGrp="1"/>
           </p:cNvSpPr>
@@ -14413,7 +14412,7 @@
         <p:spPr>
           <a:xfrm>
             <a:off x="938500" y="445025"/>
-            <a:ext cx="4629300" cy="941400"/>
+            <a:ext cx="5043600" cy="941400"/>
           </a:xfrm>
           <a:prstGeom prst="rect">
             <a:avLst/>
@@ -14425,14 +14424,18 @@
           </a:bodyPr>
           <a:lstStyle/>
           <a:p>
-            <a:pPr lvl="0"/>
+            <a:pPr marL="0" lvl="0" indent="0" algn="l" rtl="0">
+              <a:spcBef>
+                <a:spcPts val="0"/>
+              </a:spcBef>
+              <a:spcAft>
+                <a:spcPts val="0"/>
+              </a:spcAft>
+              <a:buNone/>
+            </a:pPr>
             <a:r>
               <a:rPr lang="ru-RU" dirty="0"/>
-              <a:t>Безопасность и </a:t>
-            </a:r>
-            <a:r>
-              <a:rPr lang="en-US" dirty="0"/>
-              <a:t>API</a:t>
+              <a:t>Контейнеризация</a:t>
             </a:r>
             <a:endParaRPr dirty="0"/>
           </a:p>
@@ -14440,7 +14443,7 @@
       </p:sp>
       <p:cxnSp>
         <p:nvCxnSpPr>
-          <p:cNvPr id="2016" name="Google Shape;2016;p58"/>
+          <p:cNvPr id="2106" name="Google Shape;2106;p63"/>
           <p:cNvCxnSpPr/>
           <p:nvPr/>
         </p:nvCxnSpPr>
@@ -14473,987 +14476,71 @@
       </p:cxnSp>
       <p:sp>
         <p:nvSpPr>
-          <p:cNvPr id="18" name="Google Shape;2098;p63">
+          <p:cNvPr id="30" name="TextBox 29">
             <a:extLst>
               <a:ext uri="{FF2B5EF4-FFF2-40B4-BE49-F238E27FC236}">
-                <a16:creationId xmlns:a16="http://schemas.microsoft.com/office/drawing/2014/main" id="{63D0DE40-08F9-AAE7-FD7D-6AD3A202B343}"/>
+                <a16:creationId xmlns:a16="http://schemas.microsoft.com/office/drawing/2014/main" id="{0EACDDC0-5212-7175-2407-40C47585619E}"/>
               </a:ext>
             </a:extLst>
           </p:cNvPr>
-          <p:cNvSpPr txBox="1">
-            <a:spLocks noGrp="1"/>
-          </p:cNvSpPr>
-          <p:nvPr>
-            <p:ph type="title" idx="2"/>
-          </p:nvPr>
-        </p:nvSpPr>
-        <p:spPr>
-          <a:xfrm>
-            <a:off x="1894670" y="1437831"/>
-            <a:ext cx="2025695" cy="375600"/>
-          </a:xfrm>
-          <a:prstGeom prst="rect">
-            <a:avLst/>
-          </a:prstGeom>
-        </p:spPr>
-        <p:txBody>
-          <a:bodyPr spcFirstLastPara="1" wrap="square" lIns="91425" tIns="91425" rIns="91425" bIns="91425" anchor="t" anchorCtr="0">
-            <a:noAutofit/>
-          </a:bodyPr>
-          <a:lstStyle/>
-          <a:p>
-            <a:pPr lvl="0"/>
-            <a:r>
-              <a:rPr lang="en-US" dirty="0"/>
-              <a:t>JWT-</a:t>
-            </a:r>
-            <a:r>
-              <a:rPr lang="ru-RU" dirty="0"/>
-              <a:t>токены</a:t>
-            </a:r>
-            <a:endParaRPr dirty="0"/>
-          </a:p>
-        </p:txBody>
-      </p:sp>
-      <p:sp>
-        <p:nvSpPr>
-          <p:cNvPr id="19" name="Google Shape;2099;p63">
-            <a:extLst>
-              <a:ext uri="{FF2B5EF4-FFF2-40B4-BE49-F238E27FC236}">
-                <a16:creationId xmlns:a16="http://schemas.microsoft.com/office/drawing/2014/main" id="{FE0FD251-EB6E-5C62-9897-35AB75933E92}"/>
-              </a:ext>
-            </a:extLst>
-          </p:cNvPr>
-          <p:cNvSpPr txBox="1">
-            <a:spLocks/>
-          </p:cNvSpPr>
+          <p:cNvSpPr txBox="1"/>
           <p:nvPr/>
         </p:nvSpPr>
         <p:spPr>
           <a:xfrm>
-            <a:off x="1424496" y="1885154"/>
-            <a:ext cx="2966042" cy="2492553"/>
+            <a:off x="938500" y="1114824"/>
+            <a:ext cx="4689782" cy="523220"/>
           </a:xfrm>
           <a:prstGeom prst="rect">
             <a:avLst/>
           </a:prstGeom>
           <a:noFill/>
-          <a:ln>
-            <a:noFill/>
-          </a:ln>
         </p:spPr>
         <p:txBody>
-          <a:bodyPr spcFirstLastPara="1" wrap="square" lIns="91425" tIns="91425" rIns="91425" bIns="91425" anchor="t" anchorCtr="0">
-            <a:noAutofit/>
+          <a:bodyPr wrap="square">
+            <a:spAutoFit/>
           </a:bodyPr>
-          <a:lstStyle>
-            <a:defPPr marR="0" lvl="0" algn="l" rtl="0">
-              <a:lnSpc>
-                <a:spcPct val="100000"/>
-              </a:lnSpc>
-              <a:spcBef>
-                <a:spcPts val="0"/>
-              </a:spcBef>
-              <a:spcAft>
-                <a:spcPts val="0"/>
-              </a:spcAft>
-            </a:defPPr>
-            <a:lvl1pPr marL="457200" marR="0" lvl="0" indent="-342900" algn="ctr" rtl="0">
-              <a:lnSpc>
-                <a:spcPct val="100000"/>
-              </a:lnSpc>
-              <a:spcBef>
-                <a:spcPts val="0"/>
-              </a:spcBef>
-              <a:spcAft>
-                <a:spcPts val="0"/>
-              </a:spcAft>
-              <a:buClr>
-                <a:schemeClr val="lt1"/>
-              </a:buClr>
-              <a:buSzPts val="1400"/>
-              <a:buFont typeface="Montserrat"/>
-              <a:buNone/>
-              <a:defRPr sz="1400" b="0" i="0" u="none" strike="noStrike" cap="none">
-                <a:solidFill>
-                  <a:schemeClr val="lt1"/>
-                </a:solidFill>
-                <a:latin typeface="Montserrat"/>
-                <a:ea typeface="Montserrat"/>
-                <a:cs typeface="Montserrat"/>
-                <a:sym typeface="Montserrat"/>
-              </a:defRPr>
-            </a:lvl1pPr>
-            <a:lvl2pPr marL="914400" marR="0" lvl="1" indent="-317500" algn="ctr" rtl="0">
-              <a:lnSpc>
-                <a:spcPct val="100000"/>
-              </a:lnSpc>
-              <a:spcBef>
-                <a:spcPts val="0"/>
-              </a:spcBef>
-              <a:spcAft>
-                <a:spcPts val="0"/>
-              </a:spcAft>
-              <a:buClr>
-                <a:schemeClr val="lt1"/>
-              </a:buClr>
-              <a:buSzPts val="2100"/>
-              <a:buFont typeface="Montserrat"/>
-              <a:buNone/>
-              <a:defRPr sz="2100" b="0" i="0" u="none" strike="noStrike" cap="none">
-                <a:solidFill>
-                  <a:schemeClr val="lt1"/>
-                </a:solidFill>
-                <a:latin typeface="Montserrat"/>
-                <a:ea typeface="Montserrat"/>
-                <a:cs typeface="Montserrat"/>
-                <a:sym typeface="Montserrat"/>
-              </a:defRPr>
-            </a:lvl2pPr>
-            <a:lvl3pPr marL="1371600" marR="0" lvl="2" indent="-317500" algn="ctr" rtl="0">
-              <a:lnSpc>
-                <a:spcPct val="100000"/>
-              </a:lnSpc>
-              <a:spcBef>
-                <a:spcPts val="0"/>
-              </a:spcBef>
-              <a:spcAft>
-                <a:spcPts val="0"/>
-              </a:spcAft>
-              <a:buClr>
-                <a:schemeClr val="lt1"/>
-              </a:buClr>
-              <a:buSzPts val="2100"/>
-              <a:buFont typeface="Montserrat"/>
-              <a:buNone/>
-              <a:defRPr sz="2100" b="0" i="0" u="none" strike="noStrike" cap="none">
-                <a:solidFill>
-                  <a:schemeClr val="lt1"/>
-                </a:solidFill>
-                <a:latin typeface="Montserrat"/>
-                <a:ea typeface="Montserrat"/>
-                <a:cs typeface="Montserrat"/>
-                <a:sym typeface="Montserrat"/>
-              </a:defRPr>
-            </a:lvl3pPr>
-            <a:lvl4pPr marL="1828800" marR="0" lvl="3" indent="-317500" algn="ctr" rtl="0">
-              <a:lnSpc>
-                <a:spcPct val="100000"/>
-              </a:lnSpc>
-              <a:spcBef>
-                <a:spcPts val="0"/>
-              </a:spcBef>
-              <a:spcAft>
-                <a:spcPts val="0"/>
-              </a:spcAft>
-              <a:buClr>
-                <a:schemeClr val="lt1"/>
-              </a:buClr>
-              <a:buSzPts val="2100"/>
-              <a:buFont typeface="Montserrat"/>
-              <a:buNone/>
-              <a:defRPr sz="2100" b="0" i="0" u="none" strike="noStrike" cap="none">
-                <a:solidFill>
-                  <a:schemeClr val="lt1"/>
-                </a:solidFill>
-                <a:latin typeface="Montserrat"/>
-                <a:ea typeface="Montserrat"/>
-                <a:cs typeface="Montserrat"/>
-                <a:sym typeface="Montserrat"/>
-              </a:defRPr>
-            </a:lvl4pPr>
-            <a:lvl5pPr marL="2286000" marR="0" lvl="4" indent="-317500" algn="ctr" rtl="0">
-              <a:lnSpc>
-                <a:spcPct val="100000"/>
-              </a:lnSpc>
-              <a:spcBef>
-                <a:spcPts val="0"/>
-              </a:spcBef>
-              <a:spcAft>
-                <a:spcPts val="0"/>
-              </a:spcAft>
-              <a:buClr>
-                <a:schemeClr val="lt1"/>
-              </a:buClr>
-              <a:buSzPts val="2100"/>
-              <a:buFont typeface="Montserrat"/>
-              <a:buNone/>
-              <a:defRPr sz="2100" b="0" i="0" u="none" strike="noStrike" cap="none">
-                <a:solidFill>
-                  <a:schemeClr val="lt1"/>
-                </a:solidFill>
-                <a:latin typeface="Montserrat"/>
-                <a:ea typeface="Montserrat"/>
-                <a:cs typeface="Montserrat"/>
-                <a:sym typeface="Montserrat"/>
-              </a:defRPr>
-            </a:lvl5pPr>
-            <a:lvl6pPr marL="2743200" marR="0" lvl="5" indent="-317500" algn="ctr" rtl="0">
-              <a:lnSpc>
-                <a:spcPct val="100000"/>
-              </a:lnSpc>
-              <a:spcBef>
-                <a:spcPts val="0"/>
-              </a:spcBef>
-              <a:spcAft>
-                <a:spcPts val="0"/>
-              </a:spcAft>
-              <a:buClr>
-                <a:schemeClr val="lt1"/>
-              </a:buClr>
-              <a:buSzPts val="2100"/>
-              <a:buFont typeface="Montserrat"/>
-              <a:buNone/>
-              <a:defRPr sz="2100" b="0" i="0" u="none" strike="noStrike" cap="none">
-                <a:solidFill>
-                  <a:schemeClr val="lt1"/>
-                </a:solidFill>
-                <a:latin typeface="Montserrat"/>
-                <a:ea typeface="Montserrat"/>
-                <a:cs typeface="Montserrat"/>
-                <a:sym typeface="Montserrat"/>
-              </a:defRPr>
-            </a:lvl6pPr>
-            <a:lvl7pPr marL="3200400" marR="0" lvl="6" indent="-317500" algn="ctr" rtl="0">
-              <a:lnSpc>
-                <a:spcPct val="100000"/>
-              </a:lnSpc>
-              <a:spcBef>
-                <a:spcPts val="0"/>
-              </a:spcBef>
-              <a:spcAft>
-                <a:spcPts val="0"/>
-              </a:spcAft>
-              <a:buClr>
-                <a:schemeClr val="lt1"/>
-              </a:buClr>
-              <a:buSzPts val="2100"/>
-              <a:buFont typeface="Montserrat"/>
-              <a:buNone/>
-              <a:defRPr sz="2100" b="0" i="0" u="none" strike="noStrike" cap="none">
-                <a:solidFill>
-                  <a:schemeClr val="lt1"/>
-                </a:solidFill>
-                <a:latin typeface="Montserrat"/>
-                <a:ea typeface="Montserrat"/>
-                <a:cs typeface="Montserrat"/>
-                <a:sym typeface="Montserrat"/>
-              </a:defRPr>
-            </a:lvl7pPr>
-            <a:lvl8pPr marL="3657600" marR="0" lvl="7" indent="-317500" algn="ctr" rtl="0">
-              <a:lnSpc>
-                <a:spcPct val="100000"/>
-              </a:lnSpc>
-              <a:spcBef>
-                <a:spcPts val="0"/>
-              </a:spcBef>
-              <a:spcAft>
-                <a:spcPts val="0"/>
-              </a:spcAft>
-              <a:buClr>
-                <a:schemeClr val="lt1"/>
-              </a:buClr>
-              <a:buSzPts val="2100"/>
-              <a:buFont typeface="Montserrat"/>
-              <a:buNone/>
-              <a:defRPr sz="2100" b="0" i="0" u="none" strike="noStrike" cap="none">
-                <a:solidFill>
-                  <a:schemeClr val="lt1"/>
-                </a:solidFill>
-                <a:latin typeface="Montserrat"/>
-                <a:ea typeface="Montserrat"/>
-                <a:cs typeface="Montserrat"/>
-                <a:sym typeface="Montserrat"/>
-              </a:defRPr>
-            </a:lvl8pPr>
-            <a:lvl9pPr marL="4114800" marR="0" lvl="8" indent="-317500" algn="ctr" rtl="0">
-              <a:lnSpc>
-                <a:spcPct val="100000"/>
-              </a:lnSpc>
-              <a:spcBef>
-                <a:spcPts val="0"/>
-              </a:spcBef>
-              <a:spcAft>
-                <a:spcPts val="0"/>
-              </a:spcAft>
-              <a:buClr>
-                <a:schemeClr val="lt1"/>
-              </a:buClr>
-              <a:buSzPts val="2100"/>
-              <a:buFont typeface="Montserrat"/>
-              <a:buNone/>
-              <a:defRPr sz="2100" b="0" i="0" u="none" strike="noStrike" cap="none">
-                <a:solidFill>
-                  <a:schemeClr val="lt1"/>
-                </a:solidFill>
-                <a:latin typeface="Montserrat"/>
-                <a:ea typeface="Montserrat"/>
-                <a:cs typeface="Montserrat"/>
-                <a:sym typeface="Montserrat"/>
-              </a:defRPr>
-            </a:lvl9pPr>
-          </a:lstStyle>
+          <a:lstStyle/>
           <a:p>
-            <a:pPr marL="0" indent="0" algn="l">
-              <a:lnSpc>
-                <a:spcPct val="150000"/>
-              </a:lnSpc>
+            <a:pPr>
+              <a:buNone/>
             </a:pPr>
             <a:r>
-              <a:rPr lang="ru-RU" dirty="0"/>
-              <a:t>Авторизация осуществляется</a:t>
-            </a:r>
-          </a:p>
-          <a:p>
-            <a:pPr marL="0" indent="0" algn="l">
-              <a:lnSpc>
-                <a:spcPct val="150000"/>
-              </a:lnSpc>
-            </a:pPr>
-            <a:r>
-              <a:rPr lang="ru-RU" dirty="0"/>
-              <a:t>с использованием JWT-токенов, в которые вшиваются необходимые параметры пользователя.</a:t>
-            </a:r>
-          </a:p>
-          <a:p>
-            <a:pPr marL="0" indent="0" algn="l">
-              <a:lnSpc>
-                <a:spcPct val="150000"/>
-              </a:lnSpc>
-            </a:pPr>
-            <a:r>
-              <a:rPr lang="en-US" dirty="0"/>
-              <a:t>(ID, Name, Role)</a:t>
-            </a:r>
-          </a:p>
-        </p:txBody>
-      </p:sp>
-      <p:cxnSp>
-        <p:nvCxnSpPr>
-          <p:cNvPr id="27" name="Google Shape;2108;p63">
-            <a:extLst>
-              <a:ext uri="{FF2B5EF4-FFF2-40B4-BE49-F238E27FC236}">
-                <a16:creationId xmlns:a16="http://schemas.microsoft.com/office/drawing/2014/main" id="{2E5AF290-7A46-CF31-E359-360D9F390530}"/>
-              </a:ext>
-            </a:extLst>
-          </p:cNvPr>
-          <p:cNvCxnSpPr>
-            <a:cxnSpLocks/>
-          </p:cNvCxnSpPr>
-          <p:nvPr/>
-        </p:nvCxnSpPr>
-        <p:spPr>
-          <a:xfrm>
-            <a:off x="4572000" y="1566172"/>
-            <a:ext cx="0" cy="3130519"/>
-          </a:xfrm>
-          <a:prstGeom prst="straightConnector1">
-            <a:avLst/>
-          </a:prstGeom>
-          <a:noFill/>
-          <a:ln w="9525" cap="flat" cmpd="sng">
-            <a:solidFill>
-              <a:schemeClr val="accent1"/>
-            </a:solidFill>
-            <a:prstDash val="solid"/>
-            <a:round/>
-            <a:headEnd type="none" w="med" len="med"/>
-            <a:tailEnd type="none" w="med" len="med"/>
-          </a:ln>
-          <a:effectLst>
-            <a:outerShdw blurRad="57150" dist="19050" dir="5400000" algn="bl" rotWithShape="0">
-              <a:srgbClr val="FFFFFF">
-                <a:alpha val="50000"/>
-              </a:srgbClr>
-            </a:outerShdw>
-          </a:effectLst>
-        </p:spPr>
-      </p:cxnSp>
-      <p:sp>
-        <p:nvSpPr>
-          <p:cNvPr id="2047" name="Google Shape;2098;p63">
-            <a:extLst>
-              <a:ext uri="{FF2B5EF4-FFF2-40B4-BE49-F238E27FC236}">
-                <a16:creationId xmlns:a16="http://schemas.microsoft.com/office/drawing/2014/main" id="{10AC4F83-7C14-7590-D15F-B83DAD5980FC}"/>
-              </a:ext>
-            </a:extLst>
-          </p:cNvPr>
-          <p:cNvSpPr txBox="1">
-            <a:spLocks/>
-          </p:cNvSpPr>
-          <p:nvPr/>
-        </p:nvSpPr>
-        <p:spPr>
-          <a:xfrm>
-            <a:off x="5470819" y="1437831"/>
-            <a:ext cx="1301855" cy="375600"/>
-          </a:xfrm>
-          <a:prstGeom prst="rect">
-            <a:avLst/>
-          </a:prstGeom>
-          <a:noFill/>
-          <a:ln>
-            <a:noFill/>
-          </a:ln>
-        </p:spPr>
-        <p:txBody>
-          <a:bodyPr spcFirstLastPara="1" wrap="square" lIns="91425" tIns="91425" rIns="91425" bIns="91425" anchor="t" anchorCtr="0">
-            <a:noAutofit/>
-          </a:bodyPr>
-          <a:lstStyle>
-            <a:defPPr marR="0" lvl="0" algn="l" rtl="0">
-              <a:lnSpc>
-                <a:spcPct val="100000"/>
-              </a:lnSpc>
-              <a:spcBef>
-                <a:spcPts val="0"/>
-              </a:spcBef>
-              <a:spcAft>
-                <a:spcPts val="0"/>
-              </a:spcAft>
-            </a:defPPr>
-            <a:lvl1pPr marR="0" lvl="0" algn="ctr" rtl="0">
-              <a:lnSpc>
-                <a:spcPct val="100000"/>
-              </a:lnSpc>
-              <a:spcBef>
-                <a:spcPts val="0"/>
-              </a:spcBef>
-              <a:spcAft>
-                <a:spcPts val="0"/>
-              </a:spcAft>
-              <a:buClr>
-                <a:schemeClr val="lt1"/>
-              </a:buClr>
-              <a:buSzPts val="1800"/>
-              <a:buFont typeface="Montserrat ExtraBold"/>
-              <a:buNone/>
-              <a:defRPr sz="1800" b="0" i="0" u="none" strike="noStrike" cap="none">
-                <a:solidFill>
-                  <a:schemeClr val="lt1"/>
-                </a:solidFill>
-                <a:latin typeface="Montserrat ExtraBold"/>
-                <a:ea typeface="Montserrat ExtraBold"/>
-                <a:cs typeface="Montserrat ExtraBold"/>
-                <a:sym typeface="Montserrat ExtraBold"/>
-              </a:defRPr>
-            </a:lvl1pPr>
-            <a:lvl2pPr marR="0" lvl="1" algn="ctr" rtl="0">
-              <a:lnSpc>
-                <a:spcPct val="100000"/>
-              </a:lnSpc>
-              <a:spcBef>
-                <a:spcPts val="0"/>
-              </a:spcBef>
-              <a:spcAft>
-                <a:spcPts val="0"/>
-              </a:spcAft>
-              <a:buClr>
-                <a:schemeClr val="lt1"/>
-              </a:buClr>
-              <a:buSzPts val="4200"/>
-              <a:buFont typeface="Montserrat"/>
-              <a:buNone/>
-              <a:defRPr sz="4200" b="0" i="0" u="none" strike="noStrike" cap="none">
-                <a:solidFill>
-                  <a:schemeClr val="lt1"/>
-                </a:solidFill>
-                <a:latin typeface="Montserrat"/>
-                <a:ea typeface="Montserrat"/>
-                <a:cs typeface="Montserrat"/>
-                <a:sym typeface="Montserrat"/>
-              </a:defRPr>
-            </a:lvl2pPr>
-            <a:lvl3pPr marR="0" lvl="2" algn="ctr" rtl="0">
-              <a:lnSpc>
-                <a:spcPct val="100000"/>
-              </a:lnSpc>
-              <a:spcBef>
-                <a:spcPts val="0"/>
-              </a:spcBef>
-              <a:spcAft>
-                <a:spcPts val="0"/>
-              </a:spcAft>
-              <a:buClr>
-                <a:schemeClr val="lt1"/>
-              </a:buClr>
-              <a:buSzPts val="4200"/>
-              <a:buFont typeface="Montserrat"/>
-              <a:buNone/>
-              <a:defRPr sz="4200" b="0" i="0" u="none" strike="noStrike" cap="none">
-                <a:solidFill>
-                  <a:schemeClr val="lt1"/>
-                </a:solidFill>
-                <a:latin typeface="Montserrat"/>
-                <a:ea typeface="Montserrat"/>
-                <a:cs typeface="Montserrat"/>
-                <a:sym typeface="Montserrat"/>
-              </a:defRPr>
-            </a:lvl3pPr>
-            <a:lvl4pPr marR="0" lvl="3" algn="ctr" rtl="0">
-              <a:lnSpc>
-                <a:spcPct val="100000"/>
-              </a:lnSpc>
-              <a:spcBef>
-                <a:spcPts val="0"/>
-              </a:spcBef>
-              <a:spcAft>
-                <a:spcPts val="0"/>
-              </a:spcAft>
-              <a:buClr>
-                <a:schemeClr val="lt1"/>
-              </a:buClr>
-              <a:buSzPts val="4200"/>
-              <a:buFont typeface="Montserrat"/>
-              <a:buNone/>
-              <a:defRPr sz="4200" b="0" i="0" u="none" strike="noStrike" cap="none">
-                <a:solidFill>
-                  <a:schemeClr val="lt1"/>
-                </a:solidFill>
-                <a:latin typeface="Montserrat"/>
-                <a:ea typeface="Montserrat"/>
-                <a:cs typeface="Montserrat"/>
-                <a:sym typeface="Montserrat"/>
-              </a:defRPr>
-            </a:lvl4pPr>
-            <a:lvl5pPr marR="0" lvl="4" algn="ctr" rtl="0">
-              <a:lnSpc>
-                <a:spcPct val="100000"/>
-              </a:lnSpc>
-              <a:spcBef>
-                <a:spcPts val="0"/>
-              </a:spcBef>
-              <a:spcAft>
-                <a:spcPts val="0"/>
-              </a:spcAft>
-              <a:buClr>
-                <a:schemeClr val="lt1"/>
-              </a:buClr>
-              <a:buSzPts val="4200"/>
-              <a:buFont typeface="Montserrat"/>
-              <a:buNone/>
-              <a:defRPr sz="4200" b="0" i="0" u="none" strike="noStrike" cap="none">
-                <a:solidFill>
-                  <a:schemeClr val="lt1"/>
-                </a:solidFill>
-                <a:latin typeface="Montserrat"/>
-                <a:ea typeface="Montserrat"/>
-                <a:cs typeface="Montserrat"/>
-                <a:sym typeface="Montserrat"/>
-              </a:defRPr>
-            </a:lvl5pPr>
-            <a:lvl6pPr marR="0" lvl="5" algn="ctr" rtl="0">
-              <a:lnSpc>
-                <a:spcPct val="100000"/>
-              </a:lnSpc>
-              <a:spcBef>
-                <a:spcPts val="0"/>
-              </a:spcBef>
-              <a:spcAft>
-                <a:spcPts val="0"/>
-              </a:spcAft>
-              <a:buClr>
-                <a:schemeClr val="lt1"/>
-              </a:buClr>
-              <a:buSzPts val="4200"/>
-              <a:buFont typeface="Montserrat"/>
-              <a:buNone/>
-              <a:defRPr sz="4200" b="0" i="0" u="none" strike="noStrike" cap="none">
-                <a:solidFill>
-                  <a:schemeClr val="lt1"/>
-                </a:solidFill>
-                <a:latin typeface="Montserrat"/>
-                <a:ea typeface="Montserrat"/>
-                <a:cs typeface="Montserrat"/>
-                <a:sym typeface="Montserrat"/>
-              </a:defRPr>
-            </a:lvl6pPr>
-            <a:lvl7pPr marR="0" lvl="6" algn="ctr" rtl="0">
-              <a:lnSpc>
-                <a:spcPct val="100000"/>
-              </a:lnSpc>
-              <a:spcBef>
-                <a:spcPts val="0"/>
-              </a:spcBef>
-              <a:spcAft>
-                <a:spcPts val="0"/>
-              </a:spcAft>
-              <a:buClr>
-                <a:schemeClr val="lt1"/>
-              </a:buClr>
-              <a:buSzPts val="4200"/>
-              <a:buFont typeface="Montserrat"/>
-              <a:buNone/>
-              <a:defRPr sz="4200" b="0" i="0" u="none" strike="noStrike" cap="none">
-                <a:solidFill>
-                  <a:schemeClr val="lt1"/>
-                </a:solidFill>
-                <a:latin typeface="Montserrat"/>
-                <a:ea typeface="Montserrat"/>
-                <a:cs typeface="Montserrat"/>
-                <a:sym typeface="Montserrat"/>
-              </a:defRPr>
-            </a:lvl7pPr>
-            <a:lvl8pPr marR="0" lvl="7" algn="ctr" rtl="0">
-              <a:lnSpc>
-                <a:spcPct val="100000"/>
-              </a:lnSpc>
-              <a:spcBef>
-                <a:spcPts val="0"/>
-              </a:spcBef>
-              <a:spcAft>
-                <a:spcPts val="0"/>
-              </a:spcAft>
-              <a:buClr>
-                <a:schemeClr val="lt1"/>
-              </a:buClr>
-              <a:buSzPts val="4200"/>
-              <a:buFont typeface="Montserrat"/>
-              <a:buNone/>
-              <a:defRPr sz="4200" b="0" i="0" u="none" strike="noStrike" cap="none">
-                <a:solidFill>
-                  <a:schemeClr val="lt1"/>
-                </a:solidFill>
-                <a:latin typeface="Montserrat"/>
-                <a:ea typeface="Montserrat"/>
-                <a:cs typeface="Montserrat"/>
-                <a:sym typeface="Montserrat"/>
-              </a:defRPr>
-            </a:lvl8pPr>
-            <a:lvl9pPr marR="0" lvl="8" algn="ctr" rtl="0">
-              <a:lnSpc>
-                <a:spcPct val="100000"/>
-              </a:lnSpc>
-              <a:spcBef>
-                <a:spcPts val="0"/>
-              </a:spcBef>
-              <a:spcAft>
-                <a:spcPts val="0"/>
-              </a:spcAft>
-              <a:buClr>
-                <a:schemeClr val="lt1"/>
-              </a:buClr>
-              <a:buSzPts val="4200"/>
-              <a:buFont typeface="Montserrat"/>
-              <a:buNone/>
-              <a:defRPr sz="4200" b="0" i="0" u="none" strike="noStrike" cap="none">
-                <a:solidFill>
-                  <a:schemeClr val="lt1"/>
-                </a:solidFill>
-                <a:latin typeface="Montserrat"/>
-                <a:ea typeface="Montserrat"/>
-                <a:cs typeface="Montserrat"/>
-                <a:sym typeface="Montserrat"/>
-              </a:defRPr>
-            </a:lvl9pPr>
-          </a:lstStyle>
-          <a:p>
-            <a:pPr algn="r"/>
-            <a:r>
-              <a:rPr lang="en-US" dirty="0"/>
-              <a:t>Swagger</a:t>
-            </a:r>
-            <a:endParaRPr lang="ru-RU" dirty="0"/>
-          </a:p>
-        </p:txBody>
-      </p:sp>
-      <p:sp>
-        <p:nvSpPr>
-          <p:cNvPr id="1984" name="Google Shape;2099;p63">
-            <a:extLst>
-              <a:ext uri="{FF2B5EF4-FFF2-40B4-BE49-F238E27FC236}">
-                <a16:creationId xmlns:a16="http://schemas.microsoft.com/office/drawing/2014/main" id="{B12F3D69-4715-35AA-88C6-B35AAD805FC4}"/>
-              </a:ext>
-            </a:extLst>
-          </p:cNvPr>
-          <p:cNvSpPr txBox="1">
-            <a:spLocks/>
-          </p:cNvSpPr>
-          <p:nvPr/>
-        </p:nvSpPr>
-        <p:spPr>
-          <a:xfrm>
-            <a:off x="5017773" y="1966350"/>
-            <a:ext cx="2727600" cy="605400"/>
-          </a:xfrm>
-          <a:prstGeom prst="rect">
-            <a:avLst/>
-          </a:prstGeom>
-          <a:noFill/>
-          <a:ln>
-            <a:noFill/>
-          </a:ln>
-        </p:spPr>
-        <p:txBody>
-          <a:bodyPr spcFirstLastPara="1" wrap="square" lIns="91425" tIns="91425" rIns="91425" bIns="91425" anchor="t" anchorCtr="0">
-            <a:noAutofit/>
-          </a:bodyPr>
-          <a:lstStyle>
-            <a:defPPr marR="0" lvl="0" algn="l" rtl="0">
-              <a:lnSpc>
-                <a:spcPct val="100000"/>
-              </a:lnSpc>
-              <a:spcBef>
-                <a:spcPts val="0"/>
-              </a:spcBef>
-              <a:spcAft>
-                <a:spcPts val="0"/>
-              </a:spcAft>
-            </a:defPPr>
-            <a:lvl1pPr marL="457200" marR="0" lvl="0" indent="-342900" algn="ctr" rtl="0">
-              <a:lnSpc>
-                <a:spcPct val="100000"/>
-              </a:lnSpc>
-              <a:spcBef>
-                <a:spcPts val="0"/>
-              </a:spcBef>
-              <a:spcAft>
-                <a:spcPts val="0"/>
-              </a:spcAft>
-              <a:buClr>
-                <a:schemeClr val="lt1"/>
-              </a:buClr>
-              <a:buSzPts val="1400"/>
-              <a:buFont typeface="Montserrat"/>
-              <a:buNone/>
-              <a:defRPr sz="1400" b="0" i="0" u="none" strike="noStrike" cap="none">
-                <a:solidFill>
-                  <a:schemeClr val="lt1"/>
-                </a:solidFill>
-                <a:latin typeface="Montserrat"/>
-                <a:ea typeface="Montserrat"/>
-                <a:cs typeface="Montserrat"/>
-                <a:sym typeface="Montserrat"/>
-              </a:defRPr>
-            </a:lvl1pPr>
-            <a:lvl2pPr marL="914400" marR="0" lvl="1" indent="-317500" algn="ctr" rtl="0">
-              <a:lnSpc>
-                <a:spcPct val="100000"/>
-              </a:lnSpc>
-              <a:spcBef>
-                <a:spcPts val="0"/>
-              </a:spcBef>
-              <a:spcAft>
-                <a:spcPts val="0"/>
-              </a:spcAft>
-              <a:buClr>
-                <a:schemeClr val="lt1"/>
-              </a:buClr>
-              <a:buSzPts val="2100"/>
-              <a:buFont typeface="Montserrat"/>
-              <a:buNone/>
-              <a:defRPr sz="2100" b="0" i="0" u="none" strike="noStrike" cap="none">
-                <a:solidFill>
-                  <a:schemeClr val="lt1"/>
-                </a:solidFill>
-                <a:latin typeface="Montserrat"/>
-                <a:ea typeface="Montserrat"/>
-                <a:cs typeface="Montserrat"/>
-                <a:sym typeface="Montserrat"/>
-              </a:defRPr>
-            </a:lvl2pPr>
-            <a:lvl3pPr marL="1371600" marR="0" lvl="2" indent="-317500" algn="ctr" rtl="0">
-              <a:lnSpc>
-                <a:spcPct val="100000"/>
-              </a:lnSpc>
-              <a:spcBef>
-                <a:spcPts val="0"/>
-              </a:spcBef>
-              <a:spcAft>
-                <a:spcPts val="0"/>
-              </a:spcAft>
-              <a:buClr>
-                <a:schemeClr val="lt1"/>
-              </a:buClr>
-              <a:buSzPts val="2100"/>
-              <a:buFont typeface="Montserrat"/>
-              <a:buNone/>
-              <a:defRPr sz="2100" b="0" i="0" u="none" strike="noStrike" cap="none">
-                <a:solidFill>
-                  <a:schemeClr val="lt1"/>
-                </a:solidFill>
-                <a:latin typeface="Montserrat"/>
-                <a:ea typeface="Montserrat"/>
-                <a:cs typeface="Montserrat"/>
-                <a:sym typeface="Montserrat"/>
-              </a:defRPr>
-            </a:lvl3pPr>
-            <a:lvl4pPr marL="1828800" marR="0" lvl="3" indent="-317500" algn="ctr" rtl="0">
-              <a:lnSpc>
-                <a:spcPct val="100000"/>
-              </a:lnSpc>
-              <a:spcBef>
-                <a:spcPts val="0"/>
-              </a:spcBef>
-              <a:spcAft>
-                <a:spcPts val="0"/>
-              </a:spcAft>
-              <a:buClr>
-                <a:schemeClr val="lt1"/>
-              </a:buClr>
-              <a:buSzPts val="2100"/>
-              <a:buFont typeface="Montserrat"/>
-              <a:buNone/>
-              <a:defRPr sz="2100" b="0" i="0" u="none" strike="noStrike" cap="none">
-                <a:solidFill>
-                  <a:schemeClr val="lt1"/>
-                </a:solidFill>
-                <a:latin typeface="Montserrat"/>
-                <a:ea typeface="Montserrat"/>
-                <a:cs typeface="Montserrat"/>
-                <a:sym typeface="Montserrat"/>
-              </a:defRPr>
-            </a:lvl4pPr>
-            <a:lvl5pPr marL="2286000" marR="0" lvl="4" indent="-317500" algn="ctr" rtl="0">
-              <a:lnSpc>
-                <a:spcPct val="100000"/>
-              </a:lnSpc>
-              <a:spcBef>
-                <a:spcPts val="0"/>
-              </a:spcBef>
-              <a:spcAft>
-                <a:spcPts val="0"/>
-              </a:spcAft>
-              <a:buClr>
-                <a:schemeClr val="lt1"/>
-              </a:buClr>
-              <a:buSzPts val="2100"/>
-              <a:buFont typeface="Montserrat"/>
-              <a:buNone/>
-              <a:defRPr sz="2100" b="0" i="0" u="none" strike="noStrike" cap="none">
-                <a:solidFill>
-                  <a:schemeClr val="lt1"/>
-                </a:solidFill>
-                <a:latin typeface="Montserrat"/>
-                <a:ea typeface="Montserrat"/>
-                <a:cs typeface="Montserrat"/>
-                <a:sym typeface="Montserrat"/>
-              </a:defRPr>
-            </a:lvl5pPr>
-            <a:lvl6pPr marL="2743200" marR="0" lvl="5" indent="-317500" algn="ctr" rtl="0">
-              <a:lnSpc>
-                <a:spcPct val="100000"/>
-              </a:lnSpc>
-              <a:spcBef>
-                <a:spcPts val="0"/>
-              </a:spcBef>
-              <a:spcAft>
-                <a:spcPts val="0"/>
-              </a:spcAft>
-              <a:buClr>
-                <a:schemeClr val="lt1"/>
-              </a:buClr>
-              <a:buSzPts val="2100"/>
-              <a:buFont typeface="Montserrat"/>
-              <a:buNone/>
-              <a:defRPr sz="2100" b="0" i="0" u="none" strike="noStrike" cap="none">
-                <a:solidFill>
-                  <a:schemeClr val="lt1"/>
-                </a:solidFill>
-                <a:latin typeface="Montserrat"/>
-                <a:ea typeface="Montserrat"/>
-                <a:cs typeface="Montserrat"/>
-                <a:sym typeface="Montserrat"/>
-              </a:defRPr>
-            </a:lvl6pPr>
-            <a:lvl7pPr marL="3200400" marR="0" lvl="6" indent="-317500" algn="ctr" rtl="0">
-              <a:lnSpc>
-                <a:spcPct val="100000"/>
-              </a:lnSpc>
-              <a:spcBef>
-                <a:spcPts val="0"/>
-              </a:spcBef>
-              <a:spcAft>
-                <a:spcPts val="0"/>
-              </a:spcAft>
-              <a:buClr>
-                <a:schemeClr val="lt1"/>
-              </a:buClr>
-              <a:buSzPts val="2100"/>
-              <a:buFont typeface="Montserrat"/>
-              <a:buNone/>
-              <a:defRPr sz="2100" b="0" i="0" u="none" strike="noStrike" cap="none">
-                <a:solidFill>
-                  <a:schemeClr val="lt1"/>
-                </a:solidFill>
-                <a:latin typeface="Montserrat"/>
-                <a:ea typeface="Montserrat"/>
-                <a:cs typeface="Montserrat"/>
-                <a:sym typeface="Montserrat"/>
-              </a:defRPr>
-            </a:lvl7pPr>
-            <a:lvl8pPr marL="3657600" marR="0" lvl="7" indent="-317500" algn="ctr" rtl="0">
-              <a:lnSpc>
-                <a:spcPct val="100000"/>
-              </a:lnSpc>
-              <a:spcBef>
-                <a:spcPts val="0"/>
-              </a:spcBef>
-              <a:spcAft>
-                <a:spcPts val="0"/>
-              </a:spcAft>
-              <a:buClr>
-                <a:schemeClr val="lt1"/>
-              </a:buClr>
-              <a:buSzPts val="2100"/>
-              <a:buFont typeface="Montserrat"/>
-              <a:buNone/>
-              <a:defRPr sz="2100" b="0" i="0" u="none" strike="noStrike" cap="none">
-                <a:solidFill>
-                  <a:schemeClr val="lt1"/>
-                </a:solidFill>
-                <a:latin typeface="Montserrat"/>
-                <a:ea typeface="Montserrat"/>
-                <a:cs typeface="Montserrat"/>
-                <a:sym typeface="Montserrat"/>
-              </a:defRPr>
-            </a:lvl8pPr>
-            <a:lvl9pPr marL="4114800" marR="0" lvl="8" indent="-317500" algn="ctr" rtl="0">
-              <a:lnSpc>
-                <a:spcPct val="100000"/>
-              </a:lnSpc>
-              <a:spcBef>
-                <a:spcPts val="0"/>
-              </a:spcBef>
-              <a:spcAft>
-                <a:spcPts val="0"/>
-              </a:spcAft>
-              <a:buClr>
-                <a:schemeClr val="lt1"/>
-              </a:buClr>
-              <a:buSzPts val="2100"/>
-              <a:buFont typeface="Montserrat"/>
-              <a:buNone/>
-              <a:defRPr sz="2100" b="0" i="0" u="none" strike="noStrike" cap="none">
-                <a:solidFill>
-                  <a:schemeClr val="lt1"/>
-                </a:solidFill>
-                <a:latin typeface="Montserrat"/>
-                <a:ea typeface="Montserrat"/>
-                <a:cs typeface="Montserrat"/>
-                <a:sym typeface="Montserrat"/>
-              </a:defRPr>
-            </a:lvl9pPr>
-          </a:lstStyle>
-          <a:p>
-            <a:pPr marL="0" indent="0" algn="l"/>
-            <a:r>
-              <a:rPr lang="ru-RU" dirty="0"/>
-              <a:t>Документирование </a:t>
+              <a:rPr lang="ru-RU" dirty="0">
+                <a:solidFill>
+                  <a:schemeClr val="bg1"/>
+                </a:solidFill>
+                <a:latin typeface="Montserrat" panose="00000500000000000000" pitchFamily="2" charset="-52"/>
+              </a:rPr>
+              <a:t>проводилась через </a:t>
             </a:r>
             <a:r>
-              <a:rPr lang="en-US" dirty="0"/>
-              <a:t>API</a:t>
+              <a:rPr lang="ru-RU" b="1" dirty="0">
+                <a:solidFill>
+                  <a:schemeClr val="bg1"/>
+                </a:solidFill>
+                <a:latin typeface="Montserrat" panose="00000500000000000000" pitchFamily="2" charset="-52"/>
+              </a:rPr>
+              <a:t>Docker</a:t>
+            </a:r>
+            <a:r>
+              <a:rPr lang="ru-RU" dirty="0">
+                <a:solidFill>
+                  <a:schemeClr val="bg1"/>
+                </a:solidFill>
+                <a:latin typeface="Montserrat" panose="00000500000000000000" pitchFamily="2" charset="-52"/>
+              </a:rPr>
+              <a:t> для переносимости системы на разные десктопные устройства.</a:t>
             </a:r>
           </a:p>
         </p:txBody>
       </p:sp>
       <p:pic>
         <p:nvPicPr>
-          <p:cNvPr id="3" name="Рисунок 2">
+          <p:cNvPr id="2080" name="Рисунок 2079">
             <a:extLst>
               <a:ext uri="{FF2B5EF4-FFF2-40B4-BE49-F238E27FC236}">
-                <a16:creationId xmlns:a16="http://schemas.microsoft.com/office/drawing/2014/main" id="{B9E1851E-3E99-9F22-01E7-510074DA66C2}"/>
+                <a16:creationId xmlns:a16="http://schemas.microsoft.com/office/drawing/2014/main" id="{7A3F7676-F424-8FF7-3492-3515716CF281}"/>
               </a:ext>
             </a:extLst>
           </p:cNvPr>
@@ -15463,10 +14550,40 @@
           <p:nvPr/>
         </p:nvPicPr>
         <p:blipFill>
-          <a:blip r:embed="rId3">
+          <a:blip r:embed="rId3"/>
+          <a:stretch>
+            <a:fillRect/>
+          </a:stretch>
+        </p:blipFill>
+        <p:spPr>
+          <a:xfrm>
+            <a:off x="1076892" y="1889662"/>
+            <a:ext cx="5249047" cy="2839816"/>
+          </a:xfrm>
+          <a:prstGeom prst="rect">
+            <a:avLst/>
+          </a:prstGeom>
+        </p:spPr>
+      </p:pic>
+      <p:pic>
+        <p:nvPicPr>
+          <p:cNvPr id="6" name="Рисунок 5">
+            <a:extLst>
+              <a:ext uri="{FF2B5EF4-FFF2-40B4-BE49-F238E27FC236}">
+                <a16:creationId xmlns:a16="http://schemas.microsoft.com/office/drawing/2014/main" id="{30F048CE-E1CB-E37B-91D9-88585FBCA7A0}"/>
+              </a:ext>
+            </a:extLst>
+          </p:cNvPr>
+          <p:cNvPicPr>
+            <a:picLocks noChangeAspect="1"/>
+          </p:cNvPicPr>
+          <p:nvPr/>
+        </p:nvPicPr>
+        <p:blipFill>
+          <a:blip r:embed="rId4">
             <a:extLst>
               <a:ext uri="{96DAC541-7B7A-43D3-8B79-37D633B846F1}">
-                <asvg:svgBlip xmlns:asvg="http://schemas.microsoft.com/office/drawing/2016/SVG/main" r:embed="rId4"/>
+                <asvg:svgBlip xmlns:asvg="http://schemas.microsoft.com/office/drawing/2016/SVG/main" r:embed="rId5"/>
               </a:ext>
             </a:extLst>
           </a:blip>
@@ -15476,44 +14593,8 @@
         </p:blipFill>
         <p:spPr>
           <a:xfrm>
-            <a:off x="5091418" y="2393356"/>
-            <a:ext cx="2237634" cy="2237634"/>
-          </a:xfrm>
-          <a:prstGeom prst="rect">
-            <a:avLst/>
-          </a:prstGeom>
-        </p:spPr>
-      </p:pic>
-      <p:pic>
-        <p:nvPicPr>
-          <p:cNvPr id="2" name="Рисунок 1">
-            <a:extLst>
-              <a:ext uri="{FF2B5EF4-FFF2-40B4-BE49-F238E27FC236}">
-                <a16:creationId xmlns:a16="http://schemas.microsoft.com/office/drawing/2014/main" id="{B85F368D-D45F-8F85-4B64-9980E51E913E}"/>
-              </a:ext>
-            </a:extLst>
-          </p:cNvPr>
-          <p:cNvPicPr>
-            <a:picLocks noChangeAspect="1"/>
-          </p:cNvPicPr>
-          <p:nvPr/>
-        </p:nvPicPr>
-        <p:blipFill>
-          <a:blip r:embed="rId5">
-            <a:extLst>
-              <a:ext uri="{96DAC541-7B7A-43D3-8B79-37D633B846F1}">
-                <asvg:svgBlip xmlns:asvg="http://schemas.microsoft.com/office/drawing/2016/SVG/main" r:embed="rId6"/>
-              </a:ext>
-            </a:extLst>
-          </a:blip>
-          <a:stretch>
-            <a:fillRect/>
-          </a:stretch>
-        </p:blipFill>
-        <p:spPr>
-          <a:xfrm>
-            <a:off x="4572000" y="483939"/>
-            <a:ext cx="460431" cy="460431"/>
+            <a:off x="4393967" y="445025"/>
+            <a:ext cx="605445" cy="478109"/>
           </a:xfrm>
           <a:prstGeom prst="rect">
             <a:avLst/>
@@ -15750,8 +14831,8 @@
         </p:nvSpPr>
         <p:spPr>
           <a:xfrm>
-            <a:off x="5630146" y="4267964"/>
-            <a:ext cx="2765709" cy="338554"/>
+            <a:off x="5630146" y="4425754"/>
+            <a:ext cx="3342021" cy="584775"/>
           </a:xfrm>
           <a:prstGeom prst="rect">
             <a:avLst/>
@@ -15771,8 +14852,23 @@
                 </a:solidFill>
                 <a:latin typeface="Montserrat ExtraBold" panose="00000900000000000000" pitchFamily="2" charset="-52"/>
               </a:rPr>
-              <a:t>Репозиторий проекта</a:t>
+              <a:t>Репозиторий проекта на </a:t>
             </a:r>
+            <a:r>
+              <a:rPr lang="en-US" sz="1600" b="1" dirty="0">
+                <a:solidFill>
+                  <a:schemeClr val="bg1"/>
+                </a:solidFill>
+                <a:latin typeface="Montserrat ExtraBold" panose="00000900000000000000" pitchFamily="2" charset="-52"/>
+              </a:rPr>
+              <a:t>GitHub</a:t>
+            </a:r>
+            <a:endParaRPr lang="ru-RU" sz="1600" b="1" dirty="0">
+              <a:solidFill>
+                <a:schemeClr val="bg1"/>
+              </a:solidFill>
+              <a:latin typeface="Montserrat ExtraBold" panose="00000900000000000000" pitchFamily="2" charset="-52"/>
+            </a:endParaRPr>
           </a:p>
         </p:txBody>
       </p:sp>
@@ -15819,6 +14915,192 @@
   <p:cSld>
     <p:spTree>
       <p:nvGrpSpPr>
+        <p:cNvPr id="1" name="Shape 213"/>
+        <p:cNvGrpSpPr/>
+        <p:nvPr/>
+      </p:nvGrpSpPr>
+      <p:grpSpPr>
+        <a:xfrm>
+          <a:off x="0" y="0"/>
+          <a:ext cx="0" cy="0"/>
+          <a:chOff x="0" y="0"/>
+          <a:chExt cx="0" cy="0"/>
+        </a:xfrm>
+      </p:grpSpPr>
+      <p:sp>
+        <p:nvSpPr>
+          <p:cNvPr id="214" name="Google Shape;214;p44"/>
+          <p:cNvSpPr txBox="1">
+            <a:spLocks noGrp="1"/>
+          </p:cNvSpPr>
+          <p:nvPr>
+            <p:ph type="title"/>
+          </p:nvPr>
+        </p:nvSpPr>
+        <p:spPr>
+          <a:xfrm>
+            <a:off x="938500" y="445025"/>
+            <a:ext cx="4629300" cy="941400"/>
+          </a:xfrm>
+          <a:prstGeom prst="rect">
+            <a:avLst/>
+          </a:prstGeom>
+        </p:spPr>
+        <p:txBody>
+          <a:bodyPr spcFirstLastPara="1" wrap="square" lIns="91425" tIns="91425" rIns="91425" bIns="91425" anchor="t" anchorCtr="0">
+            <a:noAutofit/>
+          </a:bodyPr>
+          <a:lstStyle/>
+          <a:p>
+            <a:pPr marL="0" lvl="0" indent="0" algn="l" rtl="0">
+              <a:spcBef>
+                <a:spcPts val="0"/>
+              </a:spcBef>
+              <a:spcAft>
+                <a:spcPts val="0"/>
+              </a:spcAft>
+              <a:buNone/>
+            </a:pPr>
+            <a:r>
+              <a:rPr lang="ru-RU" dirty="0">
+                <a:solidFill>
+                  <a:schemeClr val="accent1"/>
+                </a:solidFill>
+              </a:rPr>
+              <a:t>АКУТУАЛЬНОСТЬ ПРОЕКТА</a:t>
+            </a:r>
+            <a:endParaRPr lang="en-US" dirty="0">
+              <a:solidFill>
+                <a:schemeClr val="accent1"/>
+              </a:solidFill>
+            </a:endParaRPr>
+          </a:p>
+        </p:txBody>
+      </p:sp>
+      <p:sp>
+        <p:nvSpPr>
+          <p:cNvPr id="215" name="Google Shape;215;p44"/>
+          <p:cNvSpPr txBox="1">
+            <a:spLocks noGrp="1"/>
+          </p:cNvSpPr>
+          <p:nvPr>
+            <p:ph type="body" idx="1"/>
+          </p:nvPr>
+        </p:nvSpPr>
+        <p:spPr>
+          <a:xfrm>
+            <a:off x="814586" y="1417427"/>
+            <a:ext cx="5482305" cy="3328362"/>
+          </a:xfrm>
+          <a:prstGeom prst="rect">
+            <a:avLst/>
+          </a:prstGeom>
+        </p:spPr>
+        <p:txBody>
+          <a:bodyPr spcFirstLastPara="1" wrap="square" lIns="91425" tIns="91425" rIns="91425" bIns="91425" anchor="t" anchorCtr="0">
+            <a:noAutofit/>
+          </a:bodyPr>
+          <a:lstStyle/>
+          <a:p>
+            <a:pPr>
+              <a:lnSpc>
+                <a:spcPct val="150000"/>
+              </a:lnSpc>
+            </a:pPr>
+            <a:r>
+              <a:rPr lang="ru-RU" sz="1600" b="1" dirty="0"/>
+              <a:t>Актуальность:</a:t>
+            </a:r>
+            <a:r>
+              <a:rPr lang="ru-RU" sz="1600" dirty="0"/>
+              <a:t> Ручной учет заказов (блокноты) приводит к ошибкам и воровству. Высокая конкуренция требует скорости обслуживания.</a:t>
+            </a:r>
+          </a:p>
+          <a:p>
+            <a:pPr>
+              <a:lnSpc>
+                <a:spcPct val="150000"/>
+              </a:lnSpc>
+            </a:pPr>
+            <a:endParaRPr lang="ru-RU" sz="1600" dirty="0"/>
+          </a:p>
+          <a:p>
+            <a:pPr>
+              <a:lnSpc>
+                <a:spcPct val="150000"/>
+              </a:lnSpc>
+            </a:pPr>
+            <a:r>
+              <a:rPr lang="ru-RU" sz="1600" b="1" dirty="0"/>
+              <a:t>Предметная область:</a:t>
+            </a:r>
+            <a:r>
+              <a:rPr lang="ru-RU" sz="1600" dirty="0"/>
+              <a:t> Автоматизация процессов в общепите: прием заказа, передача на кухню, расчет стоимости.</a:t>
+            </a:r>
+          </a:p>
+          <a:p>
+            <a:pPr marL="0" lvl="0" indent="0" algn="l" rtl="0">
+              <a:spcBef>
+                <a:spcPts val="0"/>
+              </a:spcBef>
+              <a:spcAft>
+                <a:spcPts val="0"/>
+              </a:spcAft>
+              <a:buNone/>
+            </a:pPr>
+            <a:endParaRPr dirty="0"/>
+          </a:p>
+        </p:txBody>
+      </p:sp>
+      <p:cxnSp>
+        <p:nvCxnSpPr>
+          <p:cNvPr id="216" name="Google Shape;216;p44"/>
+          <p:cNvCxnSpPr>
+            <a:cxnSpLocks/>
+          </p:cNvCxnSpPr>
+          <p:nvPr/>
+        </p:nvCxnSpPr>
+        <p:spPr>
+          <a:xfrm>
+            <a:off x="1026200" y="414022"/>
+            <a:ext cx="3005473" cy="0"/>
+          </a:xfrm>
+          <a:prstGeom prst="straightConnector1">
+            <a:avLst/>
+          </a:prstGeom>
+          <a:noFill/>
+          <a:ln w="9525" cap="flat" cmpd="sng">
+            <a:solidFill>
+              <a:schemeClr val="accent1"/>
+            </a:solidFill>
+            <a:prstDash val="solid"/>
+            <a:round/>
+            <a:headEnd type="none" w="med" len="med"/>
+            <a:tailEnd type="none" w="med" len="med"/>
+          </a:ln>
+          <a:effectLst>
+            <a:outerShdw blurRad="57150" dist="19050" dir="5400000" algn="bl" rotWithShape="0">
+              <a:srgbClr val="FFFFFF">
+                <a:alpha val="50000"/>
+              </a:srgbClr>
+            </a:outerShdw>
+          </a:effectLst>
+        </p:spPr>
+      </p:cxnSp>
+    </p:spTree>
+  </p:cSld>
+  <p:clrMapOvr>
+    <a:masterClrMapping/>
+  </p:clrMapOvr>
+</p:sld>
+</file>
+
+<file path=ppt/slides/slide3.xml><?xml version="1.0" encoding="utf-8"?>
+<p:sld xmlns:a="http://schemas.openxmlformats.org/drawingml/2006/main" xmlns:r="http://schemas.openxmlformats.org/officeDocument/2006/relationships" xmlns:p="http://schemas.openxmlformats.org/presentationml/2006/main">
+  <p:cSld>
+    <p:spTree>
+      <p:nvGrpSpPr>
         <p:cNvPr id="1" name="Shape 177">
           <a:extLst>
             <a:ext uri="{FF2B5EF4-FFF2-40B4-BE49-F238E27FC236}">
@@ -15853,7 +15135,7 @@
         </p:nvSpPr>
         <p:spPr>
           <a:xfrm>
-            <a:off x="3466552" y="608053"/>
+            <a:off x="3180258" y="608053"/>
             <a:ext cx="2210896" cy="533254"/>
           </a:xfrm>
           <a:prstGeom prst="rect">
@@ -16122,7 +15404,7 @@
                   <a:schemeClr val="accent1"/>
                 </a:solidFill>
               </a:rPr>
-              <a:t>ЦЕЛЬ ПРОЕКТА</a:t>
+              <a:t>ЦЕЛИ ПРОЕКТА</a:t>
             </a:r>
             <a:endParaRPr lang="en-US" dirty="0">
               <a:solidFill>
@@ -16232,7 +15514,7 @@
 </p:sld>
 </file>
 
-<file path=ppt/slides/slide3.xml><?xml version="1.0" encoding="utf-8"?>
+<file path=ppt/slides/slide4.xml><?xml version="1.0" encoding="utf-8"?>
 <p:sld xmlns:a="http://schemas.openxmlformats.org/drawingml/2006/main" xmlns:r="http://schemas.openxmlformats.org/officeDocument/2006/relationships" xmlns:p="http://schemas.openxmlformats.org/presentationml/2006/main">
   <p:cSld>
     <p:spTree>
@@ -16352,7 +15634,7 @@
         </p:nvSpPr>
         <p:spPr>
           <a:xfrm>
-            <a:off x="2848424" y="2651024"/>
+            <a:off x="2848424" y="2636156"/>
             <a:ext cx="1374236" cy="690086"/>
           </a:xfrm>
           <a:prstGeom prst="rect">
@@ -16379,6 +15661,44 @@
               <a:t>База данных</a:t>
             </a:r>
             <a:endParaRPr sz="1600" dirty="0"/>
+          </a:p>
+        </p:txBody>
+      </p:sp>
+      <p:sp>
+        <p:nvSpPr>
+          <p:cNvPr id="182" name="Google Shape;182;p40"/>
+          <p:cNvSpPr txBox="1">
+            <a:spLocks noGrp="1"/>
+          </p:cNvSpPr>
+          <p:nvPr>
+            <p:ph type="subTitle" idx="3"/>
+          </p:nvPr>
+        </p:nvSpPr>
+        <p:spPr>
+          <a:xfrm>
+            <a:off x="2902675" y="3368911"/>
+            <a:ext cx="1384185" cy="1110275"/>
+          </a:xfrm>
+          <a:prstGeom prst="rect">
+            <a:avLst/>
+          </a:prstGeom>
+        </p:spPr>
+        <p:txBody>
+          <a:bodyPr spcFirstLastPara="1" wrap="square" lIns="91425" tIns="91425" rIns="91425" bIns="91425" anchor="t" anchorCtr="0">
+            <a:noAutofit/>
+          </a:bodyPr>
+          <a:lstStyle/>
+          <a:p>
+            <a:pPr marL="0" indent="0"/>
+            <a:r>
+              <a:rPr lang="ru-RU" dirty="0">
+                <a:latin typeface="Montserrat" panose="00000500000000000000" pitchFamily="2" charset="-52"/>
+              </a:rPr>
+              <a:t>Реализация БД и логической структуры</a:t>
+            </a:r>
+            <a:endParaRPr lang="en-US" dirty="0">
+              <a:latin typeface="Montserrat" panose="00000500000000000000" pitchFamily="2" charset="-52"/>
+            </a:endParaRPr>
           </a:p>
         </p:txBody>
       </p:sp>
@@ -16421,6 +15741,44 @@
               <a:t>Предметная область</a:t>
             </a:r>
             <a:endParaRPr sz="1400" dirty="0"/>
+          </a:p>
+        </p:txBody>
+      </p:sp>
+      <p:sp>
+        <p:nvSpPr>
+          <p:cNvPr id="184" name="Google Shape;184;p40"/>
+          <p:cNvSpPr txBox="1">
+            <a:spLocks noGrp="1"/>
+          </p:cNvSpPr>
+          <p:nvPr>
+            <p:ph type="subTitle" idx="5"/>
+          </p:nvPr>
+        </p:nvSpPr>
+        <p:spPr>
+          <a:xfrm>
+            <a:off x="30777" y="3352121"/>
+            <a:ext cx="1548028" cy="1022180"/>
+          </a:xfrm>
+          <a:prstGeom prst="rect">
+            <a:avLst/>
+          </a:prstGeom>
+        </p:spPr>
+        <p:txBody>
+          <a:bodyPr spcFirstLastPara="1" wrap="square" lIns="91425" tIns="91425" rIns="91425" bIns="91425" anchor="t" anchorCtr="0">
+            <a:noAutofit/>
+          </a:bodyPr>
+          <a:lstStyle/>
+          <a:p>
+            <a:pPr marL="0" lvl="0" indent="0"/>
+            <a:r>
+              <a:rPr lang="ru-RU" dirty="0">
+                <a:latin typeface="Montserrat" panose="00000500000000000000" pitchFamily="2" charset="-52"/>
+              </a:rPr>
+              <a:t>Выполнить анализ предметной области</a:t>
+            </a:r>
+            <a:endParaRPr dirty="0">
+              <a:latin typeface="Montserrat" panose="00000500000000000000" pitchFamily="2" charset="-52"/>
+            </a:endParaRPr>
           </a:p>
         </p:txBody>
       </p:sp>
@@ -16518,7 +15876,7 @@
         </p:nvCxnSpPr>
         <p:spPr>
           <a:xfrm>
-            <a:off x="680290" y="2608520"/>
+            <a:off x="696335" y="2624997"/>
             <a:ext cx="236339" cy="0"/>
           </a:xfrm>
           <a:prstGeom prst="straightConnector1">
@@ -16902,6 +16260,301 @@
       </p:sp>
       <p:sp>
         <p:nvSpPr>
+          <p:cNvPr id="9" name="Google Shape;182;p40">
+            <a:extLst>
+              <a:ext uri="{FF2B5EF4-FFF2-40B4-BE49-F238E27FC236}">
+                <a16:creationId xmlns:a16="http://schemas.microsoft.com/office/drawing/2014/main" id="{BDE9F2EF-1DFE-6E50-4D89-D7D06324A0D8}"/>
+              </a:ext>
+            </a:extLst>
+          </p:cNvPr>
+          <p:cNvSpPr txBox="1">
+            <a:spLocks/>
+          </p:cNvSpPr>
+          <p:nvPr/>
+        </p:nvSpPr>
+        <p:spPr>
+          <a:xfrm>
+            <a:off x="4252522" y="3344827"/>
+            <a:ext cx="1549525" cy="1092922"/>
+          </a:xfrm>
+          <a:prstGeom prst="rect">
+            <a:avLst/>
+          </a:prstGeom>
+          <a:noFill/>
+          <a:ln>
+            <a:noFill/>
+          </a:ln>
+        </p:spPr>
+        <p:txBody>
+          <a:bodyPr spcFirstLastPara="1" wrap="square" lIns="91425" tIns="91425" rIns="91425" bIns="91425" anchor="t" anchorCtr="0">
+            <a:noAutofit/>
+          </a:bodyPr>
+          <a:lstStyle>
+            <a:defPPr marR="0" lvl="0" algn="l" rtl="0">
+              <a:lnSpc>
+                <a:spcPct val="100000"/>
+              </a:lnSpc>
+              <a:spcBef>
+                <a:spcPts val="0"/>
+              </a:spcBef>
+              <a:spcAft>
+                <a:spcPts val="0"/>
+              </a:spcAft>
+            </a:defPPr>
+            <a:lvl1pPr marL="457200" marR="0" lvl="0" indent="-342900" algn="ctr" rtl="0">
+              <a:lnSpc>
+                <a:spcPct val="100000"/>
+              </a:lnSpc>
+              <a:spcBef>
+                <a:spcPts val="0"/>
+              </a:spcBef>
+              <a:spcAft>
+                <a:spcPts val="0"/>
+              </a:spcAft>
+              <a:buClr>
+                <a:schemeClr val="lt1"/>
+              </a:buClr>
+              <a:buSzPts val="1400"/>
+              <a:buFont typeface="Montserrat"/>
+              <a:buNone/>
+              <a:defRPr sz="1400" b="0" i="0" u="none" strike="noStrike" cap="none">
+                <a:solidFill>
+                  <a:schemeClr val="lt1"/>
+                </a:solidFill>
+                <a:latin typeface="Montserrat"/>
+                <a:ea typeface="Montserrat"/>
+                <a:cs typeface="Montserrat"/>
+                <a:sym typeface="Montserrat"/>
+              </a:defRPr>
+            </a:lvl1pPr>
+            <a:lvl2pPr marL="914400" marR="0" lvl="1" indent="-317500" algn="ctr" rtl="0">
+              <a:lnSpc>
+                <a:spcPct val="100000"/>
+              </a:lnSpc>
+              <a:spcBef>
+                <a:spcPts val="0"/>
+              </a:spcBef>
+              <a:spcAft>
+                <a:spcPts val="0"/>
+              </a:spcAft>
+              <a:buClr>
+                <a:schemeClr val="lt1"/>
+              </a:buClr>
+              <a:buSzPts val="2100"/>
+              <a:buFont typeface="Montserrat"/>
+              <a:buNone/>
+              <a:defRPr sz="2100" b="0" i="0" u="none" strike="noStrike" cap="none">
+                <a:solidFill>
+                  <a:schemeClr val="lt1"/>
+                </a:solidFill>
+                <a:latin typeface="Montserrat"/>
+                <a:ea typeface="Montserrat"/>
+                <a:cs typeface="Montserrat"/>
+                <a:sym typeface="Montserrat"/>
+              </a:defRPr>
+            </a:lvl2pPr>
+            <a:lvl3pPr marL="1371600" marR="0" lvl="2" indent="-317500" algn="ctr" rtl="0">
+              <a:lnSpc>
+                <a:spcPct val="100000"/>
+              </a:lnSpc>
+              <a:spcBef>
+                <a:spcPts val="0"/>
+              </a:spcBef>
+              <a:spcAft>
+                <a:spcPts val="0"/>
+              </a:spcAft>
+              <a:buClr>
+                <a:schemeClr val="lt1"/>
+              </a:buClr>
+              <a:buSzPts val="2100"/>
+              <a:buFont typeface="Montserrat"/>
+              <a:buNone/>
+              <a:defRPr sz="2100" b="0" i="0" u="none" strike="noStrike" cap="none">
+                <a:solidFill>
+                  <a:schemeClr val="lt1"/>
+                </a:solidFill>
+                <a:latin typeface="Montserrat"/>
+                <a:ea typeface="Montserrat"/>
+                <a:cs typeface="Montserrat"/>
+                <a:sym typeface="Montserrat"/>
+              </a:defRPr>
+            </a:lvl3pPr>
+            <a:lvl4pPr marL="1828800" marR="0" lvl="3" indent="-317500" algn="ctr" rtl="0">
+              <a:lnSpc>
+                <a:spcPct val="100000"/>
+              </a:lnSpc>
+              <a:spcBef>
+                <a:spcPts val="0"/>
+              </a:spcBef>
+              <a:spcAft>
+                <a:spcPts val="0"/>
+              </a:spcAft>
+              <a:buClr>
+                <a:schemeClr val="lt1"/>
+              </a:buClr>
+              <a:buSzPts val="2100"/>
+              <a:buFont typeface="Montserrat"/>
+              <a:buNone/>
+              <a:defRPr sz="2100" b="0" i="0" u="none" strike="noStrike" cap="none">
+                <a:solidFill>
+                  <a:schemeClr val="lt1"/>
+                </a:solidFill>
+                <a:latin typeface="Montserrat"/>
+                <a:ea typeface="Montserrat"/>
+                <a:cs typeface="Montserrat"/>
+                <a:sym typeface="Montserrat"/>
+              </a:defRPr>
+            </a:lvl4pPr>
+            <a:lvl5pPr marL="2286000" marR="0" lvl="4" indent="-317500" algn="ctr" rtl="0">
+              <a:lnSpc>
+                <a:spcPct val="100000"/>
+              </a:lnSpc>
+              <a:spcBef>
+                <a:spcPts val="0"/>
+              </a:spcBef>
+              <a:spcAft>
+                <a:spcPts val="0"/>
+              </a:spcAft>
+              <a:buClr>
+                <a:schemeClr val="lt1"/>
+              </a:buClr>
+              <a:buSzPts val="2100"/>
+              <a:buFont typeface="Montserrat"/>
+              <a:buNone/>
+              <a:defRPr sz="2100" b="0" i="0" u="none" strike="noStrike" cap="none">
+                <a:solidFill>
+                  <a:schemeClr val="lt1"/>
+                </a:solidFill>
+                <a:latin typeface="Montserrat"/>
+                <a:ea typeface="Montserrat"/>
+                <a:cs typeface="Montserrat"/>
+                <a:sym typeface="Montserrat"/>
+              </a:defRPr>
+            </a:lvl5pPr>
+            <a:lvl6pPr marL="2743200" marR="0" lvl="5" indent="-317500" algn="ctr" rtl="0">
+              <a:lnSpc>
+                <a:spcPct val="100000"/>
+              </a:lnSpc>
+              <a:spcBef>
+                <a:spcPts val="0"/>
+              </a:spcBef>
+              <a:spcAft>
+                <a:spcPts val="0"/>
+              </a:spcAft>
+              <a:buClr>
+                <a:schemeClr val="lt1"/>
+              </a:buClr>
+              <a:buSzPts val="2100"/>
+              <a:buFont typeface="Montserrat"/>
+              <a:buNone/>
+              <a:defRPr sz="2100" b="0" i="0" u="none" strike="noStrike" cap="none">
+                <a:solidFill>
+                  <a:schemeClr val="lt1"/>
+                </a:solidFill>
+                <a:latin typeface="Montserrat"/>
+                <a:ea typeface="Montserrat"/>
+                <a:cs typeface="Montserrat"/>
+                <a:sym typeface="Montserrat"/>
+              </a:defRPr>
+            </a:lvl6pPr>
+            <a:lvl7pPr marL="3200400" marR="0" lvl="6" indent="-317500" algn="ctr" rtl="0">
+              <a:lnSpc>
+                <a:spcPct val="100000"/>
+              </a:lnSpc>
+              <a:spcBef>
+                <a:spcPts val="0"/>
+              </a:spcBef>
+              <a:spcAft>
+                <a:spcPts val="0"/>
+              </a:spcAft>
+              <a:buClr>
+                <a:schemeClr val="lt1"/>
+              </a:buClr>
+              <a:buSzPts val="2100"/>
+              <a:buFont typeface="Montserrat"/>
+              <a:buNone/>
+              <a:defRPr sz="2100" b="0" i="0" u="none" strike="noStrike" cap="none">
+                <a:solidFill>
+                  <a:schemeClr val="lt1"/>
+                </a:solidFill>
+                <a:latin typeface="Montserrat"/>
+                <a:ea typeface="Montserrat"/>
+                <a:cs typeface="Montserrat"/>
+                <a:sym typeface="Montserrat"/>
+              </a:defRPr>
+            </a:lvl7pPr>
+            <a:lvl8pPr marL="3657600" marR="0" lvl="7" indent="-317500" algn="ctr" rtl="0">
+              <a:lnSpc>
+                <a:spcPct val="100000"/>
+              </a:lnSpc>
+              <a:spcBef>
+                <a:spcPts val="0"/>
+              </a:spcBef>
+              <a:spcAft>
+                <a:spcPts val="0"/>
+              </a:spcAft>
+              <a:buClr>
+                <a:schemeClr val="lt1"/>
+              </a:buClr>
+              <a:buSzPts val="2100"/>
+              <a:buFont typeface="Montserrat"/>
+              <a:buNone/>
+              <a:defRPr sz="2100" b="0" i="0" u="none" strike="noStrike" cap="none">
+                <a:solidFill>
+                  <a:schemeClr val="lt1"/>
+                </a:solidFill>
+                <a:latin typeface="Montserrat"/>
+                <a:ea typeface="Montserrat"/>
+                <a:cs typeface="Montserrat"/>
+                <a:sym typeface="Montserrat"/>
+              </a:defRPr>
+            </a:lvl8pPr>
+            <a:lvl9pPr marL="4114800" marR="0" lvl="8" indent="-317500" algn="ctr" rtl="0">
+              <a:lnSpc>
+                <a:spcPct val="100000"/>
+              </a:lnSpc>
+              <a:spcBef>
+                <a:spcPts val="0"/>
+              </a:spcBef>
+              <a:spcAft>
+                <a:spcPts val="0"/>
+              </a:spcAft>
+              <a:buClr>
+                <a:schemeClr val="lt1"/>
+              </a:buClr>
+              <a:buSzPts val="2100"/>
+              <a:buFont typeface="Montserrat"/>
+              <a:buNone/>
+              <a:defRPr sz="2100" b="0" i="0" u="none" strike="noStrike" cap="none">
+                <a:solidFill>
+                  <a:schemeClr val="lt1"/>
+                </a:solidFill>
+                <a:latin typeface="Montserrat"/>
+                <a:ea typeface="Montserrat"/>
+                <a:cs typeface="Montserrat"/>
+                <a:sym typeface="Montserrat"/>
+              </a:defRPr>
+            </a:lvl9pPr>
+          </a:lstStyle>
+          <a:p>
+            <a:pPr marL="0" indent="0"/>
+            <a:r>
+              <a:rPr lang="ru-RU" dirty="0">
+                <a:latin typeface="Montserrat" panose="00000500000000000000" pitchFamily="2" charset="-52"/>
+              </a:rPr>
+              <a:t>Реализация серверной части через </a:t>
+            </a:r>
+            <a:r>
+              <a:rPr lang="en-US" dirty="0">
+                <a:latin typeface="Montserrat" panose="00000500000000000000" pitchFamily="2" charset="-52"/>
+              </a:rPr>
+              <a:t>ASP.NET Core.</a:t>
+            </a:r>
+          </a:p>
+        </p:txBody>
+      </p:sp>
+      <p:sp>
+        <p:nvSpPr>
           <p:cNvPr id="10" name="Google Shape;186;p40">
             <a:extLst>
               <a:ext uri="{FF2B5EF4-FFF2-40B4-BE49-F238E27FC236}">
@@ -17203,7 +16856,7 @@
         </p:nvCxnSpPr>
         <p:spPr>
           <a:xfrm>
-            <a:off x="4868994" y="2615988"/>
+            <a:off x="4868994" y="2643027"/>
             <a:ext cx="236339" cy="0"/>
           </a:xfrm>
           <a:prstGeom prst="straightConnector1">
@@ -17512,6 +17165,296 @@
               <a:t>Клиентское приложение</a:t>
             </a:r>
             <a:endParaRPr lang="en-US" sz="1600" dirty="0"/>
+          </a:p>
+        </p:txBody>
+      </p:sp>
+      <p:sp>
+        <p:nvSpPr>
+          <p:cNvPr id="21" name="Google Shape;182;p40">
+            <a:extLst>
+              <a:ext uri="{FF2B5EF4-FFF2-40B4-BE49-F238E27FC236}">
+                <a16:creationId xmlns:a16="http://schemas.microsoft.com/office/drawing/2014/main" id="{1C07744C-8DDB-AAE4-8D0E-E49D4C197D5E}"/>
+              </a:ext>
+            </a:extLst>
+          </p:cNvPr>
+          <p:cNvSpPr txBox="1">
+            <a:spLocks/>
+          </p:cNvSpPr>
+          <p:nvPr/>
+        </p:nvSpPr>
+        <p:spPr>
+          <a:xfrm>
+            <a:off x="5824825" y="3368910"/>
+            <a:ext cx="1632639" cy="1110275"/>
+          </a:xfrm>
+          <a:prstGeom prst="rect">
+            <a:avLst/>
+          </a:prstGeom>
+          <a:noFill/>
+          <a:ln>
+            <a:noFill/>
+          </a:ln>
+        </p:spPr>
+        <p:txBody>
+          <a:bodyPr spcFirstLastPara="1" wrap="square" lIns="91425" tIns="91425" rIns="91425" bIns="91425" anchor="t" anchorCtr="0">
+            <a:noAutofit/>
+          </a:bodyPr>
+          <a:lstStyle>
+            <a:defPPr marR="0" lvl="0" algn="l" rtl="0">
+              <a:lnSpc>
+                <a:spcPct val="100000"/>
+              </a:lnSpc>
+              <a:spcBef>
+                <a:spcPts val="0"/>
+              </a:spcBef>
+              <a:spcAft>
+                <a:spcPts val="0"/>
+              </a:spcAft>
+            </a:defPPr>
+            <a:lvl1pPr marL="457200" marR="0" lvl="0" indent="-342900" algn="ctr" rtl="0">
+              <a:lnSpc>
+                <a:spcPct val="100000"/>
+              </a:lnSpc>
+              <a:spcBef>
+                <a:spcPts val="0"/>
+              </a:spcBef>
+              <a:spcAft>
+                <a:spcPts val="0"/>
+              </a:spcAft>
+              <a:buClr>
+                <a:schemeClr val="lt1"/>
+              </a:buClr>
+              <a:buSzPts val="1400"/>
+              <a:buFont typeface="Montserrat"/>
+              <a:buNone/>
+              <a:defRPr sz="1400" b="0" i="0" u="none" strike="noStrike" cap="none">
+                <a:solidFill>
+                  <a:schemeClr val="lt1"/>
+                </a:solidFill>
+                <a:latin typeface="Montserrat"/>
+                <a:ea typeface="Montserrat"/>
+                <a:cs typeface="Montserrat"/>
+                <a:sym typeface="Montserrat"/>
+              </a:defRPr>
+            </a:lvl1pPr>
+            <a:lvl2pPr marL="914400" marR="0" lvl="1" indent="-317500" algn="ctr" rtl="0">
+              <a:lnSpc>
+                <a:spcPct val="100000"/>
+              </a:lnSpc>
+              <a:spcBef>
+                <a:spcPts val="0"/>
+              </a:spcBef>
+              <a:spcAft>
+                <a:spcPts val="0"/>
+              </a:spcAft>
+              <a:buClr>
+                <a:schemeClr val="lt1"/>
+              </a:buClr>
+              <a:buSzPts val="2100"/>
+              <a:buFont typeface="Montserrat"/>
+              <a:buNone/>
+              <a:defRPr sz="2100" b="0" i="0" u="none" strike="noStrike" cap="none">
+                <a:solidFill>
+                  <a:schemeClr val="lt1"/>
+                </a:solidFill>
+                <a:latin typeface="Montserrat"/>
+                <a:ea typeface="Montserrat"/>
+                <a:cs typeface="Montserrat"/>
+                <a:sym typeface="Montserrat"/>
+              </a:defRPr>
+            </a:lvl2pPr>
+            <a:lvl3pPr marL="1371600" marR="0" lvl="2" indent="-317500" algn="ctr" rtl="0">
+              <a:lnSpc>
+                <a:spcPct val="100000"/>
+              </a:lnSpc>
+              <a:spcBef>
+                <a:spcPts val="0"/>
+              </a:spcBef>
+              <a:spcAft>
+                <a:spcPts val="0"/>
+              </a:spcAft>
+              <a:buClr>
+                <a:schemeClr val="lt1"/>
+              </a:buClr>
+              <a:buSzPts val="2100"/>
+              <a:buFont typeface="Montserrat"/>
+              <a:buNone/>
+              <a:defRPr sz="2100" b="0" i="0" u="none" strike="noStrike" cap="none">
+                <a:solidFill>
+                  <a:schemeClr val="lt1"/>
+                </a:solidFill>
+                <a:latin typeface="Montserrat"/>
+                <a:ea typeface="Montserrat"/>
+                <a:cs typeface="Montserrat"/>
+                <a:sym typeface="Montserrat"/>
+              </a:defRPr>
+            </a:lvl3pPr>
+            <a:lvl4pPr marL="1828800" marR="0" lvl="3" indent="-317500" algn="ctr" rtl="0">
+              <a:lnSpc>
+                <a:spcPct val="100000"/>
+              </a:lnSpc>
+              <a:spcBef>
+                <a:spcPts val="0"/>
+              </a:spcBef>
+              <a:spcAft>
+                <a:spcPts val="0"/>
+              </a:spcAft>
+              <a:buClr>
+                <a:schemeClr val="lt1"/>
+              </a:buClr>
+              <a:buSzPts val="2100"/>
+              <a:buFont typeface="Montserrat"/>
+              <a:buNone/>
+              <a:defRPr sz="2100" b="0" i="0" u="none" strike="noStrike" cap="none">
+                <a:solidFill>
+                  <a:schemeClr val="lt1"/>
+                </a:solidFill>
+                <a:latin typeface="Montserrat"/>
+                <a:ea typeface="Montserrat"/>
+                <a:cs typeface="Montserrat"/>
+                <a:sym typeface="Montserrat"/>
+              </a:defRPr>
+            </a:lvl4pPr>
+            <a:lvl5pPr marL="2286000" marR="0" lvl="4" indent="-317500" algn="ctr" rtl="0">
+              <a:lnSpc>
+                <a:spcPct val="100000"/>
+              </a:lnSpc>
+              <a:spcBef>
+                <a:spcPts val="0"/>
+              </a:spcBef>
+              <a:spcAft>
+                <a:spcPts val="0"/>
+              </a:spcAft>
+              <a:buClr>
+                <a:schemeClr val="lt1"/>
+              </a:buClr>
+              <a:buSzPts val="2100"/>
+              <a:buFont typeface="Montserrat"/>
+              <a:buNone/>
+              <a:defRPr sz="2100" b="0" i="0" u="none" strike="noStrike" cap="none">
+                <a:solidFill>
+                  <a:schemeClr val="lt1"/>
+                </a:solidFill>
+                <a:latin typeface="Montserrat"/>
+                <a:ea typeface="Montserrat"/>
+                <a:cs typeface="Montserrat"/>
+                <a:sym typeface="Montserrat"/>
+              </a:defRPr>
+            </a:lvl5pPr>
+            <a:lvl6pPr marL="2743200" marR="0" lvl="5" indent="-317500" algn="ctr" rtl="0">
+              <a:lnSpc>
+                <a:spcPct val="100000"/>
+              </a:lnSpc>
+              <a:spcBef>
+                <a:spcPts val="0"/>
+              </a:spcBef>
+              <a:spcAft>
+                <a:spcPts val="0"/>
+              </a:spcAft>
+              <a:buClr>
+                <a:schemeClr val="lt1"/>
+              </a:buClr>
+              <a:buSzPts val="2100"/>
+              <a:buFont typeface="Montserrat"/>
+              <a:buNone/>
+              <a:defRPr sz="2100" b="0" i="0" u="none" strike="noStrike" cap="none">
+                <a:solidFill>
+                  <a:schemeClr val="lt1"/>
+                </a:solidFill>
+                <a:latin typeface="Montserrat"/>
+                <a:ea typeface="Montserrat"/>
+                <a:cs typeface="Montserrat"/>
+                <a:sym typeface="Montserrat"/>
+              </a:defRPr>
+            </a:lvl6pPr>
+            <a:lvl7pPr marL="3200400" marR="0" lvl="6" indent="-317500" algn="ctr" rtl="0">
+              <a:lnSpc>
+                <a:spcPct val="100000"/>
+              </a:lnSpc>
+              <a:spcBef>
+                <a:spcPts val="0"/>
+              </a:spcBef>
+              <a:spcAft>
+                <a:spcPts val="0"/>
+              </a:spcAft>
+              <a:buClr>
+                <a:schemeClr val="lt1"/>
+              </a:buClr>
+              <a:buSzPts val="2100"/>
+              <a:buFont typeface="Montserrat"/>
+              <a:buNone/>
+              <a:defRPr sz="2100" b="0" i="0" u="none" strike="noStrike" cap="none">
+                <a:solidFill>
+                  <a:schemeClr val="lt1"/>
+                </a:solidFill>
+                <a:latin typeface="Montserrat"/>
+                <a:ea typeface="Montserrat"/>
+                <a:cs typeface="Montserrat"/>
+                <a:sym typeface="Montserrat"/>
+              </a:defRPr>
+            </a:lvl7pPr>
+            <a:lvl8pPr marL="3657600" marR="0" lvl="7" indent="-317500" algn="ctr" rtl="0">
+              <a:lnSpc>
+                <a:spcPct val="100000"/>
+              </a:lnSpc>
+              <a:spcBef>
+                <a:spcPts val="0"/>
+              </a:spcBef>
+              <a:spcAft>
+                <a:spcPts val="0"/>
+              </a:spcAft>
+              <a:buClr>
+                <a:schemeClr val="lt1"/>
+              </a:buClr>
+              <a:buSzPts val="2100"/>
+              <a:buFont typeface="Montserrat"/>
+              <a:buNone/>
+              <a:defRPr sz="2100" b="0" i="0" u="none" strike="noStrike" cap="none">
+                <a:solidFill>
+                  <a:schemeClr val="lt1"/>
+                </a:solidFill>
+                <a:latin typeface="Montserrat"/>
+                <a:ea typeface="Montserrat"/>
+                <a:cs typeface="Montserrat"/>
+                <a:sym typeface="Montserrat"/>
+              </a:defRPr>
+            </a:lvl8pPr>
+            <a:lvl9pPr marL="4114800" marR="0" lvl="8" indent="-317500" algn="ctr" rtl="0">
+              <a:lnSpc>
+                <a:spcPct val="100000"/>
+              </a:lnSpc>
+              <a:spcBef>
+                <a:spcPts val="0"/>
+              </a:spcBef>
+              <a:spcAft>
+                <a:spcPts val="0"/>
+              </a:spcAft>
+              <a:buClr>
+                <a:schemeClr val="lt1"/>
+              </a:buClr>
+              <a:buSzPts val="2100"/>
+              <a:buFont typeface="Montserrat"/>
+              <a:buNone/>
+              <a:defRPr sz="2100" b="0" i="0" u="none" strike="noStrike" cap="none">
+                <a:solidFill>
+                  <a:schemeClr val="lt1"/>
+                </a:solidFill>
+                <a:latin typeface="Montserrat"/>
+                <a:ea typeface="Montserrat"/>
+                <a:cs typeface="Montserrat"/>
+                <a:sym typeface="Montserrat"/>
+              </a:defRPr>
+            </a:lvl9pPr>
+          </a:lstStyle>
+          <a:p>
+            <a:pPr marL="0" indent="0"/>
+            <a:r>
+              <a:rPr lang="ru-RU" dirty="0"/>
+              <a:t>Разработать пользовательский интерфейс</a:t>
+            </a:r>
+            <a:endParaRPr lang="en-US" dirty="0">
+              <a:latin typeface="Montserrat" panose="00000500000000000000" pitchFamily="2" charset="-52"/>
+            </a:endParaRPr>
           </a:p>
         </p:txBody>
       </p:sp>
@@ -18179,6 +18122,47 @@
       </p:cxnSp>
       <p:sp>
         <p:nvSpPr>
+          <p:cNvPr id="15" name="TextBox 14">
+            <a:extLst>
+              <a:ext uri="{FF2B5EF4-FFF2-40B4-BE49-F238E27FC236}">
+                <a16:creationId xmlns:a16="http://schemas.microsoft.com/office/drawing/2014/main" id="{A56341AC-9E0F-3466-709F-1B4DE6FF8CD2}"/>
+              </a:ext>
+            </a:extLst>
+          </p:cNvPr>
+          <p:cNvSpPr txBox="1"/>
+          <p:nvPr/>
+        </p:nvSpPr>
+        <p:spPr>
+          <a:xfrm>
+            <a:off x="1413767" y="3386157"/>
+            <a:ext cx="1548027" cy="954107"/>
+          </a:xfrm>
+          <a:prstGeom prst="rect">
+            <a:avLst/>
+          </a:prstGeom>
+          <a:noFill/>
+        </p:spPr>
+        <p:txBody>
+          <a:bodyPr wrap="square" rtlCol="0">
+            <a:spAutoFit/>
+          </a:bodyPr>
+          <a:lstStyle/>
+          <a:p>
+            <a:pPr algn="ctr"/>
+            <a:r>
+              <a:rPr lang="ru-RU" dirty="0">
+                <a:solidFill>
+                  <a:schemeClr val="bg1"/>
+                </a:solidFill>
+                <a:latin typeface="Montserrat" panose="00000500000000000000" pitchFamily="2" charset="-52"/>
+              </a:rPr>
+              <a:t>Показать преимущества собственной разработки</a:t>
+            </a:r>
+          </a:p>
+        </p:txBody>
+      </p:sp>
+      <p:sp>
+        <p:nvSpPr>
           <p:cNvPr id="16" name="Google Shape;181;p40">
             <a:extLst>
               <a:ext uri="{FF2B5EF4-FFF2-40B4-BE49-F238E27FC236}">
@@ -18458,8 +18442,300 @@
           <a:p>
             <a:r>
               <a:rPr lang="en-US" sz="1600" dirty="0"/>
-              <a:t>API SERVICE</a:t>
+              <a:t>Connect</a:t>
             </a:r>
+          </a:p>
+        </p:txBody>
+      </p:sp>
+      <p:sp>
+        <p:nvSpPr>
+          <p:cNvPr id="17" name="Google Shape;182;p40">
+            <a:extLst>
+              <a:ext uri="{FF2B5EF4-FFF2-40B4-BE49-F238E27FC236}">
+                <a16:creationId xmlns:a16="http://schemas.microsoft.com/office/drawing/2014/main" id="{D7E0297E-EDA1-9D4B-6F89-E0A2C2A2ACF3}"/>
+              </a:ext>
+            </a:extLst>
+          </p:cNvPr>
+          <p:cNvSpPr txBox="1">
+            <a:spLocks/>
+          </p:cNvSpPr>
+          <p:nvPr/>
+        </p:nvSpPr>
+        <p:spPr>
+          <a:xfrm>
+            <a:off x="7556860" y="3352121"/>
+            <a:ext cx="1384185" cy="1110275"/>
+          </a:xfrm>
+          <a:prstGeom prst="rect">
+            <a:avLst/>
+          </a:prstGeom>
+          <a:noFill/>
+          <a:ln>
+            <a:noFill/>
+          </a:ln>
+        </p:spPr>
+        <p:txBody>
+          <a:bodyPr spcFirstLastPara="1" wrap="square" lIns="91425" tIns="91425" rIns="91425" bIns="91425" anchor="t" anchorCtr="0">
+            <a:noAutofit/>
+          </a:bodyPr>
+          <a:lstStyle>
+            <a:defPPr marR="0" lvl="0" algn="l" rtl="0">
+              <a:lnSpc>
+                <a:spcPct val="100000"/>
+              </a:lnSpc>
+              <a:spcBef>
+                <a:spcPts val="0"/>
+              </a:spcBef>
+              <a:spcAft>
+                <a:spcPts val="0"/>
+              </a:spcAft>
+            </a:defPPr>
+            <a:lvl1pPr marL="457200" marR="0" lvl="0" indent="-342900" algn="ctr" rtl="0">
+              <a:lnSpc>
+                <a:spcPct val="100000"/>
+              </a:lnSpc>
+              <a:spcBef>
+                <a:spcPts val="0"/>
+              </a:spcBef>
+              <a:spcAft>
+                <a:spcPts val="0"/>
+              </a:spcAft>
+              <a:buClr>
+                <a:schemeClr val="lt1"/>
+              </a:buClr>
+              <a:buSzPts val="1400"/>
+              <a:buFont typeface="Montserrat"/>
+              <a:buNone/>
+              <a:defRPr sz="1400" b="0" i="0" u="none" strike="noStrike" cap="none">
+                <a:solidFill>
+                  <a:schemeClr val="lt1"/>
+                </a:solidFill>
+                <a:latin typeface="Montserrat"/>
+                <a:ea typeface="Montserrat"/>
+                <a:cs typeface="Montserrat"/>
+                <a:sym typeface="Montserrat"/>
+              </a:defRPr>
+            </a:lvl1pPr>
+            <a:lvl2pPr marL="914400" marR="0" lvl="1" indent="-317500" algn="ctr" rtl="0">
+              <a:lnSpc>
+                <a:spcPct val="100000"/>
+              </a:lnSpc>
+              <a:spcBef>
+                <a:spcPts val="0"/>
+              </a:spcBef>
+              <a:spcAft>
+                <a:spcPts val="0"/>
+              </a:spcAft>
+              <a:buClr>
+                <a:schemeClr val="lt1"/>
+              </a:buClr>
+              <a:buSzPts val="2100"/>
+              <a:buFont typeface="Montserrat"/>
+              <a:buNone/>
+              <a:defRPr sz="2100" b="0" i="0" u="none" strike="noStrike" cap="none">
+                <a:solidFill>
+                  <a:schemeClr val="lt1"/>
+                </a:solidFill>
+                <a:latin typeface="Montserrat"/>
+                <a:ea typeface="Montserrat"/>
+                <a:cs typeface="Montserrat"/>
+                <a:sym typeface="Montserrat"/>
+              </a:defRPr>
+            </a:lvl2pPr>
+            <a:lvl3pPr marL="1371600" marR="0" lvl="2" indent="-317500" algn="ctr" rtl="0">
+              <a:lnSpc>
+                <a:spcPct val="100000"/>
+              </a:lnSpc>
+              <a:spcBef>
+                <a:spcPts val="0"/>
+              </a:spcBef>
+              <a:spcAft>
+                <a:spcPts val="0"/>
+              </a:spcAft>
+              <a:buClr>
+                <a:schemeClr val="lt1"/>
+              </a:buClr>
+              <a:buSzPts val="2100"/>
+              <a:buFont typeface="Montserrat"/>
+              <a:buNone/>
+              <a:defRPr sz="2100" b="0" i="0" u="none" strike="noStrike" cap="none">
+                <a:solidFill>
+                  <a:schemeClr val="lt1"/>
+                </a:solidFill>
+                <a:latin typeface="Montserrat"/>
+                <a:ea typeface="Montserrat"/>
+                <a:cs typeface="Montserrat"/>
+                <a:sym typeface="Montserrat"/>
+              </a:defRPr>
+            </a:lvl3pPr>
+            <a:lvl4pPr marL="1828800" marR="0" lvl="3" indent="-317500" algn="ctr" rtl="0">
+              <a:lnSpc>
+                <a:spcPct val="100000"/>
+              </a:lnSpc>
+              <a:spcBef>
+                <a:spcPts val="0"/>
+              </a:spcBef>
+              <a:spcAft>
+                <a:spcPts val="0"/>
+              </a:spcAft>
+              <a:buClr>
+                <a:schemeClr val="lt1"/>
+              </a:buClr>
+              <a:buSzPts val="2100"/>
+              <a:buFont typeface="Montserrat"/>
+              <a:buNone/>
+              <a:defRPr sz="2100" b="0" i="0" u="none" strike="noStrike" cap="none">
+                <a:solidFill>
+                  <a:schemeClr val="lt1"/>
+                </a:solidFill>
+                <a:latin typeface="Montserrat"/>
+                <a:ea typeface="Montserrat"/>
+                <a:cs typeface="Montserrat"/>
+                <a:sym typeface="Montserrat"/>
+              </a:defRPr>
+            </a:lvl4pPr>
+            <a:lvl5pPr marL="2286000" marR="0" lvl="4" indent="-317500" algn="ctr" rtl="0">
+              <a:lnSpc>
+                <a:spcPct val="100000"/>
+              </a:lnSpc>
+              <a:spcBef>
+                <a:spcPts val="0"/>
+              </a:spcBef>
+              <a:spcAft>
+                <a:spcPts val="0"/>
+              </a:spcAft>
+              <a:buClr>
+                <a:schemeClr val="lt1"/>
+              </a:buClr>
+              <a:buSzPts val="2100"/>
+              <a:buFont typeface="Montserrat"/>
+              <a:buNone/>
+              <a:defRPr sz="2100" b="0" i="0" u="none" strike="noStrike" cap="none">
+                <a:solidFill>
+                  <a:schemeClr val="lt1"/>
+                </a:solidFill>
+                <a:latin typeface="Montserrat"/>
+                <a:ea typeface="Montserrat"/>
+                <a:cs typeface="Montserrat"/>
+                <a:sym typeface="Montserrat"/>
+              </a:defRPr>
+            </a:lvl5pPr>
+            <a:lvl6pPr marL="2743200" marR="0" lvl="5" indent="-317500" algn="ctr" rtl="0">
+              <a:lnSpc>
+                <a:spcPct val="100000"/>
+              </a:lnSpc>
+              <a:spcBef>
+                <a:spcPts val="0"/>
+              </a:spcBef>
+              <a:spcAft>
+                <a:spcPts val="0"/>
+              </a:spcAft>
+              <a:buClr>
+                <a:schemeClr val="lt1"/>
+              </a:buClr>
+              <a:buSzPts val="2100"/>
+              <a:buFont typeface="Montserrat"/>
+              <a:buNone/>
+              <a:defRPr sz="2100" b="0" i="0" u="none" strike="noStrike" cap="none">
+                <a:solidFill>
+                  <a:schemeClr val="lt1"/>
+                </a:solidFill>
+                <a:latin typeface="Montserrat"/>
+                <a:ea typeface="Montserrat"/>
+                <a:cs typeface="Montserrat"/>
+                <a:sym typeface="Montserrat"/>
+              </a:defRPr>
+            </a:lvl6pPr>
+            <a:lvl7pPr marL="3200400" marR="0" lvl="6" indent="-317500" algn="ctr" rtl="0">
+              <a:lnSpc>
+                <a:spcPct val="100000"/>
+              </a:lnSpc>
+              <a:spcBef>
+                <a:spcPts val="0"/>
+              </a:spcBef>
+              <a:spcAft>
+                <a:spcPts val="0"/>
+              </a:spcAft>
+              <a:buClr>
+                <a:schemeClr val="lt1"/>
+              </a:buClr>
+              <a:buSzPts val="2100"/>
+              <a:buFont typeface="Montserrat"/>
+              <a:buNone/>
+              <a:defRPr sz="2100" b="0" i="0" u="none" strike="noStrike" cap="none">
+                <a:solidFill>
+                  <a:schemeClr val="lt1"/>
+                </a:solidFill>
+                <a:latin typeface="Montserrat"/>
+                <a:ea typeface="Montserrat"/>
+                <a:cs typeface="Montserrat"/>
+                <a:sym typeface="Montserrat"/>
+              </a:defRPr>
+            </a:lvl7pPr>
+            <a:lvl8pPr marL="3657600" marR="0" lvl="7" indent="-317500" algn="ctr" rtl="0">
+              <a:lnSpc>
+                <a:spcPct val="100000"/>
+              </a:lnSpc>
+              <a:spcBef>
+                <a:spcPts val="0"/>
+              </a:spcBef>
+              <a:spcAft>
+                <a:spcPts val="0"/>
+              </a:spcAft>
+              <a:buClr>
+                <a:schemeClr val="lt1"/>
+              </a:buClr>
+              <a:buSzPts val="2100"/>
+              <a:buFont typeface="Montserrat"/>
+              <a:buNone/>
+              <a:defRPr sz="2100" b="0" i="0" u="none" strike="noStrike" cap="none">
+                <a:solidFill>
+                  <a:schemeClr val="lt1"/>
+                </a:solidFill>
+                <a:latin typeface="Montserrat"/>
+                <a:ea typeface="Montserrat"/>
+                <a:cs typeface="Montserrat"/>
+                <a:sym typeface="Montserrat"/>
+              </a:defRPr>
+            </a:lvl8pPr>
+            <a:lvl9pPr marL="4114800" marR="0" lvl="8" indent="-317500" algn="ctr" rtl="0">
+              <a:lnSpc>
+                <a:spcPct val="100000"/>
+              </a:lnSpc>
+              <a:spcBef>
+                <a:spcPts val="0"/>
+              </a:spcBef>
+              <a:spcAft>
+                <a:spcPts val="0"/>
+              </a:spcAft>
+              <a:buClr>
+                <a:schemeClr val="lt1"/>
+              </a:buClr>
+              <a:buSzPts val="2100"/>
+              <a:buFont typeface="Montserrat"/>
+              <a:buNone/>
+              <a:defRPr sz="2100" b="0" i="0" u="none" strike="noStrike" cap="none">
+                <a:solidFill>
+                  <a:schemeClr val="lt1"/>
+                </a:solidFill>
+                <a:latin typeface="Montserrat"/>
+                <a:ea typeface="Montserrat"/>
+                <a:cs typeface="Montserrat"/>
+                <a:sym typeface="Montserrat"/>
+              </a:defRPr>
+            </a:lvl9pPr>
+          </a:lstStyle>
+          <a:p>
+            <a:pPr marL="0" indent="0"/>
+            <a:r>
+              <a:rPr lang="ru-RU" dirty="0">
+                <a:latin typeface="Montserrat" panose="00000500000000000000" pitchFamily="2" charset="-52"/>
+              </a:rPr>
+              <a:t>Реализовать связь между сервером и клиентом</a:t>
+            </a:r>
+            <a:endParaRPr lang="en-US" dirty="0">
+              <a:latin typeface="Montserrat" panose="00000500000000000000" pitchFamily="2" charset="-52"/>
+            </a:endParaRPr>
           </a:p>
         </p:txBody>
       </p:sp>
@@ -18808,7 +19084,7 @@
         <p:spPr>
           <a:xfrm>
             <a:off x="7550983" y="2571750"/>
-            <a:ext cx="0" cy="847957"/>
+            <a:ext cx="0" cy="1913537"/>
           </a:xfrm>
           <a:prstGeom prst="line">
             <a:avLst/>
@@ -18846,7 +19122,7 @@
         <p:spPr>
           <a:xfrm>
             <a:off x="5802047" y="2565648"/>
-            <a:ext cx="0" cy="854059"/>
+            <a:ext cx="0" cy="1913537"/>
           </a:xfrm>
           <a:prstGeom prst="line">
             <a:avLst/>
@@ -18884,7 +19160,7 @@
         <p:spPr>
           <a:xfrm>
             <a:off x="4252522" y="2565647"/>
-            <a:ext cx="0" cy="854060"/>
+            <a:ext cx="0" cy="1913537"/>
           </a:xfrm>
           <a:prstGeom prst="line">
             <a:avLst/>
@@ -18921,8 +19197,8 @@
         </p:nvCxnSpPr>
         <p:spPr>
           <a:xfrm>
-            <a:off x="2897071" y="2624865"/>
-            <a:ext cx="0" cy="794842"/>
+            <a:off x="2904254" y="2560081"/>
+            <a:ext cx="0" cy="1913537"/>
           </a:xfrm>
           <a:prstGeom prst="line">
             <a:avLst/>
@@ -18960,7 +19236,7 @@
         <p:spPr>
           <a:xfrm>
             <a:off x="1487227" y="2560081"/>
-            <a:ext cx="0" cy="859626"/>
+            <a:ext cx="0" cy="1913537"/>
           </a:xfrm>
           <a:prstGeom prst="line">
             <a:avLst/>
@@ -18980,181 +19256,6 @@
             <a:schemeClr val="tx1"/>
           </a:fontRef>
         </p:style>
-      </p:cxnSp>
-    </p:spTree>
-  </p:cSld>
-  <p:clrMapOvr>
-    <a:masterClrMapping/>
-  </p:clrMapOvr>
-</p:sld>
-</file>
-
-<file path=ppt/slides/slide4.xml><?xml version="1.0" encoding="utf-8"?>
-<p:sld xmlns:a="http://schemas.openxmlformats.org/drawingml/2006/main" xmlns:r="http://schemas.openxmlformats.org/officeDocument/2006/relationships" xmlns:p="http://schemas.openxmlformats.org/presentationml/2006/main">
-  <p:cSld>
-    <p:spTree>
-      <p:nvGrpSpPr>
-        <p:cNvPr id="1" name="Shape 213"/>
-        <p:cNvGrpSpPr/>
-        <p:nvPr/>
-      </p:nvGrpSpPr>
-      <p:grpSpPr>
-        <a:xfrm>
-          <a:off x="0" y="0"/>
-          <a:ext cx="0" cy="0"/>
-          <a:chOff x="0" y="0"/>
-          <a:chExt cx="0" cy="0"/>
-        </a:xfrm>
-      </p:grpSpPr>
-      <p:sp>
-        <p:nvSpPr>
-          <p:cNvPr id="214" name="Google Shape;214;p44"/>
-          <p:cNvSpPr txBox="1">
-            <a:spLocks noGrp="1"/>
-          </p:cNvSpPr>
-          <p:nvPr>
-            <p:ph type="title"/>
-          </p:nvPr>
-        </p:nvSpPr>
-        <p:spPr>
-          <a:xfrm>
-            <a:off x="938500" y="445025"/>
-            <a:ext cx="4629300" cy="941400"/>
-          </a:xfrm>
-          <a:prstGeom prst="rect">
-            <a:avLst/>
-          </a:prstGeom>
-        </p:spPr>
-        <p:txBody>
-          <a:bodyPr spcFirstLastPara="1" wrap="square" lIns="91425" tIns="91425" rIns="91425" bIns="91425" anchor="t" anchorCtr="0">
-            <a:noAutofit/>
-          </a:bodyPr>
-          <a:lstStyle/>
-          <a:p>
-            <a:pPr marL="0" lvl="0" indent="0" algn="l" rtl="0">
-              <a:spcBef>
-                <a:spcPts val="0"/>
-              </a:spcBef>
-              <a:spcAft>
-                <a:spcPts val="0"/>
-              </a:spcAft>
-              <a:buNone/>
-            </a:pPr>
-            <a:r>
-              <a:rPr lang="ru-RU" dirty="0">
-                <a:solidFill>
-                  <a:schemeClr val="accent1"/>
-                </a:solidFill>
-              </a:rPr>
-              <a:t>АКТУАЛЬНОСТЬ ПРОЕКТА</a:t>
-            </a:r>
-            <a:endParaRPr lang="en-US" dirty="0">
-              <a:solidFill>
-                <a:schemeClr val="accent1"/>
-              </a:solidFill>
-            </a:endParaRPr>
-          </a:p>
-        </p:txBody>
-      </p:sp>
-      <p:sp>
-        <p:nvSpPr>
-          <p:cNvPr id="215" name="Google Shape;215;p44"/>
-          <p:cNvSpPr txBox="1">
-            <a:spLocks noGrp="1"/>
-          </p:cNvSpPr>
-          <p:nvPr>
-            <p:ph type="body" idx="1"/>
-          </p:nvPr>
-        </p:nvSpPr>
-        <p:spPr>
-          <a:xfrm>
-            <a:off x="814586" y="1417427"/>
-            <a:ext cx="5482305" cy="3328362"/>
-          </a:xfrm>
-          <a:prstGeom prst="rect">
-            <a:avLst/>
-          </a:prstGeom>
-        </p:spPr>
-        <p:txBody>
-          <a:bodyPr spcFirstLastPara="1" wrap="square" lIns="91425" tIns="91425" rIns="91425" bIns="91425" anchor="t" anchorCtr="0">
-            <a:noAutofit/>
-          </a:bodyPr>
-          <a:lstStyle/>
-          <a:p>
-            <a:pPr>
-              <a:lnSpc>
-                <a:spcPct val="150000"/>
-              </a:lnSpc>
-            </a:pPr>
-            <a:r>
-              <a:rPr lang="ru-RU" sz="1600" b="1" dirty="0"/>
-              <a:t>Актуальность:</a:t>
-            </a:r>
-            <a:r>
-              <a:rPr lang="ru-RU" sz="1600" dirty="0"/>
-              <a:t> Ручной учет заказов (блокноты) приводит к ошибкам и воровству. Высокая конкуренция требует скорости обслуживания.</a:t>
-            </a:r>
-          </a:p>
-          <a:p>
-            <a:pPr>
-              <a:lnSpc>
-                <a:spcPct val="150000"/>
-              </a:lnSpc>
-            </a:pPr>
-            <a:endParaRPr lang="ru-RU" sz="1600" dirty="0"/>
-          </a:p>
-          <a:p>
-            <a:pPr>
-              <a:lnSpc>
-                <a:spcPct val="150000"/>
-              </a:lnSpc>
-            </a:pPr>
-            <a:r>
-              <a:rPr lang="ru-RU" sz="1600" b="1" dirty="0"/>
-              <a:t>Предметная область:</a:t>
-            </a:r>
-            <a:r>
-              <a:rPr lang="ru-RU" sz="1600" dirty="0"/>
-              <a:t> Автоматизация бизнес процессов в общепите.</a:t>
-            </a:r>
-            <a:endParaRPr dirty="0"/>
-          </a:p>
-        </p:txBody>
-      </p:sp>
-      <p:cxnSp>
-        <p:nvCxnSpPr>
-          <p:cNvPr id="216" name="Google Shape;216;p44"/>
-          <p:cNvCxnSpPr>
-            <a:cxnSpLocks/>
-          </p:cNvCxnSpPr>
-          <p:nvPr/>
-        </p:nvCxnSpPr>
-        <p:spPr>
-          <a:xfrm>
-            <a:off x="1026200" y="414022"/>
-            <a:ext cx="3005473" cy="0"/>
-          </a:xfrm>
-          <a:prstGeom prst="straightConnector1">
-            <a:avLst/>
-          </a:prstGeom>
-          <a:noFill/>
-          <a:ln w="9525" cap="flat" cmpd="sng">
-            <a:solidFill>
-              <a:schemeClr val="accent1"/>
-            </a:solidFill>
-            <a:prstDash val="solid"/>
-            <a:round/>
-            <a:headEnd type="none" w="med" len="med"/>
-            <a:tailEnd type="none" w="med" len="med"/>
-          </a:ln>
-          <a:effectLst>
-            <a:outerShdw blurRad="57150" dist="19050" dir="5400000" algn="bl" rotWithShape="0">
-              <a:srgbClr val="FFFFFF">
-                <a:alpha val="50000"/>
-              </a:srgbClr>
-            </a:outerShdw>
-          </a:effectLst>
-        </p:spPr>
       </p:cxnSp>
     </p:spTree>
   </p:cSld>
@@ -19635,233 +19736,6 @@
 </file>
 
 <file path=ppt/slides/slide6.xml><?xml version="1.0" encoding="utf-8"?>
-<p:sld xmlns:a="http://schemas.openxmlformats.org/drawingml/2006/main" xmlns:r="http://schemas.openxmlformats.org/officeDocument/2006/relationships" xmlns:p="http://schemas.openxmlformats.org/presentationml/2006/main">
-  <p:cSld>
-    <p:spTree>
-      <p:nvGrpSpPr>
-        <p:cNvPr id="1" name="Shape 2096"/>
-        <p:cNvGrpSpPr/>
-        <p:nvPr/>
-      </p:nvGrpSpPr>
-      <p:grpSpPr>
-        <a:xfrm>
-          <a:off x="0" y="0"/>
-          <a:ext cx="0" cy="0"/>
-          <a:chOff x="0" y="0"/>
-          <a:chExt cx="0" cy="0"/>
-        </a:xfrm>
-      </p:grpSpPr>
-      <p:sp>
-        <p:nvSpPr>
-          <p:cNvPr id="2097" name="Google Shape;2097;p63"/>
-          <p:cNvSpPr txBox="1">
-            <a:spLocks noGrp="1"/>
-          </p:cNvSpPr>
-          <p:nvPr>
-            <p:ph type="title"/>
-          </p:nvPr>
-        </p:nvSpPr>
-        <p:spPr>
-          <a:xfrm>
-            <a:off x="938500" y="445025"/>
-            <a:ext cx="5043600" cy="941400"/>
-          </a:xfrm>
-          <a:prstGeom prst="rect">
-            <a:avLst/>
-          </a:prstGeom>
-        </p:spPr>
-        <p:txBody>
-          <a:bodyPr spcFirstLastPara="1" wrap="square" lIns="91425" tIns="91425" rIns="91425" bIns="91425" anchor="t" anchorCtr="0">
-            <a:noAutofit/>
-          </a:bodyPr>
-          <a:lstStyle/>
-          <a:p>
-            <a:pPr marL="0" lvl="0" indent="0" algn="l" rtl="0">
-              <a:spcBef>
-                <a:spcPts val="0"/>
-              </a:spcBef>
-              <a:spcAft>
-                <a:spcPts val="0"/>
-              </a:spcAft>
-              <a:buNone/>
-            </a:pPr>
-            <a:r>
-              <a:rPr lang="ru-RU" dirty="0"/>
-              <a:t>Контейнеризация</a:t>
-            </a:r>
-            <a:endParaRPr dirty="0"/>
-          </a:p>
-        </p:txBody>
-      </p:sp>
-      <p:cxnSp>
-        <p:nvCxnSpPr>
-          <p:cNvPr id="2106" name="Google Shape;2106;p63"/>
-          <p:cNvCxnSpPr/>
-          <p:nvPr/>
-        </p:nvCxnSpPr>
-        <p:spPr>
-          <a:xfrm>
-            <a:off x="1026200" y="414022"/>
-            <a:ext cx="2763000" cy="0"/>
-          </a:xfrm>
-          <a:prstGeom prst="straightConnector1">
-            <a:avLst/>
-          </a:prstGeom>
-          <a:noFill/>
-          <a:ln w="9525" cap="flat" cmpd="sng">
-            <a:solidFill>
-              <a:schemeClr val="accent1"/>
-            </a:solidFill>
-            <a:prstDash val="solid"/>
-            <a:round/>
-            <a:headEnd type="none" w="med" len="med"/>
-            <a:tailEnd type="none" w="med" len="med"/>
-          </a:ln>
-          <a:effectLst>
-            <a:outerShdw blurRad="57150" dist="19050" dir="5400000" algn="bl" rotWithShape="0">
-              <a:srgbClr val="FFFFFF">
-                <a:alpha val="50000"/>
-              </a:srgbClr>
-            </a:outerShdw>
-          </a:effectLst>
-        </p:spPr>
-      </p:cxnSp>
-      <p:sp>
-        <p:nvSpPr>
-          <p:cNvPr id="30" name="TextBox 29">
-            <a:extLst>
-              <a:ext uri="{FF2B5EF4-FFF2-40B4-BE49-F238E27FC236}">
-                <a16:creationId xmlns:a16="http://schemas.microsoft.com/office/drawing/2014/main" id="{0EACDDC0-5212-7175-2407-40C47585619E}"/>
-              </a:ext>
-            </a:extLst>
-          </p:cNvPr>
-          <p:cNvSpPr txBox="1"/>
-          <p:nvPr/>
-        </p:nvSpPr>
-        <p:spPr>
-          <a:xfrm>
-            <a:off x="938500" y="1114824"/>
-            <a:ext cx="4689782" cy="523220"/>
-          </a:xfrm>
-          <a:prstGeom prst="rect">
-            <a:avLst/>
-          </a:prstGeom>
-          <a:noFill/>
-        </p:spPr>
-        <p:txBody>
-          <a:bodyPr wrap="square">
-            <a:spAutoFit/>
-          </a:bodyPr>
-          <a:lstStyle/>
-          <a:p>
-            <a:pPr>
-              <a:buNone/>
-            </a:pPr>
-            <a:r>
-              <a:rPr lang="ru-RU" dirty="0">
-                <a:solidFill>
-                  <a:schemeClr val="bg1"/>
-                </a:solidFill>
-                <a:latin typeface="Montserrat" panose="00000500000000000000" pitchFamily="2" charset="-52"/>
-              </a:rPr>
-              <a:t>проводилась через </a:t>
-            </a:r>
-            <a:r>
-              <a:rPr lang="ru-RU" b="1" dirty="0">
-                <a:solidFill>
-                  <a:schemeClr val="bg1"/>
-                </a:solidFill>
-                <a:latin typeface="Montserrat" panose="00000500000000000000" pitchFamily="2" charset="-52"/>
-              </a:rPr>
-              <a:t>Docker</a:t>
-            </a:r>
-            <a:r>
-              <a:rPr lang="ru-RU" dirty="0">
-                <a:solidFill>
-                  <a:schemeClr val="bg1"/>
-                </a:solidFill>
-                <a:latin typeface="Montserrat" panose="00000500000000000000" pitchFamily="2" charset="-52"/>
-              </a:rPr>
-              <a:t> для переносимости системы на разные десктопные устройства.</a:t>
-            </a:r>
-          </a:p>
-        </p:txBody>
-      </p:sp>
-      <p:pic>
-        <p:nvPicPr>
-          <p:cNvPr id="2080" name="Рисунок 2079">
-            <a:extLst>
-              <a:ext uri="{FF2B5EF4-FFF2-40B4-BE49-F238E27FC236}">
-                <a16:creationId xmlns:a16="http://schemas.microsoft.com/office/drawing/2014/main" id="{7A3F7676-F424-8FF7-3492-3515716CF281}"/>
-              </a:ext>
-            </a:extLst>
-          </p:cNvPr>
-          <p:cNvPicPr>
-            <a:picLocks noChangeAspect="1"/>
-          </p:cNvPicPr>
-          <p:nvPr/>
-        </p:nvPicPr>
-        <p:blipFill>
-          <a:blip r:embed="rId3"/>
-          <a:stretch>
-            <a:fillRect/>
-          </a:stretch>
-        </p:blipFill>
-        <p:spPr>
-          <a:xfrm>
-            <a:off x="1076892" y="1889662"/>
-            <a:ext cx="5249047" cy="2839816"/>
-          </a:xfrm>
-          <a:prstGeom prst="rect">
-            <a:avLst/>
-          </a:prstGeom>
-        </p:spPr>
-      </p:pic>
-      <p:pic>
-        <p:nvPicPr>
-          <p:cNvPr id="6" name="Рисунок 5">
-            <a:extLst>
-              <a:ext uri="{FF2B5EF4-FFF2-40B4-BE49-F238E27FC236}">
-                <a16:creationId xmlns:a16="http://schemas.microsoft.com/office/drawing/2014/main" id="{30F048CE-E1CB-E37B-91D9-88585FBCA7A0}"/>
-              </a:ext>
-            </a:extLst>
-          </p:cNvPr>
-          <p:cNvPicPr>
-            <a:picLocks noChangeAspect="1"/>
-          </p:cNvPicPr>
-          <p:nvPr/>
-        </p:nvPicPr>
-        <p:blipFill>
-          <a:blip r:embed="rId4">
-            <a:extLst>
-              <a:ext uri="{96DAC541-7B7A-43D3-8B79-37D633B846F1}">
-                <asvg:svgBlip xmlns:asvg="http://schemas.microsoft.com/office/drawing/2016/SVG/main" r:embed="rId5"/>
-              </a:ext>
-            </a:extLst>
-          </a:blip>
-          <a:stretch>
-            <a:fillRect/>
-          </a:stretch>
-        </p:blipFill>
-        <p:spPr>
-          <a:xfrm>
-            <a:off x="4393967" y="445025"/>
-            <a:ext cx="605445" cy="478109"/>
-          </a:xfrm>
-          <a:prstGeom prst="rect">
-            <a:avLst/>
-          </a:prstGeom>
-        </p:spPr>
-      </p:pic>
-    </p:spTree>
-  </p:cSld>
-  <p:clrMapOvr>
-    <a:masterClrMapping/>
-  </p:clrMapOvr>
-</p:sld>
-</file>
-
-<file path=ppt/slides/slide7.xml><?xml version="1.0" encoding="utf-8"?>
 <p:sld xmlns:a="http://schemas.openxmlformats.org/drawingml/2006/main" xmlns:r="http://schemas.openxmlformats.org/officeDocument/2006/relationships" xmlns:p="http://schemas.openxmlformats.org/presentationml/2006/main">
   <p:cSld>
     <p:spTree>
@@ -20049,7 +19923,7 @@
 </p:sld>
 </file>
 
-<file path=ppt/slides/slide8.xml><?xml version="1.0" encoding="utf-8"?>
+<file path=ppt/slides/slide7.xml><?xml version="1.0" encoding="utf-8"?>
 <p:sld xmlns:a="http://schemas.openxmlformats.org/drawingml/2006/main" xmlns:r="http://schemas.openxmlformats.org/officeDocument/2006/relationships" xmlns:p="http://schemas.openxmlformats.org/presentationml/2006/main">
   <p:cSld>
     <p:spTree>
@@ -20159,7 +20033,7 @@
         </p:nvGrpSpPr>
         <p:grpSpPr>
           <a:xfrm>
-            <a:off x="4178012" y="1174605"/>
+            <a:off x="4219287" y="1191351"/>
             <a:ext cx="3968461" cy="3397394"/>
             <a:chOff x="3012498" y="1520969"/>
             <a:chExt cx="2638425" cy="2286000"/>
@@ -22101,7 +21975,7 @@
         </p:nvCxnSpPr>
         <p:spPr>
           <a:xfrm>
-            <a:off x="5897201" y="2951159"/>
+            <a:off x="5938476" y="2967905"/>
             <a:ext cx="544410" cy="184025"/>
           </a:xfrm>
           <a:prstGeom prst="straightConnector1">
@@ -22146,7 +22020,7 @@
         </p:nvCxnSpPr>
         <p:spPr>
           <a:xfrm flipV="1">
-            <a:off x="5897201" y="3375833"/>
+            <a:off x="5938476" y="3392579"/>
             <a:ext cx="544410" cy="134480"/>
           </a:xfrm>
           <a:prstGeom prst="straightConnector1">
@@ -26752,7 +26626,7 @@
 </p:sld>
 </file>
 
-<file path=ppt/slides/slide9.xml><?xml version="1.0" encoding="utf-8"?>
+<file path=ppt/slides/slide8.xml><?xml version="1.0" encoding="utf-8"?>
 <p:sld xmlns:a="http://schemas.openxmlformats.org/drawingml/2006/main" xmlns:r="http://schemas.openxmlformats.org/officeDocument/2006/relationships" xmlns:p="http://schemas.openxmlformats.org/presentationml/2006/main">
   <p:cSld>
     <p:spTree>
@@ -26913,7 +26787,7 @@
                   <a:schemeClr val="bg1"/>
                 </a:solidFill>
               </a:rPr>
-              <a:t>Code-Behind</a:t>
+              <a:t>Service Layer</a:t>
             </a:r>
             <a:r>
               <a:rPr lang="ru-RU" b="1" dirty="0">
@@ -33108,6 +32982,1151 @@
         <p14:creationId xmlns:p14="http://schemas.microsoft.com/office/powerpoint/2010/main" val="1450412324"/>
       </p:ext>
     </p:extLst>
+  </p:cSld>
+  <p:clrMapOvr>
+    <a:masterClrMapping/>
+  </p:clrMapOvr>
+</p:sld>
+</file>
+
+<file path=ppt/slides/slide9.xml><?xml version="1.0" encoding="utf-8"?>
+<p:sld xmlns:a="http://schemas.openxmlformats.org/drawingml/2006/main" xmlns:r="http://schemas.openxmlformats.org/officeDocument/2006/relationships" xmlns:p="http://schemas.openxmlformats.org/presentationml/2006/main">
+  <p:cSld>
+    <p:spTree>
+      <p:nvGrpSpPr>
+        <p:cNvPr id="1" name="Shape 2002"/>
+        <p:cNvGrpSpPr/>
+        <p:nvPr/>
+      </p:nvGrpSpPr>
+      <p:grpSpPr>
+        <a:xfrm>
+          <a:off x="0" y="0"/>
+          <a:ext cx="0" cy="0"/>
+          <a:chOff x="0" y="0"/>
+          <a:chExt cx="0" cy="0"/>
+        </a:xfrm>
+      </p:grpSpPr>
+      <p:sp>
+        <p:nvSpPr>
+          <p:cNvPr id="2003" name="Google Shape;2003;p58"/>
+          <p:cNvSpPr txBox="1">
+            <a:spLocks noGrp="1"/>
+          </p:cNvSpPr>
+          <p:nvPr>
+            <p:ph type="title"/>
+          </p:nvPr>
+        </p:nvSpPr>
+        <p:spPr>
+          <a:xfrm>
+            <a:off x="938500" y="445025"/>
+            <a:ext cx="4629300" cy="941400"/>
+          </a:xfrm>
+          <a:prstGeom prst="rect">
+            <a:avLst/>
+          </a:prstGeom>
+        </p:spPr>
+        <p:txBody>
+          <a:bodyPr spcFirstLastPara="1" wrap="square" lIns="91425" tIns="91425" rIns="91425" bIns="91425" anchor="t" anchorCtr="0">
+            <a:noAutofit/>
+          </a:bodyPr>
+          <a:lstStyle/>
+          <a:p>
+            <a:pPr lvl="0"/>
+            <a:r>
+              <a:rPr lang="ru-RU" dirty="0"/>
+              <a:t>Безопасность и </a:t>
+            </a:r>
+            <a:r>
+              <a:rPr lang="en-US" dirty="0"/>
+              <a:t>API</a:t>
+            </a:r>
+            <a:endParaRPr dirty="0"/>
+          </a:p>
+        </p:txBody>
+      </p:sp>
+      <p:cxnSp>
+        <p:nvCxnSpPr>
+          <p:cNvPr id="2016" name="Google Shape;2016;p58"/>
+          <p:cNvCxnSpPr/>
+          <p:nvPr/>
+        </p:nvCxnSpPr>
+        <p:spPr>
+          <a:xfrm>
+            <a:off x="1026200" y="414022"/>
+            <a:ext cx="2763000" cy="0"/>
+          </a:xfrm>
+          <a:prstGeom prst="straightConnector1">
+            <a:avLst/>
+          </a:prstGeom>
+          <a:noFill/>
+          <a:ln w="9525" cap="flat" cmpd="sng">
+            <a:solidFill>
+              <a:schemeClr val="accent1"/>
+            </a:solidFill>
+            <a:prstDash val="solid"/>
+            <a:round/>
+            <a:headEnd type="none" w="med" len="med"/>
+            <a:tailEnd type="none" w="med" len="med"/>
+          </a:ln>
+          <a:effectLst>
+            <a:outerShdw blurRad="57150" dist="19050" dir="5400000" algn="bl" rotWithShape="0">
+              <a:srgbClr val="FFFFFF">
+                <a:alpha val="50000"/>
+              </a:srgbClr>
+            </a:outerShdw>
+          </a:effectLst>
+        </p:spPr>
+      </p:cxnSp>
+      <p:sp>
+        <p:nvSpPr>
+          <p:cNvPr id="18" name="Google Shape;2098;p63">
+            <a:extLst>
+              <a:ext uri="{FF2B5EF4-FFF2-40B4-BE49-F238E27FC236}">
+                <a16:creationId xmlns:a16="http://schemas.microsoft.com/office/drawing/2014/main" id="{63D0DE40-08F9-AAE7-FD7D-6AD3A202B343}"/>
+              </a:ext>
+            </a:extLst>
+          </p:cNvPr>
+          <p:cNvSpPr txBox="1">
+            <a:spLocks noGrp="1"/>
+          </p:cNvSpPr>
+          <p:nvPr>
+            <p:ph type="title" idx="2"/>
+          </p:nvPr>
+        </p:nvSpPr>
+        <p:spPr>
+          <a:xfrm>
+            <a:off x="1894670" y="1437831"/>
+            <a:ext cx="2025695" cy="375600"/>
+          </a:xfrm>
+          <a:prstGeom prst="rect">
+            <a:avLst/>
+          </a:prstGeom>
+        </p:spPr>
+        <p:txBody>
+          <a:bodyPr spcFirstLastPara="1" wrap="square" lIns="91425" tIns="91425" rIns="91425" bIns="91425" anchor="t" anchorCtr="0">
+            <a:noAutofit/>
+          </a:bodyPr>
+          <a:lstStyle/>
+          <a:p>
+            <a:pPr lvl="0"/>
+            <a:r>
+              <a:rPr lang="en-US" dirty="0"/>
+              <a:t>JWT-</a:t>
+            </a:r>
+            <a:r>
+              <a:rPr lang="ru-RU" dirty="0"/>
+              <a:t>токены</a:t>
+            </a:r>
+            <a:endParaRPr dirty="0"/>
+          </a:p>
+        </p:txBody>
+      </p:sp>
+      <p:sp>
+        <p:nvSpPr>
+          <p:cNvPr id="19" name="Google Shape;2099;p63">
+            <a:extLst>
+              <a:ext uri="{FF2B5EF4-FFF2-40B4-BE49-F238E27FC236}">
+                <a16:creationId xmlns:a16="http://schemas.microsoft.com/office/drawing/2014/main" id="{FE0FD251-EB6E-5C62-9897-35AB75933E92}"/>
+              </a:ext>
+            </a:extLst>
+          </p:cNvPr>
+          <p:cNvSpPr txBox="1">
+            <a:spLocks/>
+          </p:cNvSpPr>
+          <p:nvPr/>
+        </p:nvSpPr>
+        <p:spPr>
+          <a:xfrm>
+            <a:off x="1424496" y="1885154"/>
+            <a:ext cx="2966042" cy="2492553"/>
+          </a:xfrm>
+          <a:prstGeom prst="rect">
+            <a:avLst/>
+          </a:prstGeom>
+          <a:noFill/>
+          <a:ln>
+            <a:noFill/>
+          </a:ln>
+        </p:spPr>
+        <p:txBody>
+          <a:bodyPr spcFirstLastPara="1" wrap="square" lIns="91425" tIns="91425" rIns="91425" bIns="91425" anchor="t" anchorCtr="0">
+            <a:noAutofit/>
+          </a:bodyPr>
+          <a:lstStyle>
+            <a:defPPr marR="0" lvl="0" algn="l" rtl="0">
+              <a:lnSpc>
+                <a:spcPct val="100000"/>
+              </a:lnSpc>
+              <a:spcBef>
+                <a:spcPts val="0"/>
+              </a:spcBef>
+              <a:spcAft>
+                <a:spcPts val="0"/>
+              </a:spcAft>
+            </a:defPPr>
+            <a:lvl1pPr marL="457200" marR="0" lvl="0" indent="-342900" algn="ctr" rtl="0">
+              <a:lnSpc>
+                <a:spcPct val="100000"/>
+              </a:lnSpc>
+              <a:spcBef>
+                <a:spcPts val="0"/>
+              </a:spcBef>
+              <a:spcAft>
+                <a:spcPts val="0"/>
+              </a:spcAft>
+              <a:buClr>
+                <a:schemeClr val="lt1"/>
+              </a:buClr>
+              <a:buSzPts val="1400"/>
+              <a:buFont typeface="Montserrat"/>
+              <a:buNone/>
+              <a:defRPr sz="1400" b="0" i="0" u="none" strike="noStrike" cap="none">
+                <a:solidFill>
+                  <a:schemeClr val="lt1"/>
+                </a:solidFill>
+                <a:latin typeface="Montserrat"/>
+                <a:ea typeface="Montserrat"/>
+                <a:cs typeface="Montserrat"/>
+                <a:sym typeface="Montserrat"/>
+              </a:defRPr>
+            </a:lvl1pPr>
+            <a:lvl2pPr marL="914400" marR="0" lvl="1" indent="-317500" algn="ctr" rtl="0">
+              <a:lnSpc>
+                <a:spcPct val="100000"/>
+              </a:lnSpc>
+              <a:spcBef>
+                <a:spcPts val="0"/>
+              </a:spcBef>
+              <a:spcAft>
+                <a:spcPts val="0"/>
+              </a:spcAft>
+              <a:buClr>
+                <a:schemeClr val="lt1"/>
+              </a:buClr>
+              <a:buSzPts val="2100"/>
+              <a:buFont typeface="Montserrat"/>
+              <a:buNone/>
+              <a:defRPr sz="2100" b="0" i="0" u="none" strike="noStrike" cap="none">
+                <a:solidFill>
+                  <a:schemeClr val="lt1"/>
+                </a:solidFill>
+                <a:latin typeface="Montserrat"/>
+                <a:ea typeface="Montserrat"/>
+                <a:cs typeface="Montserrat"/>
+                <a:sym typeface="Montserrat"/>
+              </a:defRPr>
+            </a:lvl2pPr>
+            <a:lvl3pPr marL="1371600" marR="0" lvl="2" indent="-317500" algn="ctr" rtl="0">
+              <a:lnSpc>
+                <a:spcPct val="100000"/>
+              </a:lnSpc>
+              <a:spcBef>
+                <a:spcPts val="0"/>
+              </a:spcBef>
+              <a:spcAft>
+                <a:spcPts val="0"/>
+              </a:spcAft>
+              <a:buClr>
+                <a:schemeClr val="lt1"/>
+              </a:buClr>
+              <a:buSzPts val="2100"/>
+              <a:buFont typeface="Montserrat"/>
+              <a:buNone/>
+              <a:defRPr sz="2100" b="0" i="0" u="none" strike="noStrike" cap="none">
+                <a:solidFill>
+                  <a:schemeClr val="lt1"/>
+                </a:solidFill>
+                <a:latin typeface="Montserrat"/>
+                <a:ea typeface="Montserrat"/>
+                <a:cs typeface="Montserrat"/>
+                <a:sym typeface="Montserrat"/>
+              </a:defRPr>
+            </a:lvl3pPr>
+            <a:lvl4pPr marL="1828800" marR="0" lvl="3" indent="-317500" algn="ctr" rtl="0">
+              <a:lnSpc>
+                <a:spcPct val="100000"/>
+              </a:lnSpc>
+              <a:spcBef>
+                <a:spcPts val="0"/>
+              </a:spcBef>
+              <a:spcAft>
+                <a:spcPts val="0"/>
+              </a:spcAft>
+              <a:buClr>
+                <a:schemeClr val="lt1"/>
+              </a:buClr>
+              <a:buSzPts val="2100"/>
+              <a:buFont typeface="Montserrat"/>
+              <a:buNone/>
+              <a:defRPr sz="2100" b="0" i="0" u="none" strike="noStrike" cap="none">
+                <a:solidFill>
+                  <a:schemeClr val="lt1"/>
+                </a:solidFill>
+                <a:latin typeface="Montserrat"/>
+                <a:ea typeface="Montserrat"/>
+                <a:cs typeface="Montserrat"/>
+                <a:sym typeface="Montserrat"/>
+              </a:defRPr>
+            </a:lvl4pPr>
+            <a:lvl5pPr marL="2286000" marR="0" lvl="4" indent="-317500" algn="ctr" rtl="0">
+              <a:lnSpc>
+                <a:spcPct val="100000"/>
+              </a:lnSpc>
+              <a:spcBef>
+                <a:spcPts val="0"/>
+              </a:spcBef>
+              <a:spcAft>
+                <a:spcPts val="0"/>
+              </a:spcAft>
+              <a:buClr>
+                <a:schemeClr val="lt1"/>
+              </a:buClr>
+              <a:buSzPts val="2100"/>
+              <a:buFont typeface="Montserrat"/>
+              <a:buNone/>
+              <a:defRPr sz="2100" b="0" i="0" u="none" strike="noStrike" cap="none">
+                <a:solidFill>
+                  <a:schemeClr val="lt1"/>
+                </a:solidFill>
+                <a:latin typeface="Montserrat"/>
+                <a:ea typeface="Montserrat"/>
+                <a:cs typeface="Montserrat"/>
+                <a:sym typeface="Montserrat"/>
+              </a:defRPr>
+            </a:lvl5pPr>
+            <a:lvl6pPr marL="2743200" marR="0" lvl="5" indent="-317500" algn="ctr" rtl="0">
+              <a:lnSpc>
+                <a:spcPct val="100000"/>
+              </a:lnSpc>
+              <a:spcBef>
+                <a:spcPts val="0"/>
+              </a:spcBef>
+              <a:spcAft>
+                <a:spcPts val="0"/>
+              </a:spcAft>
+              <a:buClr>
+                <a:schemeClr val="lt1"/>
+              </a:buClr>
+              <a:buSzPts val="2100"/>
+              <a:buFont typeface="Montserrat"/>
+              <a:buNone/>
+              <a:defRPr sz="2100" b="0" i="0" u="none" strike="noStrike" cap="none">
+                <a:solidFill>
+                  <a:schemeClr val="lt1"/>
+                </a:solidFill>
+                <a:latin typeface="Montserrat"/>
+                <a:ea typeface="Montserrat"/>
+                <a:cs typeface="Montserrat"/>
+                <a:sym typeface="Montserrat"/>
+              </a:defRPr>
+            </a:lvl6pPr>
+            <a:lvl7pPr marL="3200400" marR="0" lvl="6" indent="-317500" algn="ctr" rtl="0">
+              <a:lnSpc>
+                <a:spcPct val="100000"/>
+              </a:lnSpc>
+              <a:spcBef>
+                <a:spcPts val="0"/>
+              </a:spcBef>
+              <a:spcAft>
+                <a:spcPts val="0"/>
+              </a:spcAft>
+              <a:buClr>
+                <a:schemeClr val="lt1"/>
+              </a:buClr>
+              <a:buSzPts val="2100"/>
+              <a:buFont typeface="Montserrat"/>
+              <a:buNone/>
+              <a:defRPr sz="2100" b="0" i="0" u="none" strike="noStrike" cap="none">
+                <a:solidFill>
+                  <a:schemeClr val="lt1"/>
+                </a:solidFill>
+                <a:latin typeface="Montserrat"/>
+                <a:ea typeface="Montserrat"/>
+                <a:cs typeface="Montserrat"/>
+                <a:sym typeface="Montserrat"/>
+              </a:defRPr>
+            </a:lvl7pPr>
+            <a:lvl8pPr marL="3657600" marR="0" lvl="7" indent="-317500" algn="ctr" rtl="0">
+              <a:lnSpc>
+                <a:spcPct val="100000"/>
+              </a:lnSpc>
+              <a:spcBef>
+                <a:spcPts val="0"/>
+              </a:spcBef>
+              <a:spcAft>
+                <a:spcPts val="0"/>
+              </a:spcAft>
+              <a:buClr>
+                <a:schemeClr val="lt1"/>
+              </a:buClr>
+              <a:buSzPts val="2100"/>
+              <a:buFont typeface="Montserrat"/>
+              <a:buNone/>
+              <a:defRPr sz="2100" b="0" i="0" u="none" strike="noStrike" cap="none">
+                <a:solidFill>
+                  <a:schemeClr val="lt1"/>
+                </a:solidFill>
+                <a:latin typeface="Montserrat"/>
+                <a:ea typeface="Montserrat"/>
+                <a:cs typeface="Montserrat"/>
+                <a:sym typeface="Montserrat"/>
+              </a:defRPr>
+            </a:lvl8pPr>
+            <a:lvl9pPr marL="4114800" marR="0" lvl="8" indent="-317500" algn="ctr" rtl="0">
+              <a:lnSpc>
+                <a:spcPct val="100000"/>
+              </a:lnSpc>
+              <a:spcBef>
+                <a:spcPts val="0"/>
+              </a:spcBef>
+              <a:spcAft>
+                <a:spcPts val="0"/>
+              </a:spcAft>
+              <a:buClr>
+                <a:schemeClr val="lt1"/>
+              </a:buClr>
+              <a:buSzPts val="2100"/>
+              <a:buFont typeface="Montserrat"/>
+              <a:buNone/>
+              <a:defRPr sz="2100" b="0" i="0" u="none" strike="noStrike" cap="none">
+                <a:solidFill>
+                  <a:schemeClr val="lt1"/>
+                </a:solidFill>
+                <a:latin typeface="Montserrat"/>
+                <a:ea typeface="Montserrat"/>
+                <a:cs typeface="Montserrat"/>
+                <a:sym typeface="Montserrat"/>
+              </a:defRPr>
+            </a:lvl9pPr>
+          </a:lstStyle>
+          <a:p>
+            <a:pPr marL="0" indent="0" algn="l">
+              <a:lnSpc>
+                <a:spcPct val="150000"/>
+              </a:lnSpc>
+            </a:pPr>
+            <a:r>
+              <a:rPr lang="ru-RU" dirty="0"/>
+              <a:t>Авторизация осуществляется</a:t>
+            </a:r>
+          </a:p>
+          <a:p>
+            <a:pPr marL="0" indent="0" algn="l">
+              <a:lnSpc>
+                <a:spcPct val="150000"/>
+              </a:lnSpc>
+            </a:pPr>
+            <a:r>
+              <a:rPr lang="ru-RU" dirty="0"/>
+              <a:t>с использованием JWT-токенов, в которые вшиваются необходимые параметры пользователя.</a:t>
+            </a:r>
+          </a:p>
+          <a:p>
+            <a:pPr marL="0" indent="0" algn="l">
+              <a:lnSpc>
+                <a:spcPct val="150000"/>
+              </a:lnSpc>
+            </a:pPr>
+            <a:r>
+              <a:rPr lang="en-US" dirty="0"/>
+              <a:t>(ID, Name, Role)</a:t>
+            </a:r>
+          </a:p>
+        </p:txBody>
+      </p:sp>
+      <p:cxnSp>
+        <p:nvCxnSpPr>
+          <p:cNvPr id="27" name="Google Shape;2108;p63">
+            <a:extLst>
+              <a:ext uri="{FF2B5EF4-FFF2-40B4-BE49-F238E27FC236}">
+                <a16:creationId xmlns:a16="http://schemas.microsoft.com/office/drawing/2014/main" id="{2E5AF290-7A46-CF31-E359-360D9F390530}"/>
+              </a:ext>
+            </a:extLst>
+          </p:cNvPr>
+          <p:cNvCxnSpPr>
+            <a:cxnSpLocks/>
+          </p:cNvCxnSpPr>
+          <p:nvPr/>
+        </p:nvCxnSpPr>
+        <p:spPr>
+          <a:xfrm>
+            <a:off x="4572000" y="1566172"/>
+            <a:ext cx="0" cy="3130519"/>
+          </a:xfrm>
+          <a:prstGeom prst="straightConnector1">
+            <a:avLst/>
+          </a:prstGeom>
+          <a:noFill/>
+          <a:ln w="9525" cap="flat" cmpd="sng">
+            <a:solidFill>
+              <a:schemeClr val="accent1"/>
+            </a:solidFill>
+            <a:prstDash val="solid"/>
+            <a:round/>
+            <a:headEnd type="none" w="med" len="med"/>
+            <a:tailEnd type="none" w="med" len="med"/>
+          </a:ln>
+          <a:effectLst>
+            <a:outerShdw blurRad="57150" dist="19050" dir="5400000" algn="bl" rotWithShape="0">
+              <a:srgbClr val="FFFFFF">
+                <a:alpha val="50000"/>
+              </a:srgbClr>
+            </a:outerShdw>
+          </a:effectLst>
+        </p:spPr>
+      </p:cxnSp>
+      <p:sp>
+        <p:nvSpPr>
+          <p:cNvPr id="2047" name="Google Shape;2098;p63">
+            <a:extLst>
+              <a:ext uri="{FF2B5EF4-FFF2-40B4-BE49-F238E27FC236}">
+                <a16:creationId xmlns:a16="http://schemas.microsoft.com/office/drawing/2014/main" id="{10AC4F83-7C14-7590-D15F-B83DAD5980FC}"/>
+              </a:ext>
+            </a:extLst>
+          </p:cNvPr>
+          <p:cNvSpPr txBox="1">
+            <a:spLocks/>
+          </p:cNvSpPr>
+          <p:nvPr/>
+        </p:nvSpPr>
+        <p:spPr>
+          <a:xfrm>
+            <a:off x="5470819" y="1437831"/>
+            <a:ext cx="1301855" cy="375600"/>
+          </a:xfrm>
+          <a:prstGeom prst="rect">
+            <a:avLst/>
+          </a:prstGeom>
+          <a:noFill/>
+          <a:ln>
+            <a:noFill/>
+          </a:ln>
+        </p:spPr>
+        <p:txBody>
+          <a:bodyPr spcFirstLastPara="1" wrap="square" lIns="91425" tIns="91425" rIns="91425" bIns="91425" anchor="t" anchorCtr="0">
+            <a:noAutofit/>
+          </a:bodyPr>
+          <a:lstStyle>
+            <a:defPPr marR="0" lvl="0" algn="l" rtl="0">
+              <a:lnSpc>
+                <a:spcPct val="100000"/>
+              </a:lnSpc>
+              <a:spcBef>
+                <a:spcPts val="0"/>
+              </a:spcBef>
+              <a:spcAft>
+                <a:spcPts val="0"/>
+              </a:spcAft>
+            </a:defPPr>
+            <a:lvl1pPr marR="0" lvl="0" algn="ctr" rtl="0">
+              <a:lnSpc>
+                <a:spcPct val="100000"/>
+              </a:lnSpc>
+              <a:spcBef>
+                <a:spcPts val="0"/>
+              </a:spcBef>
+              <a:spcAft>
+                <a:spcPts val="0"/>
+              </a:spcAft>
+              <a:buClr>
+                <a:schemeClr val="lt1"/>
+              </a:buClr>
+              <a:buSzPts val="1800"/>
+              <a:buFont typeface="Montserrat ExtraBold"/>
+              <a:buNone/>
+              <a:defRPr sz="1800" b="0" i="0" u="none" strike="noStrike" cap="none">
+                <a:solidFill>
+                  <a:schemeClr val="lt1"/>
+                </a:solidFill>
+                <a:latin typeface="Montserrat ExtraBold"/>
+                <a:ea typeface="Montserrat ExtraBold"/>
+                <a:cs typeface="Montserrat ExtraBold"/>
+                <a:sym typeface="Montserrat ExtraBold"/>
+              </a:defRPr>
+            </a:lvl1pPr>
+            <a:lvl2pPr marR="0" lvl="1" algn="ctr" rtl="0">
+              <a:lnSpc>
+                <a:spcPct val="100000"/>
+              </a:lnSpc>
+              <a:spcBef>
+                <a:spcPts val="0"/>
+              </a:spcBef>
+              <a:spcAft>
+                <a:spcPts val="0"/>
+              </a:spcAft>
+              <a:buClr>
+                <a:schemeClr val="lt1"/>
+              </a:buClr>
+              <a:buSzPts val="4200"/>
+              <a:buFont typeface="Montserrat"/>
+              <a:buNone/>
+              <a:defRPr sz="4200" b="0" i="0" u="none" strike="noStrike" cap="none">
+                <a:solidFill>
+                  <a:schemeClr val="lt1"/>
+                </a:solidFill>
+                <a:latin typeface="Montserrat"/>
+                <a:ea typeface="Montserrat"/>
+                <a:cs typeface="Montserrat"/>
+                <a:sym typeface="Montserrat"/>
+              </a:defRPr>
+            </a:lvl2pPr>
+            <a:lvl3pPr marR="0" lvl="2" algn="ctr" rtl="0">
+              <a:lnSpc>
+                <a:spcPct val="100000"/>
+              </a:lnSpc>
+              <a:spcBef>
+                <a:spcPts val="0"/>
+              </a:spcBef>
+              <a:spcAft>
+                <a:spcPts val="0"/>
+              </a:spcAft>
+              <a:buClr>
+                <a:schemeClr val="lt1"/>
+              </a:buClr>
+              <a:buSzPts val="4200"/>
+              <a:buFont typeface="Montserrat"/>
+              <a:buNone/>
+              <a:defRPr sz="4200" b="0" i="0" u="none" strike="noStrike" cap="none">
+                <a:solidFill>
+                  <a:schemeClr val="lt1"/>
+                </a:solidFill>
+                <a:latin typeface="Montserrat"/>
+                <a:ea typeface="Montserrat"/>
+                <a:cs typeface="Montserrat"/>
+                <a:sym typeface="Montserrat"/>
+              </a:defRPr>
+            </a:lvl3pPr>
+            <a:lvl4pPr marR="0" lvl="3" algn="ctr" rtl="0">
+              <a:lnSpc>
+                <a:spcPct val="100000"/>
+              </a:lnSpc>
+              <a:spcBef>
+                <a:spcPts val="0"/>
+              </a:spcBef>
+              <a:spcAft>
+                <a:spcPts val="0"/>
+              </a:spcAft>
+              <a:buClr>
+                <a:schemeClr val="lt1"/>
+              </a:buClr>
+              <a:buSzPts val="4200"/>
+              <a:buFont typeface="Montserrat"/>
+              <a:buNone/>
+              <a:defRPr sz="4200" b="0" i="0" u="none" strike="noStrike" cap="none">
+                <a:solidFill>
+                  <a:schemeClr val="lt1"/>
+                </a:solidFill>
+                <a:latin typeface="Montserrat"/>
+                <a:ea typeface="Montserrat"/>
+                <a:cs typeface="Montserrat"/>
+                <a:sym typeface="Montserrat"/>
+              </a:defRPr>
+            </a:lvl4pPr>
+            <a:lvl5pPr marR="0" lvl="4" algn="ctr" rtl="0">
+              <a:lnSpc>
+                <a:spcPct val="100000"/>
+              </a:lnSpc>
+              <a:spcBef>
+                <a:spcPts val="0"/>
+              </a:spcBef>
+              <a:spcAft>
+                <a:spcPts val="0"/>
+              </a:spcAft>
+              <a:buClr>
+                <a:schemeClr val="lt1"/>
+              </a:buClr>
+              <a:buSzPts val="4200"/>
+              <a:buFont typeface="Montserrat"/>
+              <a:buNone/>
+              <a:defRPr sz="4200" b="0" i="0" u="none" strike="noStrike" cap="none">
+                <a:solidFill>
+                  <a:schemeClr val="lt1"/>
+                </a:solidFill>
+                <a:latin typeface="Montserrat"/>
+                <a:ea typeface="Montserrat"/>
+                <a:cs typeface="Montserrat"/>
+                <a:sym typeface="Montserrat"/>
+              </a:defRPr>
+            </a:lvl5pPr>
+            <a:lvl6pPr marR="0" lvl="5" algn="ctr" rtl="0">
+              <a:lnSpc>
+                <a:spcPct val="100000"/>
+              </a:lnSpc>
+              <a:spcBef>
+                <a:spcPts val="0"/>
+              </a:spcBef>
+              <a:spcAft>
+                <a:spcPts val="0"/>
+              </a:spcAft>
+              <a:buClr>
+                <a:schemeClr val="lt1"/>
+              </a:buClr>
+              <a:buSzPts val="4200"/>
+              <a:buFont typeface="Montserrat"/>
+              <a:buNone/>
+              <a:defRPr sz="4200" b="0" i="0" u="none" strike="noStrike" cap="none">
+                <a:solidFill>
+                  <a:schemeClr val="lt1"/>
+                </a:solidFill>
+                <a:latin typeface="Montserrat"/>
+                <a:ea typeface="Montserrat"/>
+                <a:cs typeface="Montserrat"/>
+                <a:sym typeface="Montserrat"/>
+              </a:defRPr>
+            </a:lvl6pPr>
+            <a:lvl7pPr marR="0" lvl="6" algn="ctr" rtl="0">
+              <a:lnSpc>
+                <a:spcPct val="100000"/>
+              </a:lnSpc>
+              <a:spcBef>
+                <a:spcPts val="0"/>
+              </a:spcBef>
+              <a:spcAft>
+                <a:spcPts val="0"/>
+              </a:spcAft>
+              <a:buClr>
+                <a:schemeClr val="lt1"/>
+              </a:buClr>
+              <a:buSzPts val="4200"/>
+              <a:buFont typeface="Montserrat"/>
+              <a:buNone/>
+              <a:defRPr sz="4200" b="0" i="0" u="none" strike="noStrike" cap="none">
+                <a:solidFill>
+                  <a:schemeClr val="lt1"/>
+                </a:solidFill>
+                <a:latin typeface="Montserrat"/>
+                <a:ea typeface="Montserrat"/>
+                <a:cs typeface="Montserrat"/>
+                <a:sym typeface="Montserrat"/>
+              </a:defRPr>
+            </a:lvl7pPr>
+            <a:lvl8pPr marR="0" lvl="7" algn="ctr" rtl="0">
+              <a:lnSpc>
+                <a:spcPct val="100000"/>
+              </a:lnSpc>
+              <a:spcBef>
+                <a:spcPts val="0"/>
+              </a:spcBef>
+              <a:spcAft>
+                <a:spcPts val="0"/>
+              </a:spcAft>
+              <a:buClr>
+                <a:schemeClr val="lt1"/>
+              </a:buClr>
+              <a:buSzPts val="4200"/>
+              <a:buFont typeface="Montserrat"/>
+              <a:buNone/>
+              <a:defRPr sz="4200" b="0" i="0" u="none" strike="noStrike" cap="none">
+                <a:solidFill>
+                  <a:schemeClr val="lt1"/>
+                </a:solidFill>
+                <a:latin typeface="Montserrat"/>
+                <a:ea typeface="Montserrat"/>
+                <a:cs typeface="Montserrat"/>
+                <a:sym typeface="Montserrat"/>
+              </a:defRPr>
+            </a:lvl8pPr>
+            <a:lvl9pPr marR="0" lvl="8" algn="ctr" rtl="0">
+              <a:lnSpc>
+                <a:spcPct val="100000"/>
+              </a:lnSpc>
+              <a:spcBef>
+                <a:spcPts val="0"/>
+              </a:spcBef>
+              <a:spcAft>
+                <a:spcPts val="0"/>
+              </a:spcAft>
+              <a:buClr>
+                <a:schemeClr val="lt1"/>
+              </a:buClr>
+              <a:buSzPts val="4200"/>
+              <a:buFont typeface="Montserrat"/>
+              <a:buNone/>
+              <a:defRPr sz="4200" b="0" i="0" u="none" strike="noStrike" cap="none">
+                <a:solidFill>
+                  <a:schemeClr val="lt1"/>
+                </a:solidFill>
+                <a:latin typeface="Montserrat"/>
+                <a:ea typeface="Montserrat"/>
+                <a:cs typeface="Montserrat"/>
+                <a:sym typeface="Montserrat"/>
+              </a:defRPr>
+            </a:lvl9pPr>
+          </a:lstStyle>
+          <a:p>
+            <a:pPr algn="r"/>
+            <a:r>
+              <a:rPr lang="en-US" dirty="0"/>
+              <a:t>Swagger</a:t>
+            </a:r>
+            <a:endParaRPr lang="ru-RU" dirty="0"/>
+          </a:p>
+        </p:txBody>
+      </p:sp>
+      <p:sp>
+        <p:nvSpPr>
+          <p:cNvPr id="1984" name="Google Shape;2099;p63">
+            <a:extLst>
+              <a:ext uri="{FF2B5EF4-FFF2-40B4-BE49-F238E27FC236}">
+                <a16:creationId xmlns:a16="http://schemas.microsoft.com/office/drawing/2014/main" id="{B12F3D69-4715-35AA-88C6-B35AAD805FC4}"/>
+              </a:ext>
+            </a:extLst>
+          </p:cNvPr>
+          <p:cNvSpPr txBox="1">
+            <a:spLocks/>
+          </p:cNvSpPr>
+          <p:nvPr/>
+        </p:nvSpPr>
+        <p:spPr>
+          <a:xfrm>
+            <a:off x="5017773" y="1966350"/>
+            <a:ext cx="2727600" cy="605400"/>
+          </a:xfrm>
+          <a:prstGeom prst="rect">
+            <a:avLst/>
+          </a:prstGeom>
+          <a:noFill/>
+          <a:ln>
+            <a:noFill/>
+          </a:ln>
+        </p:spPr>
+        <p:txBody>
+          <a:bodyPr spcFirstLastPara="1" wrap="square" lIns="91425" tIns="91425" rIns="91425" bIns="91425" anchor="t" anchorCtr="0">
+            <a:noAutofit/>
+          </a:bodyPr>
+          <a:lstStyle>
+            <a:defPPr marR="0" lvl="0" algn="l" rtl="0">
+              <a:lnSpc>
+                <a:spcPct val="100000"/>
+              </a:lnSpc>
+              <a:spcBef>
+                <a:spcPts val="0"/>
+              </a:spcBef>
+              <a:spcAft>
+                <a:spcPts val="0"/>
+              </a:spcAft>
+            </a:defPPr>
+            <a:lvl1pPr marL="457200" marR="0" lvl="0" indent="-342900" algn="ctr" rtl="0">
+              <a:lnSpc>
+                <a:spcPct val="100000"/>
+              </a:lnSpc>
+              <a:spcBef>
+                <a:spcPts val="0"/>
+              </a:spcBef>
+              <a:spcAft>
+                <a:spcPts val="0"/>
+              </a:spcAft>
+              <a:buClr>
+                <a:schemeClr val="lt1"/>
+              </a:buClr>
+              <a:buSzPts val="1400"/>
+              <a:buFont typeface="Montserrat"/>
+              <a:buNone/>
+              <a:defRPr sz="1400" b="0" i="0" u="none" strike="noStrike" cap="none">
+                <a:solidFill>
+                  <a:schemeClr val="lt1"/>
+                </a:solidFill>
+                <a:latin typeface="Montserrat"/>
+                <a:ea typeface="Montserrat"/>
+                <a:cs typeface="Montserrat"/>
+                <a:sym typeface="Montserrat"/>
+              </a:defRPr>
+            </a:lvl1pPr>
+            <a:lvl2pPr marL="914400" marR="0" lvl="1" indent="-317500" algn="ctr" rtl="0">
+              <a:lnSpc>
+                <a:spcPct val="100000"/>
+              </a:lnSpc>
+              <a:spcBef>
+                <a:spcPts val="0"/>
+              </a:spcBef>
+              <a:spcAft>
+                <a:spcPts val="0"/>
+              </a:spcAft>
+              <a:buClr>
+                <a:schemeClr val="lt1"/>
+              </a:buClr>
+              <a:buSzPts val="2100"/>
+              <a:buFont typeface="Montserrat"/>
+              <a:buNone/>
+              <a:defRPr sz="2100" b="0" i="0" u="none" strike="noStrike" cap="none">
+                <a:solidFill>
+                  <a:schemeClr val="lt1"/>
+                </a:solidFill>
+                <a:latin typeface="Montserrat"/>
+                <a:ea typeface="Montserrat"/>
+                <a:cs typeface="Montserrat"/>
+                <a:sym typeface="Montserrat"/>
+              </a:defRPr>
+            </a:lvl2pPr>
+            <a:lvl3pPr marL="1371600" marR="0" lvl="2" indent="-317500" algn="ctr" rtl="0">
+              <a:lnSpc>
+                <a:spcPct val="100000"/>
+              </a:lnSpc>
+              <a:spcBef>
+                <a:spcPts val="0"/>
+              </a:spcBef>
+              <a:spcAft>
+                <a:spcPts val="0"/>
+              </a:spcAft>
+              <a:buClr>
+                <a:schemeClr val="lt1"/>
+              </a:buClr>
+              <a:buSzPts val="2100"/>
+              <a:buFont typeface="Montserrat"/>
+              <a:buNone/>
+              <a:defRPr sz="2100" b="0" i="0" u="none" strike="noStrike" cap="none">
+                <a:solidFill>
+                  <a:schemeClr val="lt1"/>
+                </a:solidFill>
+                <a:latin typeface="Montserrat"/>
+                <a:ea typeface="Montserrat"/>
+                <a:cs typeface="Montserrat"/>
+                <a:sym typeface="Montserrat"/>
+              </a:defRPr>
+            </a:lvl3pPr>
+            <a:lvl4pPr marL="1828800" marR="0" lvl="3" indent="-317500" algn="ctr" rtl="0">
+              <a:lnSpc>
+                <a:spcPct val="100000"/>
+              </a:lnSpc>
+              <a:spcBef>
+                <a:spcPts val="0"/>
+              </a:spcBef>
+              <a:spcAft>
+                <a:spcPts val="0"/>
+              </a:spcAft>
+              <a:buClr>
+                <a:schemeClr val="lt1"/>
+              </a:buClr>
+              <a:buSzPts val="2100"/>
+              <a:buFont typeface="Montserrat"/>
+              <a:buNone/>
+              <a:defRPr sz="2100" b="0" i="0" u="none" strike="noStrike" cap="none">
+                <a:solidFill>
+                  <a:schemeClr val="lt1"/>
+                </a:solidFill>
+                <a:latin typeface="Montserrat"/>
+                <a:ea typeface="Montserrat"/>
+                <a:cs typeface="Montserrat"/>
+                <a:sym typeface="Montserrat"/>
+              </a:defRPr>
+            </a:lvl4pPr>
+            <a:lvl5pPr marL="2286000" marR="0" lvl="4" indent="-317500" algn="ctr" rtl="0">
+              <a:lnSpc>
+                <a:spcPct val="100000"/>
+              </a:lnSpc>
+              <a:spcBef>
+                <a:spcPts val="0"/>
+              </a:spcBef>
+              <a:spcAft>
+                <a:spcPts val="0"/>
+              </a:spcAft>
+              <a:buClr>
+                <a:schemeClr val="lt1"/>
+              </a:buClr>
+              <a:buSzPts val="2100"/>
+              <a:buFont typeface="Montserrat"/>
+              <a:buNone/>
+              <a:defRPr sz="2100" b="0" i="0" u="none" strike="noStrike" cap="none">
+                <a:solidFill>
+                  <a:schemeClr val="lt1"/>
+                </a:solidFill>
+                <a:latin typeface="Montserrat"/>
+                <a:ea typeface="Montserrat"/>
+                <a:cs typeface="Montserrat"/>
+                <a:sym typeface="Montserrat"/>
+              </a:defRPr>
+            </a:lvl5pPr>
+            <a:lvl6pPr marL="2743200" marR="0" lvl="5" indent="-317500" algn="ctr" rtl="0">
+              <a:lnSpc>
+                <a:spcPct val="100000"/>
+              </a:lnSpc>
+              <a:spcBef>
+                <a:spcPts val="0"/>
+              </a:spcBef>
+              <a:spcAft>
+                <a:spcPts val="0"/>
+              </a:spcAft>
+              <a:buClr>
+                <a:schemeClr val="lt1"/>
+              </a:buClr>
+              <a:buSzPts val="2100"/>
+              <a:buFont typeface="Montserrat"/>
+              <a:buNone/>
+              <a:defRPr sz="2100" b="0" i="0" u="none" strike="noStrike" cap="none">
+                <a:solidFill>
+                  <a:schemeClr val="lt1"/>
+                </a:solidFill>
+                <a:latin typeface="Montserrat"/>
+                <a:ea typeface="Montserrat"/>
+                <a:cs typeface="Montserrat"/>
+                <a:sym typeface="Montserrat"/>
+              </a:defRPr>
+            </a:lvl6pPr>
+            <a:lvl7pPr marL="3200400" marR="0" lvl="6" indent="-317500" algn="ctr" rtl="0">
+              <a:lnSpc>
+                <a:spcPct val="100000"/>
+              </a:lnSpc>
+              <a:spcBef>
+                <a:spcPts val="0"/>
+              </a:spcBef>
+              <a:spcAft>
+                <a:spcPts val="0"/>
+              </a:spcAft>
+              <a:buClr>
+                <a:schemeClr val="lt1"/>
+              </a:buClr>
+              <a:buSzPts val="2100"/>
+              <a:buFont typeface="Montserrat"/>
+              <a:buNone/>
+              <a:defRPr sz="2100" b="0" i="0" u="none" strike="noStrike" cap="none">
+                <a:solidFill>
+                  <a:schemeClr val="lt1"/>
+                </a:solidFill>
+                <a:latin typeface="Montserrat"/>
+                <a:ea typeface="Montserrat"/>
+                <a:cs typeface="Montserrat"/>
+                <a:sym typeface="Montserrat"/>
+              </a:defRPr>
+            </a:lvl7pPr>
+            <a:lvl8pPr marL="3657600" marR="0" lvl="7" indent="-317500" algn="ctr" rtl="0">
+              <a:lnSpc>
+                <a:spcPct val="100000"/>
+              </a:lnSpc>
+              <a:spcBef>
+                <a:spcPts val="0"/>
+              </a:spcBef>
+              <a:spcAft>
+                <a:spcPts val="0"/>
+              </a:spcAft>
+              <a:buClr>
+                <a:schemeClr val="lt1"/>
+              </a:buClr>
+              <a:buSzPts val="2100"/>
+              <a:buFont typeface="Montserrat"/>
+              <a:buNone/>
+              <a:defRPr sz="2100" b="0" i="0" u="none" strike="noStrike" cap="none">
+                <a:solidFill>
+                  <a:schemeClr val="lt1"/>
+                </a:solidFill>
+                <a:latin typeface="Montserrat"/>
+                <a:ea typeface="Montserrat"/>
+                <a:cs typeface="Montserrat"/>
+                <a:sym typeface="Montserrat"/>
+              </a:defRPr>
+            </a:lvl8pPr>
+            <a:lvl9pPr marL="4114800" marR="0" lvl="8" indent="-317500" algn="ctr" rtl="0">
+              <a:lnSpc>
+                <a:spcPct val="100000"/>
+              </a:lnSpc>
+              <a:spcBef>
+                <a:spcPts val="0"/>
+              </a:spcBef>
+              <a:spcAft>
+                <a:spcPts val="0"/>
+              </a:spcAft>
+              <a:buClr>
+                <a:schemeClr val="lt1"/>
+              </a:buClr>
+              <a:buSzPts val="2100"/>
+              <a:buFont typeface="Montserrat"/>
+              <a:buNone/>
+              <a:defRPr sz="2100" b="0" i="0" u="none" strike="noStrike" cap="none">
+                <a:solidFill>
+                  <a:schemeClr val="lt1"/>
+                </a:solidFill>
+                <a:latin typeface="Montserrat"/>
+                <a:ea typeface="Montserrat"/>
+                <a:cs typeface="Montserrat"/>
+                <a:sym typeface="Montserrat"/>
+              </a:defRPr>
+            </a:lvl9pPr>
+          </a:lstStyle>
+          <a:p>
+            <a:pPr marL="0" indent="0" algn="l"/>
+            <a:r>
+              <a:rPr lang="ru-RU" dirty="0"/>
+              <a:t>Документирование </a:t>
+            </a:r>
+            <a:r>
+              <a:rPr lang="en-US" dirty="0"/>
+              <a:t>API</a:t>
+            </a:r>
+          </a:p>
+        </p:txBody>
+      </p:sp>
+      <p:pic>
+        <p:nvPicPr>
+          <p:cNvPr id="3" name="Рисунок 2">
+            <a:extLst>
+              <a:ext uri="{FF2B5EF4-FFF2-40B4-BE49-F238E27FC236}">
+                <a16:creationId xmlns:a16="http://schemas.microsoft.com/office/drawing/2014/main" id="{B9E1851E-3E99-9F22-01E7-510074DA66C2}"/>
+              </a:ext>
+            </a:extLst>
+          </p:cNvPr>
+          <p:cNvPicPr>
+            <a:picLocks noChangeAspect="1"/>
+          </p:cNvPicPr>
+          <p:nvPr/>
+        </p:nvPicPr>
+        <p:blipFill>
+          <a:blip r:embed="rId3">
+            <a:extLst>
+              <a:ext uri="{96DAC541-7B7A-43D3-8B79-37D633B846F1}">
+                <asvg:svgBlip xmlns:asvg="http://schemas.microsoft.com/office/drawing/2016/SVG/main" r:embed="rId4"/>
+              </a:ext>
+            </a:extLst>
+          </a:blip>
+          <a:stretch>
+            <a:fillRect/>
+          </a:stretch>
+        </p:blipFill>
+        <p:spPr>
+          <a:xfrm>
+            <a:off x="5091418" y="2393356"/>
+            <a:ext cx="2237634" cy="2237634"/>
+          </a:xfrm>
+          <a:prstGeom prst="rect">
+            <a:avLst/>
+          </a:prstGeom>
+        </p:spPr>
+      </p:pic>
+      <p:pic>
+        <p:nvPicPr>
+          <p:cNvPr id="2" name="Рисунок 1">
+            <a:extLst>
+              <a:ext uri="{FF2B5EF4-FFF2-40B4-BE49-F238E27FC236}">
+                <a16:creationId xmlns:a16="http://schemas.microsoft.com/office/drawing/2014/main" id="{B85F368D-D45F-8F85-4B64-9980E51E913E}"/>
+              </a:ext>
+            </a:extLst>
+          </p:cNvPr>
+          <p:cNvPicPr>
+            <a:picLocks noChangeAspect="1"/>
+          </p:cNvPicPr>
+          <p:nvPr/>
+        </p:nvPicPr>
+        <p:blipFill>
+          <a:blip r:embed="rId5">
+            <a:extLst>
+              <a:ext uri="{96DAC541-7B7A-43D3-8B79-37D633B846F1}">
+                <asvg:svgBlip xmlns:asvg="http://schemas.microsoft.com/office/drawing/2016/SVG/main" r:embed="rId6"/>
+              </a:ext>
+            </a:extLst>
+          </a:blip>
+          <a:stretch>
+            <a:fillRect/>
+          </a:stretch>
+        </p:blipFill>
+        <p:spPr>
+          <a:xfrm>
+            <a:off x="4572000" y="483939"/>
+            <a:ext cx="460431" cy="460431"/>
+          </a:xfrm>
+          <a:prstGeom prst="rect">
+            <a:avLst/>
+          </a:prstGeom>
+        </p:spPr>
+      </p:pic>
+    </p:spTree>
   </p:cSld>
   <p:clrMapOvr>
     <a:masterClrMapping/>

--- a/Docs/Презентация системы кафе.pptx
+++ b/Docs/Презентация системы кафе.pptx
@@ -19364,7 +19364,7 @@
         </p:nvSpPr>
         <p:spPr>
           <a:xfrm>
-            <a:off x="4781742" y="1259209"/>
+            <a:off x="4768745" y="1264597"/>
             <a:ext cx="3944834" cy="2614305"/>
           </a:xfrm>
           <a:prstGeom prst="rect">
@@ -19424,40 +19424,6 @@
                 </a:solidFill>
                 <a:latin typeface="Montserrat" panose="00000500000000000000" pitchFamily="2" charset="-52"/>
               </a:rPr>
-              <a:t>WPF + Material Design</a:t>
-            </a:r>
-            <a:r>
-              <a:rPr lang="en-US" dirty="0">
-                <a:solidFill>
-                  <a:schemeClr val="bg1"/>
-                </a:solidFill>
-                <a:latin typeface="Montserrat" panose="00000500000000000000" pitchFamily="2" charset="-52"/>
-              </a:rPr>
-              <a:t> (</a:t>
-            </a:r>
-            <a:r>
-              <a:rPr lang="ru-RU" dirty="0">
-                <a:solidFill>
-                  <a:schemeClr val="bg1"/>
-                </a:solidFill>
-                <a:latin typeface="Montserrat" panose="00000500000000000000" pitchFamily="2" charset="-52"/>
-              </a:rPr>
-              <a:t>Интерфейс).</a:t>
-            </a:r>
-          </a:p>
-          <a:p>
-            <a:pPr>
-              <a:lnSpc>
-                <a:spcPct val="200000"/>
-              </a:lnSpc>
-            </a:pPr>
-            <a:r>
-              <a:rPr lang="en-US" b="1" dirty="0">
-                <a:solidFill>
-                  <a:schemeClr val="bg1"/>
-                </a:solidFill>
-                <a:latin typeface="Montserrat" panose="00000500000000000000" pitchFamily="2" charset="-52"/>
-              </a:rPr>
               <a:t>ASP.NET Core</a:t>
             </a:r>
             <a:r>
@@ -19510,7 +19476,50 @@
                 </a:solidFill>
                 <a:latin typeface="Montserrat" panose="00000500000000000000" pitchFamily="2" charset="-52"/>
               </a:rPr>
-              <a:t>База данных).</a:t>
+              <a:t>База данных). </a:t>
+            </a:r>
+          </a:p>
+          <a:p>
+            <a:pPr>
+              <a:lnSpc>
+                <a:spcPct val="200000"/>
+              </a:lnSpc>
+            </a:pPr>
+            <a:r>
+              <a:rPr lang="en-US" b="1" dirty="0">
+                <a:solidFill>
+                  <a:schemeClr val="bg1"/>
+                </a:solidFill>
+                <a:latin typeface="Montserrat" panose="00000500000000000000" pitchFamily="2" charset="-52"/>
+              </a:rPr>
+              <a:t>WPF</a:t>
+            </a:r>
+            <a:r>
+              <a:rPr lang="ru-RU" b="1" dirty="0">
+                <a:solidFill>
+                  <a:schemeClr val="bg1"/>
+                </a:solidFill>
+                <a:latin typeface="Montserrat" panose="00000500000000000000" pitchFamily="2" charset="-52"/>
+              </a:rPr>
+              <a:t> </a:t>
+            </a:r>
+            <a:r>
+              <a:rPr lang="en-US" dirty="0">
+                <a:solidFill>
+                  <a:schemeClr val="bg1"/>
+                </a:solidFill>
+                <a:latin typeface="Montserrat" panose="00000500000000000000" pitchFamily="2" charset="-52"/>
+              </a:rPr>
+              <a:t>(</a:t>
+            </a:r>
+            <a:r>
+              <a:rPr lang="ru-RU" dirty="0">
+                <a:solidFill>
+                  <a:schemeClr val="bg1"/>
+                </a:solidFill>
+                <a:latin typeface="Montserrat" panose="00000500000000000000" pitchFamily="2" charset="-52"/>
+              </a:rPr>
+              <a:t>Клиентское приложение).</a:t>
             </a:r>
           </a:p>
           <a:p>

--- a/Docs/Презентация системы кафе.pptx
+++ b/Docs/Презентация системы кафе.pptx
@@ -5,7 +5,7 @@
     <p:sldMasterId id="2147483683" r:id="rId1"/>
   </p:sldMasterIdLst>
   <p:notesMasterIdLst>
-    <p:notesMasterId r:id="rId13"/>
+    <p:notesMasterId r:id="rId15"/>
   </p:notesMasterIdLst>
   <p:sldIdLst>
     <p:sldId id="256" r:id="rId2"/>
@@ -16,25 +16,30 @@
     <p:sldId id="263" r:id="rId7"/>
     <p:sldId id="264" r:id="rId8"/>
     <p:sldId id="305" r:id="rId9"/>
-    <p:sldId id="276" r:id="rId10"/>
-    <p:sldId id="281" r:id="rId11"/>
-    <p:sldId id="288" r:id="rId12"/>
+    <p:sldId id="307" r:id="rId10"/>
+    <p:sldId id="276" r:id="rId11"/>
+    <p:sldId id="281" r:id="rId12"/>
+    <p:sldId id="288" r:id="rId13"/>
+    <p:sldId id="308" r:id="rId14"/>
   </p:sldIdLst>
   <p:sldSz cx="9144000" cy="5143500" type="screen16x9"/>
   <p:notesSz cx="6858000" cy="9144000"/>
   <p:embeddedFontLst>
     <p:embeddedFont>
       <p:font typeface="Montserrat" panose="00000500000000000000" pitchFamily="2" charset="-52"/>
-      <p:regular r:id="rId14"/>
-      <p:bold r:id="rId15"/>
+      <p:regular r:id="rId16"/>
+      <p:bold r:id="rId17"/>
+      <p:italic r:id="rId18"/>
+      <p:boldItalic r:id="rId19"/>
     </p:embeddedFont>
     <p:embeddedFont>
       <p:font typeface="Montserrat ExtraBold" panose="00000900000000000000" pitchFamily="2" charset="-52"/>
-      <p:bold r:id="rId16"/>
+      <p:bold r:id="rId20"/>
     </p:embeddedFont>
     <p:embeddedFont>
       <p:font typeface="Montserrat ExtraLight" panose="00000300000000000000" pitchFamily="2" charset="-52"/>
-      <p:regular r:id="rId17"/>
+      <p:regular r:id="rId21"/>
+      <p:italic r:id="rId22"/>
     </p:embeddedFont>
   </p:embeddedFontLst>
   <p:defaultTextStyle>
@@ -13952,8 +13957,8 @@
         </p:nvSpPr>
         <p:spPr>
           <a:xfrm>
-            <a:off x="2941650" y="2624375"/>
-            <a:ext cx="3260700" cy="464700"/>
+            <a:off x="2721197" y="2638526"/>
+            <a:ext cx="3701605" cy="464700"/>
           </a:xfrm>
           <a:prstGeom prst="rect">
             <a:avLst/>
@@ -13975,7 +13980,7 @@
             <a:pPr lvl="0"/>
             <a:r>
               <a:rPr lang="ru-RU" sz="2400" dirty="0"/>
-              <a:t>Курсовой проект</a:t>
+              <a:t>Дипломный проект</a:t>
             </a:r>
             <a:endParaRPr sz="2200" b="0" dirty="0">
               <a:latin typeface="Montserrat ExtraLight"/>
@@ -13989,13 +13994,15 @@
       <p:cxnSp>
         <p:nvCxnSpPr>
           <p:cNvPr id="165" name="Google Shape;165;p38"/>
-          <p:cNvCxnSpPr/>
+          <p:cNvCxnSpPr>
+            <a:cxnSpLocks/>
+          </p:cNvCxnSpPr>
           <p:nvPr/>
         </p:nvCxnSpPr>
         <p:spPr>
           <a:xfrm>
-            <a:off x="3190500" y="2565172"/>
-            <a:ext cx="2763000" cy="0"/>
+            <a:off x="2408427" y="2571750"/>
+            <a:ext cx="4058025" cy="0"/>
           </a:xfrm>
           <a:prstGeom prst="straightConnector1">
             <a:avLst/>
@@ -14035,8 +14042,8 @@
         </p:nvSpPr>
         <p:spPr>
           <a:xfrm>
-            <a:off x="5211246" y="4135582"/>
-            <a:ext cx="3863482" cy="883630"/>
+            <a:off x="5280518" y="3860061"/>
+            <a:ext cx="3863482" cy="1159151"/>
           </a:xfrm>
           <a:prstGeom prst="rect">
             <a:avLst/>
@@ -14300,7 +14307,7 @@
           <a:p>
             <a:pPr algn="r"/>
             <a:r>
-              <a:rPr lang="ru-RU">
+              <a:rPr lang="ru-RU" dirty="0">
                 <a:solidFill>
                   <a:schemeClr val="bg1"/>
                 </a:solidFill>
@@ -14308,69 +14315,677 @@
               <a:t>Выполнил</a:t>
             </a:r>
             <a:r>
-              <a:rPr lang="en-US">
+              <a:rPr lang="en-US" dirty="0">
                 <a:solidFill>
                   <a:schemeClr val="bg1"/>
                 </a:solidFill>
               </a:rPr>
               <a:t>: </a:t>
-            </a:r>
-            <a:r>
-              <a:rPr lang="ru-RU">
-                <a:solidFill>
-                  <a:schemeClr val="bg1"/>
-                </a:solidFill>
-              </a:rPr>
-              <a:t>студент группы ПР-41  Шмелев Максим</a:t>
-            </a:r>
-          </a:p>
-          <a:p>
-            <a:pPr algn="r"/>
-            <a:r>
-              <a:rPr lang="ru-RU">
-                <a:solidFill>
-                  <a:schemeClr val="bg1"/>
-                </a:solidFill>
-              </a:rPr>
-              <a:t>Руководитель</a:t>
-            </a:r>
-            <a:r>
-              <a:rPr lang="en-US">
-                <a:solidFill>
-                  <a:schemeClr val="bg1"/>
-                </a:solidFill>
-              </a:rPr>
-              <a:t>: </a:t>
-            </a:r>
-            <a:r>
-              <a:rPr lang="ru-RU">
-                <a:solidFill>
-                  <a:schemeClr val="bg1"/>
-                </a:solidFill>
-              </a:rPr>
-              <a:t>Гариев Д</a:t>
-            </a:r>
-            <a:r>
-              <a:rPr lang="en-US">
-                <a:solidFill>
-                  <a:schemeClr val="bg1"/>
-                </a:solidFill>
-              </a:rPr>
-              <a:t>.</a:t>
-            </a:r>
-            <a:r>
-              <a:rPr lang="ru-RU">
-                <a:solidFill>
-                  <a:schemeClr val="bg1"/>
-                </a:solidFill>
-              </a:rPr>
-              <a:t>О</a:t>
             </a:r>
             <a:endParaRPr lang="ru-RU" dirty="0">
               <a:solidFill>
                 <a:schemeClr val="bg1"/>
               </a:solidFill>
             </a:endParaRPr>
+          </a:p>
+          <a:p>
+            <a:pPr algn="r"/>
+            <a:r>
+              <a:rPr lang="ru-RU" dirty="0">
+                <a:solidFill>
+                  <a:schemeClr val="bg1"/>
+                </a:solidFill>
+              </a:rPr>
+              <a:t>Студент гр. ПР-41</a:t>
+            </a:r>
+          </a:p>
+          <a:p>
+            <a:pPr algn="r"/>
+            <a:r>
+              <a:rPr lang="ru-RU" dirty="0"/>
+              <a:t> М.К. Шмелев</a:t>
+            </a:r>
+            <a:endParaRPr lang="ru-RU" dirty="0">
+              <a:solidFill>
+                <a:schemeClr val="bg1"/>
+              </a:solidFill>
+            </a:endParaRPr>
+          </a:p>
+          <a:p>
+            <a:pPr algn="r"/>
+            <a:r>
+              <a:rPr lang="ru-RU" dirty="0">
+                <a:solidFill>
+                  <a:schemeClr val="bg1"/>
+                </a:solidFill>
+              </a:rPr>
+              <a:t>Руководитель</a:t>
+            </a:r>
+            <a:r>
+              <a:rPr lang="en-US" dirty="0">
+                <a:solidFill>
+                  <a:schemeClr val="bg1"/>
+                </a:solidFill>
+              </a:rPr>
+              <a:t>:</a:t>
+            </a:r>
+            <a:endParaRPr lang="ru-RU" dirty="0">
+              <a:solidFill>
+                <a:schemeClr val="bg1"/>
+              </a:solidFill>
+            </a:endParaRPr>
+          </a:p>
+          <a:p>
+            <a:pPr algn="r"/>
+            <a:r>
+              <a:rPr lang="ru-RU" dirty="0"/>
+              <a:t> С.И. Овчинникова</a:t>
+            </a:r>
+            <a:endParaRPr lang="ru-RU" dirty="0">
+              <a:solidFill>
+                <a:schemeClr val="bg1"/>
+              </a:solidFill>
+            </a:endParaRPr>
+          </a:p>
+        </p:txBody>
+      </p:sp>
+      <p:sp>
+        <p:nvSpPr>
+          <p:cNvPr id="3" name="Заголовок 1">
+            <a:extLst>
+              <a:ext uri="{FF2B5EF4-FFF2-40B4-BE49-F238E27FC236}">
+                <a16:creationId xmlns:a16="http://schemas.microsoft.com/office/drawing/2014/main" id="{AE4E1103-5B71-913C-9F14-8178964CA2B5}"/>
+              </a:ext>
+            </a:extLst>
+          </p:cNvPr>
+          <p:cNvSpPr txBox="1">
+            <a:spLocks/>
+          </p:cNvSpPr>
+          <p:nvPr/>
+        </p:nvSpPr>
+        <p:spPr>
+          <a:xfrm>
+            <a:off x="190774" y="71593"/>
+            <a:ext cx="8762452" cy="656432"/>
+          </a:xfrm>
+          <a:prstGeom prst="rect">
+            <a:avLst/>
+          </a:prstGeom>
+          <a:noFill/>
+          <a:ln>
+            <a:noFill/>
+          </a:ln>
+        </p:spPr>
+        <p:txBody>
+          <a:bodyPr spcFirstLastPara="1" wrap="square" lIns="91425" tIns="91425" rIns="91425" bIns="91425" anchor="b" anchorCtr="0">
+            <a:normAutofit lnSpcReduction="10000"/>
+          </a:bodyPr>
+          <a:lstStyle>
+            <a:defPPr marR="0" lvl="0" algn="l" rtl="0">
+              <a:lnSpc>
+                <a:spcPct val="100000"/>
+              </a:lnSpc>
+              <a:spcBef>
+                <a:spcPts val="0"/>
+              </a:spcBef>
+              <a:spcAft>
+                <a:spcPts val="0"/>
+              </a:spcAft>
+            </a:defPPr>
+            <a:lvl1pPr marR="0" lvl="0" algn="ctr" rtl="0" eaLnBrk="1" hangingPunct="1">
+              <a:lnSpc>
+                <a:spcPct val="100000"/>
+              </a:lnSpc>
+              <a:spcBef>
+                <a:spcPts val="0"/>
+              </a:spcBef>
+              <a:spcAft>
+                <a:spcPts val="0"/>
+              </a:spcAft>
+              <a:buClr>
+                <a:schemeClr val="lt1"/>
+              </a:buClr>
+              <a:buSzPts val="3600"/>
+              <a:buFont typeface="Montserrat ExtraBold"/>
+              <a:buNone/>
+              <a:defRPr sz="3600" b="1" i="0" u="none" strike="noStrike" cap="none">
+                <a:solidFill>
+                  <a:schemeClr val="lt1"/>
+                </a:solidFill>
+                <a:latin typeface="Montserrat ExtraBold"/>
+                <a:ea typeface="Montserrat ExtraBold"/>
+                <a:cs typeface="Montserrat ExtraBold"/>
+                <a:sym typeface="Montserrat ExtraBold"/>
+              </a:defRPr>
+            </a:lvl1pPr>
+            <a:lvl2pPr marR="0" lvl="1" algn="ctr" rtl="0" eaLnBrk="1" hangingPunct="1">
+              <a:lnSpc>
+                <a:spcPct val="100000"/>
+              </a:lnSpc>
+              <a:spcBef>
+                <a:spcPts val="0"/>
+              </a:spcBef>
+              <a:spcAft>
+                <a:spcPts val="0"/>
+              </a:spcAft>
+              <a:buClr>
+                <a:schemeClr val="lt1"/>
+              </a:buClr>
+              <a:buSzPts val="3600"/>
+              <a:buFont typeface="Montserrat"/>
+              <a:buNone/>
+              <a:defRPr sz="3600" b="1" i="0" u="none" strike="noStrike" cap="none">
+                <a:solidFill>
+                  <a:schemeClr val="lt1"/>
+                </a:solidFill>
+                <a:latin typeface="Montserrat"/>
+                <a:ea typeface="Montserrat"/>
+                <a:cs typeface="Montserrat"/>
+                <a:sym typeface="Montserrat"/>
+              </a:defRPr>
+            </a:lvl2pPr>
+            <a:lvl3pPr marR="0" lvl="2" algn="ctr" rtl="0" eaLnBrk="1" hangingPunct="1">
+              <a:lnSpc>
+                <a:spcPct val="100000"/>
+              </a:lnSpc>
+              <a:spcBef>
+                <a:spcPts val="0"/>
+              </a:spcBef>
+              <a:spcAft>
+                <a:spcPts val="0"/>
+              </a:spcAft>
+              <a:buClr>
+                <a:schemeClr val="lt1"/>
+              </a:buClr>
+              <a:buSzPts val="3600"/>
+              <a:buFont typeface="Montserrat"/>
+              <a:buNone/>
+              <a:defRPr sz="3600" b="1" i="0" u="none" strike="noStrike" cap="none">
+                <a:solidFill>
+                  <a:schemeClr val="lt1"/>
+                </a:solidFill>
+                <a:latin typeface="Montserrat"/>
+                <a:ea typeface="Montserrat"/>
+                <a:cs typeface="Montserrat"/>
+                <a:sym typeface="Montserrat"/>
+              </a:defRPr>
+            </a:lvl3pPr>
+            <a:lvl4pPr marR="0" lvl="3" algn="ctr" rtl="0" eaLnBrk="1" hangingPunct="1">
+              <a:lnSpc>
+                <a:spcPct val="100000"/>
+              </a:lnSpc>
+              <a:spcBef>
+                <a:spcPts val="0"/>
+              </a:spcBef>
+              <a:spcAft>
+                <a:spcPts val="0"/>
+              </a:spcAft>
+              <a:buClr>
+                <a:schemeClr val="lt1"/>
+              </a:buClr>
+              <a:buSzPts val="3600"/>
+              <a:buFont typeface="Montserrat"/>
+              <a:buNone/>
+              <a:defRPr sz="3600" b="1" i="0" u="none" strike="noStrike" cap="none">
+                <a:solidFill>
+                  <a:schemeClr val="lt1"/>
+                </a:solidFill>
+                <a:latin typeface="Montserrat"/>
+                <a:ea typeface="Montserrat"/>
+                <a:cs typeface="Montserrat"/>
+                <a:sym typeface="Montserrat"/>
+              </a:defRPr>
+            </a:lvl4pPr>
+            <a:lvl5pPr marR="0" lvl="4" algn="ctr" rtl="0" eaLnBrk="1" hangingPunct="1">
+              <a:lnSpc>
+                <a:spcPct val="100000"/>
+              </a:lnSpc>
+              <a:spcBef>
+                <a:spcPts val="0"/>
+              </a:spcBef>
+              <a:spcAft>
+                <a:spcPts val="0"/>
+              </a:spcAft>
+              <a:buClr>
+                <a:schemeClr val="lt1"/>
+              </a:buClr>
+              <a:buSzPts val="3600"/>
+              <a:buFont typeface="Montserrat"/>
+              <a:buNone/>
+              <a:defRPr sz="3600" b="1" i="0" u="none" strike="noStrike" cap="none">
+                <a:solidFill>
+                  <a:schemeClr val="lt1"/>
+                </a:solidFill>
+                <a:latin typeface="Montserrat"/>
+                <a:ea typeface="Montserrat"/>
+                <a:cs typeface="Montserrat"/>
+                <a:sym typeface="Montserrat"/>
+              </a:defRPr>
+            </a:lvl5pPr>
+            <a:lvl6pPr marR="0" lvl="5" algn="ctr" rtl="0" eaLnBrk="1" hangingPunct="1">
+              <a:lnSpc>
+                <a:spcPct val="100000"/>
+              </a:lnSpc>
+              <a:spcBef>
+                <a:spcPts val="0"/>
+              </a:spcBef>
+              <a:spcAft>
+                <a:spcPts val="0"/>
+              </a:spcAft>
+              <a:buClr>
+                <a:schemeClr val="lt1"/>
+              </a:buClr>
+              <a:buSzPts val="3600"/>
+              <a:buFont typeface="Montserrat"/>
+              <a:buNone/>
+              <a:defRPr sz="3600" b="1" i="0" u="none" strike="noStrike" cap="none">
+                <a:solidFill>
+                  <a:schemeClr val="lt1"/>
+                </a:solidFill>
+                <a:latin typeface="Montserrat"/>
+                <a:ea typeface="Montserrat"/>
+                <a:cs typeface="Montserrat"/>
+                <a:sym typeface="Montserrat"/>
+              </a:defRPr>
+            </a:lvl6pPr>
+            <a:lvl7pPr marR="0" lvl="6" algn="ctr" rtl="0" eaLnBrk="1" hangingPunct="1">
+              <a:lnSpc>
+                <a:spcPct val="100000"/>
+              </a:lnSpc>
+              <a:spcBef>
+                <a:spcPts val="0"/>
+              </a:spcBef>
+              <a:spcAft>
+                <a:spcPts val="0"/>
+              </a:spcAft>
+              <a:buClr>
+                <a:schemeClr val="lt1"/>
+              </a:buClr>
+              <a:buSzPts val="3600"/>
+              <a:buFont typeface="Montserrat"/>
+              <a:buNone/>
+              <a:defRPr sz="3600" b="1" i="0" u="none" strike="noStrike" cap="none">
+                <a:solidFill>
+                  <a:schemeClr val="lt1"/>
+                </a:solidFill>
+                <a:latin typeface="Montserrat"/>
+                <a:ea typeface="Montserrat"/>
+                <a:cs typeface="Montserrat"/>
+                <a:sym typeface="Montserrat"/>
+              </a:defRPr>
+            </a:lvl7pPr>
+            <a:lvl8pPr marR="0" lvl="7" algn="ctr" rtl="0" eaLnBrk="1" hangingPunct="1">
+              <a:lnSpc>
+                <a:spcPct val="100000"/>
+              </a:lnSpc>
+              <a:spcBef>
+                <a:spcPts val="0"/>
+              </a:spcBef>
+              <a:spcAft>
+                <a:spcPts val="0"/>
+              </a:spcAft>
+              <a:buClr>
+                <a:schemeClr val="lt1"/>
+              </a:buClr>
+              <a:buSzPts val="3600"/>
+              <a:buFont typeface="Montserrat"/>
+              <a:buNone/>
+              <a:defRPr sz="3600" b="1" i="0" u="none" strike="noStrike" cap="none">
+                <a:solidFill>
+                  <a:schemeClr val="lt1"/>
+                </a:solidFill>
+                <a:latin typeface="Montserrat"/>
+                <a:ea typeface="Montserrat"/>
+                <a:cs typeface="Montserrat"/>
+                <a:sym typeface="Montserrat"/>
+              </a:defRPr>
+            </a:lvl8pPr>
+            <a:lvl9pPr marR="0" lvl="8" algn="ctr" rtl="0" eaLnBrk="1" hangingPunct="1">
+              <a:lnSpc>
+                <a:spcPct val="100000"/>
+              </a:lnSpc>
+              <a:spcBef>
+                <a:spcPts val="0"/>
+              </a:spcBef>
+              <a:spcAft>
+                <a:spcPts val="0"/>
+              </a:spcAft>
+              <a:buClr>
+                <a:schemeClr val="lt1"/>
+              </a:buClr>
+              <a:buSzPts val="3600"/>
+              <a:buFont typeface="Montserrat"/>
+              <a:buNone/>
+              <a:defRPr sz="3600" b="1" i="0" u="none" strike="noStrike" cap="none">
+                <a:solidFill>
+                  <a:schemeClr val="lt1"/>
+                </a:solidFill>
+                <a:latin typeface="Montserrat"/>
+                <a:ea typeface="Montserrat"/>
+                <a:cs typeface="Montserrat"/>
+                <a:sym typeface="Montserrat"/>
+              </a:defRPr>
+            </a:lvl9pPr>
+          </a:lstStyle>
+          <a:p>
+            <a:r>
+              <a:rPr lang="ru-RU" sz="1600" dirty="0"/>
+              <a:t>МИНИСТЕРСТВО ОБРАЗОВАНИЯ СВЕРДЛОВСКОЙ ОБЛАСТИ </a:t>
+            </a:r>
+            <a:br>
+              <a:rPr lang="ru-RU" sz="1600" dirty="0"/>
+            </a:br>
+            <a:r>
+              <a:rPr lang="ru-RU" sz="1600" dirty="0"/>
+              <a:t>ГАПОУ СО </a:t>
+            </a:r>
+            <a:r>
+              <a:rPr lang="en-US" sz="1600" dirty="0"/>
+              <a:t>«</a:t>
+            </a:r>
+            <a:r>
+              <a:rPr lang="ru-RU" sz="1600" dirty="0"/>
+              <a:t>Екатеринбургский колледж транспортного строительства</a:t>
+            </a:r>
+            <a:r>
+              <a:rPr lang="en-US" sz="1600" dirty="0"/>
+              <a:t>»</a:t>
+            </a:r>
+            <a:endParaRPr lang="ru-RU" sz="1600" dirty="0"/>
+          </a:p>
+        </p:txBody>
+      </p:sp>
+      <p:sp>
+        <p:nvSpPr>
+          <p:cNvPr id="4" name="Объект 2">
+            <a:extLst>
+              <a:ext uri="{FF2B5EF4-FFF2-40B4-BE49-F238E27FC236}">
+                <a16:creationId xmlns:a16="http://schemas.microsoft.com/office/drawing/2014/main" id="{1974C2EA-F10C-5EF3-3597-E97D25978E76}"/>
+              </a:ext>
+            </a:extLst>
+          </p:cNvPr>
+          <p:cNvSpPr txBox="1">
+            <a:spLocks/>
+          </p:cNvSpPr>
+          <p:nvPr/>
+        </p:nvSpPr>
+        <p:spPr>
+          <a:xfrm>
+            <a:off x="136067" y="608918"/>
+            <a:ext cx="8762452" cy="656432"/>
+          </a:xfrm>
+          <a:prstGeom prst="rect">
+            <a:avLst/>
+          </a:prstGeom>
+          <a:noFill/>
+          <a:ln>
+            <a:noFill/>
+          </a:ln>
+        </p:spPr>
+        <p:txBody>
+          <a:bodyPr spcFirstLastPara="1" wrap="square" lIns="91425" tIns="91425" rIns="91425" bIns="91425" anchor="t" anchorCtr="0">
+            <a:normAutofit/>
+          </a:bodyPr>
+          <a:lstStyle>
+            <a:defPPr marR="0" lvl="0" algn="l" rtl="0">
+              <a:lnSpc>
+                <a:spcPct val="100000"/>
+              </a:lnSpc>
+              <a:spcBef>
+                <a:spcPts val="0"/>
+              </a:spcBef>
+              <a:spcAft>
+                <a:spcPts val="0"/>
+              </a:spcAft>
+            </a:defPPr>
+            <a:lvl1pPr marL="457200" marR="0" lvl="0" indent="-342900" algn="ctr" rtl="0" eaLnBrk="1" hangingPunct="1">
+              <a:lnSpc>
+                <a:spcPct val="100000"/>
+              </a:lnSpc>
+              <a:spcBef>
+                <a:spcPts val="0"/>
+              </a:spcBef>
+              <a:spcAft>
+                <a:spcPts val="0"/>
+              </a:spcAft>
+              <a:buClr>
+                <a:schemeClr val="accent1"/>
+              </a:buClr>
+              <a:buSzPts val="1400"/>
+              <a:buFont typeface="Montserrat"/>
+              <a:buNone/>
+              <a:defRPr sz="1400" b="0" i="0" u="none" strike="noStrike" cap="none">
+                <a:solidFill>
+                  <a:schemeClr val="accent1"/>
+                </a:solidFill>
+                <a:latin typeface="Montserrat"/>
+                <a:ea typeface="Montserrat"/>
+                <a:cs typeface="Montserrat"/>
+                <a:sym typeface="Montserrat"/>
+              </a:defRPr>
+            </a:lvl1pPr>
+            <a:lvl2pPr marL="914400" marR="0" lvl="1" indent="-317500" algn="ctr" rtl="0" eaLnBrk="1" hangingPunct="1">
+              <a:lnSpc>
+                <a:spcPct val="100000"/>
+              </a:lnSpc>
+              <a:spcBef>
+                <a:spcPts val="0"/>
+              </a:spcBef>
+              <a:spcAft>
+                <a:spcPts val="0"/>
+              </a:spcAft>
+              <a:buClr>
+                <a:schemeClr val="lt1"/>
+              </a:buClr>
+              <a:buSzPts val="1800"/>
+              <a:buFont typeface="Montserrat"/>
+              <a:buNone/>
+              <a:defRPr sz="1800" b="0" i="0" u="none" strike="noStrike" cap="none">
+                <a:solidFill>
+                  <a:schemeClr val="lt1"/>
+                </a:solidFill>
+                <a:latin typeface="Montserrat"/>
+                <a:ea typeface="Montserrat"/>
+                <a:cs typeface="Montserrat"/>
+                <a:sym typeface="Montserrat"/>
+              </a:defRPr>
+            </a:lvl2pPr>
+            <a:lvl3pPr marL="1371600" marR="0" lvl="2" indent="-317500" algn="ctr" rtl="0" eaLnBrk="1" hangingPunct="1">
+              <a:lnSpc>
+                <a:spcPct val="100000"/>
+              </a:lnSpc>
+              <a:spcBef>
+                <a:spcPts val="0"/>
+              </a:spcBef>
+              <a:spcAft>
+                <a:spcPts val="0"/>
+              </a:spcAft>
+              <a:buClr>
+                <a:schemeClr val="lt1"/>
+              </a:buClr>
+              <a:buSzPts val="1800"/>
+              <a:buFont typeface="Montserrat"/>
+              <a:buNone/>
+              <a:defRPr sz="1800" b="0" i="0" u="none" strike="noStrike" cap="none">
+                <a:solidFill>
+                  <a:schemeClr val="lt1"/>
+                </a:solidFill>
+                <a:latin typeface="Montserrat"/>
+                <a:ea typeface="Montserrat"/>
+                <a:cs typeface="Montserrat"/>
+                <a:sym typeface="Montserrat"/>
+              </a:defRPr>
+            </a:lvl3pPr>
+            <a:lvl4pPr marL="1828800" marR="0" lvl="3" indent="-317500" algn="ctr" rtl="0" eaLnBrk="1" hangingPunct="1">
+              <a:lnSpc>
+                <a:spcPct val="100000"/>
+              </a:lnSpc>
+              <a:spcBef>
+                <a:spcPts val="0"/>
+              </a:spcBef>
+              <a:spcAft>
+                <a:spcPts val="0"/>
+              </a:spcAft>
+              <a:buClr>
+                <a:schemeClr val="lt1"/>
+              </a:buClr>
+              <a:buSzPts val="1800"/>
+              <a:buFont typeface="Montserrat"/>
+              <a:buNone/>
+              <a:defRPr sz="1800" b="0" i="0" u="none" strike="noStrike" cap="none">
+                <a:solidFill>
+                  <a:schemeClr val="lt1"/>
+                </a:solidFill>
+                <a:latin typeface="Montserrat"/>
+                <a:ea typeface="Montserrat"/>
+                <a:cs typeface="Montserrat"/>
+                <a:sym typeface="Montserrat"/>
+              </a:defRPr>
+            </a:lvl4pPr>
+            <a:lvl5pPr marL="2286000" marR="0" lvl="4" indent="-317500" algn="ctr" rtl="0" eaLnBrk="1" hangingPunct="1">
+              <a:lnSpc>
+                <a:spcPct val="100000"/>
+              </a:lnSpc>
+              <a:spcBef>
+                <a:spcPts val="0"/>
+              </a:spcBef>
+              <a:spcAft>
+                <a:spcPts val="0"/>
+              </a:spcAft>
+              <a:buClr>
+                <a:schemeClr val="lt1"/>
+              </a:buClr>
+              <a:buSzPts val="1800"/>
+              <a:buFont typeface="Montserrat"/>
+              <a:buNone/>
+              <a:defRPr sz="1800" b="0" i="0" u="none" strike="noStrike" cap="none">
+                <a:solidFill>
+                  <a:schemeClr val="lt1"/>
+                </a:solidFill>
+                <a:latin typeface="Montserrat"/>
+                <a:ea typeface="Montserrat"/>
+                <a:cs typeface="Montserrat"/>
+                <a:sym typeface="Montserrat"/>
+              </a:defRPr>
+            </a:lvl5pPr>
+            <a:lvl6pPr marL="2743200" marR="0" lvl="5" indent="-317500" algn="ctr" rtl="0" eaLnBrk="1" hangingPunct="1">
+              <a:lnSpc>
+                <a:spcPct val="100000"/>
+              </a:lnSpc>
+              <a:spcBef>
+                <a:spcPts val="0"/>
+              </a:spcBef>
+              <a:spcAft>
+                <a:spcPts val="0"/>
+              </a:spcAft>
+              <a:buClr>
+                <a:schemeClr val="lt1"/>
+              </a:buClr>
+              <a:buSzPts val="1800"/>
+              <a:buFont typeface="Montserrat"/>
+              <a:buNone/>
+              <a:defRPr sz="1800" b="0" i="0" u="none" strike="noStrike" cap="none">
+                <a:solidFill>
+                  <a:schemeClr val="lt1"/>
+                </a:solidFill>
+                <a:latin typeface="Montserrat"/>
+                <a:ea typeface="Montserrat"/>
+                <a:cs typeface="Montserrat"/>
+                <a:sym typeface="Montserrat"/>
+              </a:defRPr>
+            </a:lvl6pPr>
+            <a:lvl7pPr marL="3200400" marR="0" lvl="6" indent="-317500" algn="ctr" rtl="0" eaLnBrk="1" hangingPunct="1">
+              <a:lnSpc>
+                <a:spcPct val="100000"/>
+              </a:lnSpc>
+              <a:spcBef>
+                <a:spcPts val="0"/>
+              </a:spcBef>
+              <a:spcAft>
+                <a:spcPts val="0"/>
+              </a:spcAft>
+              <a:buClr>
+                <a:schemeClr val="lt1"/>
+              </a:buClr>
+              <a:buSzPts val="1800"/>
+              <a:buFont typeface="Montserrat"/>
+              <a:buNone/>
+              <a:defRPr sz="1800" b="0" i="0" u="none" strike="noStrike" cap="none">
+                <a:solidFill>
+                  <a:schemeClr val="lt1"/>
+                </a:solidFill>
+                <a:latin typeface="Montserrat"/>
+                <a:ea typeface="Montserrat"/>
+                <a:cs typeface="Montserrat"/>
+                <a:sym typeface="Montserrat"/>
+              </a:defRPr>
+            </a:lvl7pPr>
+            <a:lvl8pPr marL="3657600" marR="0" lvl="7" indent="-317500" algn="ctr" rtl="0" eaLnBrk="1" hangingPunct="1">
+              <a:lnSpc>
+                <a:spcPct val="100000"/>
+              </a:lnSpc>
+              <a:spcBef>
+                <a:spcPts val="0"/>
+              </a:spcBef>
+              <a:spcAft>
+                <a:spcPts val="0"/>
+              </a:spcAft>
+              <a:buClr>
+                <a:schemeClr val="lt1"/>
+              </a:buClr>
+              <a:buSzPts val="1800"/>
+              <a:buFont typeface="Montserrat"/>
+              <a:buNone/>
+              <a:defRPr sz="1800" b="0" i="0" u="none" strike="noStrike" cap="none">
+                <a:solidFill>
+                  <a:schemeClr val="lt1"/>
+                </a:solidFill>
+                <a:latin typeface="Montserrat"/>
+                <a:ea typeface="Montserrat"/>
+                <a:cs typeface="Montserrat"/>
+                <a:sym typeface="Montserrat"/>
+              </a:defRPr>
+            </a:lvl8pPr>
+            <a:lvl9pPr marL="4114800" marR="0" lvl="8" indent="-317500" algn="ctr" rtl="0" eaLnBrk="1" hangingPunct="1">
+              <a:lnSpc>
+                <a:spcPct val="100000"/>
+              </a:lnSpc>
+              <a:spcBef>
+                <a:spcPts val="0"/>
+              </a:spcBef>
+              <a:spcAft>
+                <a:spcPts val="0"/>
+              </a:spcAft>
+              <a:buClr>
+                <a:schemeClr val="lt1"/>
+              </a:buClr>
+              <a:buSzPts val="1800"/>
+              <a:buFont typeface="Montserrat"/>
+              <a:buNone/>
+              <a:defRPr sz="1800" b="0" i="0" u="none" strike="noStrike" cap="none">
+                <a:solidFill>
+                  <a:schemeClr val="lt1"/>
+                </a:solidFill>
+                <a:latin typeface="Montserrat"/>
+                <a:ea typeface="Montserrat"/>
+                <a:cs typeface="Montserrat"/>
+                <a:sym typeface="Montserrat"/>
+              </a:defRPr>
+            </a:lvl9pPr>
+          </a:lstStyle>
+          <a:p>
+            <a:pPr marL="0" indent="0"/>
+            <a:r>
+              <a:rPr lang="ru-RU" dirty="0"/>
+              <a:t>СПЕЦИАЛЬНОСТЬ 09.02.07 </a:t>
+            </a:r>
+            <a:br>
+              <a:rPr lang="ru-RU" dirty="0"/>
+            </a:br>
+            <a:r>
+              <a:rPr lang="ru-RU" dirty="0"/>
+              <a:t>«Информационные системы и программирование»</a:t>
+            </a:r>
           </a:p>
         </p:txBody>
       </p:sp>
@@ -14383,6 +14998,1151 @@
 </file>
 
 <file path=ppt/slides/slide10.xml><?xml version="1.0" encoding="utf-8"?>
+<p:sld xmlns:a="http://schemas.openxmlformats.org/drawingml/2006/main" xmlns:r="http://schemas.openxmlformats.org/officeDocument/2006/relationships" xmlns:p="http://schemas.openxmlformats.org/presentationml/2006/main">
+  <p:cSld>
+    <p:spTree>
+      <p:nvGrpSpPr>
+        <p:cNvPr id="1" name="Shape 2002"/>
+        <p:cNvGrpSpPr/>
+        <p:nvPr/>
+      </p:nvGrpSpPr>
+      <p:grpSpPr>
+        <a:xfrm>
+          <a:off x="0" y="0"/>
+          <a:ext cx="0" cy="0"/>
+          <a:chOff x="0" y="0"/>
+          <a:chExt cx="0" cy="0"/>
+        </a:xfrm>
+      </p:grpSpPr>
+      <p:sp>
+        <p:nvSpPr>
+          <p:cNvPr id="2003" name="Google Shape;2003;p58"/>
+          <p:cNvSpPr txBox="1">
+            <a:spLocks noGrp="1"/>
+          </p:cNvSpPr>
+          <p:nvPr>
+            <p:ph type="title"/>
+          </p:nvPr>
+        </p:nvSpPr>
+        <p:spPr>
+          <a:xfrm>
+            <a:off x="938500" y="445025"/>
+            <a:ext cx="4629300" cy="941400"/>
+          </a:xfrm>
+          <a:prstGeom prst="rect">
+            <a:avLst/>
+          </a:prstGeom>
+        </p:spPr>
+        <p:txBody>
+          <a:bodyPr spcFirstLastPara="1" wrap="square" lIns="91425" tIns="91425" rIns="91425" bIns="91425" anchor="t" anchorCtr="0">
+            <a:noAutofit/>
+          </a:bodyPr>
+          <a:lstStyle/>
+          <a:p>
+            <a:pPr lvl="0"/>
+            <a:r>
+              <a:rPr lang="ru-RU" dirty="0"/>
+              <a:t>Безопасность и </a:t>
+            </a:r>
+            <a:r>
+              <a:rPr lang="en-US" dirty="0"/>
+              <a:t>API</a:t>
+            </a:r>
+            <a:endParaRPr dirty="0"/>
+          </a:p>
+        </p:txBody>
+      </p:sp>
+      <p:cxnSp>
+        <p:nvCxnSpPr>
+          <p:cNvPr id="2016" name="Google Shape;2016;p58"/>
+          <p:cNvCxnSpPr/>
+          <p:nvPr/>
+        </p:nvCxnSpPr>
+        <p:spPr>
+          <a:xfrm>
+            <a:off x="1026200" y="414022"/>
+            <a:ext cx="2763000" cy="0"/>
+          </a:xfrm>
+          <a:prstGeom prst="straightConnector1">
+            <a:avLst/>
+          </a:prstGeom>
+          <a:noFill/>
+          <a:ln w="9525" cap="flat" cmpd="sng">
+            <a:solidFill>
+              <a:schemeClr val="accent1"/>
+            </a:solidFill>
+            <a:prstDash val="solid"/>
+            <a:round/>
+            <a:headEnd type="none" w="med" len="med"/>
+            <a:tailEnd type="none" w="med" len="med"/>
+          </a:ln>
+          <a:effectLst>
+            <a:outerShdw blurRad="57150" dist="19050" dir="5400000" algn="bl" rotWithShape="0">
+              <a:srgbClr val="FFFFFF">
+                <a:alpha val="50000"/>
+              </a:srgbClr>
+            </a:outerShdw>
+          </a:effectLst>
+        </p:spPr>
+      </p:cxnSp>
+      <p:sp>
+        <p:nvSpPr>
+          <p:cNvPr id="18" name="Google Shape;2098;p63">
+            <a:extLst>
+              <a:ext uri="{FF2B5EF4-FFF2-40B4-BE49-F238E27FC236}">
+                <a16:creationId xmlns:a16="http://schemas.microsoft.com/office/drawing/2014/main" id="{63D0DE40-08F9-AAE7-FD7D-6AD3A202B343}"/>
+              </a:ext>
+            </a:extLst>
+          </p:cNvPr>
+          <p:cNvSpPr txBox="1">
+            <a:spLocks noGrp="1"/>
+          </p:cNvSpPr>
+          <p:nvPr>
+            <p:ph type="title" idx="2"/>
+          </p:nvPr>
+        </p:nvSpPr>
+        <p:spPr>
+          <a:xfrm>
+            <a:off x="1894670" y="1437831"/>
+            <a:ext cx="2025695" cy="375600"/>
+          </a:xfrm>
+          <a:prstGeom prst="rect">
+            <a:avLst/>
+          </a:prstGeom>
+        </p:spPr>
+        <p:txBody>
+          <a:bodyPr spcFirstLastPara="1" wrap="square" lIns="91425" tIns="91425" rIns="91425" bIns="91425" anchor="t" anchorCtr="0">
+            <a:noAutofit/>
+          </a:bodyPr>
+          <a:lstStyle/>
+          <a:p>
+            <a:pPr lvl="0"/>
+            <a:r>
+              <a:rPr lang="en-US" dirty="0"/>
+              <a:t>JWT-</a:t>
+            </a:r>
+            <a:r>
+              <a:rPr lang="ru-RU" dirty="0"/>
+              <a:t>токены</a:t>
+            </a:r>
+            <a:endParaRPr dirty="0"/>
+          </a:p>
+        </p:txBody>
+      </p:sp>
+      <p:sp>
+        <p:nvSpPr>
+          <p:cNvPr id="19" name="Google Shape;2099;p63">
+            <a:extLst>
+              <a:ext uri="{FF2B5EF4-FFF2-40B4-BE49-F238E27FC236}">
+                <a16:creationId xmlns:a16="http://schemas.microsoft.com/office/drawing/2014/main" id="{FE0FD251-EB6E-5C62-9897-35AB75933E92}"/>
+              </a:ext>
+            </a:extLst>
+          </p:cNvPr>
+          <p:cNvSpPr txBox="1">
+            <a:spLocks/>
+          </p:cNvSpPr>
+          <p:nvPr/>
+        </p:nvSpPr>
+        <p:spPr>
+          <a:xfrm>
+            <a:off x="1424496" y="1885154"/>
+            <a:ext cx="2966042" cy="2492553"/>
+          </a:xfrm>
+          <a:prstGeom prst="rect">
+            <a:avLst/>
+          </a:prstGeom>
+          <a:noFill/>
+          <a:ln>
+            <a:noFill/>
+          </a:ln>
+        </p:spPr>
+        <p:txBody>
+          <a:bodyPr spcFirstLastPara="1" wrap="square" lIns="91425" tIns="91425" rIns="91425" bIns="91425" anchor="t" anchorCtr="0">
+            <a:noAutofit/>
+          </a:bodyPr>
+          <a:lstStyle>
+            <a:defPPr marR="0" lvl="0" algn="l" rtl="0">
+              <a:lnSpc>
+                <a:spcPct val="100000"/>
+              </a:lnSpc>
+              <a:spcBef>
+                <a:spcPts val="0"/>
+              </a:spcBef>
+              <a:spcAft>
+                <a:spcPts val="0"/>
+              </a:spcAft>
+            </a:defPPr>
+            <a:lvl1pPr marL="457200" marR="0" lvl="0" indent="-342900" algn="ctr" rtl="0">
+              <a:lnSpc>
+                <a:spcPct val="100000"/>
+              </a:lnSpc>
+              <a:spcBef>
+                <a:spcPts val="0"/>
+              </a:spcBef>
+              <a:spcAft>
+                <a:spcPts val="0"/>
+              </a:spcAft>
+              <a:buClr>
+                <a:schemeClr val="lt1"/>
+              </a:buClr>
+              <a:buSzPts val="1400"/>
+              <a:buFont typeface="Montserrat"/>
+              <a:buNone/>
+              <a:defRPr sz="1400" b="0" i="0" u="none" strike="noStrike" cap="none">
+                <a:solidFill>
+                  <a:schemeClr val="lt1"/>
+                </a:solidFill>
+                <a:latin typeface="Montserrat"/>
+                <a:ea typeface="Montserrat"/>
+                <a:cs typeface="Montserrat"/>
+                <a:sym typeface="Montserrat"/>
+              </a:defRPr>
+            </a:lvl1pPr>
+            <a:lvl2pPr marL="914400" marR="0" lvl="1" indent="-317500" algn="ctr" rtl="0">
+              <a:lnSpc>
+                <a:spcPct val="100000"/>
+              </a:lnSpc>
+              <a:spcBef>
+                <a:spcPts val="0"/>
+              </a:spcBef>
+              <a:spcAft>
+                <a:spcPts val="0"/>
+              </a:spcAft>
+              <a:buClr>
+                <a:schemeClr val="lt1"/>
+              </a:buClr>
+              <a:buSzPts val="2100"/>
+              <a:buFont typeface="Montserrat"/>
+              <a:buNone/>
+              <a:defRPr sz="2100" b="0" i="0" u="none" strike="noStrike" cap="none">
+                <a:solidFill>
+                  <a:schemeClr val="lt1"/>
+                </a:solidFill>
+                <a:latin typeface="Montserrat"/>
+                <a:ea typeface="Montserrat"/>
+                <a:cs typeface="Montserrat"/>
+                <a:sym typeface="Montserrat"/>
+              </a:defRPr>
+            </a:lvl2pPr>
+            <a:lvl3pPr marL="1371600" marR="0" lvl="2" indent="-317500" algn="ctr" rtl="0">
+              <a:lnSpc>
+                <a:spcPct val="100000"/>
+              </a:lnSpc>
+              <a:spcBef>
+                <a:spcPts val="0"/>
+              </a:spcBef>
+              <a:spcAft>
+                <a:spcPts val="0"/>
+              </a:spcAft>
+              <a:buClr>
+                <a:schemeClr val="lt1"/>
+              </a:buClr>
+              <a:buSzPts val="2100"/>
+              <a:buFont typeface="Montserrat"/>
+              <a:buNone/>
+              <a:defRPr sz="2100" b="0" i="0" u="none" strike="noStrike" cap="none">
+                <a:solidFill>
+                  <a:schemeClr val="lt1"/>
+                </a:solidFill>
+                <a:latin typeface="Montserrat"/>
+                <a:ea typeface="Montserrat"/>
+                <a:cs typeface="Montserrat"/>
+                <a:sym typeface="Montserrat"/>
+              </a:defRPr>
+            </a:lvl3pPr>
+            <a:lvl4pPr marL="1828800" marR="0" lvl="3" indent="-317500" algn="ctr" rtl="0">
+              <a:lnSpc>
+                <a:spcPct val="100000"/>
+              </a:lnSpc>
+              <a:spcBef>
+                <a:spcPts val="0"/>
+              </a:spcBef>
+              <a:spcAft>
+                <a:spcPts val="0"/>
+              </a:spcAft>
+              <a:buClr>
+                <a:schemeClr val="lt1"/>
+              </a:buClr>
+              <a:buSzPts val="2100"/>
+              <a:buFont typeface="Montserrat"/>
+              <a:buNone/>
+              <a:defRPr sz="2100" b="0" i="0" u="none" strike="noStrike" cap="none">
+                <a:solidFill>
+                  <a:schemeClr val="lt1"/>
+                </a:solidFill>
+                <a:latin typeface="Montserrat"/>
+                <a:ea typeface="Montserrat"/>
+                <a:cs typeface="Montserrat"/>
+                <a:sym typeface="Montserrat"/>
+              </a:defRPr>
+            </a:lvl4pPr>
+            <a:lvl5pPr marL="2286000" marR="0" lvl="4" indent="-317500" algn="ctr" rtl="0">
+              <a:lnSpc>
+                <a:spcPct val="100000"/>
+              </a:lnSpc>
+              <a:spcBef>
+                <a:spcPts val="0"/>
+              </a:spcBef>
+              <a:spcAft>
+                <a:spcPts val="0"/>
+              </a:spcAft>
+              <a:buClr>
+                <a:schemeClr val="lt1"/>
+              </a:buClr>
+              <a:buSzPts val="2100"/>
+              <a:buFont typeface="Montserrat"/>
+              <a:buNone/>
+              <a:defRPr sz="2100" b="0" i="0" u="none" strike="noStrike" cap="none">
+                <a:solidFill>
+                  <a:schemeClr val="lt1"/>
+                </a:solidFill>
+                <a:latin typeface="Montserrat"/>
+                <a:ea typeface="Montserrat"/>
+                <a:cs typeface="Montserrat"/>
+                <a:sym typeface="Montserrat"/>
+              </a:defRPr>
+            </a:lvl5pPr>
+            <a:lvl6pPr marL="2743200" marR="0" lvl="5" indent="-317500" algn="ctr" rtl="0">
+              <a:lnSpc>
+                <a:spcPct val="100000"/>
+              </a:lnSpc>
+              <a:spcBef>
+                <a:spcPts val="0"/>
+              </a:spcBef>
+              <a:spcAft>
+                <a:spcPts val="0"/>
+              </a:spcAft>
+              <a:buClr>
+                <a:schemeClr val="lt1"/>
+              </a:buClr>
+              <a:buSzPts val="2100"/>
+              <a:buFont typeface="Montserrat"/>
+              <a:buNone/>
+              <a:defRPr sz="2100" b="0" i="0" u="none" strike="noStrike" cap="none">
+                <a:solidFill>
+                  <a:schemeClr val="lt1"/>
+                </a:solidFill>
+                <a:latin typeface="Montserrat"/>
+                <a:ea typeface="Montserrat"/>
+                <a:cs typeface="Montserrat"/>
+                <a:sym typeface="Montserrat"/>
+              </a:defRPr>
+            </a:lvl6pPr>
+            <a:lvl7pPr marL="3200400" marR="0" lvl="6" indent="-317500" algn="ctr" rtl="0">
+              <a:lnSpc>
+                <a:spcPct val="100000"/>
+              </a:lnSpc>
+              <a:spcBef>
+                <a:spcPts val="0"/>
+              </a:spcBef>
+              <a:spcAft>
+                <a:spcPts val="0"/>
+              </a:spcAft>
+              <a:buClr>
+                <a:schemeClr val="lt1"/>
+              </a:buClr>
+              <a:buSzPts val="2100"/>
+              <a:buFont typeface="Montserrat"/>
+              <a:buNone/>
+              <a:defRPr sz="2100" b="0" i="0" u="none" strike="noStrike" cap="none">
+                <a:solidFill>
+                  <a:schemeClr val="lt1"/>
+                </a:solidFill>
+                <a:latin typeface="Montserrat"/>
+                <a:ea typeface="Montserrat"/>
+                <a:cs typeface="Montserrat"/>
+                <a:sym typeface="Montserrat"/>
+              </a:defRPr>
+            </a:lvl7pPr>
+            <a:lvl8pPr marL="3657600" marR="0" lvl="7" indent="-317500" algn="ctr" rtl="0">
+              <a:lnSpc>
+                <a:spcPct val="100000"/>
+              </a:lnSpc>
+              <a:spcBef>
+                <a:spcPts val="0"/>
+              </a:spcBef>
+              <a:spcAft>
+                <a:spcPts val="0"/>
+              </a:spcAft>
+              <a:buClr>
+                <a:schemeClr val="lt1"/>
+              </a:buClr>
+              <a:buSzPts val="2100"/>
+              <a:buFont typeface="Montserrat"/>
+              <a:buNone/>
+              <a:defRPr sz="2100" b="0" i="0" u="none" strike="noStrike" cap="none">
+                <a:solidFill>
+                  <a:schemeClr val="lt1"/>
+                </a:solidFill>
+                <a:latin typeface="Montserrat"/>
+                <a:ea typeface="Montserrat"/>
+                <a:cs typeface="Montserrat"/>
+                <a:sym typeface="Montserrat"/>
+              </a:defRPr>
+            </a:lvl8pPr>
+            <a:lvl9pPr marL="4114800" marR="0" lvl="8" indent="-317500" algn="ctr" rtl="0">
+              <a:lnSpc>
+                <a:spcPct val="100000"/>
+              </a:lnSpc>
+              <a:spcBef>
+                <a:spcPts val="0"/>
+              </a:spcBef>
+              <a:spcAft>
+                <a:spcPts val="0"/>
+              </a:spcAft>
+              <a:buClr>
+                <a:schemeClr val="lt1"/>
+              </a:buClr>
+              <a:buSzPts val="2100"/>
+              <a:buFont typeface="Montserrat"/>
+              <a:buNone/>
+              <a:defRPr sz="2100" b="0" i="0" u="none" strike="noStrike" cap="none">
+                <a:solidFill>
+                  <a:schemeClr val="lt1"/>
+                </a:solidFill>
+                <a:latin typeface="Montserrat"/>
+                <a:ea typeface="Montserrat"/>
+                <a:cs typeface="Montserrat"/>
+                <a:sym typeface="Montserrat"/>
+              </a:defRPr>
+            </a:lvl9pPr>
+          </a:lstStyle>
+          <a:p>
+            <a:pPr marL="0" indent="0" algn="l">
+              <a:lnSpc>
+                <a:spcPct val="150000"/>
+              </a:lnSpc>
+            </a:pPr>
+            <a:r>
+              <a:rPr lang="ru-RU" dirty="0"/>
+              <a:t>Авторизация осуществляется</a:t>
+            </a:r>
+          </a:p>
+          <a:p>
+            <a:pPr marL="0" indent="0" algn="l">
+              <a:lnSpc>
+                <a:spcPct val="150000"/>
+              </a:lnSpc>
+            </a:pPr>
+            <a:r>
+              <a:rPr lang="ru-RU" dirty="0"/>
+              <a:t>с использованием JWT-токенов, в которые вшиваются необходимые параметры пользователя.</a:t>
+            </a:r>
+          </a:p>
+          <a:p>
+            <a:pPr marL="0" indent="0" algn="l">
+              <a:lnSpc>
+                <a:spcPct val="150000"/>
+              </a:lnSpc>
+            </a:pPr>
+            <a:r>
+              <a:rPr lang="en-US" dirty="0"/>
+              <a:t>(ID, Name, Role)</a:t>
+            </a:r>
+          </a:p>
+        </p:txBody>
+      </p:sp>
+      <p:cxnSp>
+        <p:nvCxnSpPr>
+          <p:cNvPr id="27" name="Google Shape;2108;p63">
+            <a:extLst>
+              <a:ext uri="{FF2B5EF4-FFF2-40B4-BE49-F238E27FC236}">
+                <a16:creationId xmlns:a16="http://schemas.microsoft.com/office/drawing/2014/main" id="{2E5AF290-7A46-CF31-E359-360D9F390530}"/>
+              </a:ext>
+            </a:extLst>
+          </p:cNvPr>
+          <p:cNvCxnSpPr>
+            <a:cxnSpLocks/>
+          </p:cNvCxnSpPr>
+          <p:nvPr/>
+        </p:nvCxnSpPr>
+        <p:spPr>
+          <a:xfrm>
+            <a:off x="4572000" y="1566172"/>
+            <a:ext cx="0" cy="3130519"/>
+          </a:xfrm>
+          <a:prstGeom prst="straightConnector1">
+            <a:avLst/>
+          </a:prstGeom>
+          <a:noFill/>
+          <a:ln w="9525" cap="flat" cmpd="sng">
+            <a:solidFill>
+              <a:schemeClr val="accent1"/>
+            </a:solidFill>
+            <a:prstDash val="solid"/>
+            <a:round/>
+            <a:headEnd type="none" w="med" len="med"/>
+            <a:tailEnd type="none" w="med" len="med"/>
+          </a:ln>
+          <a:effectLst>
+            <a:outerShdw blurRad="57150" dist="19050" dir="5400000" algn="bl" rotWithShape="0">
+              <a:srgbClr val="FFFFFF">
+                <a:alpha val="50000"/>
+              </a:srgbClr>
+            </a:outerShdw>
+          </a:effectLst>
+        </p:spPr>
+      </p:cxnSp>
+      <p:sp>
+        <p:nvSpPr>
+          <p:cNvPr id="2047" name="Google Shape;2098;p63">
+            <a:extLst>
+              <a:ext uri="{FF2B5EF4-FFF2-40B4-BE49-F238E27FC236}">
+                <a16:creationId xmlns:a16="http://schemas.microsoft.com/office/drawing/2014/main" id="{10AC4F83-7C14-7590-D15F-B83DAD5980FC}"/>
+              </a:ext>
+            </a:extLst>
+          </p:cNvPr>
+          <p:cNvSpPr txBox="1">
+            <a:spLocks/>
+          </p:cNvSpPr>
+          <p:nvPr/>
+        </p:nvSpPr>
+        <p:spPr>
+          <a:xfrm>
+            <a:off x="5470819" y="1437831"/>
+            <a:ext cx="1301855" cy="375600"/>
+          </a:xfrm>
+          <a:prstGeom prst="rect">
+            <a:avLst/>
+          </a:prstGeom>
+          <a:noFill/>
+          <a:ln>
+            <a:noFill/>
+          </a:ln>
+        </p:spPr>
+        <p:txBody>
+          <a:bodyPr spcFirstLastPara="1" wrap="square" lIns="91425" tIns="91425" rIns="91425" bIns="91425" anchor="t" anchorCtr="0">
+            <a:noAutofit/>
+          </a:bodyPr>
+          <a:lstStyle>
+            <a:defPPr marR="0" lvl="0" algn="l" rtl="0">
+              <a:lnSpc>
+                <a:spcPct val="100000"/>
+              </a:lnSpc>
+              <a:spcBef>
+                <a:spcPts val="0"/>
+              </a:spcBef>
+              <a:spcAft>
+                <a:spcPts val="0"/>
+              </a:spcAft>
+            </a:defPPr>
+            <a:lvl1pPr marR="0" lvl="0" algn="ctr" rtl="0">
+              <a:lnSpc>
+                <a:spcPct val="100000"/>
+              </a:lnSpc>
+              <a:spcBef>
+                <a:spcPts val="0"/>
+              </a:spcBef>
+              <a:spcAft>
+                <a:spcPts val="0"/>
+              </a:spcAft>
+              <a:buClr>
+                <a:schemeClr val="lt1"/>
+              </a:buClr>
+              <a:buSzPts val="1800"/>
+              <a:buFont typeface="Montserrat ExtraBold"/>
+              <a:buNone/>
+              <a:defRPr sz="1800" b="0" i="0" u="none" strike="noStrike" cap="none">
+                <a:solidFill>
+                  <a:schemeClr val="lt1"/>
+                </a:solidFill>
+                <a:latin typeface="Montserrat ExtraBold"/>
+                <a:ea typeface="Montserrat ExtraBold"/>
+                <a:cs typeface="Montserrat ExtraBold"/>
+                <a:sym typeface="Montserrat ExtraBold"/>
+              </a:defRPr>
+            </a:lvl1pPr>
+            <a:lvl2pPr marR="0" lvl="1" algn="ctr" rtl="0">
+              <a:lnSpc>
+                <a:spcPct val="100000"/>
+              </a:lnSpc>
+              <a:spcBef>
+                <a:spcPts val="0"/>
+              </a:spcBef>
+              <a:spcAft>
+                <a:spcPts val="0"/>
+              </a:spcAft>
+              <a:buClr>
+                <a:schemeClr val="lt1"/>
+              </a:buClr>
+              <a:buSzPts val="4200"/>
+              <a:buFont typeface="Montserrat"/>
+              <a:buNone/>
+              <a:defRPr sz="4200" b="0" i="0" u="none" strike="noStrike" cap="none">
+                <a:solidFill>
+                  <a:schemeClr val="lt1"/>
+                </a:solidFill>
+                <a:latin typeface="Montserrat"/>
+                <a:ea typeface="Montserrat"/>
+                <a:cs typeface="Montserrat"/>
+                <a:sym typeface="Montserrat"/>
+              </a:defRPr>
+            </a:lvl2pPr>
+            <a:lvl3pPr marR="0" lvl="2" algn="ctr" rtl="0">
+              <a:lnSpc>
+                <a:spcPct val="100000"/>
+              </a:lnSpc>
+              <a:spcBef>
+                <a:spcPts val="0"/>
+              </a:spcBef>
+              <a:spcAft>
+                <a:spcPts val="0"/>
+              </a:spcAft>
+              <a:buClr>
+                <a:schemeClr val="lt1"/>
+              </a:buClr>
+              <a:buSzPts val="4200"/>
+              <a:buFont typeface="Montserrat"/>
+              <a:buNone/>
+              <a:defRPr sz="4200" b="0" i="0" u="none" strike="noStrike" cap="none">
+                <a:solidFill>
+                  <a:schemeClr val="lt1"/>
+                </a:solidFill>
+                <a:latin typeface="Montserrat"/>
+                <a:ea typeface="Montserrat"/>
+                <a:cs typeface="Montserrat"/>
+                <a:sym typeface="Montserrat"/>
+              </a:defRPr>
+            </a:lvl3pPr>
+            <a:lvl4pPr marR="0" lvl="3" algn="ctr" rtl="0">
+              <a:lnSpc>
+                <a:spcPct val="100000"/>
+              </a:lnSpc>
+              <a:spcBef>
+                <a:spcPts val="0"/>
+              </a:spcBef>
+              <a:spcAft>
+                <a:spcPts val="0"/>
+              </a:spcAft>
+              <a:buClr>
+                <a:schemeClr val="lt1"/>
+              </a:buClr>
+              <a:buSzPts val="4200"/>
+              <a:buFont typeface="Montserrat"/>
+              <a:buNone/>
+              <a:defRPr sz="4200" b="0" i="0" u="none" strike="noStrike" cap="none">
+                <a:solidFill>
+                  <a:schemeClr val="lt1"/>
+                </a:solidFill>
+                <a:latin typeface="Montserrat"/>
+                <a:ea typeface="Montserrat"/>
+                <a:cs typeface="Montserrat"/>
+                <a:sym typeface="Montserrat"/>
+              </a:defRPr>
+            </a:lvl4pPr>
+            <a:lvl5pPr marR="0" lvl="4" algn="ctr" rtl="0">
+              <a:lnSpc>
+                <a:spcPct val="100000"/>
+              </a:lnSpc>
+              <a:spcBef>
+                <a:spcPts val="0"/>
+              </a:spcBef>
+              <a:spcAft>
+                <a:spcPts val="0"/>
+              </a:spcAft>
+              <a:buClr>
+                <a:schemeClr val="lt1"/>
+              </a:buClr>
+              <a:buSzPts val="4200"/>
+              <a:buFont typeface="Montserrat"/>
+              <a:buNone/>
+              <a:defRPr sz="4200" b="0" i="0" u="none" strike="noStrike" cap="none">
+                <a:solidFill>
+                  <a:schemeClr val="lt1"/>
+                </a:solidFill>
+                <a:latin typeface="Montserrat"/>
+                <a:ea typeface="Montserrat"/>
+                <a:cs typeface="Montserrat"/>
+                <a:sym typeface="Montserrat"/>
+              </a:defRPr>
+            </a:lvl5pPr>
+            <a:lvl6pPr marR="0" lvl="5" algn="ctr" rtl="0">
+              <a:lnSpc>
+                <a:spcPct val="100000"/>
+              </a:lnSpc>
+              <a:spcBef>
+                <a:spcPts val="0"/>
+              </a:spcBef>
+              <a:spcAft>
+                <a:spcPts val="0"/>
+              </a:spcAft>
+              <a:buClr>
+                <a:schemeClr val="lt1"/>
+              </a:buClr>
+              <a:buSzPts val="4200"/>
+              <a:buFont typeface="Montserrat"/>
+              <a:buNone/>
+              <a:defRPr sz="4200" b="0" i="0" u="none" strike="noStrike" cap="none">
+                <a:solidFill>
+                  <a:schemeClr val="lt1"/>
+                </a:solidFill>
+                <a:latin typeface="Montserrat"/>
+                <a:ea typeface="Montserrat"/>
+                <a:cs typeface="Montserrat"/>
+                <a:sym typeface="Montserrat"/>
+              </a:defRPr>
+            </a:lvl6pPr>
+            <a:lvl7pPr marR="0" lvl="6" algn="ctr" rtl="0">
+              <a:lnSpc>
+                <a:spcPct val="100000"/>
+              </a:lnSpc>
+              <a:spcBef>
+                <a:spcPts val="0"/>
+              </a:spcBef>
+              <a:spcAft>
+                <a:spcPts val="0"/>
+              </a:spcAft>
+              <a:buClr>
+                <a:schemeClr val="lt1"/>
+              </a:buClr>
+              <a:buSzPts val="4200"/>
+              <a:buFont typeface="Montserrat"/>
+              <a:buNone/>
+              <a:defRPr sz="4200" b="0" i="0" u="none" strike="noStrike" cap="none">
+                <a:solidFill>
+                  <a:schemeClr val="lt1"/>
+                </a:solidFill>
+                <a:latin typeface="Montserrat"/>
+                <a:ea typeface="Montserrat"/>
+                <a:cs typeface="Montserrat"/>
+                <a:sym typeface="Montserrat"/>
+              </a:defRPr>
+            </a:lvl7pPr>
+            <a:lvl8pPr marR="0" lvl="7" algn="ctr" rtl="0">
+              <a:lnSpc>
+                <a:spcPct val="100000"/>
+              </a:lnSpc>
+              <a:spcBef>
+                <a:spcPts val="0"/>
+              </a:spcBef>
+              <a:spcAft>
+                <a:spcPts val="0"/>
+              </a:spcAft>
+              <a:buClr>
+                <a:schemeClr val="lt1"/>
+              </a:buClr>
+              <a:buSzPts val="4200"/>
+              <a:buFont typeface="Montserrat"/>
+              <a:buNone/>
+              <a:defRPr sz="4200" b="0" i="0" u="none" strike="noStrike" cap="none">
+                <a:solidFill>
+                  <a:schemeClr val="lt1"/>
+                </a:solidFill>
+                <a:latin typeface="Montserrat"/>
+                <a:ea typeface="Montserrat"/>
+                <a:cs typeface="Montserrat"/>
+                <a:sym typeface="Montserrat"/>
+              </a:defRPr>
+            </a:lvl8pPr>
+            <a:lvl9pPr marR="0" lvl="8" algn="ctr" rtl="0">
+              <a:lnSpc>
+                <a:spcPct val="100000"/>
+              </a:lnSpc>
+              <a:spcBef>
+                <a:spcPts val="0"/>
+              </a:spcBef>
+              <a:spcAft>
+                <a:spcPts val="0"/>
+              </a:spcAft>
+              <a:buClr>
+                <a:schemeClr val="lt1"/>
+              </a:buClr>
+              <a:buSzPts val="4200"/>
+              <a:buFont typeface="Montserrat"/>
+              <a:buNone/>
+              <a:defRPr sz="4200" b="0" i="0" u="none" strike="noStrike" cap="none">
+                <a:solidFill>
+                  <a:schemeClr val="lt1"/>
+                </a:solidFill>
+                <a:latin typeface="Montserrat"/>
+                <a:ea typeface="Montserrat"/>
+                <a:cs typeface="Montserrat"/>
+                <a:sym typeface="Montserrat"/>
+              </a:defRPr>
+            </a:lvl9pPr>
+          </a:lstStyle>
+          <a:p>
+            <a:pPr algn="r"/>
+            <a:r>
+              <a:rPr lang="en-US" dirty="0"/>
+              <a:t>Swagger</a:t>
+            </a:r>
+            <a:endParaRPr lang="ru-RU" dirty="0"/>
+          </a:p>
+        </p:txBody>
+      </p:sp>
+      <p:sp>
+        <p:nvSpPr>
+          <p:cNvPr id="1984" name="Google Shape;2099;p63">
+            <a:extLst>
+              <a:ext uri="{FF2B5EF4-FFF2-40B4-BE49-F238E27FC236}">
+                <a16:creationId xmlns:a16="http://schemas.microsoft.com/office/drawing/2014/main" id="{B12F3D69-4715-35AA-88C6-B35AAD805FC4}"/>
+              </a:ext>
+            </a:extLst>
+          </p:cNvPr>
+          <p:cNvSpPr txBox="1">
+            <a:spLocks/>
+          </p:cNvSpPr>
+          <p:nvPr/>
+        </p:nvSpPr>
+        <p:spPr>
+          <a:xfrm>
+            <a:off x="5017773" y="1966350"/>
+            <a:ext cx="2727600" cy="605400"/>
+          </a:xfrm>
+          <a:prstGeom prst="rect">
+            <a:avLst/>
+          </a:prstGeom>
+          <a:noFill/>
+          <a:ln>
+            <a:noFill/>
+          </a:ln>
+        </p:spPr>
+        <p:txBody>
+          <a:bodyPr spcFirstLastPara="1" wrap="square" lIns="91425" tIns="91425" rIns="91425" bIns="91425" anchor="t" anchorCtr="0">
+            <a:noAutofit/>
+          </a:bodyPr>
+          <a:lstStyle>
+            <a:defPPr marR="0" lvl="0" algn="l" rtl="0">
+              <a:lnSpc>
+                <a:spcPct val="100000"/>
+              </a:lnSpc>
+              <a:spcBef>
+                <a:spcPts val="0"/>
+              </a:spcBef>
+              <a:spcAft>
+                <a:spcPts val="0"/>
+              </a:spcAft>
+            </a:defPPr>
+            <a:lvl1pPr marL="457200" marR="0" lvl="0" indent="-342900" algn="ctr" rtl="0">
+              <a:lnSpc>
+                <a:spcPct val="100000"/>
+              </a:lnSpc>
+              <a:spcBef>
+                <a:spcPts val="0"/>
+              </a:spcBef>
+              <a:spcAft>
+                <a:spcPts val="0"/>
+              </a:spcAft>
+              <a:buClr>
+                <a:schemeClr val="lt1"/>
+              </a:buClr>
+              <a:buSzPts val="1400"/>
+              <a:buFont typeface="Montserrat"/>
+              <a:buNone/>
+              <a:defRPr sz="1400" b="0" i="0" u="none" strike="noStrike" cap="none">
+                <a:solidFill>
+                  <a:schemeClr val="lt1"/>
+                </a:solidFill>
+                <a:latin typeface="Montserrat"/>
+                <a:ea typeface="Montserrat"/>
+                <a:cs typeface="Montserrat"/>
+                <a:sym typeface="Montserrat"/>
+              </a:defRPr>
+            </a:lvl1pPr>
+            <a:lvl2pPr marL="914400" marR="0" lvl="1" indent="-317500" algn="ctr" rtl="0">
+              <a:lnSpc>
+                <a:spcPct val="100000"/>
+              </a:lnSpc>
+              <a:spcBef>
+                <a:spcPts val="0"/>
+              </a:spcBef>
+              <a:spcAft>
+                <a:spcPts val="0"/>
+              </a:spcAft>
+              <a:buClr>
+                <a:schemeClr val="lt1"/>
+              </a:buClr>
+              <a:buSzPts val="2100"/>
+              <a:buFont typeface="Montserrat"/>
+              <a:buNone/>
+              <a:defRPr sz="2100" b="0" i="0" u="none" strike="noStrike" cap="none">
+                <a:solidFill>
+                  <a:schemeClr val="lt1"/>
+                </a:solidFill>
+                <a:latin typeface="Montserrat"/>
+                <a:ea typeface="Montserrat"/>
+                <a:cs typeface="Montserrat"/>
+                <a:sym typeface="Montserrat"/>
+              </a:defRPr>
+            </a:lvl2pPr>
+            <a:lvl3pPr marL="1371600" marR="0" lvl="2" indent="-317500" algn="ctr" rtl="0">
+              <a:lnSpc>
+                <a:spcPct val="100000"/>
+              </a:lnSpc>
+              <a:spcBef>
+                <a:spcPts val="0"/>
+              </a:spcBef>
+              <a:spcAft>
+                <a:spcPts val="0"/>
+              </a:spcAft>
+              <a:buClr>
+                <a:schemeClr val="lt1"/>
+              </a:buClr>
+              <a:buSzPts val="2100"/>
+              <a:buFont typeface="Montserrat"/>
+              <a:buNone/>
+              <a:defRPr sz="2100" b="0" i="0" u="none" strike="noStrike" cap="none">
+                <a:solidFill>
+                  <a:schemeClr val="lt1"/>
+                </a:solidFill>
+                <a:latin typeface="Montserrat"/>
+                <a:ea typeface="Montserrat"/>
+                <a:cs typeface="Montserrat"/>
+                <a:sym typeface="Montserrat"/>
+              </a:defRPr>
+            </a:lvl3pPr>
+            <a:lvl4pPr marL="1828800" marR="0" lvl="3" indent="-317500" algn="ctr" rtl="0">
+              <a:lnSpc>
+                <a:spcPct val="100000"/>
+              </a:lnSpc>
+              <a:spcBef>
+                <a:spcPts val="0"/>
+              </a:spcBef>
+              <a:spcAft>
+                <a:spcPts val="0"/>
+              </a:spcAft>
+              <a:buClr>
+                <a:schemeClr val="lt1"/>
+              </a:buClr>
+              <a:buSzPts val="2100"/>
+              <a:buFont typeface="Montserrat"/>
+              <a:buNone/>
+              <a:defRPr sz="2100" b="0" i="0" u="none" strike="noStrike" cap="none">
+                <a:solidFill>
+                  <a:schemeClr val="lt1"/>
+                </a:solidFill>
+                <a:latin typeface="Montserrat"/>
+                <a:ea typeface="Montserrat"/>
+                <a:cs typeface="Montserrat"/>
+                <a:sym typeface="Montserrat"/>
+              </a:defRPr>
+            </a:lvl4pPr>
+            <a:lvl5pPr marL="2286000" marR="0" lvl="4" indent="-317500" algn="ctr" rtl="0">
+              <a:lnSpc>
+                <a:spcPct val="100000"/>
+              </a:lnSpc>
+              <a:spcBef>
+                <a:spcPts val="0"/>
+              </a:spcBef>
+              <a:spcAft>
+                <a:spcPts val="0"/>
+              </a:spcAft>
+              <a:buClr>
+                <a:schemeClr val="lt1"/>
+              </a:buClr>
+              <a:buSzPts val="2100"/>
+              <a:buFont typeface="Montserrat"/>
+              <a:buNone/>
+              <a:defRPr sz="2100" b="0" i="0" u="none" strike="noStrike" cap="none">
+                <a:solidFill>
+                  <a:schemeClr val="lt1"/>
+                </a:solidFill>
+                <a:latin typeface="Montserrat"/>
+                <a:ea typeface="Montserrat"/>
+                <a:cs typeface="Montserrat"/>
+                <a:sym typeface="Montserrat"/>
+              </a:defRPr>
+            </a:lvl5pPr>
+            <a:lvl6pPr marL="2743200" marR="0" lvl="5" indent="-317500" algn="ctr" rtl="0">
+              <a:lnSpc>
+                <a:spcPct val="100000"/>
+              </a:lnSpc>
+              <a:spcBef>
+                <a:spcPts val="0"/>
+              </a:spcBef>
+              <a:spcAft>
+                <a:spcPts val="0"/>
+              </a:spcAft>
+              <a:buClr>
+                <a:schemeClr val="lt1"/>
+              </a:buClr>
+              <a:buSzPts val="2100"/>
+              <a:buFont typeface="Montserrat"/>
+              <a:buNone/>
+              <a:defRPr sz="2100" b="0" i="0" u="none" strike="noStrike" cap="none">
+                <a:solidFill>
+                  <a:schemeClr val="lt1"/>
+                </a:solidFill>
+                <a:latin typeface="Montserrat"/>
+                <a:ea typeface="Montserrat"/>
+                <a:cs typeface="Montserrat"/>
+                <a:sym typeface="Montserrat"/>
+              </a:defRPr>
+            </a:lvl6pPr>
+            <a:lvl7pPr marL="3200400" marR="0" lvl="6" indent="-317500" algn="ctr" rtl="0">
+              <a:lnSpc>
+                <a:spcPct val="100000"/>
+              </a:lnSpc>
+              <a:spcBef>
+                <a:spcPts val="0"/>
+              </a:spcBef>
+              <a:spcAft>
+                <a:spcPts val="0"/>
+              </a:spcAft>
+              <a:buClr>
+                <a:schemeClr val="lt1"/>
+              </a:buClr>
+              <a:buSzPts val="2100"/>
+              <a:buFont typeface="Montserrat"/>
+              <a:buNone/>
+              <a:defRPr sz="2100" b="0" i="0" u="none" strike="noStrike" cap="none">
+                <a:solidFill>
+                  <a:schemeClr val="lt1"/>
+                </a:solidFill>
+                <a:latin typeface="Montserrat"/>
+                <a:ea typeface="Montserrat"/>
+                <a:cs typeface="Montserrat"/>
+                <a:sym typeface="Montserrat"/>
+              </a:defRPr>
+            </a:lvl7pPr>
+            <a:lvl8pPr marL="3657600" marR="0" lvl="7" indent="-317500" algn="ctr" rtl="0">
+              <a:lnSpc>
+                <a:spcPct val="100000"/>
+              </a:lnSpc>
+              <a:spcBef>
+                <a:spcPts val="0"/>
+              </a:spcBef>
+              <a:spcAft>
+                <a:spcPts val="0"/>
+              </a:spcAft>
+              <a:buClr>
+                <a:schemeClr val="lt1"/>
+              </a:buClr>
+              <a:buSzPts val="2100"/>
+              <a:buFont typeface="Montserrat"/>
+              <a:buNone/>
+              <a:defRPr sz="2100" b="0" i="0" u="none" strike="noStrike" cap="none">
+                <a:solidFill>
+                  <a:schemeClr val="lt1"/>
+                </a:solidFill>
+                <a:latin typeface="Montserrat"/>
+                <a:ea typeface="Montserrat"/>
+                <a:cs typeface="Montserrat"/>
+                <a:sym typeface="Montserrat"/>
+              </a:defRPr>
+            </a:lvl8pPr>
+            <a:lvl9pPr marL="4114800" marR="0" lvl="8" indent="-317500" algn="ctr" rtl="0">
+              <a:lnSpc>
+                <a:spcPct val="100000"/>
+              </a:lnSpc>
+              <a:spcBef>
+                <a:spcPts val="0"/>
+              </a:spcBef>
+              <a:spcAft>
+                <a:spcPts val="0"/>
+              </a:spcAft>
+              <a:buClr>
+                <a:schemeClr val="lt1"/>
+              </a:buClr>
+              <a:buSzPts val="2100"/>
+              <a:buFont typeface="Montserrat"/>
+              <a:buNone/>
+              <a:defRPr sz="2100" b="0" i="0" u="none" strike="noStrike" cap="none">
+                <a:solidFill>
+                  <a:schemeClr val="lt1"/>
+                </a:solidFill>
+                <a:latin typeface="Montserrat"/>
+                <a:ea typeface="Montserrat"/>
+                <a:cs typeface="Montserrat"/>
+                <a:sym typeface="Montserrat"/>
+              </a:defRPr>
+            </a:lvl9pPr>
+          </a:lstStyle>
+          <a:p>
+            <a:pPr marL="0" indent="0" algn="l"/>
+            <a:r>
+              <a:rPr lang="ru-RU" dirty="0"/>
+              <a:t>Документирование </a:t>
+            </a:r>
+            <a:r>
+              <a:rPr lang="en-US" dirty="0"/>
+              <a:t>API</a:t>
+            </a:r>
+          </a:p>
+        </p:txBody>
+      </p:sp>
+      <p:pic>
+        <p:nvPicPr>
+          <p:cNvPr id="3" name="Рисунок 2">
+            <a:extLst>
+              <a:ext uri="{FF2B5EF4-FFF2-40B4-BE49-F238E27FC236}">
+                <a16:creationId xmlns:a16="http://schemas.microsoft.com/office/drawing/2014/main" id="{B9E1851E-3E99-9F22-01E7-510074DA66C2}"/>
+              </a:ext>
+            </a:extLst>
+          </p:cNvPr>
+          <p:cNvPicPr>
+            <a:picLocks noChangeAspect="1"/>
+          </p:cNvPicPr>
+          <p:nvPr/>
+        </p:nvPicPr>
+        <p:blipFill>
+          <a:blip>
+            <a:extLst>
+              <a:ext uri="{96DAC541-7B7A-43D3-8B79-37D633B846F1}">
+                <asvg:svgBlip xmlns:asvg="http://schemas.microsoft.com/office/drawing/2016/SVG/main" r:embed="rId3"/>
+              </a:ext>
+            </a:extLst>
+          </a:blip>
+          <a:stretch>
+            <a:fillRect/>
+          </a:stretch>
+        </p:blipFill>
+        <p:spPr>
+          <a:xfrm>
+            <a:off x="5091418" y="2393356"/>
+            <a:ext cx="2237634" cy="2237634"/>
+          </a:xfrm>
+          <a:prstGeom prst="rect">
+            <a:avLst/>
+          </a:prstGeom>
+        </p:spPr>
+      </p:pic>
+      <p:pic>
+        <p:nvPicPr>
+          <p:cNvPr id="2" name="Рисунок 1">
+            <a:extLst>
+              <a:ext uri="{FF2B5EF4-FFF2-40B4-BE49-F238E27FC236}">
+                <a16:creationId xmlns:a16="http://schemas.microsoft.com/office/drawing/2014/main" id="{B85F368D-D45F-8F85-4B64-9980E51E913E}"/>
+              </a:ext>
+            </a:extLst>
+          </p:cNvPr>
+          <p:cNvPicPr>
+            <a:picLocks noChangeAspect="1"/>
+          </p:cNvPicPr>
+          <p:nvPr/>
+        </p:nvPicPr>
+        <p:blipFill>
+          <a:blip>
+            <a:extLst>
+              <a:ext uri="{96DAC541-7B7A-43D3-8B79-37D633B846F1}">
+                <asvg:svgBlip xmlns:asvg="http://schemas.microsoft.com/office/drawing/2016/SVG/main" r:embed="rId4"/>
+              </a:ext>
+            </a:extLst>
+          </a:blip>
+          <a:stretch>
+            <a:fillRect/>
+          </a:stretch>
+        </p:blipFill>
+        <p:spPr>
+          <a:xfrm>
+            <a:off x="4572000" y="483939"/>
+            <a:ext cx="460431" cy="460431"/>
+          </a:xfrm>
+          <a:prstGeom prst="rect">
+            <a:avLst/>
+          </a:prstGeom>
+        </p:spPr>
+      </p:pic>
+    </p:spTree>
+  </p:cSld>
+  <p:clrMapOvr>
+    <a:masterClrMapping/>
+  </p:clrMapOvr>
+</p:sld>
+</file>
+
+<file path=ppt/slides/slide11.xml><?xml version="1.0" encoding="utf-8"?>
 <p:sld xmlns:a="http://schemas.openxmlformats.org/drawingml/2006/main" xmlns:r="http://schemas.openxmlformats.org/officeDocument/2006/relationships" xmlns:p="http://schemas.openxmlformats.org/presentationml/2006/main">
   <p:cSld>
     <p:spTree>
@@ -14537,36 +16297,6 @@
       </p:sp>
       <p:pic>
         <p:nvPicPr>
-          <p:cNvPr id="2080" name="Рисунок 2079">
-            <a:extLst>
-              <a:ext uri="{FF2B5EF4-FFF2-40B4-BE49-F238E27FC236}">
-                <a16:creationId xmlns:a16="http://schemas.microsoft.com/office/drawing/2014/main" id="{7A3F7676-F424-8FF7-3492-3515716CF281}"/>
-              </a:ext>
-            </a:extLst>
-          </p:cNvPr>
-          <p:cNvPicPr>
-            <a:picLocks noChangeAspect="1"/>
-          </p:cNvPicPr>
-          <p:nvPr/>
-        </p:nvPicPr>
-        <p:blipFill>
-          <a:blip r:embed="rId3"/>
-          <a:stretch>
-            <a:fillRect/>
-          </a:stretch>
-        </p:blipFill>
-        <p:spPr>
-          <a:xfrm>
-            <a:off x="1076892" y="1889662"/>
-            <a:ext cx="5249047" cy="2839816"/>
-          </a:xfrm>
-          <a:prstGeom prst="rect">
-            <a:avLst/>
-          </a:prstGeom>
-        </p:spPr>
-      </p:pic>
-      <p:pic>
-        <p:nvPicPr>
           <p:cNvPr id="6" name="Рисунок 5">
             <a:extLst>
               <a:ext uri="{FF2B5EF4-FFF2-40B4-BE49-F238E27FC236}">
@@ -14580,10 +16310,10 @@
           <p:nvPr/>
         </p:nvPicPr>
         <p:blipFill>
-          <a:blip r:embed="rId4">
+          <a:blip>
             <a:extLst>
               <a:ext uri="{96DAC541-7B7A-43D3-8B79-37D633B846F1}">
-                <asvg:svgBlip xmlns:asvg="http://schemas.microsoft.com/office/drawing/2016/SVG/main" r:embed="rId5"/>
+                <asvg:svgBlip xmlns:asvg="http://schemas.microsoft.com/office/drawing/2016/SVG/main" r:embed="rId3"/>
               </a:ext>
             </a:extLst>
           </a:blip>
@@ -14601,6 +16331,36 @@
           </a:prstGeom>
         </p:spPr>
       </p:pic>
+      <p:pic>
+        <p:nvPicPr>
+          <p:cNvPr id="3" name="Рисунок 2">
+            <a:extLst>
+              <a:ext uri="{FF2B5EF4-FFF2-40B4-BE49-F238E27FC236}">
+                <a16:creationId xmlns:a16="http://schemas.microsoft.com/office/drawing/2014/main" id="{F40DA8A4-C6EC-0DB7-92AE-1735BFFF600D}"/>
+              </a:ext>
+            </a:extLst>
+          </p:cNvPr>
+          <p:cNvPicPr>
+            <a:picLocks noChangeAspect="1"/>
+          </p:cNvPicPr>
+          <p:nvPr/>
+        </p:nvPicPr>
+        <p:blipFill>
+          <a:blip r:embed="rId4"/>
+          <a:stretch>
+            <a:fillRect/>
+          </a:stretch>
+        </p:blipFill>
+        <p:spPr>
+          <a:xfrm>
+            <a:off x="938500" y="1862053"/>
+            <a:ext cx="5515745" cy="2867425"/>
+          </a:xfrm>
+          <a:prstGeom prst="rect">
+            <a:avLst/>
+          </a:prstGeom>
+        </p:spPr>
+      </p:pic>
     </p:spTree>
   </p:cSld>
   <p:clrMapOvr>
@@ -14609,7 +16369,7 @@
 </p:sld>
 </file>
 
-<file path=ppt/slides/slide11.xml><?xml version="1.0" encoding="utf-8"?>
+<file path=ppt/slides/slide12.xml><?xml version="1.0" encoding="utf-8"?>
 <p:sld xmlns:a="http://schemas.openxmlformats.org/drawingml/2006/main" xmlns:r="http://schemas.openxmlformats.org/officeDocument/2006/relationships" xmlns:p="http://schemas.openxmlformats.org/presentationml/2006/main">
   <p:cSld>
     <p:spTree>
@@ -14680,7 +16440,7 @@
         </p:nvSpPr>
         <p:spPr>
           <a:xfrm>
-            <a:off x="313454" y="1076715"/>
+            <a:off x="318172" y="1181004"/>
             <a:ext cx="4922786" cy="2781491"/>
           </a:xfrm>
           <a:prstGeom prst="rect">
@@ -14693,57 +16453,70 @@
           </a:bodyPr>
           <a:lstStyle/>
           <a:p>
-            <a:pPr>
+            <a:pPr lvl="0">
               <a:lnSpc>
                 <a:spcPct val="150000"/>
               </a:lnSpc>
             </a:pPr>
             <a:r>
               <a:rPr lang="ru-RU" dirty="0"/>
-              <a:t>Создана полнофункциональная клиент-серверная система</a:t>
-            </a:r>
-            <a:r>
-              <a:rPr lang="en-US" dirty="0"/>
-              <a:t> </a:t>
-            </a:r>
-            <a:r>
-              <a:rPr lang="ru-RU" dirty="0"/>
-              <a:t>для кафе.</a:t>
+              <a:t>Готовая автоматизированная система</a:t>
             </a:r>
           </a:p>
           <a:p>
-            <a:pPr>
+            <a:pPr lvl="0">
               <a:lnSpc>
                 <a:spcPct val="150000"/>
               </a:lnSpc>
             </a:pPr>
             <a:r>
               <a:rPr lang="ru-RU" dirty="0"/>
-              <a:t>Обеспечена безопасность данных и разграничение ролей доступа.</a:t>
+              <a:t>Доступная альтернатива iiko и R-Keeper</a:t>
             </a:r>
           </a:p>
           <a:p>
-            <a:pPr>
+            <a:pPr lvl="0">
               <a:lnSpc>
                 <a:spcPct val="150000"/>
               </a:lnSpc>
             </a:pPr>
             <a:r>
               <a:rPr lang="ru-RU" dirty="0"/>
-              <a:t>Система готова к масштабированию и развертыванию в изолированной среде через Docker.</a:t>
+              <a:t>Многослойная архитектура (N-Layer)</a:t>
             </a:r>
           </a:p>
           <a:p>
-            <a:pPr marL="457200" lvl="0" indent="-317500" algn="l" rtl="0">
-              <a:spcBef>
-                <a:spcPts val="0"/>
-              </a:spcBef>
-              <a:spcAft>
-                <a:spcPts val="0"/>
-              </a:spcAft>
-              <a:buSzPts val="1400"/>
-              <a:buChar char="●"/>
+            <a:pPr lvl="0">
+              <a:lnSpc>
+                <a:spcPct val="150000"/>
+              </a:lnSpc>
             </a:pPr>
+            <a:r>
+              <a:rPr lang="ru-RU" dirty="0"/>
+              <a:t>Надежная дата-логика</a:t>
+            </a:r>
+          </a:p>
+          <a:p>
+            <a:pPr lvl="0">
+              <a:lnSpc>
+                <a:spcPct val="150000"/>
+              </a:lnSpc>
+            </a:pPr>
+            <a:r>
+              <a:rPr lang="ru-RU" dirty="0"/>
+              <a:t>Безопасность и асинхронность</a:t>
+            </a:r>
+          </a:p>
+          <a:p>
+            <a:pPr lvl="0">
+              <a:lnSpc>
+                <a:spcPct val="150000"/>
+              </a:lnSpc>
+            </a:pPr>
+            <a:r>
+              <a:rPr lang="ru-RU" dirty="0"/>
+              <a:t>Легкий деплой и авто тесты</a:t>
+            </a:r>
             <a:endParaRPr dirty="0"/>
           </a:p>
         </p:txBody>
@@ -14796,10 +16569,10 @@
           <p:nvPr/>
         </p:nvPicPr>
         <p:blipFill>
-          <a:blip r:embed="rId3">
+          <a:blip>
             <a:extLst>
               <a:ext uri="{96DAC541-7B7A-43D3-8B79-37D633B846F1}">
-                <asvg:svgBlip xmlns:asvg="http://schemas.microsoft.com/office/drawing/2016/SVG/main" r:embed="rId4"/>
+                <asvg:svgBlip xmlns:asvg="http://schemas.microsoft.com/office/drawing/2016/SVG/main" r:embed="rId3"/>
               </a:ext>
             </a:extLst>
           </a:blip>
@@ -14809,8 +16582,8 @@
         </p:blipFill>
         <p:spPr>
           <a:xfrm>
-            <a:off x="5630146" y="1190726"/>
-            <a:ext cx="3049727" cy="3049727"/>
+            <a:off x="6364436" y="2645454"/>
+            <a:ext cx="1705836" cy="1705836"/>
           </a:xfrm>
           <a:prstGeom prst="rect">
             <a:avLst/>
@@ -14874,10 +16647,10 @@
       </p:sp>
       <p:pic>
         <p:nvPicPr>
-          <p:cNvPr id="14" name="Рисунок 13">
+          <p:cNvPr id="5" name="Рисунок 4">
             <a:extLst>
               <a:ext uri="{FF2B5EF4-FFF2-40B4-BE49-F238E27FC236}">
-                <a16:creationId xmlns:a16="http://schemas.microsoft.com/office/drawing/2014/main" id="{321AFF81-7EF6-7F7E-16C7-D17759EABFBC}"/>
+                <a16:creationId xmlns:a16="http://schemas.microsoft.com/office/drawing/2014/main" id="{9E818D66-3306-F5F4-CE34-35AFEB2F7604}"/>
               </a:ext>
             </a:extLst>
           </p:cNvPr>
@@ -14887,22 +16660,209 @@
           <p:nvPr/>
         </p:nvPicPr>
         <p:blipFill>
-          <a:blip r:embed="rId5"/>
+          <a:blip>
+            <a:extLst>
+              <a:ext uri="{96DAC541-7B7A-43D3-8B79-37D633B846F1}">
+                <asvg:svgBlip xmlns:asvg="http://schemas.microsoft.com/office/drawing/2016/SVG/main" r:embed="rId4"/>
+              </a:ext>
+            </a:extLst>
+          </a:blip>
           <a:stretch>
             <a:fillRect/>
           </a:stretch>
         </p:blipFill>
         <p:spPr>
           <a:xfrm>
-            <a:off x="7498246" y="706259"/>
-            <a:ext cx="1181627" cy="484467"/>
+            <a:off x="6411964" y="237624"/>
+            <a:ext cx="1705836" cy="1705836"/>
           </a:xfrm>
           <a:prstGeom prst="rect">
             <a:avLst/>
           </a:prstGeom>
         </p:spPr>
       </p:pic>
+      <p:sp>
+        <p:nvSpPr>
+          <p:cNvPr id="7" name="TextBox 6">
+            <a:extLst>
+              <a:ext uri="{FF2B5EF4-FFF2-40B4-BE49-F238E27FC236}">
+                <a16:creationId xmlns:a16="http://schemas.microsoft.com/office/drawing/2014/main" id="{87016984-BBD0-D6B2-7F2E-55DFF0DAAC61}"/>
+              </a:ext>
+            </a:extLst>
+          </p:cNvPr>
+          <p:cNvSpPr txBox="1"/>
+          <p:nvPr/>
+        </p:nvSpPr>
+        <p:spPr>
+          <a:xfrm>
+            <a:off x="6218625" y="2010026"/>
+            <a:ext cx="1997457" cy="338554"/>
+          </a:xfrm>
+          <a:prstGeom prst="rect">
+            <a:avLst/>
+          </a:prstGeom>
+          <a:noFill/>
+        </p:spPr>
+        <p:txBody>
+          <a:bodyPr wrap="square" rtlCol="0">
+            <a:spAutoFit/>
+          </a:bodyPr>
+          <a:lstStyle/>
+          <a:p>
+            <a:r>
+              <a:rPr lang="ru-RU" sz="1600" b="1" dirty="0">
+                <a:solidFill>
+                  <a:schemeClr val="bg1"/>
+                </a:solidFill>
+                <a:latin typeface="Montserrat ExtraBold" panose="00000900000000000000" pitchFamily="2" charset="-52"/>
+              </a:rPr>
+              <a:t>Мое портфолио</a:t>
+            </a:r>
+          </a:p>
+        </p:txBody>
+      </p:sp>
     </p:spTree>
+  </p:cSld>
+  <p:clrMapOvr>
+    <a:masterClrMapping/>
+  </p:clrMapOvr>
+</p:sld>
+</file>
+
+<file path=ppt/slides/slide13.xml><?xml version="1.0" encoding="utf-8"?>
+<p:sld xmlns:a="http://schemas.openxmlformats.org/drawingml/2006/main" xmlns:r="http://schemas.openxmlformats.org/officeDocument/2006/relationships" xmlns:p="http://schemas.openxmlformats.org/presentationml/2006/main">
+  <p:cSld>
+    <p:spTree>
+      <p:nvGrpSpPr>
+        <p:cNvPr id="1" name=""/>
+        <p:cNvGrpSpPr/>
+        <p:nvPr/>
+      </p:nvGrpSpPr>
+      <p:grpSpPr>
+        <a:xfrm>
+          <a:off x="0" y="0"/>
+          <a:ext cx="0" cy="0"/>
+          <a:chOff x="0" y="0"/>
+          <a:chExt cx="0" cy="0"/>
+        </a:xfrm>
+      </p:grpSpPr>
+      <p:sp>
+        <p:nvSpPr>
+          <p:cNvPr id="2" name="Заголовок 1">
+            <a:extLst>
+              <a:ext uri="{FF2B5EF4-FFF2-40B4-BE49-F238E27FC236}">
+                <a16:creationId xmlns:a16="http://schemas.microsoft.com/office/drawing/2014/main" id="{B03029F4-8831-05D2-566C-110313EDAD81}"/>
+              </a:ext>
+            </a:extLst>
+          </p:cNvPr>
+          <p:cNvSpPr>
+            <a:spLocks noGrp="1"/>
+          </p:cNvSpPr>
+          <p:nvPr>
+            <p:ph type="title"/>
+          </p:nvPr>
+        </p:nvSpPr>
+        <p:spPr/>
+        <p:txBody>
+          <a:bodyPr/>
+          <a:lstStyle/>
+          <a:p>
+            <a:r>
+              <a:rPr lang="ru-RU" dirty="0"/>
+              <a:t>Возможное улучшение проекта:</a:t>
+            </a:r>
+          </a:p>
+        </p:txBody>
+      </p:sp>
+      <p:sp>
+        <p:nvSpPr>
+          <p:cNvPr id="3" name="Текст 2">
+            <a:extLst>
+              <a:ext uri="{FF2B5EF4-FFF2-40B4-BE49-F238E27FC236}">
+                <a16:creationId xmlns:a16="http://schemas.microsoft.com/office/drawing/2014/main" id="{E0958228-D502-F783-4E2A-2107FB9DA6EF}"/>
+              </a:ext>
+            </a:extLst>
+          </p:cNvPr>
+          <p:cNvSpPr>
+            <a:spLocks noGrp="1"/>
+          </p:cNvSpPr>
+          <p:nvPr>
+            <p:ph type="body" idx="1"/>
+          </p:nvPr>
+        </p:nvSpPr>
+        <p:spPr>
+          <a:xfrm>
+            <a:off x="938500" y="1645421"/>
+            <a:ext cx="5185209" cy="3189816"/>
+          </a:xfrm>
+        </p:spPr>
+        <p:txBody>
+          <a:bodyPr/>
+          <a:lstStyle/>
+          <a:p>
+            <a:pPr>
+              <a:lnSpc>
+                <a:spcPct val="150000"/>
+              </a:lnSpc>
+            </a:pPr>
+            <a:r>
+              <a:rPr lang="ru-RU" dirty="0"/>
+              <a:t>Проведение тестирования на реальных </a:t>
+            </a:r>
+            <a:r>
+              <a:rPr lang="en-US" dirty="0"/>
+              <a:t>POS – </a:t>
+            </a:r>
+            <a:r>
+              <a:rPr lang="ru-RU" dirty="0"/>
+              <a:t>терминалах.</a:t>
+            </a:r>
+          </a:p>
+          <a:p>
+            <a:pPr>
+              <a:lnSpc>
+                <a:spcPct val="150000"/>
+              </a:lnSpc>
+            </a:pPr>
+            <a:r>
+              <a:rPr lang="ru-RU" dirty="0"/>
+              <a:t>Разработка мобильного приложения и сайта для кафе.</a:t>
+            </a:r>
+          </a:p>
+          <a:p>
+            <a:pPr>
+              <a:lnSpc>
+                <a:spcPct val="150000"/>
+              </a:lnSpc>
+            </a:pPr>
+            <a:r>
+              <a:rPr lang="ru-RU" dirty="0"/>
+              <a:t>Переход на реляционную базу данных </a:t>
+            </a:r>
+            <a:r>
+              <a:rPr lang="en-US" dirty="0"/>
+              <a:t>PostgreSQL.</a:t>
+            </a:r>
+          </a:p>
+          <a:p>
+            <a:pPr>
+              <a:lnSpc>
+                <a:spcPct val="150000"/>
+              </a:lnSpc>
+            </a:pPr>
+            <a:r>
+              <a:rPr lang="ru-RU" dirty="0"/>
+              <a:t>Создание дополнительного сервиса для управления клиентами и решения их проблем</a:t>
+            </a:r>
+          </a:p>
+        </p:txBody>
+      </p:sp>
+    </p:spTree>
+    <p:extLst>
+      <p:ext uri="{BB962C8B-B14F-4D97-AF65-F5344CB8AC3E}">
+        <p14:creationId xmlns:p14="http://schemas.microsoft.com/office/powerpoint/2010/main" val="3573228695"/>
+      </p:ext>
+    </p:extLst>
   </p:cSld>
   <p:clrMapOvr>
     <a:masterClrMapping/>
@@ -15013,7 +16973,7 @@
             </a:r>
             <a:r>
               <a:rPr lang="ru-RU" sz="1600" dirty="0"/>
-              <a:t> Ручной учет заказов (блокноты) приводит к ошибкам и воровству. Высокая конкуренция требует скорости обслуживания.</a:t>
+              <a:t> Ручной учет заказов приводит к ошибкам и воровству. Высокая конкуренция требует скорости обслуживания.</a:t>
             </a:r>
           </a:p>
           <a:p>
@@ -15404,7 +17364,7 @@
                   <a:schemeClr val="accent1"/>
                 </a:solidFill>
               </a:rPr>
-              <a:t>ЦЕЛИ ПРОЕКТА</a:t>
+              <a:t>ЦЕЛЬ ПРОЕКТА</a:t>
             </a:r>
             <a:endParaRPr lang="en-US" dirty="0">
               <a:solidFill>
@@ -15429,7 +17389,7 @@
         <p:spPr>
           <a:xfrm>
             <a:off x="1918855" y="1771531"/>
-            <a:ext cx="5624946" cy="1600438"/>
+            <a:ext cx="5624946" cy="1785104"/>
           </a:xfrm>
           <a:prstGeom prst="rect">
             <a:avLst/>
@@ -15448,12 +17408,12 @@
               </a:lnSpc>
             </a:pPr>
             <a:r>
-              <a:rPr lang="ru-RU" dirty="0">
+              <a:rPr lang="ru-RU" sz="1600" dirty="0">
                 <a:solidFill>
                   <a:schemeClr val="bg1"/>
                 </a:solidFill>
               </a:rPr>
-              <a:t>Целью курсового проекта является разработка автоматизированной системы, состоящей из серверной части и клиентского приложения, для автоматизации обработки заказов в кафе.</a:t>
+              <a:t>Целью дипломного проекта является разработка автоматизированной системы, состоящей из серверной части и клиентского приложения, для автоматизации обработки заказов в кафе.</a:t>
             </a:r>
           </a:p>
           <a:p>
@@ -15543,7 +17503,7 @@
         </p:nvSpPr>
         <p:spPr>
           <a:xfrm>
-            <a:off x="696260" y="2129076"/>
+            <a:off x="744751" y="1374584"/>
             <a:ext cx="174386" cy="495921"/>
           </a:xfrm>
           <a:prstGeom prst="rect">
@@ -15585,7 +17545,7 @@
         </p:nvSpPr>
         <p:spPr>
           <a:xfrm>
-            <a:off x="1493899" y="2845437"/>
+            <a:off x="1479464" y="2011044"/>
             <a:ext cx="1403172" cy="492096"/>
           </a:xfrm>
           <a:prstGeom prst="rect">
@@ -15634,8 +17594,8 @@
         </p:nvSpPr>
         <p:spPr>
           <a:xfrm>
-            <a:off x="2848424" y="2636156"/>
-            <a:ext cx="1374236" cy="690086"/>
+            <a:off x="2883081" y="1862350"/>
+            <a:ext cx="1336721" cy="690086"/>
           </a:xfrm>
           <a:prstGeom prst="rect">
             <a:avLst/>
@@ -15676,7 +17636,7 @@
         </p:nvSpPr>
         <p:spPr>
           <a:xfrm>
-            <a:off x="2902675" y="3368911"/>
+            <a:off x="2867291" y="2614418"/>
             <a:ext cx="1384185" cy="1110275"/>
           </a:xfrm>
           <a:prstGeom prst="rect">
@@ -15714,8 +17674,8 @@
         </p:nvSpPr>
         <p:spPr>
           <a:xfrm>
-            <a:off x="-25017" y="2727703"/>
-            <a:ext cx="1603822" cy="577377"/>
+            <a:off x="3371" y="1924260"/>
+            <a:ext cx="1516241" cy="577377"/>
           </a:xfrm>
           <a:prstGeom prst="rect">
             <a:avLst/>
@@ -15756,7 +17716,7 @@
         </p:nvSpPr>
         <p:spPr>
           <a:xfrm>
-            <a:off x="30777" y="3352121"/>
+            <a:off x="-25312" y="2583041"/>
             <a:ext cx="1548028" cy="1022180"/>
           </a:xfrm>
           <a:prstGeom prst="rect">
@@ -15794,7 +17754,7 @@
         </p:nvSpPr>
         <p:spPr>
           <a:xfrm>
-            <a:off x="2041002" y="2129076"/>
+            <a:off x="2026568" y="1376087"/>
             <a:ext cx="236339" cy="495921"/>
           </a:xfrm>
           <a:prstGeom prst="rect">
@@ -15836,7 +17796,7 @@
         </p:nvSpPr>
         <p:spPr>
           <a:xfrm>
-            <a:off x="3466255" y="2139120"/>
+            <a:off x="3430871" y="1384627"/>
             <a:ext cx="236341" cy="485745"/>
           </a:xfrm>
           <a:prstGeom prst="rect">
@@ -15876,7 +17836,7 @@
         </p:nvCxnSpPr>
         <p:spPr>
           <a:xfrm>
-            <a:off x="696335" y="2624997"/>
+            <a:off x="744826" y="1870505"/>
             <a:ext cx="236339" cy="0"/>
           </a:xfrm>
           <a:prstGeom prst="straightConnector1">
@@ -15911,7 +17871,7 @@
         </p:nvCxnSpPr>
         <p:spPr>
           <a:xfrm>
-            <a:off x="2059484" y="2615988"/>
+            <a:off x="2045050" y="1862999"/>
             <a:ext cx="236339" cy="0"/>
           </a:xfrm>
           <a:prstGeom prst="straightConnector1">
@@ -15946,7 +17906,7 @@
         </p:nvCxnSpPr>
         <p:spPr>
           <a:xfrm>
-            <a:off x="3447773" y="2624997"/>
+            <a:off x="3412389" y="1870504"/>
             <a:ext cx="236339" cy="0"/>
           </a:xfrm>
           <a:prstGeom prst="straightConnector1">
@@ -15987,7 +17947,7 @@
         </p:nvSpPr>
         <p:spPr>
           <a:xfrm>
-            <a:off x="4256798" y="2685033"/>
+            <a:off x="4201737" y="1924260"/>
             <a:ext cx="1440371" cy="640871"/>
           </a:xfrm>
           <a:prstGeom prst="rect">
@@ -16274,7 +18234,7 @@
         </p:nvSpPr>
         <p:spPr>
           <a:xfrm>
-            <a:off x="4252522" y="3344827"/>
+            <a:off x="4210204" y="2593118"/>
             <a:ext cx="1549525" cy="1092922"/>
           </a:xfrm>
           <a:prstGeom prst="rect">
@@ -16569,7 +18529,7 @@
         </p:nvSpPr>
         <p:spPr>
           <a:xfrm>
-            <a:off x="4868993" y="1969215"/>
+            <a:off x="4826675" y="1217506"/>
             <a:ext cx="236340" cy="674381"/>
           </a:xfrm>
           <a:prstGeom prst="rect">
@@ -16856,7 +18816,7 @@
         </p:nvCxnSpPr>
         <p:spPr>
           <a:xfrm>
-            <a:off x="4868994" y="2643027"/>
+            <a:off x="4826676" y="1891318"/>
             <a:ext cx="236339" cy="0"/>
           </a:xfrm>
           <a:prstGeom prst="straightConnector1">
@@ -16897,7 +18857,7 @@
         </p:nvSpPr>
         <p:spPr>
           <a:xfrm>
-            <a:off x="5731308" y="2802265"/>
+            <a:off x="5616227" y="2045453"/>
             <a:ext cx="1819675" cy="495920"/>
           </a:xfrm>
           <a:prstGeom prst="rect">
@@ -17184,7 +19144,7 @@
         </p:nvSpPr>
         <p:spPr>
           <a:xfrm>
-            <a:off x="5824825" y="3368910"/>
+            <a:off x="5688348" y="2620520"/>
             <a:ext cx="1632639" cy="1110275"/>
           </a:xfrm>
           <a:prstGeom prst="rect">
@@ -17474,7 +19434,7 @@
         </p:nvSpPr>
         <p:spPr>
           <a:xfrm>
-            <a:off x="6530588" y="2129076"/>
+            <a:off x="6394111" y="1380686"/>
             <a:ext cx="236340" cy="495921"/>
           </a:xfrm>
           <a:prstGeom prst="rect">
@@ -17761,7 +19721,7 @@
         </p:nvCxnSpPr>
         <p:spPr>
           <a:xfrm>
-            <a:off x="6522977" y="2616427"/>
+            <a:off x="6386500" y="1868037"/>
             <a:ext cx="236339" cy="0"/>
           </a:xfrm>
           <a:prstGeom prst="straightConnector1">
@@ -17802,7 +19762,7 @@
         </p:nvSpPr>
         <p:spPr>
           <a:xfrm>
-            <a:off x="258386" y="1414475"/>
+            <a:off x="3010285" y="659983"/>
             <a:ext cx="2763000" cy="533254"/>
           </a:xfrm>
           <a:prstGeom prst="rect">
@@ -18071,7 +20031,7 @@
                   <a:schemeClr val="accent1"/>
                 </a:solidFill>
               </a:rPr>
-              <a:t>ЗАДАЧИ ПРОЕКТА</a:t>
+              <a:t>ЗАДАЧИ</a:t>
             </a:r>
             <a:endParaRPr lang="en-US" dirty="0">
               <a:solidFill>
@@ -18095,7 +20055,7 @@
         </p:nvCxnSpPr>
         <p:spPr>
           <a:xfrm>
-            <a:off x="244830" y="1825943"/>
+            <a:off x="2996729" y="1071451"/>
             <a:ext cx="2763000" cy="0"/>
           </a:xfrm>
           <a:prstGeom prst="straightConnector1">
@@ -18134,7 +20094,7 @@
         </p:nvSpPr>
         <p:spPr>
           <a:xfrm>
-            <a:off x="1413767" y="3386157"/>
+            <a:off x="1399333" y="2633168"/>
             <a:ext cx="1548027" cy="954107"/>
           </a:xfrm>
           <a:prstGeom prst="rect">
@@ -18177,8 +20137,8 @@
         </p:nvSpPr>
         <p:spPr>
           <a:xfrm>
-            <a:off x="7556860" y="2757178"/>
-            <a:ext cx="1322797" cy="495920"/>
+            <a:off x="7320987" y="1897907"/>
+            <a:ext cx="1868880" cy="495920"/>
           </a:xfrm>
           <a:prstGeom prst="rect">
             <a:avLst/>
@@ -18441,9 +20401,10 @@
           </a:lstStyle>
           <a:p>
             <a:r>
-              <a:rPr lang="en-US" sz="1600" dirty="0"/>
-              <a:t>Connect</a:t>
+              <a:rPr lang="ru-RU" sz="1600" dirty="0"/>
+              <a:t>Тестирование</a:t>
             </a:r>
+            <a:endParaRPr lang="en-US" sz="1600" dirty="0"/>
           </a:p>
         </p:txBody>
       </p:sp>
@@ -18463,8 +20424,8 @@
         </p:nvSpPr>
         <p:spPr>
           <a:xfrm>
-            <a:off x="7556860" y="3352121"/>
-            <a:ext cx="1384185" cy="1110275"/>
+            <a:off x="7317396" y="2501637"/>
+            <a:ext cx="1868878" cy="1110275"/>
           </a:xfrm>
           <a:prstGeom prst="rect">
             <a:avLst/>
@@ -18731,11 +20692,14 @@
               <a:rPr lang="ru-RU" dirty="0">
                 <a:latin typeface="Montserrat" panose="00000500000000000000" pitchFamily="2" charset="-52"/>
               </a:rPr>
-              <a:t>Реализовать связь между сервером и клиентом</a:t>
+              <a:t>Проведение интеграционного тестирования </a:t>
             </a:r>
-            <a:endParaRPr lang="en-US" dirty="0">
-              <a:latin typeface="Montserrat" panose="00000500000000000000" pitchFamily="2" charset="-52"/>
-            </a:endParaRPr>
+            <a:r>
+              <a:rPr lang="en-US" dirty="0">
+                <a:latin typeface="Montserrat" panose="00000500000000000000" pitchFamily="2" charset="-52"/>
+              </a:rPr>
+              <a:t>API</a:t>
+            </a:r>
           </a:p>
         </p:txBody>
       </p:sp>
@@ -18755,7 +20719,7 @@
         </p:nvSpPr>
         <p:spPr>
           <a:xfrm>
-            <a:off x="8100087" y="2129076"/>
+            <a:off x="8148578" y="1374584"/>
             <a:ext cx="236340" cy="495921"/>
           </a:xfrm>
           <a:prstGeom prst="rect">
@@ -19042,7 +21006,7 @@
         </p:nvCxnSpPr>
         <p:spPr>
           <a:xfrm>
-            <a:off x="8092476" y="2616427"/>
+            <a:off x="8140967" y="1861935"/>
             <a:ext cx="236339" cy="0"/>
           </a:xfrm>
           <a:prstGeom prst="straightConnector1">
@@ -19083,7 +21047,7 @@
         </p:nvCxnSpPr>
         <p:spPr>
           <a:xfrm>
-            <a:off x="7550983" y="2571750"/>
+            <a:off x="7328170" y="1805589"/>
             <a:ext cx="0" cy="1913537"/>
           </a:xfrm>
           <a:prstGeom prst="line">
@@ -19121,7 +21085,7 @@
         </p:nvCxnSpPr>
         <p:spPr>
           <a:xfrm>
-            <a:off x="5802047" y="2565648"/>
+            <a:off x="5759729" y="1794367"/>
             <a:ext cx="0" cy="1913537"/>
           </a:xfrm>
           <a:prstGeom prst="line">
@@ -19159,7 +21123,7 @@
         </p:nvCxnSpPr>
         <p:spPr>
           <a:xfrm>
-            <a:off x="4252522" y="2565647"/>
+            <a:off x="4218979" y="1805589"/>
             <a:ext cx="0" cy="1913537"/>
           </a:xfrm>
           <a:prstGeom prst="line">
@@ -19197,7 +21161,7 @@
         </p:nvCxnSpPr>
         <p:spPr>
           <a:xfrm>
-            <a:off x="2904254" y="2560081"/>
+            <a:off x="2891290" y="1805589"/>
             <a:ext cx="0" cy="1913537"/>
           </a:xfrm>
           <a:prstGeom prst="line">
@@ -19235,7 +21199,7 @@
         </p:nvCxnSpPr>
         <p:spPr>
           <a:xfrm>
-            <a:off x="1487227" y="2560081"/>
+            <a:off x="1462258" y="1805589"/>
             <a:ext cx="0" cy="1913537"/>
           </a:xfrm>
           <a:prstGeom prst="line">
@@ -19365,7 +21329,7 @@
         <p:spPr>
           <a:xfrm>
             <a:off x="4768745" y="1264597"/>
-            <a:ext cx="3944834" cy="2614305"/>
+            <a:ext cx="3944834" cy="3045193"/>
           </a:xfrm>
           <a:prstGeom prst="rect">
             <a:avLst/>
@@ -19478,6 +21442,61 @@
               </a:rPr>
               <a:t>База данных). </a:t>
             </a:r>
+            <a:endParaRPr lang="en-US" dirty="0">
+              <a:solidFill>
+                <a:schemeClr val="bg1"/>
+              </a:solidFill>
+              <a:latin typeface="Montserrat" panose="00000500000000000000" pitchFamily="2" charset="-52"/>
+            </a:endParaRPr>
+          </a:p>
+          <a:p>
+            <a:pPr>
+              <a:lnSpc>
+                <a:spcPct val="200000"/>
+              </a:lnSpc>
+            </a:pPr>
+            <a:r>
+              <a:rPr lang="en-US" b="1" dirty="0">
+                <a:solidFill>
+                  <a:schemeClr val="bg1"/>
+                </a:solidFill>
+                <a:latin typeface="Montserrat" panose="00000500000000000000" pitchFamily="2" charset="-52"/>
+              </a:rPr>
+              <a:t>NUnit</a:t>
+            </a:r>
+            <a:r>
+              <a:rPr lang="en-US" dirty="0">
+                <a:solidFill>
+                  <a:schemeClr val="bg1"/>
+                </a:solidFill>
+                <a:latin typeface="Montserrat" panose="00000500000000000000" pitchFamily="2" charset="-52"/>
+              </a:rPr>
+              <a:t> (</a:t>
+            </a:r>
+            <a:r>
+              <a:rPr lang="ru-RU" dirty="0">
+                <a:solidFill>
+                  <a:schemeClr val="bg1"/>
+                </a:solidFill>
+                <a:latin typeface="Montserrat" panose="00000500000000000000" pitchFamily="2" charset="-52"/>
+              </a:rPr>
+              <a:t>Фреймворк для тестов</a:t>
+            </a:r>
+            <a:r>
+              <a:rPr lang="en-US" dirty="0">
+                <a:solidFill>
+                  <a:schemeClr val="bg1"/>
+                </a:solidFill>
+                <a:latin typeface="Montserrat" panose="00000500000000000000" pitchFamily="2" charset="-52"/>
+              </a:rPr>
+              <a:t>)</a:t>
+            </a:r>
+            <a:endParaRPr lang="ru-RU" dirty="0">
+              <a:solidFill>
+                <a:schemeClr val="bg1"/>
+              </a:solidFill>
+              <a:latin typeface="Montserrat" panose="00000500000000000000" pitchFamily="2" charset="-52"/>
+            </a:endParaRPr>
           </a:p>
           <a:p>
             <a:pPr>
@@ -19607,10 +21626,10 @@
           <p:nvPr/>
         </p:nvPicPr>
         <p:blipFill>
-          <a:blip r:embed="rId3">
+          <a:blip>
             <a:extLst>
               <a:ext uri="{96DAC541-7B7A-43D3-8B79-37D633B846F1}">
-                <asvg:svgBlip xmlns:asvg="http://schemas.microsoft.com/office/drawing/2016/SVG/main" r:embed="rId4"/>
+                <asvg:svgBlip xmlns:asvg="http://schemas.microsoft.com/office/drawing/2016/SVG/main" r:embed="rId3"/>
               </a:ext>
             </a:extLst>
           </a:blip>
@@ -19643,10 +21662,10 @@
           <p:nvPr/>
         </p:nvPicPr>
         <p:blipFill>
-          <a:blip r:embed="rId5">
+          <a:blip>
             <a:extLst>
               <a:ext uri="{96DAC541-7B7A-43D3-8B79-37D633B846F1}">
-                <asvg:svgBlip xmlns:asvg="http://schemas.microsoft.com/office/drawing/2016/SVG/main" r:embed="rId6"/>
+                <asvg:svgBlip xmlns:asvg="http://schemas.microsoft.com/office/drawing/2016/SVG/main" r:embed="rId4"/>
               </a:ext>
             </a:extLst>
           </a:blip>
@@ -19656,7 +21675,7 @@
         </p:blipFill>
         <p:spPr>
           <a:xfrm>
-            <a:off x="2970260" y="824345"/>
+            <a:off x="3526751" y="888133"/>
             <a:ext cx="1050637" cy="1050637"/>
           </a:xfrm>
           <a:prstGeom prst="rect">
@@ -19679,10 +21698,10 @@
           <p:nvPr/>
         </p:nvPicPr>
         <p:blipFill>
-          <a:blip r:embed="rId7">
+          <a:blip>
             <a:extLst>
               <a:ext uri="{96DAC541-7B7A-43D3-8B79-37D633B846F1}">
-                <asvg:svgBlip xmlns:asvg="http://schemas.microsoft.com/office/drawing/2016/SVG/main" r:embed="rId8"/>
+                <asvg:svgBlip xmlns:asvg="http://schemas.microsoft.com/office/drawing/2016/SVG/main" r:embed="rId5"/>
               </a:ext>
             </a:extLst>
           </a:blip>
@@ -19692,7 +21711,7 @@
         </p:blipFill>
         <p:spPr>
           <a:xfrm>
-            <a:off x="190336" y="3268519"/>
+            <a:off x="221862" y="3116983"/>
             <a:ext cx="4279729" cy="973666"/>
           </a:xfrm>
           <a:prstGeom prst="rect">
@@ -19715,10 +21734,10 @@
           <p:nvPr/>
         </p:nvPicPr>
         <p:blipFill>
-          <a:blip r:embed="rId9">
+          <a:blip>
             <a:extLst>
               <a:ext uri="{96DAC541-7B7A-43D3-8B79-37D633B846F1}">
-                <asvg:svgBlip xmlns:asvg="http://schemas.microsoft.com/office/drawing/2016/SVG/main" r:embed="rId10"/>
+                <asvg:svgBlip xmlns:asvg="http://schemas.microsoft.com/office/drawing/2016/SVG/main" r:embed="rId6"/>
               </a:ext>
             </a:extLst>
           </a:blip>
@@ -19728,8 +21747,38 @@
         </p:blipFill>
         <p:spPr>
           <a:xfrm>
-            <a:off x="3039918" y="2079529"/>
+            <a:off x="2361727" y="926617"/>
             <a:ext cx="973667" cy="973667"/>
+          </a:xfrm>
+          <a:prstGeom prst="rect">
+            <a:avLst/>
+          </a:prstGeom>
+        </p:spPr>
+      </p:pic>
+      <p:pic>
+        <p:nvPicPr>
+          <p:cNvPr id="6" name="Рисунок 5">
+            <a:extLst>
+              <a:ext uri="{FF2B5EF4-FFF2-40B4-BE49-F238E27FC236}">
+                <a16:creationId xmlns:a16="http://schemas.microsoft.com/office/drawing/2014/main" id="{47E885B6-D6C4-8600-486E-7D6844F93B8F}"/>
+              </a:ext>
+            </a:extLst>
+          </p:cNvPr>
+          <p:cNvPicPr>
+            <a:picLocks noChangeAspect="1"/>
+          </p:cNvPicPr>
+          <p:nvPr/>
+        </p:nvPicPr>
+        <p:blipFill>
+          <a:blip r:embed="rId7"/>
+          <a:stretch>
+            <a:fillRect/>
+          </a:stretch>
+        </p:blipFill>
+        <p:spPr>
+          <a:xfrm>
+            <a:off x="2546227" y="2179193"/>
+            <a:ext cx="1904826" cy="735852"/>
           </a:xfrm>
           <a:prstGeom prst="rect">
             <a:avLst/>
@@ -19830,66 +21879,6 @@
       </p:cxnSp>
       <p:pic>
         <p:nvPicPr>
-          <p:cNvPr id="15" name="Рисунок 14" descr="Изображение выглядит как текст, снимок экрана, диаграмма, число&#10;&#10;Содержимое, созданное искусственным интеллектом, может быть неверным.">
-            <a:extLst>
-              <a:ext uri="{FF2B5EF4-FFF2-40B4-BE49-F238E27FC236}">
-                <a16:creationId xmlns:a16="http://schemas.microsoft.com/office/drawing/2014/main" id="{290F61C7-2CD7-EC10-078E-27AC0DFAF12C}"/>
-              </a:ext>
-            </a:extLst>
-          </p:cNvPr>
-          <p:cNvPicPr>
-            <a:picLocks noChangeAspect="1"/>
-          </p:cNvPicPr>
-          <p:nvPr/>
-        </p:nvPicPr>
-        <p:blipFill>
-          <a:blip r:embed="rId3"/>
-          <a:stretch>
-            <a:fillRect/>
-          </a:stretch>
-        </p:blipFill>
-        <p:spPr>
-          <a:xfrm>
-            <a:off x="1026200" y="1297097"/>
-            <a:ext cx="7017672" cy="3401378"/>
-          </a:xfrm>
-          <a:prstGeom prst="rect">
-            <a:avLst/>
-          </a:prstGeom>
-          <a:solidFill>
-            <a:srgbClr val="FFFFFF">
-              <a:shade val="85000"/>
-            </a:srgbClr>
-          </a:solidFill>
-          <a:ln w="88900" cap="sq">
-            <a:solidFill>
-              <a:srgbClr val="FFFFFF"/>
-            </a:solidFill>
-            <a:miter lim="800000"/>
-          </a:ln>
-          <a:effectLst>
-            <a:outerShdw blurRad="55000" dist="18000" dir="5400000" algn="tl" rotWithShape="0">
-              <a:srgbClr val="000000">
-                <a:alpha val="40000"/>
-              </a:srgbClr>
-            </a:outerShdw>
-          </a:effectLst>
-          <a:scene3d>
-            <a:camera prst="orthographicFront"/>
-            <a:lightRig rig="twoPt" dir="t">
-              <a:rot lat="0" lon="0" rev="7200000"/>
-            </a:lightRig>
-          </a:scene3d>
-          <a:sp3d>
-            <a:bevelT w="25400" h="19050"/>
-            <a:contourClr>
-              <a:srgbClr val="FFFFFF"/>
-            </a:contourClr>
-          </a:sp3d>
-        </p:spPr>
-      </p:pic>
-      <p:pic>
-        <p:nvPicPr>
           <p:cNvPr id="2" name="Рисунок 1">
             <a:extLst>
               <a:ext uri="{FF2B5EF4-FFF2-40B4-BE49-F238E27FC236}">
@@ -19903,10 +21892,10 @@
           <p:nvPr/>
         </p:nvPicPr>
         <p:blipFill>
-          <a:blip r:embed="rId4">
+          <a:blip>
             <a:extLst>
               <a:ext uri="{96DAC541-7B7A-43D3-8B79-37D633B846F1}">
-                <asvg:svgBlip xmlns:asvg="http://schemas.microsoft.com/office/drawing/2016/SVG/main" r:embed="rId5"/>
+                <asvg:svgBlip xmlns:asvg="http://schemas.microsoft.com/office/drawing/2016/SVG/main" r:embed="rId3"/>
               </a:ext>
             </a:extLst>
           </a:blip>
@@ -19918,6 +21907,36 @@
           <a:xfrm>
             <a:off x="5309181" y="516833"/>
             <a:ext cx="398892" cy="398892"/>
+          </a:xfrm>
+          <a:prstGeom prst="rect">
+            <a:avLst/>
+          </a:prstGeom>
+        </p:spPr>
+      </p:pic>
+      <p:pic>
+        <p:nvPicPr>
+          <p:cNvPr id="4" name="Рисунок 3">
+            <a:extLst>
+              <a:ext uri="{FF2B5EF4-FFF2-40B4-BE49-F238E27FC236}">
+                <a16:creationId xmlns:a16="http://schemas.microsoft.com/office/drawing/2014/main" id="{2C2B8D57-76BF-D552-871A-FC74D5088FE5}"/>
+              </a:ext>
+            </a:extLst>
+          </p:cNvPr>
+          <p:cNvPicPr>
+            <a:picLocks noChangeAspect="1"/>
+          </p:cNvPicPr>
+          <p:nvPr/>
+        </p:nvPicPr>
+        <p:blipFill>
+          <a:blip r:embed="rId4"/>
+          <a:stretch>
+            <a:fillRect/>
+          </a:stretch>
+        </p:blipFill>
+        <p:spPr>
+          <a:xfrm>
+            <a:off x="606791" y="1049127"/>
+            <a:ext cx="7930417" cy="3577540"/>
           </a:xfrm>
           <a:prstGeom prst="rect">
             <a:avLst/>
@@ -22091,98 +24110,80 @@
               </a:lnSpc>
             </a:pPr>
             <a:r>
-              <a:rPr lang="ru-RU" b="1" dirty="0">
+              <a:rPr lang="ru-RU" dirty="0">
                 <a:solidFill>
                   <a:schemeClr val="bg1"/>
                 </a:solidFill>
               </a:rPr>
               <a:t>Используется N-Layer архитектура:</a:t>
             </a:r>
-            <a:endParaRPr lang="en-US" b="1" dirty="0">
+            <a:endParaRPr lang="en-US" dirty="0">
               <a:solidFill>
                 <a:schemeClr val="bg1"/>
               </a:solidFill>
             </a:endParaRPr>
           </a:p>
           <a:p>
-            <a:pPr marL="180000" lvl="3">
+            <a:pPr marL="465750" lvl="3" indent="-285750">
               <a:lnSpc>
                 <a:spcPct val="150000"/>
               </a:lnSpc>
+              <a:buFont typeface="Wingdings" panose="05000000000000000000" pitchFamily="2" charset="2"/>
+              <a:buChar char="§"/>
             </a:pPr>
             <a:r>
-              <a:rPr lang="en-US" b="1" dirty="0">
-                <a:solidFill>
-                  <a:schemeClr val="bg1"/>
-                </a:solidFill>
-              </a:rPr>
-              <a:t>1. </a:t>
-            </a:r>
-            <a:r>
-              <a:rPr lang="ru-RU" b="1" dirty="0">
+              <a:rPr lang="ru-RU" dirty="0">
                 <a:solidFill>
                   <a:schemeClr val="bg1"/>
                 </a:solidFill>
               </a:rPr>
               <a:t>Контроллеры</a:t>
             </a:r>
-            <a:endParaRPr lang="en-US" b="1" dirty="0">
+            <a:endParaRPr lang="en-US" dirty="0">
               <a:solidFill>
                 <a:schemeClr val="bg1"/>
               </a:solidFill>
             </a:endParaRPr>
           </a:p>
           <a:p>
-            <a:pPr marL="180000" lvl="3">
+            <a:pPr marL="465750" lvl="3" indent="-285750">
               <a:lnSpc>
                 <a:spcPct val="150000"/>
               </a:lnSpc>
+              <a:buFont typeface="Wingdings" panose="05000000000000000000" pitchFamily="2" charset="2"/>
+              <a:buChar char="§"/>
             </a:pPr>
             <a:r>
-              <a:rPr lang="en-US" b="1" dirty="0">
-                <a:solidFill>
-                  <a:schemeClr val="bg1"/>
-                </a:solidFill>
-              </a:rPr>
-              <a:t>2. </a:t>
-            </a:r>
-            <a:r>
-              <a:rPr lang="ru-RU" b="1" dirty="0">
+              <a:rPr lang="ru-RU" dirty="0">
                 <a:solidFill>
                   <a:schemeClr val="bg1"/>
                 </a:solidFill>
               </a:rPr>
               <a:t>Сервисы</a:t>
             </a:r>
-            <a:endParaRPr lang="en-US" b="1" dirty="0">
+            <a:endParaRPr lang="en-US" dirty="0">
               <a:solidFill>
                 <a:schemeClr val="bg1"/>
               </a:solidFill>
             </a:endParaRPr>
           </a:p>
           <a:p>
-            <a:pPr marL="180000" lvl="3">
+            <a:pPr marL="465750" lvl="3" indent="-285750">
               <a:lnSpc>
                 <a:spcPct val="150000"/>
               </a:lnSpc>
+              <a:buFont typeface="Wingdings" panose="05000000000000000000" pitchFamily="2" charset="2"/>
+              <a:buChar char="§"/>
             </a:pPr>
             <a:r>
-              <a:rPr lang="en-US" b="1" dirty="0">
-                <a:solidFill>
-                  <a:schemeClr val="bg1"/>
-                </a:solidFill>
-              </a:rPr>
-              <a:t>3. </a:t>
-            </a:r>
-            <a:r>
-              <a:rPr lang="ru-RU" b="1" dirty="0">
+              <a:rPr lang="ru-RU" dirty="0">
                 <a:solidFill>
                   <a:schemeClr val="bg1"/>
                 </a:solidFill>
               </a:rPr>
               <a:t>Репозитории.</a:t>
             </a:r>
-            <a:endParaRPr lang="en-US" b="1" dirty="0">
+            <a:endParaRPr lang="en-US" dirty="0">
               <a:solidFill>
                 <a:schemeClr val="bg1"/>
               </a:solidFill>
@@ -22195,7 +24196,7 @@
               </a:lnSpc>
             </a:pPr>
             <a:r>
-              <a:rPr lang="ru-RU" b="1" dirty="0">
+              <a:rPr lang="ru-RU" dirty="0">
                 <a:solidFill>
                   <a:schemeClr val="bg1"/>
                 </a:solidFill>
@@ -26903,11 +28904,11 @@
                   <a:schemeClr val="bg1"/>
                 </a:solidFill>
               </a:rPr>
-              <a:t>Показывает последовательность каждого слоя.  </a:t>
+              <a:t>Показывает последовательность каждого слоя. </a:t>
             </a:r>
           </a:p>
           <a:p>
-            <a:pPr marL="180000" lvl="3">
+            <a:pPr lvl="3">
               <a:lnSpc>
                 <a:spcPct val="150000"/>
               </a:lnSpc>
@@ -33003,7 +35004,7 @@
   <p:cSld>
     <p:spTree>
       <p:nvGrpSpPr>
-        <p:cNvPr id="1" name="Shape 2002"/>
+        <p:cNvPr id="1" name=""/>
         <p:cNvGrpSpPr/>
         <p:nvPr/>
       </p:nvGrpSpPr>
@@ -33017,125 +35018,154 @@
       </p:grpSpPr>
       <p:sp>
         <p:nvSpPr>
-          <p:cNvPr id="2003" name="Google Shape;2003;p58"/>
-          <p:cNvSpPr txBox="1">
+          <p:cNvPr id="13" name="Заголовок 12">
+            <a:extLst>
+              <a:ext uri="{FF2B5EF4-FFF2-40B4-BE49-F238E27FC236}">
+                <a16:creationId xmlns:a16="http://schemas.microsoft.com/office/drawing/2014/main" id="{6EA83435-3728-FB68-91A0-C4C4A28553C7}"/>
+              </a:ext>
+            </a:extLst>
+          </p:cNvPr>
+          <p:cNvSpPr>
             <a:spLocks noGrp="1"/>
           </p:cNvSpPr>
           <p:nvPr>
-            <p:ph type="title"/>
+            <p:ph type="title" idx="4"/>
           </p:nvPr>
         </p:nvSpPr>
         <p:spPr>
           <a:xfrm>
             <a:off x="938500" y="445025"/>
-            <a:ext cx="4629300" cy="941400"/>
+            <a:ext cx="5649336" cy="941400"/>
           </a:xfrm>
-          <a:prstGeom prst="rect">
-            <a:avLst/>
-          </a:prstGeom>
         </p:spPr>
         <p:txBody>
-          <a:bodyPr spcFirstLastPara="1" wrap="square" lIns="91425" tIns="91425" rIns="91425" bIns="91425" anchor="t" anchorCtr="0">
-            <a:noAutofit/>
-          </a:bodyPr>
+          <a:bodyPr/>
           <a:lstStyle/>
           <a:p>
-            <a:pPr lvl="0"/>
             <a:r>
-              <a:rPr lang="ru-RU" dirty="0"/>
-              <a:t>Безопасность и </a:t>
+              <a:rPr lang="ru-RU" b="1"/>
+              <a:t>Интеграционное тестирования</a:t>
             </a:r>
             <a:r>
-              <a:rPr lang="en-US" dirty="0"/>
-              <a:t>API</a:t>
+              <a:rPr lang="ru-RU" b="1" dirty="0"/>
+              <a:t>:</a:t>
             </a:r>
-            <a:endParaRPr dirty="0"/>
-          </a:p>
-        </p:txBody>
-      </p:sp>
-      <p:cxnSp>
-        <p:nvCxnSpPr>
-          <p:cNvPr id="2016" name="Google Shape;2016;p58"/>
-          <p:cNvCxnSpPr/>
-          <p:nvPr/>
-        </p:nvCxnSpPr>
-        <p:spPr>
-          <a:xfrm>
-            <a:off x="1026200" y="414022"/>
-            <a:ext cx="2763000" cy="0"/>
-          </a:xfrm>
-          <a:prstGeom prst="straightConnector1">
-            <a:avLst/>
-          </a:prstGeom>
-          <a:noFill/>
-          <a:ln w="9525" cap="flat" cmpd="sng">
-            <a:solidFill>
-              <a:schemeClr val="accent1"/>
-            </a:solidFill>
-            <a:prstDash val="solid"/>
-            <a:round/>
-            <a:headEnd type="none" w="med" len="med"/>
-            <a:tailEnd type="none" w="med" len="med"/>
-          </a:ln>
-          <a:effectLst>
-            <a:outerShdw blurRad="57150" dist="19050" dir="5400000" algn="bl" rotWithShape="0">
-              <a:srgbClr val="FFFFFF">
-                <a:alpha val="50000"/>
-              </a:srgbClr>
-            </a:outerShdw>
-          </a:effectLst>
-        </p:spPr>
-      </p:cxnSp>
-      <p:sp>
-        <p:nvSpPr>
-          <p:cNvPr id="18" name="Google Shape;2098;p63">
-            <a:extLst>
-              <a:ext uri="{FF2B5EF4-FFF2-40B4-BE49-F238E27FC236}">
-                <a16:creationId xmlns:a16="http://schemas.microsoft.com/office/drawing/2014/main" id="{63D0DE40-08F9-AAE7-FD7D-6AD3A202B343}"/>
-              </a:ext>
-            </a:extLst>
-          </p:cNvPr>
-          <p:cNvSpPr txBox="1">
-            <a:spLocks noGrp="1"/>
-          </p:cNvSpPr>
-          <p:nvPr>
-            <p:ph type="title" idx="2"/>
-          </p:nvPr>
-        </p:nvSpPr>
-        <p:spPr>
-          <a:xfrm>
-            <a:off x="1894670" y="1437831"/>
-            <a:ext cx="2025695" cy="375600"/>
-          </a:xfrm>
-          <a:prstGeom prst="rect">
-            <a:avLst/>
-          </a:prstGeom>
-        </p:spPr>
-        <p:txBody>
-          <a:bodyPr spcFirstLastPara="1" wrap="square" lIns="91425" tIns="91425" rIns="91425" bIns="91425" anchor="t" anchorCtr="0">
-            <a:noAutofit/>
-          </a:bodyPr>
-          <a:lstStyle/>
-          <a:p>
-            <a:pPr lvl="0"/>
-            <a:r>
-              <a:rPr lang="en-US" dirty="0"/>
-              <a:t>JWT-</a:t>
-            </a:r>
-            <a:r>
-              <a:rPr lang="ru-RU" dirty="0"/>
-              <a:t>токены</a:t>
-            </a:r>
-            <a:endParaRPr dirty="0"/>
+            <a:endParaRPr lang="ru-RU" dirty="0"/>
           </a:p>
         </p:txBody>
       </p:sp>
       <p:sp>
         <p:nvSpPr>
-          <p:cNvPr id="19" name="Google Shape;2099;p63">
+          <p:cNvPr id="14" name="Заголовок 13">
             <a:extLst>
               <a:ext uri="{FF2B5EF4-FFF2-40B4-BE49-F238E27FC236}">
-                <a16:creationId xmlns:a16="http://schemas.microsoft.com/office/drawing/2014/main" id="{FE0FD251-EB6E-5C62-9897-35AB75933E92}"/>
+                <a16:creationId xmlns:a16="http://schemas.microsoft.com/office/drawing/2014/main" id="{5AE6F4DD-4DEE-CE71-81CC-C4CEB8B668BF}"/>
+              </a:ext>
+            </a:extLst>
+          </p:cNvPr>
+          <p:cNvSpPr>
+            <a:spLocks noGrp="1"/>
+          </p:cNvSpPr>
+          <p:nvPr>
+            <p:ph type="title" idx="5"/>
+          </p:nvPr>
+        </p:nvSpPr>
+        <p:spPr>
+          <a:xfrm>
+            <a:off x="304800" y="1756420"/>
+            <a:ext cx="2810647" cy="663230"/>
+          </a:xfrm>
+        </p:spPr>
+        <p:txBody>
+          <a:bodyPr/>
+          <a:lstStyle/>
+          <a:p>
+            <a:r>
+              <a:rPr lang="ru-RU" dirty="0"/>
+              <a:t>Интеграционное тестирование API:</a:t>
+            </a:r>
+          </a:p>
+        </p:txBody>
+      </p:sp>
+      <p:sp>
+        <p:nvSpPr>
+          <p:cNvPr id="15" name="Подзаголовок 14">
+            <a:extLst>
+              <a:ext uri="{FF2B5EF4-FFF2-40B4-BE49-F238E27FC236}">
+                <a16:creationId xmlns:a16="http://schemas.microsoft.com/office/drawing/2014/main" id="{93BB3C0F-1D7D-F1F2-C8BA-B8935E2ECDBF}"/>
+              </a:ext>
+            </a:extLst>
+          </p:cNvPr>
+          <p:cNvSpPr>
+            <a:spLocks noGrp="1"/>
+          </p:cNvSpPr>
+          <p:nvPr>
+            <p:ph type="subTitle" idx="6"/>
+          </p:nvPr>
+        </p:nvSpPr>
+        <p:spPr>
+          <a:xfrm>
+            <a:off x="449359" y="2419650"/>
+            <a:ext cx="2591713" cy="2417618"/>
+          </a:xfrm>
+        </p:spPr>
+        <p:txBody>
+          <a:bodyPr/>
+          <a:lstStyle/>
+          <a:p>
+            <a:pPr marL="0" indent="0" algn="l">
+              <a:lnSpc>
+                <a:spcPct val="150000"/>
+              </a:lnSpc>
+            </a:pPr>
+            <a:r>
+              <a:rPr lang="ru-RU" dirty="0"/>
+              <a:t>Имитация реальных HTTP-запросов к</a:t>
+            </a:r>
+            <a:r>
+              <a:rPr lang="en-US" dirty="0"/>
+              <a:t> </a:t>
+            </a:r>
+            <a:r>
+              <a:rPr lang="ru-RU" dirty="0"/>
+              <a:t>серверу (GET, POST) с</a:t>
+            </a:r>
+            <a:r>
+              <a:rPr lang="en-US" dirty="0"/>
+              <a:t> </a:t>
+            </a:r>
+            <a:r>
+              <a:rPr lang="ru-RU" dirty="0"/>
+              <a:t>проверкой статус-кодов (200 OK, 400 </a:t>
+            </a:r>
+            <a:r>
+              <a:rPr lang="ru-RU" dirty="0" err="1"/>
+              <a:t>BadRequest</a:t>
+            </a:r>
+            <a:r>
+              <a:rPr lang="ru-RU" dirty="0"/>
+              <a:t>).</a:t>
+            </a:r>
+          </a:p>
+          <a:p>
+            <a:pPr marL="0" indent="0" algn="l">
+              <a:lnSpc>
+                <a:spcPct val="150000"/>
+              </a:lnSpc>
+            </a:pPr>
+            <a:r>
+              <a:rPr lang="ru-RU" dirty="0"/>
+              <a:t>И сравнение данных</a:t>
+            </a:r>
+          </a:p>
+        </p:txBody>
+      </p:sp>
+      <p:sp>
+        <p:nvSpPr>
+          <p:cNvPr id="18" name="Заголовок 13">
+            <a:extLst>
+              <a:ext uri="{FF2B5EF4-FFF2-40B4-BE49-F238E27FC236}">
+                <a16:creationId xmlns:a16="http://schemas.microsoft.com/office/drawing/2014/main" id="{3DA145F6-DD86-8F7F-5C1A-F6640080D3DA}"/>
               </a:ext>
             </a:extLst>
           </p:cNvPr>
@@ -33146,8 +35176,299 @@
         </p:nvSpPr>
         <p:spPr>
           <a:xfrm>
-            <a:off x="1424496" y="1885154"/>
-            <a:ext cx="2966042" cy="2492553"/>
+            <a:off x="3115446" y="1738383"/>
+            <a:ext cx="2810647" cy="663230"/>
+          </a:xfrm>
+          <a:prstGeom prst="rect">
+            <a:avLst/>
+          </a:prstGeom>
+          <a:noFill/>
+          <a:ln>
+            <a:noFill/>
+          </a:ln>
+        </p:spPr>
+        <p:txBody>
+          <a:bodyPr spcFirstLastPara="1" wrap="square" lIns="91425" tIns="91425" rIns="91425" bIns="91425" anchor="b" anchorCtr="0">
+            <a:noAutofit/>
+          </a:bodyPr>
+          <a:lstStyle>
+            <a:defPPr marR="0" lvl="0" algn="l" rtl="0">
+              <a:lnSpc>
+                <a:spcPct val="100000"/>
+              </a:lnSpc>
+              <a:spcBef>
+                <a:spcPts val="0"/>
+              </a:spcBef>
+              <a:spcAft>
+                <a:spcPts val="0"/>
+              </a:spcAft>
+            </a:defPPr>
+            <a:lvl1pPr marR="0" lvl="0" algn="ctr" rtl="0" eaLnBrk="1" hangingPunct="1">
+              <a:lnSpc>
+                <a:spcPct val="100000"/>
+              </a:lnSpc>
+              <a:spcBef>
+                <a:spcPts val="0"/>
+              </a:spcBef>
+              <a:spcAft>
+                <a:spcPts val="0"/>
+              </a:spcAft>
+              <a:buClr>
+                <a:schemeClr val="lt1"/>
+              </a:buClr>
+              <a:buSzPts val="1800"/>
+              <a:buFont typeface="Montserrat ExtraBold"/>
+              <a:buNone/>
+              <a:defRPr sz="1800" b="0" i="0" u="none" strike="noStrike" cap="none">
+                <a:solidFill>
+                  <a:schemeClr val="lt1"/>
+                </a:solidFill>
+                <a:latin typeface="Montserrat ExtraBold"/>
+                <a:ea typeface="Montserrat ExtraBold"/>
+                <a:cs typeface="Montserrat ExtraBold"/>
+                <a:sym typeface="Montserrat ExtraBold"/>
+              </a:defRPr>
+            </a:lvl1pPr>
+            <a:lvl2pPr marR="0" lvl="1" algn="ctr" rtl="0" eaLnBrk="1" hangingPunct="1">
+              <a:lnSpc>
+                <a:spcPct val="100000"/>
+              </a:lnSpc>
+              <a:spcBef>
+                <a:spcPts val="0"/>
+              </a:spcBef>
+              <a:spcAft>
+                <a:spcPts val="0"/>
+              </a:spcAft>
+              <a:buClr>
+                <a:schemeClr val="lt1"/>
+              </a:buClr>
+              <a:buSzPts val="4200"/>
+              <a:buFont typeface="Montserrat"/>
+              <a:buNone/>
+              <a:defRPr sz="4200" b="0" i="0" u="none" strike="noStrike" cap="none">
+                <a:solidFill>
+                  <a:schemeClr val="lt1"/>
+                </a:solidFill>
+                <a:latin typeface="Montserrat"/>
+                <a:ea typeface="Montserrat"/>
+                <a:cs typeface="Montserrat"/>
+                <a:sym typeface="Montserrat"/>
+              </a:defRPr>
+            </a:lvl2pPr>
+            <a:lvl3pPr marR="0" lvl="2" algn="ctr" rtl="0" eaLnBrk="1" hangingPunct="1">
+              <a:lnSpc>
+                <a:spcPct val="100000"/>
+              </a:lnSpc>
+              <a:spcBef>
+                <a:spcPts val="0"/>
+              </a:spcBef>
+              <a:spcAft>
+                <a:spcPts val="0"/>
+              </a:spcAft>
+              <a:buClr>
+                <a:schemeClr val="lt1"/>
+              </a:buClr>
+              <a:buSzPts val="4200"/>
+              <a:buFont typeface="Montserrat"/>
+              <a:buNone/>
+              <a:defRPr sz="4200" b="0" i="0" u="none" strike="noStrike" cap="none">
+                <a:solidFill>
+                  <a:schemeClr val="lt1"/>
+                </a:solidFill>
+                <a:latin typeface="Montserrat"/>
+                <a:ea typeface="Montserrat"/>
+                <a:cs typeface="Montserrat"/>
+                <a:sym typeface="Montserrat"/>
+              </a:defRPr>
+            </a:lvl3pPr>
+            <a:lvl4pPr marR="0" lvl="3" algn="ctr" rtl="0" eaLnBrk="1" hangingPunct="1">
+              <a:lnSpc>
+                <a:spcPct val="100000"/>
+              </a:lnSpc>
+              <a:spcBef>
+                <a:spcPts val="0"/>
+              </a:spcBef>
+              <a:spcAft>
+                <a:spcPts val="0"/>
+              </a:spcAft>
+              <a:buClr>
+                <a:schemeClr val="lt1"/>
+              </a:buClr>
+              <a:buSzPts val="4200"/>
+              <a:buFont typeface="Montserrat"/>
+              <a:buNone/>
+              <a:defRPr sz="4200" b="0" i="0" u="none" strike="noStrike" cap="none">
+                <a:solidFill>
+                  <a:schemeClr val="lt1"/>
+                </a:solidFill>
+                <a:latin typeface="Montserrat"/>
+                <a:ea typeface="Montserrat"/>
+                <a:cs typeface="Montserrat"/>
+                <a:sym typeface="Montserrat"/>
+              </a:defRPr>
+            </a:lvl4pPr>
+            <a:lvl5pPr marR="0" lvl="4" algn="ctr" rtl="0" eaLnBrk="1" hangingPunct="1">
+              <a:lnSpc>
+                <a:spcPct val="100000"/>
+              </a:lnSpc>
+              <a:spcBef>
+                <a:spcPts val="0"/>
+              </a:spcBef>
+              <a:spcAft>
+                <a:spcPts val="0"/>
+              </a:spcAft>
+              <a:buClr>
+                <a:schemeClr val="lt1"/>
+              </a:buClr>
+              <a:buSzPts val="4200"/>
+              <a:buFont typeface="Montserrat"/>
+              <a:buNone/>
+              <a:defRPr sz="4200" b="0" i="0" u="none" strike="noStrike" cap="none">
+                <a:solidFill>
+                  <a:schemeClr val="lt1"/>
+                </a:solidFill>
+                <a:latin typeface="Montserrat"/>
+                <a:ea typeface="Montserrat"/>
+                <a:cs typeface="Montserrat"/>
+                <a:sym typeface="Montserrat"/>
+              </a:defRPr>
+            </a:lvl5pPr>
+            <a:lvl6pPr marR="0" lvl="5" algn="ctr" rtl="0" eaLnBrk="1" hangingPunct="1">
+              <a:lnSpc>
+                <a:spcPct val="100000"/>
+              </a:lnSpc>
+              <a:spcBef>
+                <a:spcPts val="0"/>
+              </a:spcBef>
+              <a:spcAft>
+                <a:spcPts val="0"/>
+              </a:spcAft>
+              <a:buClr>
+                <a:schemeClr val="lt1"/>
+              </a:buClr>
+              <a:buSzPts val="4200"/>
+              <a:buFont typeface="Montserrat"/>
+              <a:buNone/>
+              <a:defRPr sz="4200" b="0" i="0" u="none" strike="noStrike" cap="none">
+                <a:solidFill>
+                  <a:schemeClr val="lt1"/>
+                </a:solidFill>
+                <a:latin typeface="Montserrat"/>
+                <a:ea typeface="Montserrat"/>
+                <a:cs typeface="Montserrat"/>
+                <a:sym typeface="Montserrat"/>
+              </a:defRPr>
+            </a:lvl6pPr>
+            <a:lvl7pPr marR="0" lvl="6" algn="ctr" rtl="0" eaLnBrk="1" hangingPunct="1">
+              <a:lnSpc>
+                <a:spcPct val="100000"/>
+              </a:lnSpc>
+              <a:spcBef>
+                <a:spcPts val="0"/>
+              </a:spcBef>
+              <a:spcAft>
+                <a:spcPts val="0"/>
+              </a:spcAft>
+              <a:buClr>
+                <a:schemeClr val="lt1"/>
+              </a:buClr>
+              <a:buSzPts val="4200"/>
+              <a:buFont typeface="Montserrat"/>
+              <a:buNone/>
+              <a:defRPr sz="4200" b="0" i="0" u="none" strike="noStrike" cap="none">
+                <a:solidFill>
+                  <a:schemeClr val="lt1"/>
+                </a:solidFill>
+                <a:latin typeface="Montserrat"/>
+                <a:ea typeface="Montserrat"/>
+                <a:cs typeface="Montserrat"/>
+                <a:sym typeface="Montserrat"/>
+              </a:defRPr>
+            </a:lvl7pPr>
+            <a:lvl8pPr marR="0" lvl="7" algn="ctr" rtl="0" eaLnBrk="1" hangingPunct="1">
+              <a:lnSpc>
+                <a:spcPct val="100000"/>
+              </a:lnSpc>
+              <a:spcBef>
+                <a:spcPts val="0"/>
+              </a:spcBef>
+              <a:spcAft>
+                <a:spcPts val="0"/>
+              </a:spcAft>
+              <a:buClr>
+                <a:schemeClr val="lt1"/>
+              </a:buClr>
+              <a:buSzPts val="4200"/>
+              <a:buFont typeface="Montserrat"/>
+              <a:buNone/>
+              <a:defRPr sz="4200" b="0" i="0" u="none" strike="noStrike" cap="none">
+                <a:solidFill>
+                  <a:schemeClr val="lt1"/>
+                </a:solidFill>
+                <a:latin typeface="Montserrat"/>
+                <a:ea typeface="Montserrat"/>
+                <a:cs typeface="Montserrat"/>
+                <a:sym typeface="Montserrat"/>
+              </a:defRPr>
+            </a:lvl8pPr>
+            <a:lvl9pPr marR="0" lvl="8" algn="ctr" rtl="0" eaLnBrk="1" hangingPunct="1">
+              <a:lnSpc>
+                <a:spcPct val="100000"/>
+              </a:lnSpc>
+              <a:spcBef>
+                <a:spcPts val="0"/>
+              </a:spcBef>
+              <a:spcAft>
+                <a:spcPts val="0"/>
+              </a:spcAft>
+              <a:buClr>
+                <a:schemeClr val="lt1"/>
+              </a:buClr>
+              <a:buSzPts val="4200"/>
+              <a:buFont typeface="Montserrat"/>
+              <a:buNone/>
+              <a:defRPr sz="4200" b="0" i="0" u="none" strike="noStrike" cap="none">
+                <a:solidFill>
+                  <a:schemeClr val="lt1"/>
+                </a:solidFill>
+                <a:latin typeface="Montserrat"/>
+                <a:ea typeface="Montserrat"/>
+                <a:cs typeface="Montserrat"/>
+                <a:sym typeface="Montserrat"/>
+              </a:defRPr>
+            </a:lvl9pPr>
+          </a:lstStyle>
+          <a:p>
+            <a:pPr>
+              <a:lnSpc>
+                <a:spcPct val="300000"/>
+              </a:lnSpc>
+            </a:pPr>
+            <a:r>
+              <a:rPr lang="ru-RU" dirty="0"/>
+              <a:t>Изоляция среды</a:t>
+            </a:r>
+          </a:p>
+        </p:txBody>
+      </p:sp>
+      <p:sp>
+        <p:nvSpPr>
+          <p:cNvPr id="19" name="Подзаголовок 14">
+            <a:extLst>
+              <a:ext uri="{FF2B5EF4-FFF2-40B4-BE49-F238E27FC236}">
+                <a16:creationId xmlns:a16="http://schemas.microsoft.com/office/drawing/2014/main" id="{CBD86E2C-D97F-6CE4-57B1-67F6698E427E}"/>
+              </a:ext>
+            </a:extLst>
+          </p:cNvPr>
+          <p:cNvSpPr txBox="1">
+            <a:spLocks/>
+          </p:cNvSpPr>
+          <p:nvPr/>
+        </p:nvSpPr>
+        <p:spPr>
+          <a:xfrm>
+            <a:off x="3348424" y="2401613"/>
+            <a:ext cx="2591713" cy="2417618"/>
           </a:xfrm>
           <a:prstGeom prst="rect">
             <a:avLst/>
@@ -33173,7 +35494,7 @@
                 <a:spcPts val="0"/>
               </a:spcAft>
             </a:defPPr>
-            <a:lvl1pPr marL="457200" marR="0" lvl="0" indent="-342900" algn="ctr" rtl="0">
+            <a:lvl1pPr marL="457200" marR="0" lvl="0" indent="-342900" algn="ctr" rtl="0" eaLnBrk="1" hangingPunct="1">
               <a:lnSpc>
                 <a:spcPct val="100000"/>
               </a:lnSpc>
@@ -33199,7 +35520,7 @@
                 <a:sym typeface="Montserrat"/>
               </a:defRPr>
             </a:lvl1pPr>
-            <a:lvl2pPr marL="914400" marR="0" lvl="1" indent="-317500" algn="ctr" rtl="0">
+            <a:lvl2pPr marL="914400" marR="0" lvl="1" indent="-317500" algn="ctr" rtl="0" eaLnBrk="1" hangingPunct="1">
               <a:lnSpc>
                 <a:spcPct val="100000"/>
               </a:lnSpc>
@@ -33225,7 +35546,7 @@
                 <a:sym typeface="Montserrat"/>
               </a:defRPr>
             </a:lvl2pPr>
-            <a:lvl3pPr marL="1371600" marR="0" lvl="2" indent="-317500" algn="ctr" rtl="0">
+            <a:lvl3pPr marL="1371600" marR="0" lvl="2" indent="-317500" algn="ctr" rtl="0" eaLnBrk="1" hangingPunct="1">
               <a:lnSpc>
                 <a:spcPct val="100000"/>
               </a:lnSpc>
@@ -33251,7 +35572,7 @@
                 <a:sym typeface="Montserrat"/>
               </a:defRPr>
             </a:lvl3pPr>
-            <a:lvl4pPr marL="1828800" marR="0" lvl="3" indent="-317500" algn="ctr" rtl="0">
+            <a:lvl4pPr marL="1828800" marR="0" lvl="3" indent="-317500" algn="ctr" rtl="0" eaLnBrk="1" hangingPunct="1">
               <a:lnSpc>
                 <a:spcPct val="100000"/>
               </a:lnSpc>
@@ -33277,7 +35598,7 @@
                 <a:sym typeface="Montserrat"/>
               </a:defRPr>
             </a:lvl4pPr>
-            <a:lvl5pPr marL="2286000" marR="0" lvl="4" indent="-317500" algn="ctr" rtl="0">
+            <a:lvl5pPr marL="2286000" marR="0" lvl="4" indent="-317500" algn="ctr" rtl="0" eaLnBrk="1" hangingPunct="1">
               <a:lnSpc>
                 <a:spcPct val="100000"/>
               </a:lnSpc>
@@ -33303,7 +35624,7 @@
                 <a:sym typeface="Montserrat"/>
               </a:defRPr>
             </a:lvl5pPr>
-            <a:lvl6pPr marL="2743200" marR="0" lvl="5" indent="-317500" algn="ctr" rtl="0">
+            <a:lvl6pPr marL="2743200" marR="0" lvl="5" indent="-317500" algn="ctr" rtl="0" eaLnBrk="1" hangingPunct="1">
               <a:lnSpc>
                 <a:spcPct val="100000"/>
               </a:lnSpc>
@@ -33329,7 +35650,7 @@
                 <a:sym typeface="Montserrat"/>
               </a:defRPr>
             </a:lvl6pPr>
-            <a:lvl7pPr marL="3200400" marR="0" lvl="6" indent="-317500" algn="ctr" rtl="0">
+            <a:lvl7pPr marL="3200400" marR="0" lvl="6" indent="-317500" algn="ctr" rtl="0" eaLnBrk="1" hangingPunct="1">
               <a:lnSpc>
                 <a:spcPct val="100000"/>
               </a:lnSpc>
@@ -33355,7 +35676,7 @@
                 <a:sym typeface="Montserrat"/>
               </a:defRPr>
             </a:lvl7pPr>
-            <a:lvl8pPr marL="3657600" marR="0" lvl="7" indent="-317500" algn="ctr" rtl="0">
+            <a:lvl8pPr marL="3657600" marR="0" lvl="7" indent="-317500" algn="ctr" rtl="0" eaLnBrk="1" hangingPunct="1">
               <a:lnSpc>
                 <a:spcPct val="100000"/>
               </a:lnSpc>
@@ -33381,7 +35702,7 @@
                 <a:sym typeface="Montserrat"/>
               </a:defRPr>
             </a:lvl8pPr>
-            <a:lvl9pPr marL="4114800" marR="0" lvl="8" indent="-317500" algn="ctr" rtl="0">
+            <a:lvl9pPr marL="4114800" marR="0" lvl="8" indent="-317500" algn="ctr" rtl="0" eaLnBrk="1" hangingPunct="1">
               <a:lnSpc>
                 <a:spcPct val="100000"/>
               </a:lnSpc>
@@ -33416,80 +35737,17 @@
             </a:pPr>
             <a:r>
               <a:rPr lang="ru-RU" dirty="0"/>
-              <a:t>Авторизация осуществляется</a:t>
-            </a:r>
-          </a:p>
-          <a:p>
-            <a:pPr marL="0" indent="0" algn="l">
-              <a:lnSpc>
-                <a:spcPct val="150000"/>
-              </a:lnSpc>
-            </a:pPr>
-            <a:r>
-              <a:rPr lang="ru-RU" dirty="0"/>
-              <a:t>с использованием JWT-токенов, в которые вшиваются необходимые параметры пользователя.</a:t>
-            </a:r>
-          </a:p>
-          <a:p>
-            <a:pPr marL="0" indent="0" algn="l">
-              <a:lnSpc>
-                <a:spcPct val="150000"/>
-              </a:lnSpc>
-            </a:pPr>
-            <a:r>
-              <a:rPr lang="en-US" dirty="0"/>
-              <a:t>(ID, Name, Role)</a:t>
+              <a:t>Перед каждым тестом база данных пересоздается в памяти с чистыми данными</a:t>
             </a:r>
           </a:p>
         </p:txBody>
       </p:sp>
-      <p:cxnSp>
-        <p:nvCxnSpPr>
-          <p:cNvPr id="27" name="Google Shape;2108;p63">
+      <p:sp>
+        <p:nvSpPr>
+          <p:cNvPr id="22" name="Заголовок 13">
             <a:extLst>
               <a:ext uri="{FF2B5EF4-FFF2-40B4-BE49-F238E27FC236}">
-                <a16:creationId xmlns:a16="http://schemas.microsoft.com/office/drawing/2014/main" id="{2E5AF290-7A46-CF31-E359-360D9F390530}"/>
-              </a:ext>
-            </a:extLst>
-          </p:cNvPr>
-          <p:cNvCxnSpPr>
-            <a:cxnSpLocks/>
-          </p:cNvCxnSpPr>
-          <p:nvPr/>
-        </p:nvCxnSpPr>
-        <p:spPr>
-          <a:xfrm>
-            <a:off x="4572000" y="1566172"/>
-            <a:ext cx="0" cy="3130519"/>
-          </a:xfrm>
-          <a:prstGeom prst="straightConnector1">
-            <a:avLst/>
-          </a:prstGeom>
-          <a:noFill/>
-          <a:ln w="9525" cap="flat" cmpd="sng">
-            <a:solidFill>
-              <a:schemeClr val="accent1"/>
-            </a:solidFill>
-            <a:prstDash val="solid"/>
-            <a:round/>
-            <a:headEnd type="none" w="med" len="med"/>
-            <a:tailEnd type="none" w="med" len="med"/>
-          </a:ln>
-          <a:effectLst>
-            <a:outerShdw blurRad="57150" dist="19050" dir="5400000" algn="bl" rotWithShape="0">
-              <a:srgbClr val="FFFFFF">
-                <a:alpha val="50000"/>
-              </a:srgbClr>
-            </a:outerShdw>
-          </a:effectLst>
-        </p:spPr>
-      </p:cxnSp>
-      <p:sp>
-        <p:nvSpPr>
-          <p:cNvPr id="2047" name="Google Shape;2098;p63">
-            <a:extLst>
-              <a:ext uri="{FF2B5EF4-FFF2-40B4-BE49-F238E27FC236}">
-                <a16:creationId xmlns:a16="http://schemas.microsoft.com/office/drawing/2014/main" id="{10AC4F83-7C14-7590-D15F-B83DAD5980FC}"/>
+                <a16:creationId xmlns:a16="http://schemas.microsoft.com/office/drawing/2014/main" id="{0645A112-9263-FF11-C972-80E8ED14AE29}"/>
               </a:ext>
             </a:extLst>
           </p:cNvPr>
@@ -33500,8 +35758,294 @@
         </p:nvSpPr>
         <p:spPr>
           <a:xfrm>
-            <a:off x="5470819" y="1437831"/>
-            <a:ext cx="1301855" cy="375600"/>
+            <a:off x="5889551" y="1769912"/>
+            <a:ext cx="3158838" cy="663230"/>
+          </a:xfrm>
+          <a:prstGeom prst="rect">
+            <a:avLst/>
+          </a:prstGeom>
+          <a:noFill/>
+          <a:ln>
+            <a:noFill/>
+          </a:ln>
+        </p:spPr>
+        <p:txBody>
+          <a:bodyPr spcFirstLastPara="1" wrap="square" lIns="91425" tIns="91425" rIns="91425" bIns="91425" anchor="b" anchorCtr="0">
+            <a:noAutofit/>
+          </a:bodyPr>
+          <a:lstStyle>
+            <a:defPPr marR="0" lvl="0" algn="l" rtl="0">
+              <a:lnSpc>
+                <a:spcPct val="100000"/>
+              </a:lnSpc>
+              <a:spcBef>
+                <a:spcPts val="0"/>
+              </a:spcBef>
+              <a:spcAft>
+                <a:spcPts val="0"/>
+              </a:spcAft>
+            </a:defPPr>
+            <a:lvl1pPr marR="0" lvl="0" algn="ctr" rtl="0" eaLnBrk="1" hangingPunct="1">
+              <a:lnSpc>
+                <a:spcPct val="100000"/>
+              </a:lnSpc>
+              <a:spcBef>
+                <a:spcPts val="0"/>
+              </a:spcBef>
+              <a:spcAft>
+                <a:spcPts val="0"/>
+              </a:spcAft>
+              <a:buClr>
+                <a:schemeClr val="lt1"/>
+              </a:buClr>
+              <a:buSzPts val="1800"/>
+              <a:buFont typeface="Montserrat ExtraBold"/>
+              <a:buNone/>
+              <a:defRPr sz="1800" b="0" i="0" u="none" strike="noStrike" cap="none">
+                <a:solidFill>
+                  <a:schemeClr val="lt1"/>
+                </a:solidFill>
+                <a:latin typeface="Montserrat ExtraBold"/>
+                <a:ea typeface="Montserrat ExtraBold"/>
+                <a:cs typeface="Montserrat ExtraBold"/>
+                <a:sym typeface="Montserrat ExtraBold"/>
+              </a:defRPr>
+            </a:lvl1pPr>
+            <a:lvl2pPr marR="0" lvl="1" algn="ctr" rtl="0" eaLnBrk="1" hangingPunct="1">
+              <a:lnSpc>
+                <a:spcPct val="100000"/>
+              </a:lnSpc>
+              <a:spcBef>
+                <a:spcPts val="0"/>
+              </a:spcBef>
+              <a:spcAft>
+                <a:spcPts val="0"/>
+              </a:spcAft>
+              <a:buClr>
+                <a:schemeClr val="lt1"/>
+              </a:buClr>
+              <a:buSzPts val="4200"/>
+              <a:buFont typeface="Montserrat"/>
+              <a:buNone/>
+              <a:defRPr sz="4200" b="0" i="0" u="none" strike="noStrike" cap="none">
+                <a:solidFill>
+                  <a:schemeClr val="lt1"/>
+                </a:solidFill>
+                <a:latin typeface="Montserrat"/>
+                <a:ea typeface="Montserrat"/>
+                <a:cs typeface="Montserrat"/>
+                <a:sym typeface="Montserrat"/>
+              </a:defRPr>
+            </a:lvl2pPr>
+            <a:lvl3pPr marR="0" lvl="2" algn="ctr" rtl="0" eaLnBrk="1" hangingPunct="1">
+              <a:lnSpc>
+                <a:spcPct val="100000"/>
+              </a:lnSpc>
+              <a:spcBef>
+                <a:spcPts val="0"/>
+              </a:spcBef>
+              <a:spcAft>
+                <a:spcPts val="0"/>
+              </a:spcAft>
+              <a:buClr>
+                <a:schemeClr val="lt1"/>
+              </a:buClr>
+              <a:buSzPts val="4200"/>
+              <a:buFont typeface="Montserrat"/>
+              <a:buNone/>
+              <a:defRPr sz="4200" b="0" i="0" u="none" strike="noStrike" cap="none">
+                <a:solidFill>
+                  <a:schemeClr val="lt1"/>
+                </a:solidFill>
+                <a:latin typeface="Montserrat"/>
+                <a:ea typeface="Montserrat"/>
+                <a:cs typeface="Montserrat"/>
+                <a:sym typeface="Montserrat"/>
+              </a:defRPr>
+            </a:lvl3pPr>
+            <a:lvl4pPr marR="0" lvl="3" algn="ctr" rtl="0" eaLnBrk="1" hangingPunct="1">
+              <a:lnSpc>
+                <a:spcPct val="100000"/>
+              </a:lnSpc>
+              <a:spcBef>
+                <a:spcPts val="0"/>
+              </a:spcBef>
+              <a:spcAft>
+                <a:spcPts val="0"/>
+              </a:spcAft>
+              <a:buClr>
+                <a:schemeClr val="lt1"/>
+              </a:buClr>
+              <a:buSzPts val="4200"/>
+              <a:buFont typeface="Montserrat"/>
+              <a:buNone/>
+              <a:defRPr sz="4200" b="0" i="0" u="none" strike="noStrike" cap="none">
+                <a:solidFill>
+                  <a:schemeClr val="lt1"/>
+                </a:solidFill>
+                <a:latin typeface="Montserrat"/>
+                <a:ea typeface="Montserrat"/>
+                <a:cs typeface="Montserrat"/>
+                <a:sym typeface="Montserrat"/>
+              </a:defRPr>
+            </a:lvl4pPr>
+            <a:lvl5pPr marR="0" lvl="4" algn="ctr" rtl="0" eaLnBrk="1" hangingPunct="1">
+              <a:lnSpc>
+                <a:spcPct val="100000"/>
+              </a:lnSpc>
+              <a:spcBef>
+                <a:spcPts val="0"/>
+              </a:spcBef>
+              <a:spcAft>
+                <a:spcPts val="0"/>
+              </a:spcAft>
+              <a:buClr>
+                <a:schemeClr val="lt1"/>
+              </a:buClr>
+              <a:buSzPts val="4200"/>
+              <a:buFont typeface="Montserrat"/>
+              <a:buNone/>
+              <a:defRPr sz="4200" b="0" i="0" u="none" strike="noStrike" cap="none">
+                <a:solidFill>
+                  <a:schemeClr val="lt1"/>
+                </a:solidFill>
+                <a:latin typeface="Montserrat"/>
+                <a:ea typeface="Montserrat"/>
+                <a:cs typeface="Montserrat"/>
+                <a:sym typeface="Montserrat"/>
+              </a:defRPr>
+            </a:lvl5pPr>
+            <a:lvl6pPr marR="0" lvl="5" algn="ctr" rtl="0" eaLnBrk="1" hangingPunct="1">
+              <a:lnSpc>
+                <a:spcPct val="100000"/>
+              </a:lnSpc>
+              <a:spcBef>
+                <a:spcPts val="0"/>
+              </a:spcBef>
+              <a:spcAft>
+                <a:spcPts val="0"/>
+              </a:spcAft>
+              <a:buClr>
+                <a:schemeClr val="lt1"/>
+              </a:buClr>
+              <a:buSzPts val="4200"/>
+              <a:buFont typeface="Montserrat"/>
+              <a:buNone/>
+              <a:defRPr sz="4200" b="0" i="0" u="none" strike="noStrike" cap="none">
+                <a:solidFill>
+                  <a:schemeClr val="lt1"/>
+                </a:solidFill>
+                <a:latin typeface="Montserrat"/>
+                <a:ea typeface="Montserrat"/>
+                <a:cs typeface="Montserrat"/>
+                <a:sym typeface="Montserrat"/>
+              </a:defRPr>
+            </a:lvl6pPr>
+            <a:lvl7pPr marR="0" lvl="6" algn="ctr" rtl="0" eaLnBrk="1" hangingPunct="1">
+              <a:lnSpc>
+                <a:spcPct val="100000"/>
+              </a:lnSpc>
+              <a:spcBef>
+                <a:spcPts val="0"/>
+              </a:spcBef>
+              <a:spcAft>
+                <a:spcPts val="0"/>
+              </a:spcAft>
+              <a:buClr>
+                <a:schemeClr val="lt1"/>
+              </a:buClr>
+              <a:buSzPts val="4200"/>
+              <a:buFont typeface="Montserrat"/>
+              <a:buNone/>
+              <a:defRPr sz="4200" b="0" i="0" u="none" strike="noStrike" cap="none">
+                <a:solidFill>
+                  <a:schemeClr val="lt1"/>
+                </a:solidFill>
+                <a:latin typeface="Montserrat"/>
+                <a:ea typeface="Montserrat"/>
+                <a:cs typeface="Montserrat"/>
+                <a:sym typeface="Montserrat"/>
+              </a:defRPr>
+            </a:lvl7pPr>
+            <a:lvl8pPr marR="0" lvl="7" algn="ctr" rtl="0" eaLnBrk="1" hangingPunct="1">
+              <a:lnSpc>
+                <a:spcPct val="100000"/>
+              </a:lnSpc>
+              <a:spcBef>
+                <a:spcPts val="0"/>
+              </a:spcBef>
+              <a:spcAft>
+                <a:spcPts val="0"/>
+              </a:spcAft>
+              <a:buClr>
+                <a:schemeClr val="lt1"/>
+              </a:buClr>
+              <a:buSzPts val="4200"/>
+              <a:buFont typeface="Montserrat"/>
+              <a:buNone/>
+              <a:defRPr sz="4200" b="0" i="0" u="none" strike="noStrike" cap="none">
+                <a:solidFill>
+                  <a:schemeClr val="lt1"/>
+                </a:solidFill>
+                <a:latin typeface="Montserrat"/>
+                <a:ea typeface="Montserrat"/>
+                <a:cs typeface="Montserrat"/>
+                <a:sym typeface="Montserrat"/>
+              </a:defRPr>
+            </a:lvl8pPr>
+            <a:lvl9pPr marR="0" lvl="8" algn="ctr" rtl="0" eaLnBrk="1" hangingPunct="1">
+              <a:lnSpc>
+                <a:spcPct val="100000"/>
+              </a:lnSpc>
+              <a:spcBef>
+                <a:spcPts val="0"/>
+              </a:spcBef>
+              <a:spcAft>
+                <a:spcPts val="0"/>
+              </a:spcAft>
+              <a:buClr>
+                <a:schemeClr val="lt1"/>
+              </a:buClr>
+              <a:buSzPts val="4200"/>
+              <a:buFont typeface="Montserrat"/>
+              <a:buNone/>
+              <a:defRPr sz="4200" b="0" i="0" u="none" strike="noStrike" cap="none">
+                <a:solidFill>
+                  <a:schemeClr val="lt1"/>
+                </a:solidFill>
+                <a:latin typeface="Montserrat"/>
+                <a:ea typeface="Montserrat"/>
+                <a:cs typeface="Montserrat"/>
+                <a:sym typeface="Montserrat"/>
+              </a:defRPr>
+            </a:lvl9pPr>
+          </a:lstStyle>
+          <a:p>
+            <a:r>
+              <a:rPr lang="ru-RU" dirty="0"/>
+              <a:t>Покрытие тестами каждого контроллера</a:t>
+            </a:r>
+          </a:p>
+        </p:txBody>
+      </p:sp>
+      <p:sp>
+        <p:nvSpPr>
+          <p:cNvPr id="23" name="Подзаголовок 14">
+            <a:extLst>
+              <a:ext uri="{FF2B5EF4-FFF2-40B4-BE49-F238E27FC236}">
+                <a16:creationId xmlns:a16="http://schemas.microsoft.com/office/drawing/2014/main" id="{14643DB1-FA2E-C5A2-C60D-A355BD33070C}"/>
+              </a:ext>
+            </a:extLst>
+          </p:cNvPr>
+          <p:cNvSpPr txBox="1">
+            <a:spLocks/>
+          </p:cNvSpPr>
+          <p:nvPr/>
+        </p:nvSpPr>
+        <p:spPr>
+          <a:xfrm>
+            <a:off x="6173114" y="2419650"/>
+            <a:ext cx="2591713" cy="2417618"/>
           </a:xfrm>
           <a:prstGeom prst="rect">
             <a:avLst/>
@@ -33527,49 +36071,23 @@
                 <a:spcPts val="0"/>
               </a:spcAft>
             </a:defPPr>
-            <a:lvl1pPr marR="0" lvl="0" algn="ctr" rtl="0">
-              <a:lnSpc>
-                <a:spcPct val="100000"/>
-              </a:lnSpc>
-              <a:spcBef>
-                <a:spcPts val="0"/>
-              </a:spcBef>
-              <a:spcAft>
-                <a:spcPts val="0"/>
-              </a:spcAft>
-              <a:buClr>
-                <a:schemeClr val="lt1"/>
-              </a:buClr>
-              <a:buSzPts val="1800"/>
-              <a:buFont typeface="Montserrat ExtraBold"/>
-              <a:buNone/>
-              <a:defRPr sz="1800" b="0" i="0" u="none" strike="noStrike" cap="none">
-                <a:solidFill>
-                  <a:schemeClr val="lt1"/>
-                </a:solidFill>
-                <a:latin typeface="Montserrat ExtraBold"/>
-                <a:ea typeface="Montserrat ExtraBold"/>
-                <a:cs typeface="Montserrat ExtraBold"/>
-                <a:sym typeface="Montserrat ExtraBold"/>
-              </a:defRPr>
-            </a:lvl1pPr>
-            <a:lvl2pPr marR="0" lvl="1" algn="ctr" rtl="0">
-              <a:lnSpc>
-                <a:spcPct val="100000"/>
-              </a:lnSpc>
-              <a:spcBef>
-                <a:spcPts val="0"/>
-              </a:spcBef>
-              <a:spcAft>
-                <a:spcPts val="0"/>
-              </a:spcAft>
-              <a:buClr>
-                <a:schemeClr val="lt1"/>
-              </a:buClr>
-              <a:buSzPts val="4200"/>
+            <a:lvl1pPr marL="457200" marR="0" lvl="0" indent="-342900" algn="ctr" rtl="0" eaLnBrk="1" hangingPunct="1">
+              <a:lnSpc>
+                <a:spcPct val="100000"/>
+              </a:lnSpc>
+              <a:spcBef>
+                <a:spcPts val="0"/>
+              </a:spcBef>
+              <a:spcAft>
+                <a:spcPts val="0"/>
+              </a:spcAft>
+              <a:buClr>
+                <a:schemeClr val="lt1"/>
+              </a:buClr>
+              <a:buSzPts val="1400"/>
               <a:buFont typeface="Montserrat"/>
               <a:buNone/>
-              <a:defRPr sz="4200" b="0" i="0" u="none" strike="noStrike" cap="none">
+              <a:defRPr sz="1400" b="0" i="0" u="none" strike="noStrike" cap="none">
                 <a:solidFill>
                   <a:schemeClr val="lt1"/>
                 </a:solidFill>
@@ -33578,24 +36096,24 @@
                 <a:cs typeface="Montserrat"/>
                 <a:sym typeface="Montserrat"/>
               </a:defRPr>
-            </a:lvl2pPr>
-            <a:lvl3pPr marR="0" lvl="2" algn="ctr" rtl="0">
-              <a:lnSpc>
-                <a:spcPct val="100000"/>
-              </a:lnSpc>
-              <a:spcBef>
-                <a:spcPts val="0"/>
-              </a:spcBef>
-              <a:spcAft>
-                <a:spcPts val="0"/>
-              </a:spcAft>
-              <a:buClr>
-                <a:schemeClr val="lt1"/>
-              </a:buClr>
-              <a:buSzPts val="4200"/>
+            </a:lvl1pPr>
+            <a:lvl2pPr marL="914400" marR="0" lvl="1" indent="-317500" algn="ctr" rtl="0" eaLnBrk="1" hangingPunct="1">
+              <a:lnSpc>
+                <a:spcPct val="100000"/>
+              </a:lnSpc>
+              <a:spcBef>
+                <a:spcPts val="0"/>
+              </a:spcBef>
+              <a:spcAft>
+                <a:spcPts val="0"/>
+              </a:spcAft>
+              <a:buClr>
+                <a:schemeClr val="lt1"/>
+              </a:buClr>
+              <a:buSzPts val="2100"/>
               <a:buFont typeface="Montserrat"/>
               <a:buNone/>
-              <a:defRPr sz="4200" b="0" i="0" u="none" strike="noStrike" cap="none">
+              <a:defRPr sz="2100" b="0" i="0" u="none" strike="noStrike" cap="none">
                 <a:solidFill>
                   <a:schemeClr val="lt1"/>
                 </a:solidFill>
@@ -33604,24 +36122,24 @@
                 <a:cs typeface="Montserrat"/>
                 <a:sym typeface="Montserrat"/>
               </a:defRPr>
-            </a:lvl3pPr>
-            <a:lvl4pPr marR="0" lvl="3" algn="ctr" rtl="0">
-              <a:lnSpc>
-                <a:spcPct val="100000"/>
-              </a:lnSpc>
-              <a:spcBef>
-                <a:spcPts val="0"/>
-              </a:spcBef>
-              <a:spcAft>
-                <a:spcPts val="0"/>
-              </a:spcAft>
-              <a:buClr>
-                <a:schemeClr val="lt1"/>
-              </a:buClr>
-              <a:buSzPts val="4200"/>
+            </a:lvl2pPr>
+            <a:lvl3pPr marL="1371600" marR="0" lvl="2" indent="-317500" algn="ctr" rtl="0" eaLnBrk="1" hangingPunct="1">
+              <a:lnSpc>
+                <a:spcPct val="100000"/>
+              </a:lnSpc>
+              <a:spcBef>
+                <a:spcPts val="0"/>
+              </a:spcBef>
+              <a:spcAft>
+                <a:spcPts val="0"/>
+              </a:spcAft>
+              <a:buClr>
+                <a:schemeClr val="lt1"/>
+              </a:buClr>
+              <a:buSzPts val="2100"/>
               <a:buFont typeface="Montserrat"/>
               <a:buNone/>
-              <a:defRPr sz="4200" b="0" i="0" u="none" strike="noStrike" cap="none">
+              <a:defRPr sz="2100" b="0" i="0" u="none" strike="noStrike" cap="none">
                 <a:solidFill>
                   <a:schemeClr val="lt1"/>
                 </a:solidFill>
@@ -33630,24 +36148,24 @@
                 <a:cs typeface="Montserrat"/>
                 <a:sym typeface="Montserrat"/>
               </a:defRPr>
-            </a:lvl4pPr>
-            <a:lvl5pPr marR="0" lvl="4" algn="ctr" rtl="0">
-              <a:lnSpc>
-                <a:spcPct val="100000"/>
-              </a:lnSpc>
-              <a:spcBef>
-                <a:spcPts val="0"/>
-              </a:spcBef>
-              <a:spcAft>
-                <a:spcPts val="0"/>
-              </a:spcAft>
-              <a:buClr>
-                <a:schemeClr val="lt1"/>
-              </a:buClr>
-              <a:buSzPts val="4200"/>
+            </a:lvl3pPr>
+            <a:lvl4pPr marL="1828800" marR="0" lvl="3" indent="-317500" algn="ctr" rtl="0" eaLnBrk="1" hangingPunct="1">
+              <a:lnSpc>
+                <a:spcPct val="100000"/>
+              </a:lnSpc>
+              <a:spcBef>
+                <a:spcPts val="0"/>
+              </a:spcBef>
+              <a:spcAft>
+                <a:spcPts val="0"/>
+              </a:spcAft>
+              <a:buClr>
+                <a:schemeClr val="lt1"/>
+              </a:buClr>
+              <a:buSzPts val="2100"/>
               <a:buFont typeface="Montserrat"/>
               <a:buNone/>
-              <a:defRPr sz="4200" b="0" i="0" u="none" strike="noStrike" cap="none">
+              <a:defRPr sz="2100" b="0" i="0" u="none" strike="noStrike" cap="none">
                 <a:solidFill>
                   <a:schemeClr val="lt1"/>
                 </a:solidFill>
@@ -33656,24 +36174,24 @@
                 <a:cs typeface="Montserrat"/>
                 <a:sym typeface="Montserrat"/>
               </a:defRPr>
-            </a:lvl5pPr>
-            <a:lvl6pPr marR="0" lvl="5" algn="ctr" rtl="0">
-              <a:lnSpc>
-                <a:spcPct val="100000"/>
-              </a:lnSpc>
-              <a:spcBef>
-                <a:spcPts val="0"/>
-              </a:spcBef>
-              <a:spcAft>
-                <a:spcPts val="0"/>
-              </a:spcAft>
-              <a:buClr>
-                <a:schemeClr val="lt1"/>
-              </a:buClr>
-              <a:buSzPts val="4200"/>
+            </a:lvl4pPr>
+            <a:lvl5pPr marL="2286000" marR="0" lvl="4" indent="-317500" algn="ctr" rtl="0" eaLnBrk="1" hangingPunct="1">
+              <a:lnSpc>
+                <a:spcPct val="100000"/>
+              </a:lnSpc>
+              <a:spcBef>
+                <a:spcPts val="0"/>
+              </a:spcBef>
+              <a:spcAft>
+                <a:spcPts val="0"/>
+              </a:spcAft>
+              <a:buClr>
+                <a:schemeClr val="lt1"/>
+              </a:buClr>
+              <a:buSzPts val="2100"/>
               <a:buFont typeface="Montserrat"/>
               <a:buNone/>
-              <a:defRPr sz="4200" b="0" i="0" u="none" strike="noStrike" cap="none">
+              <a:defRPr sz="2100" b="0" i="0" u="none" strike="noStrike" cap="none">
                 <a:solidFill>
                   <a:schemeClr val="lt1"/>
                 </a:solidFill>
@@ -33682,24 +36200,24 @@
                 <a:cs typeface="Montserrat"/>
                 <a:sym typeface="Montserrat"/>
               </a:defRPr>
-            </a:lvl6pPr>
-            <a:lvl7pPr marR="0" lvl="6" algn="ctr" rtl="0">
-              <a:lnSpc>
-                <a:spcPct val="100000"/>
-              </a:lnSpc>
-              <a:spcBef>
-                <a:spcPts val="0"/>
-              </a:spcBef>
-              <a:spcAft>
-                <a:spcPts val="0"/>
-              </a:spcAft>
-              <a:buClr>
-                <a:schemeClr val="lt1"/>
-              </a:buClr>
-              <a:buSzPts val="4200"/>
+            </a:lvl5pPr>
+            <a:lvl6pPr marL="2743200" marR="0" lvl="5" indent="-317500" algn="ctr" rtl="0" eaLnBrk="1" hangingPunct="1">
+              <a:lnSpc>
+                <a:spcPct val="100000"/>
+              </a:lnSpc>
+              <a:spcBef>
+                <a:spcPts val="0"/>
+              </a:spcBef>
+              <a:spcAft>
+                <a:spcPts val="0"/>
+              </a:spcAft>
+              <a:buClr>
+                <a:schemeClr val="lt1"/>
+              </a:buClr>
+              <a:buSzPts val="2100"/>
               <a:buFont typeface="Montserrat"/>
               <a:buNone/>
-              <a:defRPr sz="4200" b="0" i="0" u="none" strike="noStrike" cap="none">
+              <a:defRPr sz="2100" b="0" i="0" u="none" strike="noStrike" cap="none">
                 <a:solidFill>
                   <a:schemeClr val="lt1"/>
                 </a:solidFill>
@@ -33708,24 +36226,24 @@
                 <a:cs typeface="Montserrat"/>
                 <a:sym typeface="Montserrat"/>
               </a:defRPr>
-            </a:lvl7pPr>
-            <a:lvl8pPr marR="0" lvl="7" algn="ctr" rtl="0">
-              <a:lnSpc>
-                <a:spcPct val="100000"/>
-              </a:lnSpc>
-              <a:spcBef>
-                <a:spcPts val="0"/>
-              </a:spcBef>
-              <a:spcAft>
-                <a:spcPts val="0"/>
-              </a:spcAft>
-              <a:buClr>
-                <a:schemeClr val="lt1"/>
-              </a:buClr>
-              <a:buSzPts val="4200"/>
+            </a:lvl6pPr>
+            <a:lvl7pPr marL="3200400" marR="0" lvl="6" indent="-317500" algn="ctr" rtl="0" eaLnBrk="1" hangingPunct="1">
+              <a:lnSpc>
+                <a:spcPct val="100000"/>
+              </a:lnSpc>
+              <a:spcBef>
+                <a:spcPts val="0"/>
+              </a:spcBef>
+              <a:spcAft>
+                <a:spcPts val="0"/>
+              </a:spcAft>
+              <a:buClr>
+                <a:schemeClr val="lt1"/>
+              </a:buClr>
+              <a:buSzPts val="2100"/>
               <a:buFont typeface="Montserrat"/>
               <a:buNone/>
-              <a:defRPr sz="4200" b="0" i="0" u="none" strike="noStrike" cap="none">
+              <a:defRPr sz="2100" b="0" i="0" u="none" strike="noStrike" cap="none">
                 <a:solidFill>
                   <a:schemeClr val="lt1"/>
                 </a:solidFill>
@@ -33734,24 +36252,24 @@
                 <a:cs typeface="Montserrat"/>
                 <a:sym typeface="Montserrat"/>
               </a:defRPr>
-            </a:lvl8pPr>
-            <a:lvl9pPr marR="0" lvl="8" algn="ctr" rtl="0">
-              <a:lnSpc>
-                <a:spcPct val="100000"/>
-              </a:lnSpc>
-              <a:spcBef>
-                <a:spcPts val="0"/>
-              </a:spcBef>
-              <a:spcAft>
-                <a:spcPts val="0"/>
-              </a:spcAft>
-              <a:buClr>
-                <a:schemeClr val="lt1"/>
-              </a:buClr>
-              <a:buSzPts val="4200"/>
+            </a:lvl7pPr>
+            <a:lvl8pPr marL="3657600" marR="0" lvl="7" indent="-317500" algn="ctr" rtl="0" eaLnBrk="1" hangingPunct="1">
+              <a:lnSpc>
+                <a:spcPct val="100000"/>
+              </a:lnSpc>
+              <a:spcBef>
+                <a:spcPts val="0"/>
+              </a:spcBef>
+              <a:spcAft>
+                <a:spcPts val="0"/>
+              </a:spcAft>
+              <a:buClr>
+                <a:schemeClr val="lt1"/>
+              </a:buClr>
+              <a:buSzPts val="2100"/>
               <a:buFont typeface="Montserrat"/>
               <a:buNone/>
-              <a:defRPr sz="4200" b="0" i="0" u="none" strike="noStrike" cap="none">
+              <a:defRPr sz="2100" b="0" i="0" u="none" strike="noStrike" cap="none">
                 <a:solidFill>
                   <a:schemeClr val="lt1"/>
                 </a:solidFill>
@@ -33760,78 +36278,24 @@
                 <a:cs typeface="Montserrat"/>
                 <a:sym typeface="Montserrat"/>
               </a:defRPr>
-            </a:lvl9pPr>
-          </a:lstStyle>
-          <a:p>
-            <a:pPr algn="r"/>
-            <a:r>
-              <a:rPr lang="en-US" dirty="0"/>
-              <a:t>Swagger</a:t>
-            </a:r>
-            <a:endParaRPr lang="ru-RU" dirty="0"/>
-          </a:p>
-        </p:txBody>
-      </p:sp>
-      <p:sp>
-        <p:nvSpPr>
-          <p:cNvPr id="1984" name="Google Shape;2099;p63">
-            <a:extLst>
-              <a:ext uri="{FF2B5EF4-FFF2-40B4-BE49-F238E27FC236}">
-                <a16:creationId xmlns:a16="http://schemas.microsoft.com/office/drawing/2014/main" id="{B12F3D69-4715-35AA-88C6-B35AAD805FC4}"/>
-              </a:ext>
-            </a:extLst>
-          </p:cNvPr>
-          <p:cNvSpPr txBox="1">
-            <a:spLocks/>
-          </p:cNvSpPr>
-          <p:nvPr/>
-        </p:nvSpPr>
-        <p:spPr>
-          <a:xfrm>
-            <a:off x="5017773" y="1966350"/>
-            <a:ext cx="2727600" cy="605400"/>
-          </a:xfrm>
-          <a:prstGeom prst="rect">
-            <a:avLst/>
-          </a:prstGeom>
-          <a:noFill/>
-          <a:ln>
-            <a:noFill/>
-          </a:ln>
-        </p:spPr>
-        <p:txBody>
-          <a:bodyPr spcFirstLastPara="1" wrap="square" lIns="91425" tIns="91425" rIns="91425" bIns="91425" anchor="t" anchorCtr="0">
-            <a:noAutofit/>
-          </a:bodyPr>
-          <a:lstStyle>
-            <a:defPPr marR="0" lvl="0" algn="l" rtl="0">
-              <a:lnSpc>
-                <a:spcPct val="100000"/>
-              </a:lnSpc>
-              <a:spcBef>
-                <a:spcPts val="0"/>
-              </a:spcBef>
-              <a:spcAft>
-                <a:spcPts val="0"/>
-              </a:spcAft>
-            </a:defPPr>
-            <a:lvl1pPr marL="457200" marR="0" lvl="0" indent="-342900" algn="ctr" rtl="0">
-              <a:lnSpc>
-                <a:spcPct val="100000"/>
-              </a:lnSpc>
-              <a:spcBef>
-                <a:spcPts val="0"/>
-              </a:spcBef>
-              <a:spcAft>
-                <a:spcPts val="0"/>
-              </a:spcAft>
-              <a:buClr>
-                <a:schemeClr val="lt1"/>
-              </a:buClr>
-              <a:buSzPts val="1400"/>
+            </a:lvl8pPr>
+            <a:lvl9pPr marL="4114800" marR="0" lvl="8" indent="-317500" algn="ctr" rtl="0" eaLnBrk="1" hangingPunct="1">
+              <a:lnSpc>
+                <a:spcPct val="100000"/>
+              </a:lnSpc>
+              <a:spcBef>
+                <a:spcPts val="0"/>
+              </a:spcBef>
+              <a:spcAft>
+                <a:spcPts val="0"/>
+              </a:spcAft>
+              <a:buClr>
+                <a:schemeClr val="lt1"/>
+              </a:buClr>
+              <a:buSzPts val="2100"/>
               <a:buFont typeface="Montserrat"/>
               <a:buNone/>
-              <a:defRPr sz="1400" b="0" i="0" u="none" strike="noStrike" cap="none">
+              <a:defRPr sz="2100" b="0" i="0" u="none" strike="noStrike" cap="none">
                 <a:solidFill>
                   <a:schemeClr val="lt1"/>
                 </a:solidFill>
@@ -33840,302 +36304,27 @@
                 <a:cs typeface="Montserrat"/>
                 <a:sym typeface="Montserrat"/>
               </a:defRPr>
-            </a:lvl1pPr>
-            <a:lvl2pPr marL="914400" marR="0" lvl="1" indent="-317500" algn="ctr" rtl="0">
-              <a:lnSpc>
-                <a:spcPct val="100000"/>
-              </a:lnSpc>
-              <a:spcBef>
-                <a:spcPts val="0"/>
-              </a:spcBef>
-              <a:spcAft>
-                <a:spcPts val="0"/>
-              </a:spcAft>
-              <a:buClr>
-                <a:schemeClr val="lt1"/>
-              </a:buClr>
-              <a:buSzPts val="2100"/>
-              <a:buFont typeface="Montserrat"/>
-              <a:buNone/>
-              <a:defRPr sz="2100" b="0" i="0" u="none" strike="noStrike" cap="none">
-                <a:solidFill>
-                  <a:schemeClr val="lt1"/>
-                </a:solidFill>
-                <a:latin typeface="Montserrat"/>
-                <a:ea typeface="Montserrat"/>
-                <a:cs typeface="Montserrat"/>
-                <a:sym typeface="Montserrat"/>
-              </a:defRPr>
-            </a:lvl2pPr>
-            <a:lvl3pPr marL="1371600" marR="0" lvl="2" indent="-317500" algn="ctr" rtl="0">
-              <a:lnSpc>
-                <a:spcPct val="100000"/>
-              </a:lnSpc>
-              <a:spcBef>
-                <a:spcPts val="0"/>
-              </a:spcBef>
-              <a:spcAft>
-                <a:spcPts val="0"/>
-              </a:spcAft>
-              <a:buClr>
-                <a:schemeClr val="lt1"/>
-              </a:buClr>
-              <a:buSzPts val="2100"/>
-              <a:buFont typeface="Montserrat"/>
-              <a:buNone/>
-              <a:defRPr sz="2100" b="0" i="0" u="none" strike="noStrike" cap="none">
-                <a:solidFill>
-                  <a:schemeClr val="lt1"/>
-                </a:solidFill>
-                <a:latin typeface="Montserrat"/>
-                <a:ea typeface="Montserrat"/>
-                <a:cs typeface="Montserrat"/>
-                <a:sym typeface="Montserrat"/>
-              </a:defRPr>
-            </a:lvl3pPr>
-            <a:lvl4pPr marL="1828800" marR="0" lvl="3" indent="-317500" algn="ctr" rtl="0">
-              <a:lnSpc>
-                <a:spcPct val="100000"/>
-              </a:lnSpc>
-              <a:spcBef>
-                <a:spcPts val="0"/>
-              </a:spcBef>
-              <a:spcAft>
-                <a:spcPts val="0"/>
-              </a:spcAft>
-              <a:buClr>
-                <a:schemeClr val="lt1"/>
-              </a:buClr>
-              <a:buSzPts val="2100"/>
-              <a:buFont typeface="Montserrat"/>
-              <a:buNone/>
-              <a:defRPr sz="2100" b="0" i="0" u="none" strike="noStrike" cap="none">
-                <a:solidFill>
-                  <a:schemeClr val="lt1"/>
-                </a:solidFill>
-                <a:latin typeface="Montserrat"/>
-                <a:ea typeface="Montserrat"/>
-                <a:cs typeface="Montserrat"/>
-                <a:sym typeface="Montserrat"/>
-              </a:defRPr>
-            </a:lvl4pPr>
-            <a:lvl5pPr marL="2286000" marR="0" lvl="4" indent="-317500" algn="ctr" rtl="0">
-              <a:lnSpc>
-                <a:spcPct val="100000"/>
-              </a:lnSpc>
-              <a:spcBef>
-                <a:spcPts val="0"/>
-              </a:spcBef>
-              <a:spcAft>
-                <a:spcPts val="0"/>
-              </a:spcAft>
-              <a:buClr>
-                <a:schemeClr val="lt1"/>
-              </a:buClr>
-              <a:buSzPts val="2100"/>
-              <a:buFont typeface="Montserrat"/>
-              <a:buNone/>
-              <a:defRPr sz="2100" b="0" i="0" u="none" strike="noStrike" cap="none">
-                <a:solidFill>
-                  <a:schemeClr val="lt1"/>
-                </a:solidFill>
-                <a:latin typeface="Montserrat"/>
-                <a:ea typeface="Montserrat"/>
-                <a:cs typeface="Montserrat"/>
-                <a:sym typeface="Montserrat"/>
-              </a:defRPr>
-            </a:lvl5pPr>
-            <a:lvl6pPr marL="2743200" marR="0" lvl="5" indent="-317500" algn="ctr" rtl="0">
-              <a:lnSpc>
-                <a:spcPct val="100000"/>
-              </a:lnSpc>
-              <a:spcBef>
-                <a:spcPts val="0"/>
-              </a:spcBef>
-              <a:spcAft>
-                <a:spcPts val="0"/>
-              </a:spcAft>
-              <a:buClr>
-                <a:schemeClr val="lt1"/>
-              </a:buClr>
-              <a:buSzPts val="2100"/>
-              <a:buFont typeface="Montserrat"/>
-              <a:buNone/>
-              <a:defRPr sz="2100" b="0" i="0" u="none" strike="noStrike" cap="none">
-                <a:solidFill>
-                  <a:schemeClr val="lt1"/>
-                </a:solidFill>
-                <a:latin typeface="Montserrat"/>
-                <a:ea typeface="Montserrat"/>
-                <a:cs typeface="Montserrat"/>
-                <a:sym typeface="Montserrat"/>
-              </a:defRPr>
-            </a:lvl6pPr>
-            <a:lvl7pPr marL="3200400" marR="0" lvl="6" indent="-317500" algn="ctr" rtl="0">
-              <a:lnSpc>
-                <a:spcPct val="100000"/>
-              </a:lnSpc>
-              <a:spcBef>
-                <a:spcPts val="0"/>
-              </a:spcBef>
-              <a:spcAft>
-                <a:spcPts val="0"/>
-              </a:spcAft>
-              <a:buClr>
-                <a:schemeClr val="lt1"/>
-              </a:buClr>
-              <a:buSzPts val="2100"/>
-              <a:buFont typeface="Montserrat"/>
-              <a:buNone/>
-              <a:defRPr sz="2100" b="0" i="0" u="none" strike="noStrike" cap="none">
-                <a:solidFill>
-                  <a:schemeClr val="lt1"/>
-                </a:solidFill>
-                <a:latin typeface="Montserrat"/>
-                <a:ea typeface="Montserrat"/>
-                <a:cs typeface="Montserrat"/>
-                <a:sym typeface="Montserrat"/>
-              </a:defRPr>
-            </a:lvl7pPr>
-            <a:lvl8pPr marL="3657600" marR="0" lvl="7" indent="-317500" algn="ctr" rtl="0">
-              <a:lnSpc>
-                <a:spcPct val="100000"/>
-              </a:lnSpc>
-              <a:spcBef>
-                <a:spcPts val="0"/>
-              </a:spcBef>
-              <a:spcAft>
-                <a:spcPts val="0"/>
-              </a:spcAft>
-              <a:buClr>
-                <a:schemeClr val="lt1"/>
-              </a:buClr>
-              <a:buSzPts val="2100"/>
-              <a:buFont typeface="Montserrat"/>
-              <a:buNone/>
-              <a:defRPr sz="2100" b="0" i="0" u="none" strike="noStrike" cap="none">
-                <a:solidFill>
-                  <a:schemeClr val="lt1"/>
-                </a:solidFill>
-                <a:latin typeface="Montserrat"/>
-                <a:ea typeface="Montserrat"/>
-                <a:cs typeface="Montserrat"/>
-                <a:sym typeface="Montserrat"/>
-              </a:defRPr>
-            </a:lvl8pPr>
-            <a:lvl9pPr marL="4114800" marR="0" lvl="8" indent="-317500" algn="ctr" rtl="0">
-              <a:lnSpc>
-                <a:spcPct val="100000"/>
-              </a:lnSpc>
-              <a:spcBef>
-                <a:spcPts val="0"/>
-              </a:spcBef>
-              <a:spcAft>
-                <a:spcPts val="0"/>
-              </a:spcAft>
-              <a:buClr>
-                <a:schemeClr val="lt1"/>
-              </a:buClr>
-              <a:buSzPts val="2100"/>
-              <a:buFont typeface="Montserrat"/>
-              <a:buNone/>
-              <a:defRPr sz="2100" b="0" i="0" u="none" strike="noStrike" cap="none">
-                <a:solidFill>
-                  <a:schemeClr val="lt1"/>
-                </a:solidFill>
-                <a:latin typeface="Montserrat"/>
-                <a:ea typeface="Montserrat"/>
-                <a:cs typeface="Montserrat"/>
-                <a:sym typeface="Montserrat"/>
-              </a:defRPr>
             </a:lvl9pPr>
           </a:lstStyle>
           <a:p>
-            <a:pPr marL="0" indent="0" algn="l"/>
+            <a:pPr marL="0" indent="0" algn="l">
+              <a:lnSpc>
+                <a:spcPct val="150000"/>
+              </a:lnSpc>
+            </a:pPr>
             <a:r>
               <a:rPr lang="ru-RU" dirty="0"/>
-              <a:t>Документирование </a:t>
-            </a:r>
-            <a:r>
-              <a:rPr lang="en-US" dirty="0"/>
-              <a:t>API</a:t>
+              <a:t>На каждый контроллер есть определенное кол-во тестов на самые главные функции серверного приложения</a:t>
             </a:r>
           </a:p>
         </p:txBody>
       </p:sp>
-      <p:pic>
-        <p:nvPicPr>
-          <p:cNvPr id="3" name="Рисунок 2">
-            <a:extLst>
-              <a:ext uri="{FF2B5EF4-FFF2-40B4-BE49-F238E27FC236}">
-                <a16:creationId xmlns:a16="http://schemas.microsoft.com/office/drawing/2014/main" id="{B9E1851E-3E99-9F22-01E7-510074DA66C2}"/>
-              </a:ext>
-            </a:extLst>
-          </p:cNvPr>
-          <p:cNvPicPr>
-            <a:picLocks noChangeAspect="1"/>
-          </p:cNvPicPr>
-          <p:nvPr/>
-        </p:nvPicPr>
-        <p:blipFill>
-          <a:blip r:embed="rId3">
-            <a:extLst>
-              <a:ext uri="{96DAC541-7B7A-43D3-8B79-37D633B846F1}">
-                <asvg:svgBlip xmlns:asvg="http://schemas.microsoft.com/office/drawing/2016/SVG/main" r:embed="rId4"/>
-              </a:ext>
-            </a:extLst>
-          </a:blip>
-          <a:stretch>
-            <a:fillRect/>
-          </a:stretch>
-        </p:blipFill>
-        <p:spPr>
-          <a:xfrm>
-            <a:off x="5091418" y="2393356"/>
-            <a:ext cx="2237634" cy="2237634"/>
-          </a:xfrm>
-          <a:prstGeom prst="rect">
-            <a:avLst/>
-          </a:prstGeom>
-        </p:spPr>
-      </p:pic>
-      <p:pic>
-        <p:nvPicPr>
-          <p:cNvPr id="2" name="Рисунок 1">
-            <a:extLst>
-              <a:ext uri="{FF2B5EF4-FFF2-40B4-BE49-F238E27FC236}">
-                <a16:creationId xmlns:a16="http://schemas.microsoft.com/office/drawing/2014/main" id="{B85F368D-D45F-8F85-4B64-9980E51E913E}"/>
-              </a:ext>
-            </a:extLst>
-          </p:cNvPr>
-          <p:cNvPicPr>
-            <a:picLocks noChangeAspect="1"/>
-          </p:cNvPicPr>
-          <p:nvPr/>
-        </p:nvPicPr>
-        <p:blipFill>
-          <a:blip r:embed="rId5">
-            <a:extLst>
-              <a:ext uri="{96DAC541-7B7A-43D3-8B79-37D633B846F1}">
-                <asvg:svgBlip xmlns:asvg="http://schemas.microsoft.com/office/drawing/2016/SVG/main" r:embed="rId6"/>
-              </a:ext>
-            </a:extLst>
-          </a:blip>
-          <a:stretch>
-            <a:fillRect/>
-          </a:stretch>
-        </p:blipFill>
-        <p:spPr>
-          <a:xfrm>
-            <a:off x="4572000" y="483939"/>
-            <a:ext cx="460431" cy="460431"/>
-          </a:xfrm>
-          <a:prstGeom prst="rect">
-            <a:avLst/>
-          </a:prstGeom>
-        </p:spPr>
-      </p:pic>
     </p:spTree>
+    <p:extLst>
+      <p:ext uri="{BB962C8B-B14F-4D97-AF65-F5344CB8AC3E}">
+        <p14:creationId xmlns:p14="http://schemas.microsoft.com/office/powerpoint/2010/main" val="3363185708"/>
+      </p:ext>
+    </p:extLst>
   </p:cSld>
   <p:clrMapOvr>
     <a:masterClrMapping/>

--- a/Docs/Презентация системы кафе.pptx
+++ b/Docs/Презентация системы кафе.pptx
@@ -5,7 +5,7 @@
     <p:sldMasterId id="2147483683" r:id="rId1"/>
   </p:sldMasterIdLst>
   <p:notesMasterIdLst>
-    <p:notesMasterId r:id="rId15"/>
+    <p:notesMasterId r:id="rId14"/>
   </p:notesMasterIdLst>
   <p:sldIdLst>
     <p:sldId id="256" r:id="rId2"/>
@@ -15,31 +15,30 @@
     <p:sldId id="259" r:id="rId6"/>
     <p:sldId id="263" r:id="rId7"/>
     <p:sldId id="264" r:id="rId8"/>
-    <p:sldId id="305" r:id="rId9"/>
-    <p:sldId id="307" r:id="rId10"/>
-    <p:sldId id="276" r:id="rId11"/>
-    <p:sldId id="281" r:id="rId12"/>
-    <p:sldId id="288" r:id="rId13"/>
-    <p:sldId id="308" r:id="rId14"/>
+    <p:sldId id="307" r:id="rId9"/>
+    <p:sldId id="276" r:id="rId10"/>
+    <p:sldId id="281" r:id="rId11"/>
+    <p:sldId id="288" r:id="rId12"/>
+    <p:sldId id="308" r:id="rId13"/>
   </p:sldIdLst>
   <p:sldSz cx="9144000" cy="5143500" type="screen16x9"/>
   <p:notesSz cx="6858000" cy="9144000"/>
   <p:embeddedFontLst>
     <p:embeddedFont>
       <p:font typeface="Montserrat" panose="00000500000000000000" pitchFamily="2" charset="-52"/>
-      <p:regular r:id="rId16"/>
-      <p:bold r:id="rId17"/>
-      <p:italic r:id="rId18"/>
-      <p:boldItalic r:id="rId19"/>
+      <p:regular r:id="rId15"/>
+      <p:bold r:id="rId16"/>
+      <p:italic r:id="rId17"/>
+      <p:boldItalic r:id="rId18"/>
     </p:embeddedFont>
     <p:embeddedFont>
       <p:font typeface="Montserrat ExtraBold" panose="00000900000000000000" pitchFamily="2" charset="-52"/>
-      <p:bold r:id="rId20"/>
+      <p:bold r:id="rId19"/>
     </p:embeddedFont>
     <p:embeddedFont>
       <p:font typeface="Montserrat ExtraLight" panose="00000300000000000000" pitchFamily="2" charset="-52"/>
-      <p:regular r:id="rId21"/>
-      <p:italic r:id="rId22"/>
+      <p:regular r:id="rId20"/>
+      <p:italic r:id="rId21"/>
     </p:embeddedFont>
   </p:embeddedFontLst>
   <p:defaultTextStyle>
@@ -829,110 +828,6 @@
   <p:cSld>
     <p:spTree>
       <p:nvGrpSpPr>
-        <p:cNvPr id="1" name="Shape 2093"/>
-        <p:cNvGrpSpPr/>
-        <p:nvPr/>
-      </p:nvGrpSpPr>
-      <p:grpSpPr>
-        <a:xfrm>
-          <a:off x="0" y="0"/>
-          <a:ext cx="0" cy="0"/>
-          <a:chOff x="0" y="0"/>
-          <a:chExt cx="0" cy="0"/>
-        </a:xfrm>
-      </p:grpSpPr>
-      <p:sp>
-        <p:nvSpPr>
-          <p:cNvPr id="2094" name="Google Shape;2094;g7f9262ee2f_0_26352:notes"/>
-          <p:cNvSpPr>
-            <a:spLocks noGrp="1" noRot="1" noChangeAspect="1"/>
-          </p:cNvSpPr>
-          <p:nvPr>
-            <p:ph type="sldImg" idx="2"/>
-          </p:nvPr>
-        </p:nvSpPr>
-        <p:spPr>
-          <a:xfrm>
-            <a:off x="381000" y="685800"/>
-            <a:ext cx="6096000" cy="3429000"/>
-          </a:xfrm>
-          <a:custGeom>
-            <a:avLst/>
-            <a:gdLst/>
-            <a:ahLst/>
-            <a:cxnLst/>
-            <a:rect l="l" t="t" r="r" b="b"/>
-            <a:pathLst>
-              <a:path w="120000" h="120000" extrusionOk="0">
-                <a:moveTo>
-                  <a:pt x="0" y="0"/>
-                </a:moveTo>
-                <a:lnTo>
-                  <a:pt x="120000" y="0"/>
-                </a:lnTo>
-                <a:lnTo>
-                  <a:pt x="120000" y="120000"/>
-                </a:lnTo>
-                <a:lnTo>
-                  <a:pt x="0" y="120000"/>
-                </a:lnTo>
-                <a:close/>
-              </a:path>
-            </a:pathLst>
-          </a:custGeom>
-        </p:spPr>
-      </p:sp>
-      <p:sp>
-        <p:nvSpPr>
-          <p:cNvPr id="2095" name="Google Shape;2095;g7f9262ee2f_0_26352:notes"/>
-          <p:cNvSpPr txBox="1">
-            <a:spLocks noGrp="1"/>
-          </p:cNvSpPr>
-          <p:nvPr>
-            <p:ph type="body" idx="1"/>
-          </p:nvPr>
-        </p:nvSpPr>
-        <p:spPr>
-          <a:xfrm>
-            <a:off x="685800" y="4343400"/>
-            <a:ext cx="5486400" cy="4114800"/>
-          </a:xfrm>
-          <a:prstGeom prst="rect">
-            <a:avLst/>
-          </a:prstGeom>
-        </p:spPr>
-        <p:txBody>
-          <a:bodyPr spcFirstLastPara="1" wrap="square" lIns="91425" tIns="91425" rIns="91425" bIns="91425" anchor="t" anchorCtr="0">
-            <a:noAutofit/>
-          </a:bodyPr>
-          <a:lstStyle/>
-          <a:p>
-            <a:pPr marL="0" lvl="0" indent="0" algn="l" rtl="0">
-              <a:spcBef>
-                <a:spcPts val="0"/>
-              </a:spcBef>
-              <a:spcAft>
-                <a:spcPts val="0"/>
-              </a:spcAft>
-              <a:buNone/>
-            </a:pPr>
-            <a:endParaRPr/>
-          </a:p>
-        </p:txBody>
-      </p:sp>
-    </p:spTree>
-  </p:cSld>
-  <p:clrMapOvr>
-    <a:masterClrMapping/>
-  </p:clrMapOvr>
-</p:notes>
-</file>
-
-<file path=ppt/notesSlides/notesSlide11.xml><?xml version="1.0" encoding="utf-8"?>
-<p:notes xmlns:a="http://schemas.openxmlformats.org/drawingml/2006/main" xmlns:r="http://schemas.openxmlformats.org/officeDocument/2006/relationships" xmlns:p="http://schemas.openxmlformats.org/presentationml/2006/main" showMasterSp="0" showMasterPhAnim="0">
-  <p:cSld>
-    <p:spTree>
-      <p:nvGrpSpPr>
         <p:cNvPr id="1" name="Shape 2186"/>
         <p:cNvGrpSpPr/>
         <p:nvPr/>
@@ -1684,133 +1579,6 @@
   <p:cSld>
     <p:spTree>
       <p:nvGrpSpPr>
-        <p:cNvPr id="1" name="Shape 229">
-          <a:extLst>
-            <a:ext uri="{FF2B5EF4-FFF2-40B4-BE49-F238E27FC236}">
-              <a16:creationId xmlns:a16="http://schemas.microsoft.com/office/drawing/2014/main" id="{A0CFE08D-C5D5-3233-BB16-750F392C80D8}"/>
-            </a:ext>
-          </a:extLst>
-        </p:cNvPr>
-        <p:cNvGrpSpPr/>
-        <p:nvPr/>
-      </p:nvGrpSpPr>
-      <p:grpSpPr>
-        <a:xfrm>
-          <a:off x="0" y="0"/>
-          <a:ext cx="0" cy="0"/>
-          <a:chOff x="0" y="0"/>
-          <a:chExt cx="0" cy="0"/>
-        </a:xfrm>
-      </p:grpSpPr>
-      <p:sp>
-        <p:nvSpPr>
-          <p:cNvPr id="230" name="Google Shape;230;g7f9262ee2f_0_18:notes">
-            <a:extLst>
-              <a:ext uri="{FF2B5EF4-FFF2-40B4-BE49-F238E27FC236}">
-                <a16:creationId xmlns:a16="http://schemas.microsoft.com/office/drawing/2014/main" id="{C12D190F-FD31-D8DC-B29C-95D8BAE3A2D5}"/>
-              </a:ext>
-            </a:extLst>
-          </p:cNvPr>
-          <p:cNvSpPr>
-            <a:spLocks noGrp="1" noRot="1" noChangeAspect="1"/>
-          </p:cNvSpPr>
-          <p:nvPr>
-            <p:ph type="sldImg" idx="2"/>
-          </p:nvPr>
-        </p:nvSpPr>
-        <p:spPr>
-          <a:xfrm>
-            <a:off x="381000" y="685800"/>
-            <a:ext cx="6096000" cy="3429000"/>
-          </a:xfrm>
-          <a:custGeom>
-            <a:avLst/>
-            <a:gdLst/>
-            <a:ahLst/>
-            <a:cxnLst/>
-            <a:rect l="l" t="t" r="r" b="b"/>
-            <a:pathLst>
-              <a:path w="120000" h="120000" extrusionOk="0">
-                <a:moveTo>
-                  <a:pt x="0" y="0"/>
-                </a:moveTo>
-                <a:lnTo>
-                  <a:pt x="120000" y="0"/>
-                </a:lnTo>
-                <a:lnTo>
-                  <a:pt x="120000" y="120000"/>
-                </a:lnTo>
-                <a:lnTo>
-                  <a:pt x="0" y="120000"/>
-                </a:lnTo>
-                <a:close/>
-              </a:path>
-            </a:pathLst>
-          </a:custGeom>
-        </p:spPr>
-      </p:sp>
-      <p:sp>
-        <p:nvSpPr>
-          <p:cNvPr id="231" name="Google Shape;231;g7f9262ee2f_0_18:notes">
-            <a:extLst>
-              <a:ext uri="{FF2B5EF4-FFF2-40B4-BE49-F238E27FC236}">
-                <a16:creationId xmlns:a16="http://schemas.microsoft.com/office/drawing/2014/main" id="{0368FF88-16F0-B1E1-E20D-5AD2ED3578C4}"/>
-              </a:ext>
-            </a:extLst>
-          </p:cNvPr>
-          <p:cNvSpPr txBox="1">
-            <a:spLocks noGrp="1"/>
-          </p:cNvSpPr>
-          <p:nvPr>
-            <p:ph type="body" idx="1"/>
-          </p:nvPr>
-        </p:nvSpPr>
-        <p:spPr>
-          <a:xfrm>
-            <a:off x="685800" y="4343400"/>
-            <a:ext cx="5486400" cy="4114800"/>
-          </a:xfrm>
-          <a:prstGeom prst="rect">
-            <a:avLst/>
-          </a:prstGeom>
-        </p:spPr>
-        <p:txBody>
-          <a:bodyPr spcFirstLastPara="1" wrap="square" lIns="91425" tIns="91425" rIns="91425" bIns="91425" anchor="t" anchorCtr="0">
-            <a:noAutofit/>
-          </a:bodyPr>
-          <a:lstStyle/>
-          <a:p>
-            <a:pPr marL="0" lvl="0" indent="0" algn="l" rtl="0">
-              <a:spcBef>
-                <a:spcPts val="0"/>
-              </a:spcBef>
-              <a:spcAft>
-                <a:spcPts val="0"/>
-              </a:spcAft>
-              <a:buNone/>
-            </a:pPr>
-            <a:endParaRPr/>
-          </a:p>
-        </p:txBody>
-      </p:sp>
-    </p:spTree>
-    <p:extLst>
-      <p:ext uri="{BB962C8B-B14F-4D97-AF65-F5344CB8AC3E}">
-        <p14:creationId xmlns:p14="http://schemas.microsoft.com/office/powerpoint/2010/main" val="1346213620"/>
-      </p:ext>
-    </p:extLst>
-  </p:cSld>
-  <p:clrMapOvr>
-    <a:masterClrMapping/>
-  </p:clrMapOvr>
-</p:notes>
-</file>
-
-<file path=ppt/notesSlides/notesSlide9.xml><?xml version="1.0" encoding="utf-8"?>
-<p:notes xmlns:a="http://schemas.openxmlformats.org/drawingml/2006/main" xmlns:r="http://schemas.openxmlformats.org/officeDocument/2006/relationships" xmlns:p="http://schemas.openxmlformats.org/presentationml/2006/main" showMasterSp="0" showMasterPhAnim="0">
-  <p:cSld>
-    <p:spTree>
-      <p:nvGrpSpPr>
         <p:cNvPr id="1" name="Shape 1999"/>
         <p:cNvGrpSpPr/>
         <p:nvPr/>
@@ -1867,6 +1635,110 @@
       <p:sp>
         <p:nvSpPr>
           <p:cNvPr id="2001" name="Google Shape;2001;g7f9262ee2f_0_26289:notes"/>
+          <p:cNvSpPr txBox="1">
+            <a:spLocks noGrp="1"/>
+          </p:cNvSpPr>
+          <p:nvPr>
+            <p:ph type="body" idx="1"/>
+          </p:nvPr>
+        </p:nvSpPr>
+        <p:spPr>
+          <a:xfrm>
+            <a:off x="685800" y="4343400"/>
+            <a:ext cx="5486400" cy="4114800"/>
+          </a:xfrm>
+          <a:prstGeom prst="rect">
+            <a:avLst/>
+          </a:prstGeom>
+        </p:spPr>
+        <p:txBody>
+          <a:bodyPr spcFirstLastPara="1" wrap="square" lIns="91425" tIns="91425" rIns="91425" bIns="91425" anchor="t" anchorCtr="0">
+            <a:noAutofit/>
+          </a:bodyPr>
+          <a:lstStyle/>
+          <a:p>
+            <a:pPr marL="0" lvl="0" indent="0" algn="l" rtl="0">
+              <a:spcBef>
+                <a:spcPts val="0"/>
+              </a:spcBef>
+              <a:spcAft>
+                <a:spcPts val="0"/>
+              </a:spcAft>
+              <a:buNone/>
+            </a:pPr>
+            <a:endParaRPr/>
+          </a:p>
+        </p:txBody>
+      </p:sp>
+    </p:spTree>
+  </p:cSld>
+  <p:clrMapOvr>
+    <a:masterClrMapping/>
+  </p:clrMapOvr>
+</p:notes>
+</file>
+
+<file path=ppt/notesSlides/notesSlide9.xml><?xml version="1.0" encoding="utf-8"?>
+<p:notes xmlns:a="http://schemas.openxmlformats.org/drawingml/2006/main" xmlns:r="http://schemas.openxmlformats.org/officeDocument/2006/relationships" xmlns:p="http://schemas.openxmlformats.org/presentationml/2006/main" showMasterSp="0" showMasterPhAnim="0">
+  <p:cSld>
+    <p:spTree>
+      <p:nvGrpSpPr>
+        <p:cNvPr id="1" name="Shape 2093"/>
+        <p:cNvGrpSpPr/>
+        <p:nvPr/>
+      </p:nvGrpSpPr>
+      <p:grpSpPr>
+        <a:xfrm>
+          <a:off x="0" y="0"/>
+          <a:ext cx="0" cy="0"/>
+          <a:chOff x="0" y="0"/>
+          <a:chExt cx="0" cy="0"/>
+        </a:xfrm>
+      </p:grpSpPr>
+      <p:sp>
+        <p:nvSpPr>
+          <p:cNvPr id="2094" name="Google Shape;2094;g7f9262ee2f_0_26352:notes"/>
+          <p:cNvSpPr>
+            <a:spLocks noGrp="1" noRot="1" noChangeAspect="1"/>
+          </p:cNvSpPr>
+          <p:nvPr>
+            <p:ph type="sldImg" idx="2"/>
+          </p:nvPr>
+        </p:nvSpPr>
+        <p:spPr>
+          <a:xfrm>
+            <a:off x="381000" y="685800"/>
+            <a:ext cx="6096000" cy="3429000"/>
+          </a:xfrm>
+          <a:custGeom>
+            <a:avLst/>
+            <a:gdLst/>
+            <a:ahLst/>
+            <a:cxnLst/>
+            <a:rect l="l" t="t" r="r" b="b"/>
+            <a:pathLst>
+              <a:path w="120000" h="120000" extrusionOk="0">
+                <a:moveTo>
+                  <a:pt x="0" y="0"/>
+                </a:moveTo>
+                <a:lnTo>
+                  <a:pt x="120000" y="0"/>
+                </a:lnTo>
+                <a:lnTo>
+                  <a:pt x="120000" y="120000"/>
+                </a:lnTo>
+                <a:lnTo>
+                  <a:pt x="0" y="120000"/>
+                </a:lnTo>
+                <a:close/>
+              </a:path>
+            </a:pathLst>
+          </a:custGeom>
+        </p:spPr>
+      </p:sp>
+      <p:sp>
+        <p:nvSpPr>
+          <p:cNvPr id="2095" name="Google Shape;2095;g7f9262ee2f_0_26352:notes"/>
           <p:cNvSpPr txBox="1">
             <a:spLocks noGrp="1"/>
           </p:cNvSpPr>
@@ -15002,1151 +14874,6 @@
   <p:cSld>
     <p:spTree>
       <p:nvGrpSpPr>
-        <p:cNvPr id="1" name="Shape 2002"/>
-        <p:cNvGrpSpPr/>
-        <p:nvPr/>
-      </p:nvGrpSpPr>
-      <p:grpSpPr>
-        <a:xfrm>
-          <a:off x="0" y="0"/>
-          <a:ext cx="0" cy="0"/>
-          <a:chOff x="0" y="0"/>
-          <a:chExt cx="0" cy="0"/>
-        </a:xfrm>
-      </p:grpSpPr>
-      <p:sp>
-        <p:nvSpPr>
-          <p:cNvPr id="2003" name="Google Shape;2003;p58"/>
-          <p:cNvSpPr txBox="1">
-            <a:spLocks noGrp="1"/>
-          </p:cNvSpPr>
-          <p:nvPr>
-            <p:ph type="title"/>
-          </p:nvPr>
-        </p:nvSpPr>
-        <p:spPr>
-          <a:xfrm>
-            <a:off x="938500" y="445025"/>
-            <a:ext cx="4629300" cy="941400"/>
-          </a:xfrm>
-          <a:prstGeom prst="rect">
-            <a:avLst/>
-          </a:prstGeom>
-        </p:spPr>
-        <p:txBody>
-          <a:bodyPr spcFirstLastPara="1" wrap="square" lIns="91425" tIns="91425" rIns="91425" bIns="91425" anchor="t" anchorCtr="0">
-            <a:noAutofit/>
-          </a:bodyPr>
-          <a:lstStyle/>
-          <a:p>
-            <a:pPr lvl="0"/>
-            <a:r>
-              <a:rPr lang="ru-RU" dirty="0"/>
-              <a:t>Безопасность и </a:t>
-            </a:r>
-            <a:r>
-              <a:rPr lang="en-US" dirty="0"/>
-              <a:t>API</a:t>
-            </a:r>
-            <a:endParaRPr dirty="0"/>
-          </a:p>
-        </p:txBody>
-      </p:sp>
-      <p:cxnSp>
-        <p:nvCxnSpPr>
-          <p:cNvPr id="2016" name="Google Shape;2016;p58"/>
-          <p:cNvCxnSpPr/>
-          <p:nvPr/>
-        </p:nvCxnSpPr>
-        <p:spPr>
-          <a:xfrm>
-            <a:off x="1026200" y="414022"/>
-            <a:ext cx="2763000" cy="0"/>
-          </a:xfrm>
-          <a:prstGeom prst="straightConnector1">
-            <a:avLst/>
-          </a:prstGeom>
-          <a:noFill/>
-          <a:ln w="9525" cap="flat" cmpd="sng">
-            <a:solidFill>
-              <a:schemeClr val="accent1"/>
-            </a:solidFill>
-            <a:prstDash val="solid"/>
-            <a:round/>
-            <a:headEnd type="none" w="med" len="med"/>
-            <a:tailEnd type="none" w="med" len="med"/>
-          </a:ln>
-          <a:effectLst>
-            <a:outerShdw blurRad="57150" dist="19050" dir="5400000" algn="bl" rotWithShape="0">
-              <a:srgbClr val="FFFFFF">
-                <a:alpha val="50000"/>
-              </a:srgbClr>
-            </a:outerShdw>
-          </a:effectLst>
-        </p:spPr>
-      </p:cxnSp>
-      <p:sp>
-        <p:nvSpPr>
-          <p:cNvPr id="18" name="Google Shape;2098;p63">
-            <a:extLst>
-              <a:ext uri="{FF2B5EF4-FFF2-40B4-BE49-F238E27FC236}">
-                <a16:creationId xmlns:a16="http://schemas.microsoft.com/office/drawing/2014/main" id="{63D0DE40-08F9-AAE7-FD7D-6AD3A202B343}"/>
-              </a:ext>
-            </a:extLst>
-          </p:cNvPr>
-          <p:cNvSpPr txBox="1">
-            <a:spLocks noGrp="1"/>
-          </p:cNvSpPr>
-          <p:nvPr>
-            <p:ph type="title" idx="2"/>
-          </p:nvPr>
-        </p:nvSpPr>
-        <p:spPr>
-          <a:xfrm>
-            <a:off x="1894670" y="1437831"/>
-            <a:ext cx="2025695" cy="375600"/>
-          </a:xfrm>
-          <a:prstGeom prst="rect">
-            <a:avLst/>
-          </a:prstGeom>
-        </p:spPr>
-        <p:txBody>
-          <a:bodyPr spcFirstLastPara="1" wrap="square" lIns="91425" tIns="91425" rIns="91425" bIns="91425" anchor="t" anchorCtr="0">
-            <a:noAutofit/>
-          </a:bodyPr>
-          <a:lstStyle/>
-          <a:p>
-            <a:pPr lvl="0"/>
-            <a:r>
-              <a:rPr lang="en-US" dirty="0"/>
-              <a:t>JWT-</a:t>
-            </a:r>
-            <a:r>
-              <a:rPr lang="ru-RU" dirty="0"/>
-              <a:t>токены</a:t>
-            </a:r>
-            <a:endParaRPr dirty="0"/>
-          </a:p>
-        </p:txBody>
-      </p:sp>
-      <p:sp>
-        <p:nvSpPr>
-          <p:cNvPr id="19" name="Google Shape;2099;p63">
-            <a:extLst>
-              <a:ext uri="{FF2B5EF4-FFF2-40B4-BE49-F238E27FC236}">
-                <a16:creationId xmlns:a16="http://schemas.microsoft.com/office/drawing/2014/main" id="{FE0FD251-EB6E-5C62-9897-35AB75933E92}"/>
-              </a:ext>
-            </a:extLst>
-          </p:cNvPr>
-          <p:cNvSpPr txBox="1">
-            <a:spLocks/>
-          </p:cNvSpPr>
-          <p:nvPr/>
-        </p:nvSpPr>
-        <p:spPr>
-          <a:xfrm>
-            <a:off x="1424496" y="1885154"/>
-            <a:ext cx="2966042" cy="2492553"/>
-          </a:xfrm>
-          <a:prstGeom prst="rect">
-            <a:avLst/>
-          </a:prstGeom>
-          <a:noFill/>
-          <a:ln>
-            <a:noFill/>
-          </a:ln>
-        </p:spPr>
-        <p:txBody>
-          <a:bodyPr spcFirstLastPara="1" wrap="square" lIns="91425" tIns="91425" rIns="91425" bIns="91425" anchor="t" anchorCtr="0">
-            <a:noAutofit/>
-          </a:bodyPr>
-          <a:lstStyle>
-            <a:defPPr marR="0" lvl="0" algn="l" rtl="0">
-              <a:lnSpc>
-                <a:spcPct val="100000"/>
-              </a:lnSpc>
-              <a:spcBef>
-                <a:spcPts val="0"/>
-              </a:spcBef>
-              <a:spcAft>
-                <a:spcPts val="0"/>
-              </a:spcAft>
-            </a:defPPr>
-            <a:lvl1pPr marL="457200" marR="0" lvl="0" indent="-342900" algn="ctr" rtl="0">
-              <a:lnSpc>
-                <a:spcPct val="100000"/>
-              </a:lnSpc>
-              <a:spcBef>
-                <a:spcPts val="0"/>
-              </a:spcBef>
-              <a:spcAft>
-                <a:spcPts val="0"/>
-              </a:spcAft>
-              <a:buClr>
-                <a:schemeClr val="lt1"/>
-              </a:buClr>
-              <a:buSzPts val="1400"/>
-              <a:buFont typeface="Montserrat"/>
-              <a:buNone/>
-              <a:defRPr sz="1400" b="0" i="0" u="none" strike="noStrike" cap="none">
-                <a:solidFill>
-                  <a:schemeClr val="lt1"/>
-                </a:solidFill>
-                <a:latin typeface="Montserrat"/>
-                <a:ea typeface="Montserrat"/>
-                <a:cs typeface="Montserrat"/>
-                <a:sym typeface="Montserrat"/>
-              </a:defRPr>
-            </a:lvl1pPr>
-            <a:lvl2pPr marL="914400" marR="0" lvl="1" indent="-317500" algn="ctr" rtl="0">
-              <a:lnSpc>
-                <a:spcPct val="100000"/>
-              </a:lnSpc>
-              <a:spcBef>
-                <a:spcPts val="0"/>
-              </a:spcBef>
-              <a:spcAft>
-                <a:spcPts val="0"/>
-              </a:spcAft>
-              <a:buClr>
-                <a:schemeClr val="lt1"/>
-              </a:buClr>
-              <a:buSzPts val="2100"/>
-              <a:buFont typeface="Montserrat"/>
-              <a:buNone/>
-              <a:defRPr sz="2100" b="0" i="0" u="none" strike="noStrike" cap="none">
-                <a:solidFill>
-                  <a:schemeClr val="lt1"/>
-                </a:solidFill>
-                <a:latin typeface="Montserrat"/>
-                <a:ea typeface="Montserrat"/>
-                <a:cs typeface="Montserrat"/>
-                <a:sym typeface="Montserrat"/>
-              </a:defRPr>
-            </a:lvl2pPr>
-            <a:lvl3pPr marL="1371600" marR="0" lvl="2" indent="-317500" algn="ctr" rtl="0">
-              <a:lnSpc>
-                <a:spcPct val="100000"/>
-              </a:lnSpc>
-              <a:spcBef>
-                <a:spcPts val="0"/>
-              </a:spcBef>
-              <a:spcAft>
-                <a:spcPts val="0"/>
-              </a:spcAft>
-              <a:buClr>
-                <a:schemeClr val="lt1"/>
-              </a:buClr>
-              <a:buSzPts val="2100"/>
-              <a:buFont typeface="Montserrat"/>
-              <a:buNone/>
-              <a:defRPr sz="2100" b="0" i="0" u="none" strike="noStrike" cap="none">
-                <a:solidFill>
-                  <a:schemeClr val="lt1"/>
-                </a:solidFill>
-                <a:latin typeface="Montserrat"/>
-                <a:ea typeface="Montserrat"/>
-                <a:cs typeface="Montserrat"/>
-                <a:sym typeface="Montserrat"/>
-              </a:defRPr>
-            </a:lvl3pPr>
-            <a:lvl4pPr marL="1828800" marR="0" lvl="3" indent="-317500" algn="ctr" rtl="0">
-              <a:lnSpc>
-                <a:spcPct val="100000"/>
-              </a:lnSpc>
-              <a:spcBef>
-                <a:spcPts val="0"/>
-              </a:spcBef>
-              <a:spcAft>
-                <a:spcPts val="0"/>
-              </a:spcAft>
-              <a:buClr>
-                <a:schemeClr val="lt1"/>
-              </a:buClr>
-              <a:buSzPts val="2100"/>
-              <a:buFont typeface="Montserrat"/>
-              <a:buNone/>
-              <a:defRPr sz="2100" b="0" i="0" u="none" strike="noStrike" cap="none">
-                <a:solidFill>
-                  <a:schemeClr val="lt1"/>
-                </a:solidFill>
-                <a:latin typeface="Montserrat"/>
-                <a:ea typeface="Montserrat"/>
-                <a:cs typeface="Montserrat"/>
-                <a:sym typeface="Montserrat"/>
-              </a:defRPr>
-            </a:lvl4pPr>
-            <a:lvl5pPr marL="2286000" marR="0" lvl="4" indent="-317500" algn="ctr" rtl="0">
-              <a:lnSpc>
-                <a:spcPct val="100000"/>
-              </a:lnSpc>
-              <a:spcBef>
-                <a:spcPts val="0"/>
-              </a:spcBef>
-              <a:spcAft>
-                <a:spcPts val="0"/>
-              </a:spcAft>
-              <a:buClr>
-                <a:schemeClr val="lt1"/>
-              </a:buClr>
-              <a:buSzPts val="2100"/>
-              <a:buFont typeface="Montserrat"/>
-              <a:buNone/>
-              <a:defRPr sz="2100" b="0" i="0" u="none" strike="noStrike" cap="none">
-                <a:solidFill>
-                  <a:schemeClr val="lt1"/>
-                </a:solidFill>
-                <a:latin typeface="Montserrat"/>
-                <a:ea typeface="Montserrat"/>
-                <a:cs typeface="Montserrat"/>
-                <a:sym typeface="Montserrat"/>
-              </a:defRPr>
-            </a:lvl5pPr>
-            <a:lvl6pPr marL="2743200" marR="0" lvl="5" indent="-317500" algn="ctr" rtl="0">
-              <a:lnSpc>
-                <a:spcPct val="100000"/>
-              </a:lnSpc>
-              <a:spcBef>
-                <a:spcPts val="0"/>
-              </a:spcBef>
-              <a:spcAft>
-                <a:spcPts val="0"/>
-              </a:spcAft>
-              <a:buClr>
-                <a:schemeClr val="lt1"/>
-              </a:buClr>
-              <a:buSzPts val="2100"/>
-              <a:buFont typeface="Montserrat"/>
-              <a:buNone/>
-              <a:defRPr sz="2100" b="0" i="0" u="none" strike="noStrike" cap="none">
-                <a:solidFill>
-                  <a:schemeClr val="lt1"/>
-                </a:solidFill>
-                <a:latin typeface="Montserrat"/>
-                <a:ea typeface="Montserrat"/>
-                <a:cs typeface="Montserrat"/>
-                <a:sym typeface="Montserrat"/>
-              </a:defRPr>
-            </a:lvl6pPr>
-            <a:lvl7pPr marL="3200400" marR="0" lvl="6" indent="-317500" algn="ctr" rtl="0">
-              <a:lnSpc>
-                <a:spcPct val="100000"/>
-              </a:lnSpc>
-              <a:spcBef>
-                <a:spcPts val="0"/>
-              </a:spcBef>
-              <a:spcAft>
-                <a:spcPts val="0"/>
-              </a:spcAft>
-              <a:buClr>
-                <a:schemeClr val="lt1"/>
-              </a:buClr>
-              <a:buSzPts val="2100"/>
-              <a:buFont typeface="Montserrat"/>
-              <a:buNone/>
-              <a:defRPr sz="2100" b="0" i="0" u="none" strike="noStrike" cap="none">
-                <a:solidFill>
-                  <a:schemeClr val="lt1"/>
-                </a:solidFill>
-                <a:latin typeface="Montserrat"/>
-                <a:ea typeface="Montserrat"/>
-                <a:cs typeface="Montserrat"/>
-                <a:sym typeface="Montserrat"/>
-              </a:defRPr>
-            </a:lvl7pPr>
-            <a:lvl8pPr marL="3657600" marR="0" lvl="7" indent="-317500" algn="ctr" rtl="0">
-              <a:lnSpc>
-                <a:spcPct val="100000"/>
-              </a:lnSpc>
-              <a:spcBef>
-                <a:spcPts val="0"/>
-              </a:spcBef>
-              <a:spcAft>
-                <a:spcPts val="0"/>
-              </a:spcAft>
-              <a:buClr>
-                <a:schemeClr val="lt1"/>
-              </a:buClr>
-              <a:buSzPts val="2100"/>
-              <a:buFont typeface="Montserrat"/>
-              <a:buNone/>
-              <a:defRPr sz="2100" b="0" i="0" u="none" strike="noStrike" cap="none">
-                <a:solidFill>
-                  <a:schemeClr val="lt1"/>
-                </a:solidFill>
-                <a:latin typeface="Montserrat"/>
-                <a:ea typeface="Montserrat"/>
-                <a:cs typeface="Montserrat"/>
-                <a:sym typeface="Montserrat"/>
-              </a:defRPr>
-            </a:lvl8pPr>
-            <a:lvl9pPr marL="4114800" marR="0" lvl="8" indent="-317500" algn="ctr" rtl="0">
-              <a:lnSpc>
-                <a:spcPct val="100000"/>
-              </a:lnSpc>
-              <a:spcBef>
-                <a:spcPts val="0"/>
-              </a:spcBef>
-              <a:spcAft>
-                <a:spcPts val="0"/>
-              </a:spcAft>
-              <a:buClr>
-                <a:schemeClr val="lt1"/>
-              </a:buClr>
-              <a:buSzPts val="2100"/>
-              <a:buFont typeface="Montserrat"/>
-              <a:buNone/>
-              <a:defRPr sz="2100" b="0" i="0" u="none" strike="noStrike" cap="none">
-                <a:solidFill>
-                  <a:schemeClr val="lt1"/>
-                </a:solidFill>
-                <a:latin typeface="Montserrat"/>
-                <a:ea typeface="Montserrat"/>
-                <a:cs typeface="Montserrat"/>
-                <a:sym typeface="Montserrat"/>
-              </a:defRPr>
-            </a:lvl9pPr>
-          </a:lstStyle>
-          <a:p>
-            <a:pPr marL="0" indent="0" algn="l">
-              <a:lnSpc>
-                <a:spcPct val="150000"/>
-              </a:lnSpc>
-            </a:pPr>
-            <a:r>
-              <a:rPr lang="ru-RU" dirty="0"/>
-              <a:t>Авторизация осуществляется</a:t>
-            </a:r>
-          </a:p>
-          <a:p>
-            <a:pPr marL="0" indent="0" algn="l">
-              <a:lnSpc>
-                <a:spcPct val="150000"/>
-              </a:lnSpc>
-            </a:pPr>
-            <a:r>
-              <a:rPr lang="ru-RU" dirty="0"/>
-              <a:t>с использованием JWT-токенов, в которые вшиваются необходимые параметры пользователя.</a:t>
-            </a:r>
-          </a:p>
-          <a:p>
-            <a:pPr marL="0" indent="0" algn="l">
-              <a:lnSpc>
-                <a:spcPct val="150000"/>
-              </a:lnSpc>
-            </a:pPr>
-            <a:r>
-              <a:rPr lang="en-US" dirty="0"/>
-              <a:t>(ID, Name, Role)</a:t>
-            </a:r>
-          </a:p>
-        </p:txBody>
-      </p:sp>
-      <p:cxnSp>
-        <p:nvCxnSpPr>
-          <p:cNvPr id="27" name="Google Shape;2108;p63">
-            <a:extLst>
-              <a:ext uri="{FF2B5EF4-FFF2-40B4-BE49-F238E27FC236}">
-                <a16:creationId xmlns:a16="http://schemas.microsoft.com/office/drawing/2014/main" id="{2E5AF290-7A46-CF31-E359-360D9F390530}"/>
-              </a:ext>
-            </a:extLst>
-          </p:cNvPr>
-          <p:cNvCxnSpPr>
-            <a:cxnSpLocks/>
-          </p:cNvCxnSpPr>
-          <p:nvPr/>
-        </p:nvCxnSpPr>
-        <p:spPr>
-          <a:xfrm>
-            <a:off x="4572000" y="1566172"/>
-            <a:ext cx="0" cy="3130519"/>
-          </a:xfrm>
-          <a:prstGeom prst="straightConnector1">
-            <a:avLst/>
-          </a:prstGeom>
-          <a:noFill/>
-          <a:ln w="9525" cap="flat" cmpd="sng">
-            <a:solidFill>
-              <a:schemeClr val="accent1"/>
-            </a:solidFill>
-            <a:prstDash val="solid"/>
-            <a:round/>
-            <a:headEnd type="none" w="med" len="med"/>
-            <a:tailEnd type="none" w="med" len="med"/>
-          </a:ln>
-          <a:effectLst>
-            <a:outerShdw blurRad="57150" dist="19050" dir="5400000" algn="bl" rotWithShape="0">
-              <a:srgbClr val="FFFFFF">
-                <a:alpha val="50000"/>
-              </a:srgbClr>
-            </a:outerShdw>
-          </a:effectLst>
-        </p:spPr>
-      </p:cxnSp>
-      <p:sp>
-        <p:nvSpPr>
-          <p:cNvPr id="2047" name="Google Shape;2098;p63">
-            <a:extLst>
-              <a:ext uri="{FF2B5EF4-FFF2-40B4-BE49-F238E27FC236}">
-                <a16:creationId xmlns:a16="http://schemas.microsoft.com/office/drawing/2014/main" id="{10AC4F83-7C14-7590-D15F-B83DAD5980FC}"/>
-              </a:ext>
-            </a:extLst>
-          </p:cNvPr>
-          <p:cNvSpPr txBox="1">
-            <a:spLocks/>
-          </p:cNvSpPr>
-          <p:nvPr/>
-        </p:nvSpPr>
-        <p:spPr>
-          <a:xfrm>
-            <a:off x="5470819" y="1437831"/>
-            <a:ext cx="1301855" cy="375600"/>
-          </a:xfrm>
-          <a:prstGeom prst="rect">
-            <a:avLst/>
-          </a:prstGeom>
-          <a:noFill/>
-          <a:ln>
-            <a:noFill/>
-          </a:ln>
-        </p:spPr>
-        <p:txBody>
-          <a:bodyPr spcFirstLastPara="1" wrap="square" lIns="91425" tIns="91425" rIns="91425" bIns="91425" anchor="t" anchorCtr="0">
-            <a:noAutofit/>
-          </a:bodyPr>
-          <a:lstStyle>
-            <a:defPPr marR="0" lvl="0" algn="l" rtl="0">
-              <a:lnSpc>
-                <a:spcPct val="100000"/>
-              </a:lnSpc>
-              <a:spcBef>
-                <a:spcPts val="0"/>
-              </a:spcBef>
-              <a:spcAft>
-                <a:spcPts val="0"/>
-              </a:spcAft>
-            </a:defPPr>
-            <a:lvl1pPr marR="0" lvl="0" algn="ctr" rtl="0">
-              <a:lnSpc>
-                <a:spcPct val="100000"/>
-              </a:lnSpc>
-              <a:spcBef>
-                <a:spcPts val="0"/>
-              </a:spcBef>
-              <a:spcAft>
-                <a:spcPts val="0"/>
-              </a:spcAft>
-              <a:buClr>
-                <a:schemeClr val="lt1"/>
-              </a:buClr>
-              <a:buSzPts val="1800"/>
-              <a:buFont typeface="Montserrat ExtraBold"/>
-              <a:buNone/>
-              <a:defRPr sz="1800" b="0" i="0" u="none" strike="noStrike" cap="none">
-                <a:solidFill>
-                  <a:schemeClr val="lt1"/>
-                </a:solidFill>
-                <a:latin typeface="Montserrat ExtraBold"/>
-                <a:ea typeface="Montserrat ExtraBold"/>
-                <a:cs typeface="Montserrat ExtraBold"/>
-                <a:sym typeface="Montserrat ExtraBold"/>
-              </a:defRPr>
-            </a:lvl1pPr>
-            <a:lvl2pPr marR="0" lvl="1" algn="ctr" rtl="0">
-              <a:lnSpc>
-                <a:spcPct val="100000"/>
-              </a:lnSpc>
-              <a:spcBef>
-                <a:spcPts val="0"/>
-              </a:spcBef>
-              <a:spcAft>
-                <a:spcPts val="0"/>
-              </a:spcAft>
-              <a:buClr>
-                <a:schemeClr val="lt1"/>
-              </a:buClr>
-              <a:buSzPts val="4200"/>
-              <a:buFont typeface="Montserrat"/>
-              <a:buNone/>
-              <a:defRPr sz="4200" b="0" i="0" u="none" strike="noStrike" cap="none">
-                <a:solidFill>
-                  <a:schemeClr val="lt1"/>
-                </a:solidFill>
-                <a:latin typeface="Montserrat"/>
-                <a:ea typeface="Montserrat"/>
-                <a:cs typeface="Montserrat"/>
-                <a:sym typeface="Montserrat"/>
-              </a:defRPr>
-            </a:lvl2pPr>
-            <a:lvl3pPr marR="0" lvl="2" algn="ctr" rtl="0">
-              <a:lnSpc>
-                <a:spcPct val="100000"/>
-              </a:lnSpc>
-              <a:spcBef>
-                <a:spcPts val="0"/>
-              </a:spcBef>
-              <a:spcAft>
-                <a:spcPts val="0"/>
-              </a:spcAft>
-              <a:buClr>
-                <a:schemeClr val="lt1"/>
-              </a:buClr>
-              <a:buSzPts val="4200"/>
-              <a:buFont typeface="Montserrat"/>
-              <a:buNone/>
-              <a:defRPr sz="4200" b="0" i="0" u="none" strike="noStrike" cap="none">
-                <a:solidFill>
-                  <a:schemeClr val="lt1"/>
-                </a:solidFill>
-                <a:latin typeface="Montserrat"/>
-                <a:ea typeface="Montserrat"/>
-                <a:cs typeface="Montserrat"/>
-                <a:sym typeface="Montserrat"/>
-              </a:defRPr>
-            </a:lvl3pPr>
-            <a:lvl4pPr marR="0" lvl="3" algn="ctr" rtl="0">
-              <a:lnSpc>
-                <a:spcPct val="100000"/>
-              </a:lnSpc>
-              <a:spcBef>
-                <a:spcPts val="0"/>
-              </a:spcBef>
-              <a:spcAft>
-                <a:spcPts val="0"/>
-              </a:spcAft>
-              <a:buClr>
-                <a:schemeClr val="lt1"/>
-              </a:buClr>
-              <a:buSzPts val="4200"/>
-              <a:buFont typeface="Montserrat"/>
-              <a:buNone/>
-              <a:defRPr sz="4200" b="0" i="0" u="none" strike="noStrike" cap="none">
-                <a:solidFill>
-                  <a:schemeClr val="lt1"/>
-                </a:solidFill>
-                <a:latin typeface="Montserrat"/>
-                <a:ea typeface="Montserrat"/>
-                <a:cs typeface="Montserrat"/>
-                <a:sym typeface="Montserrat"/>
-              </a:defRPr>
-            </a:lvl4pPr>
-            <a:lvl5pPr marR="0" lvl="4" algn="ctr" rtl="0">
-              <a:lnSpc>
-                <a:spcPct val="100000"/>
-              </a:lnSpc>
-              <a:spcBef>
-                <a:spcPts val="0"/>
-              </a:spcBef>
-              <a:spcAft>
-                <a:spcPts val="0"/>
-              </a:spcAft>
-              <a:buClr>
-                <a:schemeClr val="lt1"/>
-              </a:buClr>
-              <a:buSzPts val="4200"/>
-              <a:buFont typeface="Montserrat"/>
-              <a:buNone/>
-              <a:defRPr sz="4200" b="0" i="0" u="none" strike="noStrike" cap="none">
-                <a:solidFill>
-                  <a:schemeClr val="lt1"/>
-                </a:solidFill>
-                <a:latin typeface="Montserrat"/>
-                <a:ea typeface="Montserrat"/>
-                <a:cs typeface="Montserrat"/>
-                <a:sym typeface="Montserrat"/>
-              </a:defRPr>
-            </a:lvl5pPr>
-            <a:lvl6pPr marR="0" lvl="5" algn="ctr" rtl="0">
-              <a:lnSpc>
-                <a:spcPct val="100000"/>
-              </a:lnSpc>
-              <a:spcBef>
-                <a:spcPts val="0"/>
-              </a:spcBef>
-              <a:spcAft>
-                <a:spcPts val="0"/>
-              </a:spcAft>
-              <a:buClr>
-                <a:schemeClr val="lt1"/>
-              </a:buClr>
-              <a:buSzPts val="4200"/>
-              <a:buFont typeface="Montserrat"/>
-              <a:buNone/>
-              <a:defRPr sz="4200" b="0" i="0" u="none" strike="noStrike" cap="none">
-                <a:solidFill>
-                  <a:schemeClr val="lt1"/>
-                </a:solidFill>
-                <a:latin typeface="Montserrat"/>
-                <a:ea typeface="Montserrat"/>
-                <a:cs typeface="Montserrat"/>
-                <a:sym typeface="Montserrat"/>
-              </a:defRPr>
-            </a:lvl6pPr>
-            <a:lvl7pPr marR="0" lvl="6" algn="ctr" rtl="0">
-              <a:lnSpc>
-                <a:spcPct val="100000"/>
-              </a:lnSpc>
-              <a:spcBef>
-                <a:spcPts val="0"/>
-              </a:spcBef>
-              <a:spcAft>
-                <a:spcPts val="0"/>
-              </a:spcAft>
-              <a:buClr>
-                <a:schemeClr val="lt1"/>
-              </a:buClr>
-              <a:buSzPts val="4200"/>
-              <a:buFont typeface="Montserrat"/>
-              <a:buNone/>
-              <a:defRPr sz="4200" b="0" i="0" u="none" strike="noStrike" cap="none">
-                <a:solidFill>
-                  <a:schemeClr val="lt1"/>
-                </a:solidFill>
-                <a:latin typeface="Montserrat"/>
-                <a:ea typeface="Montserrat"/>
-                <a:cs typeface="Montserrat"/>
-                <a:sym typeface="Montserrat"/>
-              </a:defRPr>
-            </a:lvl7pPr>
-            <a:lvl8pPr marR="0" lvl="7" algn="ctr" rtl="0">
-              <a:lnSpc>
-                <a:spcPct val="100000"/>
-              </a:lnSpc>
-              <a:spcBef>
-                <a:spcPts val="0"/>
-              </a:spcBef>
-              <a:spcAft>
-                <a:spcPts val="0"/>
-              </a:spcAft>
-              <a:buClr>
-                <a:schemeClr val="lt1"/>
-              </a:buClr>
-              <a:buSzPts val="4200"/>
-              <a:buFont typeface="Montserrat"/>
-              <a:buNone/>
-              <a:defRPr sz="4200" b="0" i="0" u="none" strike="noStrike" cap="none">
-                <a:solidFill>
-                  <a:schemeClr val="lt1"/>
-                </a:solidFill>
-                <a:latin typeface="Montserrat"/>
-                <a:ea typeface="Montserrat"/>
-                <a:cs typeface="Montserrat"/>
-                <a:sym typeface="Montserrat"/>
-              </a:defRPr>
-            </a:lvl8pPr>
-            <a:lvl9pPr marR="0" lvl="8" algn="ctr" rtl="0">
-              <a:lnSpc>
-                <a:spcPct val="100000"/>
-              </a:lnSpc>
-              <a:spcBef>
-                <a:spcPts val="0"/>
-              </a:spcBef>
-              <a:spcAft>
-                <a:spcPts val="0"/>
-              </a:spcAft>
-              <a:buClr>
-                <a:schemeClr val="lt1"/>
-              </a:buClr>
-              <a:buSzPts val="4200"/>
-              <a:buFont typeface="Montserrat"/>
-              <a:buNone/>
-              <a:defRPr sz="4200" b="0" i="0" u="none" strike="noStrike" cap="none">
-                <a:solidFill>
-                  <a:schemeClr val="lt1"/>
-                </a:solidFill>
-                <a:latin typeface="Montserrat"/>
-                <a:ea typeface="Montserrat"/>
-                <a:cs typeface="Montserrat"/>
-                <a:sym typeface="Montserrat"/>
-              </a:defRPr>
-            </a:lvl9pPr>
-          </a:lstStyle>
-          <a:p>
-            <a:pPr algn="r"/>
-            <a:r>
-              <a:rPr lang="en-US" dirty="0"/>
-              <a:t>Swagger</a:t>
-            </a:r>
-            <a:endParaRPr lang="ru-RU" dirty="0"/>
-          </a:p>
-        </p:txBody>
-      </p:sp>
-      <p:sp>
-        <p:nvSpPr>
-          <p:cNvPr id="1984" name="Google Shape;2099;p63">
-            <a:extLst>
-              <a:ext uri="{FF2B5EF4-FFF2-40B4-BE49-F238E27FC236}">
-                <a16:creationId xmlns:a16="http://schemas.microsoft.com/office/drawing/2014/main" id="{B12F3D69-4715-35AA-88C6-B35AAD805FC4}"/>
-              </a:ext>
-            </a:extLst>
-          </p:cNvPr>
-          <p:cNvSpPr txBox="1">
-            <a:spLocks/>
-          </p:cNvSpPr>
-          <p:nvPr/>
-        </p:nvSpPr>
-        <p:spPr>
-          <a:xfrm>
-            <a:off x="5017773" y="1966350"/>
-            <a:ext cx="2727600" cy="605400"/>
-          </a:xfrm>
-          <a:prstGeom prst="rect">
-            <a:avLst/>
-          </a:prstGeom>
-          <a:noFill/>
-          <a:ln>
-            <a:noFill/>
-          </a:ln>
-        </p:spPr>
-        <p:txBody>
-          <a:bodyPr spcFirstLastPara="1" wrap="square" lIns="91425" tIns="91425" rIns="91425" bIns="91425" anchor="t" anchorCtr="0">
-            <a:noAutofit/>
-          </a:bodyPr>
-          <a:lstStyle>
-            <a:defPPr marR="0" lvl="0" algn="l" rtl="0">
-              <a:lnSpc>
-                <a:spcPct val="100000"/>
-              </a:lnSpc>
-              <a:spcBef>
-                <a:spcPts val="0"/>
-              </a:spcBef>
-              <a:spcAft>
-                <a:spcPts val="0"/>
-              </a:spcAft>
-            </a:defPPr>
-            <a:lvl1pPr marL="457200" marR="0" lvl="0" indent="-342900" algn="ctr" rtl="0">
-              <a:lnSpc>
-                <a:spcPct val="100000"/>
-              </a:lnSpc>
-              <a:spcBef>
-                <a:spcPts val="0"/>
-              </a:spcBef>
-              <a:spcAft>
-                <a:spcPts val="0"/>
-              </a:spcAft>
-              <a:buClr>
-                <a:schemeClr val="lt1"/>
-              </a:buClr>
-              <a:buSzPts val="1400"/>
-              <a:buFont typeface="Montserrat"/>
-              <a:buNone/>
-              <a:defRPr sz="1400" b="0" i="0" u="none" strike="noStrike" cap="none">
-                <a:solidFill>
-                  <a:schemeClr val="lt1"/>
-                </a:solidFill>
-                <a:latin typeface="Montserrat"/>
-                <a:ea typeface="Montserrat"/>
-                <a:cs typeface="Montserrat"/>
-                <a:sym typeface="Montserrat"/>
-              </a:defRPr>
-            </a:lvl1pPr>
-            <a:lvl2pPr marL="914400" marR="0" lvl="1" indent="-317500" algn="ctr" rtl="0">
-              <a:lnSpc>
-                <a:spcPct val="100000"/>
-              </a:lnSpc>
-              <a:spcBef>
-                <a:spcPts val="0"/>
-              </a:spcBef>
-              <a:spcAft>
-                <a:spcPts val="0"/>
-              </a:spcAft>
-              <a:buClr>
-                <a:schemeClr val="lt1"/>
-              </a:buClr>
-              <a:buSzPts val="2100"/>
-              <a:buFont typeface="Montserrat"/>
-              <a:buNone/>
-              <a:defRPr sz="2100" b="0" i="0" u="none" strike="noStrike" cap="none">
-                <a:solidFill>
-                  <a:schemeClr val="lt1"/>
-                </a:solidFill>
-                <a:latin typeface="Montserrat"/>
-                <a:ea typeface="Montserrat"/>
-                <a:cs typeface="Montserrat"/>
-                <a:sym typeface="Montserrat"/>
-              </a:defRPr>
-            </a:lvl2pPr>
-            <a:lvl3pPr marL="1371600" marR="0" lvl="2" indent="-317500" algn="ctr" rtl="0">
-              <a:lnSpc>
-                <a:spcPct val="100000"/>
-              </a:lnSpc>
-              <a:spcBef>
-                <a:spcPts val="0"/>
-              </a:spcBef>
-              <a:spcAft>
-                <a:spcPts val="0"/>
-              </a:spcAft>
-              <a:buClr>
-                <a:schemeClr val="lt1"/>
-              </a:buClr>
-              <a:buSzPts val="2100"/>
-              <a:buFont typeface="Montserrat"/>
-              <a:buNone/>
-              <a:defRPr sz="2100" b="0" i="0" u="none" strike="noStrike" cap="none">
-                <a:solidFill>
-                  <a:schemeClr val="lt1"/>
-                </a:solidFill>
-                <a:latin typeface="Montserrat"/>
-                <a:ea typeface="Montserrat"/>
-                <a:cs typeface="Montserrat"/>
-                <a:sym typeface="Montserrat"/>
-              </a:defRPr>
-            </a:lvl3pPr>
-            <a:lvl4pPr marL="1828800" marR="0" lvl="3" indent="-317500" algn="ctr" rtl="0">
-              <a:lnSpc>
-                <a:spcPct val="100000"/>
-              </a:lnSpc>
-              <a:spcBef>
-                <a:spcPts val="0"/>
-              </a:spcBef>
-              <a:spcAft>
-                <a:spcPts val="0"/>
-              </a:spcAft>
-              <a:buClr>
-                <a:schemeClr val="lt1"/>
-              </a:buClr>
-              <a:buSzPts val="2100"/>
-              <a:buFont typeface="Montserrat"/>
-              <a:buNone/>
-              <a:defRPr sz="2100" b="0" i="0" u="none" strike="noStrike" cap="none">
-                <a:solidFill>
-                  <a:schemeClr val="lt1"/>
-                </a:solidFill>
-                <a:latin typeface="Montserrat"/>
-                <a:ea typeface="Montserrat"/>
-                <a:cs typeface="Montserrat"/>
-                <a:sym typeface="Montserrat"/>
-              </a:defRPr>
-            </a:lvl4pPr>
-            <a:lvl5pPr marL="2286000" marR="0" lvl="4" indent="-317500" algn="ctr" rtl="0">
-              <a:lnSpc>
-                <a:spcPct val="100000"/>
-              </a:lnSpc>
-              <a:spcBef>
-                <a:spcPts val="0"/>
-              </a:spcBef>
-              <a:spcAft>
-                <a:spcPts val="0"/>
-              </a:spcAft>
-              <a:buClr>
-                <a:schemeClr val="lt1"/>
-              </a:buClr>
-              <a:buSzPts val="2100"/>
-              <a:buFont typeface="Montserrat"/>
-              <a:buNone/>
-              <a:defRPr sz="2100" b="0" i="0" u="none" strike="noStrike" cap="none">
-                <a:solidFill>
-                  <a:schemeClr val="lt1"/>
-                </a:solidFill>
-                <a:latin typeface="Montserrat"/>
-                <a:ea typeface="Montserrat"/>
-                <a:cs typeface="Montserrat"/>
-                <a:sym typeface="Montserrat"/>
-              </a:defRPr>
-            </a:lvl5pPr>
-            <a:lvl6pPr marL="2743200" marR="0" lvl="5" indent="-317500" algn="ctr" rtl="0">
-              <a:lnSpc>
-                <a:spcPct val="100000"/>
-              </a:lnSpc>
-              <a:spcBef>
-                <a:spcPts val="0"/>
-              </a:spcBef>
-              <a:spcAft>
-                <a:spcPts val="0"/>
-              </a:spcAft>
-              <a:buClr>
-                <a:schemeClr val="lt1"/>
-              </a:buClr>
-              <a:buSzPts val="2100"/>
-              <a:buFont typeface="Montserrat"/>
-              <a:buNone/>
-              <a:defRPr sz="2100" b="0" i="0" u="none" strike="noStrike" cap="none">
-                <a:solidFill>
-                  <a:schemeClr val="lt1"/>
-                </a:solidFill>
-                <a:latin typeface="Montserrat"/>
-                <a:ea typeface="Montserrat"/>
-                <a:cs typeface="Montserrat"/>
-                <a:sym typeface="Montserrat"/>
-              </a:defRPr>
-            </a:lvl6pPr>
-            <a:lvl7pPr marL="3200400" marR="0" lvl="6" indent="-317500" algn="ctr" rtl="0">
-              <a:lnSpc>
-                <a:spcPct val="100000"/>
-              </a:lnSpc>
-              <a:spcBef>
-                <a:spcPts val="0"/>
-              </a:spcBef>
-              <a:spcAft>
-                <a:spcPts val="0"/>
-              </a:spcAft>
-              <a:buClr>
-                <a:schemeClr val="lt1"/>
-              </a:buClr>
-              <a:buSzPts val="2100"/>
-              <a:buFont typeface="Montserrat"/>
-              <a:buNone/>
-              <a:defRPr sz="2100" b="0" i="0" u="none" strike="noStrike" cap="none">
-                <a:solidFill>
-                  <a:schemeClr val="lt1"/>
-                </a:solidFill>
-                <a:latin typeface="Montserrat"/>
-                <a:ea typeface="Montserrat"/>
-                <a:cs typeface="Montserrat"/>
-                <a:sym typeface="Montserrat"/>
-              </a:defRPr>
-            </a:lvl7pPr>
-            <a:lvl8pPr marL="3657600" marR="0" lvl="7" indent="-317500" algn="ctr" rtl="0">
-              <a:lnSpc>
-                <a:spcPct val="100000"/>
-              </a:lnSpc>
-              <a:spcBef>
-                <a:spcPts val="0"/>
-              </a:spcBef>
-              <a:spcAft>
-                <a:spcPts val="0"/>
-              </a:spcAft>
-              <a:buClr>
-                <a:schemeClr val="lt1"/>
-              </a:buClr>
-              <a:buSzPts val="2100"/>
-              <a:buFont typeface="Montserrat"/>
-              <a:buNone/>
-              <a:defRPr sz="2100" b="0" i="0" u="none" strike="noStrike" cap="none">
-                <a:solidFill>
-                  <a:schemeClr val="lt1"/>
-                </a:solidFill>
-                <a:latin typeface="Montserrat"/>
-                <a:ea typeface="Montserrat"/>
-                <a:cs typeface="Montserrat"/>
-                <a:sym typeface="Montserrat"/>
-              </a:defRPr>
-            </a:lvl8pPr>
-            <a:lvl9pPr marL="4114800" marR="0" lvl="8" indent="-317500" algn="ctr" rtl="0">
-              <a:lnSpc>
-                <a:spcPct val="100000"/>
-              </a:lnSpc>
-              <a:spcBef>
-                <a:spcPts val="0"/>
-              </a:spcBef>
-              <a:spcAft>
-                <a:spcPts val="0"/>
-              </a:spcAft>
-              <a:buClr>
-                <a:schemeClr val="lt1"/>
-              </a:buClr>
-              <a:buSzPts val="2100"/>
-              <a:buFont typeface="Montserrat"/>
-              <a:buNone/>
-              <a:defRPr sz="2100" b="0" i="0" u="none" strike="noStrike" cap="none">
-                <a:solidFill>
-                  <a:schemeClr val="lt1"/>
-                </a:solidFill>
-                <a:latin typeface="Montserrat"/>
-                <a:ea typeface="Montserrat"/>
-                <a:cs typeface="Montserrat"/>
-                <a:sym typeface="Montserrat"/>
-              </a:defRPr>
-            </a:lvl9pPr>
-          </a:lstStyle>
-          <a:p>
-            <a:pPr marL="0" indent="0" algn="l"/>
-            <a:r>
-              <a:rPr lang="ru-RU" dirty="0"/>
-              <a:t>Документирование </a:t>
-            </a:r>
-            <a:r>
-              <a:rPr lang="en-US" dirty="0"/>
-              <a:t>API</a:t>
-            </a:r>
-          </a:p>
-        </p:txBody>
-      </p:sp>
-      <p:pic>
-        <p:nvPicPr>
-          <p:cNvPr id="3" name="Рисунок 2">
-            <a:extLst>
-              <a:ext uri="{FF2B5EF4-FFF2-40B4-BE49-F238E27FC236}">
-                <a16:creationId xmlns:a16="http://schemas.microsoft.com/office/drawing/2014/main" id="{B9E1851E-3E99-9F22-01E7-510074DA66C2}"/>
-              </a:ext>
-            </a:extLst>
-          </p:cNvPr>
-          <p:cNvPicPr>
-            <a:picLocks noChangeAspect="1"/>
-          </p:cNvPicPr>
-          <p:nvPr/>
-        </p:nvPicPr>
-        <p:blipFill>
-          <a:blip>
-            <a:extLst>
-              <a:ext uri="{96DAC541-7B7A-43D3-8B79-37D633B846F1}">
-                <asvg:svgBlip xmlns:asvg="http://schemas.microsoft.com/office/drawing/2016/SVG/main" r:embed="rId3"/>
-              </a:ext>
-            </a:extLst>
-          </a:blip>
-          <a:stretch>
-            <a:fillRect/>
-          </a:stretch>
-        </p:blipFill>
-        <p:spPr>
-          <a:xfrm>
-            <a:off x="5091418" y="2393356"/>
-            <a:ext cx="2237634" cy="2237634"/>
-          </a:xfrm>
-          <a:prstGeom prst="rect">
-            <a:avLst/>
-          </a:prstGeom>
-        </p:spPr>
-      </p:pic>
-      <p:pic>
-        <p:nvPicPr>
-          <p:cNvPr id="2" name="Рисунок 1">
-            <a:extLst>
-              <a:ext uri="{FF2B5EF4-FFF2-40B4-BE49-F238E27FC236}">
-                <a16:creationId xmlns:a16="http://schemas.microsoft.com/office/drawing/2014/main" id="{B85F368D-D45F-8F85-4B64-9980E51E913E}"/>
-              </a:ext>
-            </a:extLst>
-          </p:cNvPr>
-          <p:cNvPicPr>
-            <a:picLocks noChangeAspect="1"/>
-          </p:cNvPicPr>
-          <p:nvPr/>
-        </p:nvPicPr>
-        <p:blipFill>
-          <a:blip>
-            <a:extLst>
-              <a:ext uri="{96DAC541-7B7A-43D3-8B79-37D633B846F1}">
-                <asvg:svgBlip xmlns:asvg="http://schemas.microsoft.com/office/drawing/2016/SVG/main" r:embed="rId4"/>
-              </a:ext>
-            </a:extLst>
-          </a:blip>
-          <a:stretch>
-            <a:fillRect/>
-          </a:stretch>
-        </p:blipFill>
-        <p:spPr>
-          <a:xfrm>
-            <a:off x="4572000" y="483939"/>
-            <a:ext cx="460431" cy="460431"/>
-          </a:xfrm>
-          <a:prstGeom prst="rect">
-            <a:avLst/>
-          </a:prstGeom>
-        </p:spPr>
-      </p:pic>
-    </p:spTree>
-  </p:cSld>
-  <p:clrMapOvr>
-    <a:masterClrMapping/>
-  </p:clrMapOvr>
-</p:sld>
-</file>
-
-<file path=ppt/slides/slide11.xml><?xml version="1.0" encoding="utf-8"?>
-<p:sld xmlns:a="http://schemas.openxmlformats.org/drawingml/2006/main" xmlns:r="http://schemas.openxmlformats.org/officeDocument/2006/relationships" xmlns:p="http://schemas.openxmlformats.org/presentationml/2006/main">
-  <p:cSld>
-    <p:spTree>
-      <p:nvGrpSpPr>
         <p:cNvPr id="1" name="Shape 2096"/>
         <p:cNvGrpSpPr/>
         <p:nvPr/>
@@ -16369,7 +15096,7 @@
 </p:sld>
 </file>
 
-<file path=ppt/slides/slide12.xml><?xml version="1.0" encoding="utf-8"?>
+<file path=ppt/slides/slide11.xml><?xml version="1.0" encoding="utf-8"?>
 <p:sld xmlns:a="http://schemas.openxmlformats.org/drawingml/2006/main" xmlns:r="http://schemas.openxmlformats.org/officeDocument/2006/relationships" xmlns:p="http://schemas.openxmlformats.org/presentationml/2006/main">
   <p:cSld>
     <p:spTree>
@@ -16440,7 +15167,7 @@
         </p:nvSpPr>
         <p:spPr>
           <a:xfrm>
-            <a:off x="318172" y="1181004"/>
+            <a:off x="318172" y="1254708"/>
             <a:ext cx="4922786" cy="2781491"/>
           </a:xfrm>
           <a:prstGeom prst="rect">
@@ -16482,18 +15209,7 @@
             </a:pPr>
             <a:r>
               <a:rPr lang="ru-RU" dirty="0"/>
-              <a:t>Многослойная архитектура (N-Layer)</a:t>
-            </a:r>
-          </a:p>
-          <a:p>
-            <a:pPr lvl="0">
-              <a:lnSpc>
-                <a:spcPct val="150000"/>
-              </a:lnSpc>
-            </a:pPr>
-            <a:r>
-              <a:rPr lang="ru-RU" dirty="0"/>
-              <a:t>Надежная дата-логика</a:t>
+              <a:t>Система удобна для дальнейшей разработки</a:t>
             </a:r>
           </a:p>
           <a:p>
@@ -16729,7 +15445,7 @@
 </p:sld>
 </file>
 
-<file path=ppt/slides/slide13.xml><?xml version="1.0" encoding="utf-8"?>
+<file path=ppt/slides/slide12.xml><?xml version="1.0" encoding="utf-8"?>
 <p:sld xmlns:a="http://schemas.openxmlformats.org/drawingml/2006/main" xmlns:r="http://schemas.openxmlformats.org/officeDocument/2006/relationships" xmlns:p="http://schemas.openxmlformats.org/presentationml/2006/main">
   <p:cSld>
     <p:spTree>
@@ -16853,6 +15569,25 @@
             <a:r>
               <a:rPr lang="ru-RU" dirty="0"/>
               <a:t>Создание дополнительного сервиса для управления клиентами и решения их проблем</a:t>
+            </a:r>
+          </a:p>
+          <a:p>
+            <a:pPr>
+              <a:lnSpc>
+                <a:spcPct val="150000"/>
+              </a:lnSpc>
+            </a:pPr>
+            <a:r>
+              <a:rPr lang="ru-RU" dirty="0"/>
+              <a:t>Использовать </a:t>
+            </a:r>
+            <a:r>
+              <a:rPr lang="en-US" dirty="0"/>
+              <a:t>Clean </a:t>
+            </a:r>
+            <a:r>
+              <a:rPr lang="ru-RU" dirty="0"/>
+              <a:t>Architecture</a:t>
             </a:r>
           </a:p>
         </p:txBody>
@@ -24090,8 +22825,8 @@
         </p:nvSpPr>
         <p:spPr>
           <a:xfrm>
-            <a:off x="100389" y="1174605"/>
-            <a:ext cx="3688811" cy="2637710"/>
+            <a:off x="100388" y="1191351"/>
+            <a:ext cx="4096881" cy="2314544"/>
           </a:xfrm>
           <a:prstGeom prst="rect">
             <a:avLst/>
@@ -24115,7 +22850,7 @@
                   <a:schemeClr val="bg1"/>
                 </a:solidFill>
               </a:rPr>
-              <a:t>Используется N-Layer архитектура:</a:t>
+              <a:t>   Используется N-Layer архитектура:</a:t>
             </a:r>
             <a:endParaRPr lang="en-US" dirty="0">
               <a:solidFill>
@@ -24181,7 +22916,7 @@
                   <a:schemeClr val="bg1"/>
                 </a:solidFill>
               </a:rPr>
-              <a:t>Репозитории.</a:t>
+              <a:t>Репозитории</a:t>
             </a:r>
             <a:endParaRPr lang="en-US" dirty="0">
               <a:solidFill>
@@ -24190,7 +22925,7 @@
             </a:endParaRPr>
           </a:p>
           <a:p>
-            <a:pPr lvl="1">
+            <a:pPr marL="180000" lvl="3">
               <a:lnSpc>
                 <a:spcPct val="150000"/>
               </a:lnSpc>
@@ -24201,8 +22936,68 @@
                   <a:schemeClr val="bg1"/>
                 </a:solidFill>
               </a:rPr>
-              <a:t>У каждого слоя своя ответственность и он не знает о существовании других слоев. Это обеспечивает гибкость и тестируемость. </a:t>
+              <a:t>Распространённый паттерн для </a:t>
             </a:r>
+            <a:r>
+              <a:rPr lang="en-US" dirty="0">
+                <a:solidFill>
+                  <a:schemeClr val="bg1"/>
+                </a:solidFill>
+              </a:rPr>
+              <a:t>MVC </a:t>
+            </a:r>
+            <a:r>
+              <a:rPr lang="ru-RU" dirty="0">
+                <a:solidFill>
+                  <a:schemeClr val="bg1"/>
+                </a:solidFill>
+              </a:rPr>
+              <a:t>проектов где монолит разбит на слои.</a:t>
+            </a:r>
+          </a:p>
+          <a:p>
+            <a:pPr marL="180000" lvl="3">
+              <a:lnSpc>
+                <a:spcPct val="150000"/>
+              </a:lnSpc>
+            </a:pPr>
+            <a:r>
+              <a:rPr lang="ru-RU" dirty="0">
+                <a:solidFill>
+                  <a:schemeClr val="bg1"/>
+                </a:solidFill>
+              </a:rPr>
+              <a:t>Старался придерживаться принципам </a:t>
+            </a:r>
+            <a:r>
+              <a:rPr lang="en-US" dirty="0">
+                <a:solidFill>
+                  <a:schemeClr val="bg1"/>
+                </a:solidFill>
+              </a:rPr>
+              <a:t>S </a:t>
+            </a:r>
+            <a:r>
+              <a:rPr lang="ru-RU" dirty="0">
+                <a:solidFill>
+                  <a:schemeClr val="bg1"/>
+                </a:solidFill>
+              </a:rPr>
+              <a:t>и </a:t>
+            </a:r>
+            <a:r>
+              <a:rPr lang="en-US" dirty="0">
+                <a:solidFill>
+                  <a:schemeClr val="bg1"/>
+                </a:solidFill>
+              </a:rPr>
+              <a:t>D </a:t>
+            </a:r>
+            <a:endParaRPr lang="ru-RU" dirty="0">
+              <a:solidFill>
+                <a:schemeClr val="bg1"/>
+              </a:solidFill>
+            </a:endParaRPr>
           </a:p>
         </p:txBody>
       </p:sp>
@@ -28641,6369 +27436,6 @@
   <p:cSld>
     <p:spTree>
       <p:nvGrpSpPr>
-        <p:cNvPr id="1" name="Shape 232">
-          <a:extLst>
-            <a:ext uri="{FF2B5EF4-FFF2-40B4-BE49-F238E27FC236}">
-              <a16:creationId xmlns:a16="http://schemas.microsoft.com/office/drawing/2014/main" id="{16CAB4F6-D3D8-8C31-50F9-CD1D4C508CB5}"/>
-            </a:ext>
-          </a:extLst>
-        </p:cNvPr>
-        <p:cNvGrpSpPr/>
-        <p:nvPr/>
-      </p:nvGrpSpPr>
-      <p:grpSpPr>
-        <a:xfrm>
-          <a:off x="0" y="0"/>
-          <a:ext cx="0" cy="0"/>
-          <a:chOff x="0" y="0"/>
-          <a:chExt cx="0" cy="0"/>
-        </a:xfrm>
-      </p:grpSpPr>
-      <p:sp>
-        <p:nvSpPr>
-          <p:cNvPr id="233" name="Google Shape;233;p46">
-            <a:extLst>
-              <a:ext uri="{FF2B5EF4-FFF2-40B4-BE49-F238E27FC236}">
-                <a16:creationId xmlns:a16="http://schemas.microsoft.com/office/drawing/2014/main" id="{9AD4F6EA-4A31-0946-448B-9AB3CE0AF2C2}"/>
-              </a:ext>
-            </a:extLst>
-          </p:cNvPr>
-          <p:cNvSpPr txBox="1">
-            <a:spLocks noGrp="1"/>
-          </p:cNvSpPr>
-          <p:nvPr>
-            <p:ph type="title" idx="4"/>
-          </p:nvPr>
-        </p:nvSpPr>
-        <p:spPr>
-          <a:xfrm>
-            <a:off x="938500" y="445025"/>
-            <a:ext cx="5472738" cy="941400"/>
-          </a:xfrm>
-          <a:prstGeom prst="rect">
-            <a:avLst/>
-          </a:prstGeom>
-        </p:spPr>
-        <p:txBody>
-          <a:bodyPr spcFirstLastPara="1" wrap="square" lIns="91425" tIns="91425" rIns="91425" bIns="91425" anchor="t" anchorCtr="0">
-            <a:noAutofit/>
-          </a:bodyPr>
-          <a:lstStyle/>
-          <a:p>
-            <a:pPr marL="0" lvl="0" indent="0" algn="l" rtl="0">
-              <a:spcBef>
-                <a:spcPts val="0"/>
-              </a:spcBef>
-              <a:spcAft>
-                <a:spcPts val="0"/>
-              </a:spcAft>
-              <a:buNone/>
-            </a:pPr>
-            <a:r>
-              <a:rPr lang="ru-RU" dirty="0"/>
-              <a:t>Паттерн проектирования</a:t>
-            </a:r>
-            <a:r>
-              <a:rPr lang="en-US" dirty="0"/>
-              <a:t> WPF</a:t>
-            </a:r>
-            <a:endParaRPr dirty="0"/>
-          </a:p>
-        </p:txBody>
-      </p:sp>
-      <p:cxnSp>
-        <p:nvCxnSpPr>
-          <p:cNvPr id="234" name="Google Shape;234;p46">
-            <a:extLst>
-              <a:ext uri="{FF2B5EF4-FFF2-40B4-BE49-F238E27FC236}">
-                <a16:creationId xmlns:a16="http://schemas.microsoft.com/office/drawing/2014/main" id="{DC4B0A6F-C1DE-425D-6627-1A15892D9D54}"/>
-              </a:ext>
-            </a:extLst>
-          </p:cNvPr>
-          <p:cNvCxnSpPr/>
-          <p:nvPr/>
-        </p:nvCxnSpPr>
-        <p:spPr>
-          <a:xfrm>
-            <a:off x="1026200" y="414022"/>
-            <a:ext cx="2763000" cy="0"/>
-          </a:xfrm>
-          <a:prstGeom prst="straightConnector1">
-            <a:avLst/>
-          </a:prstGeom>
-          <a:noFill/>
-          <a:ln w="9525" cap="flat" cmpd="sng">
-            <a:solidFill>
-              <a:schemeClr val="accent1"/>
-            </a:solidFill>
-            <a:prstDash val="solid"/>
-            <a:round/>
-            <a:headEnd type="none" w="med" len="med"/>
-            <a:tailEnd type="none" w="med" len="med"/>
-          </a:ln>
-          <a:effectLst>
-            <a:outerShdw blurRad="57150" dist="19050" dir="5400000" algn="bl" rotWithShape="0">
-              <a:srgbClr val="FFFFFF">
-                <a:alpha val="50000"/>
-              </a:srgbClr>
-            </a:outerShdw>
-          </a:effectLst>
-        </p:spPr>
-      </p:cxnSp>
-      <p:sp>
-        <p:nvSpPr>
-          <p:cNvPr id="301" name="TextBox 300">
-            <a:extLst>
-              <a:ext uri="{FF2B5EF4-FFF2-40B4-BE49-F238E27FC236}">
-                <a16:creationId xmlns:a16="http://schemas.microsoft.com/office/drawing/2014/main" id="{76F5E634-6431-C0B0-2D94-C443AD0CC0ED}"/>
-              </a:ext>
-            </a:extLst>
-          </p:cNvPr>
-          <p:cNvSpPr txBox="1"/>
-          <p:nvPr/>
-        </p:nvSpPr>
-        <p:spPr>
-          <a:xfrm>
-            <a:off x="121577" y="1120998"/>
-            <a:ext cx="3511723" cy="2314544"/>
-          </a:xfrm>
-          <a:prstGeom prst="rect">
-            <a:avLst/>
-          </a:prstGeom>
-          <a:noFill/>
-        </p:spPr>
-        <p:txBody>
-          <a:bodyPr wrap="square">
-            <a:spAutoFit/>
-          </a:bodyPr>
-          <a:lstStyle/>
-          <a:p>
-            <a:pPr>
-              <a:lnSpc>
-                <a:spcPct val="150000"/>
-              </a:lnSpc>
-            </a:pPr>
-            <a:r>
-              <a:rPr lang="ru-RU" b="1" dirty="0">
-                <a:solidFill>
-                  <a:schemeClr val="bg1"/>
-                </a:solidFill>
-              </a:rPr>
-              <a:t>Используется Паттерн: </a:t>
-            </a:r>
-            <a:r>
-              <a:rPr lang="en-US" b="1" dirty="0">
-                <a:solidFill>
-                  <a:schemeClr val="bg1"/>
-                </a:solidFill>
-              </a:rPr>
-              <a:t>Service Layer</a:t>
-            </a:r>
-            <a:r>
-              <a:rPr lang="ru-RU" b="1" dirty="0">
-                <a:solidFill>
-                  <a:schemeClr val="bg1"/>
-                </a:solidFill>
-              </a:rPr>
-              <a:t>:</a:t>
-            </a:r>
-            <a:endParaRPr lang="en-US" b="1" dirty="0">
-              <a:solidFill>
-                <a:schemeClr val="bg1"/>
-              </a:solidFill>
-            </a:endParaRPr>
-          </a:p>
-          <a:p>
-            <a:pPr marL="180000" lvl="3">
-              <a:lnSpc>
-                <a:spcPct val="150000"/>
-              </a:lnSpc>
-            </a:pPr>
-            <a:r>
-              <a:rPr lang="en-US" b="1" dirty="0">
-                <a:solidFill>
-                  <a:schemeClr val="bg1"/>
-                </a:solidFill>
-              </a:rPr>
-              <a:t>1. </a:t>
-            </a:r>
-            <a:r>
-              <a:rPr lang="ru-RU" b="1" dirty="0">
-                <a:solidFill>
-                  <a:schemeClr val="bg1"/>
-                </a:solidFill>
-              </a:rPr>
-              <a:t>Страницы </a:t>
-            </a:r>
-            <a:endParaRPr lang="en-US" b="1" dirty="0">
-              <a:solidFill>
-                <a:schemeClr val="bg1"/>
-              </a:solidFill>
-            </a:endParaRPr>
-          </a:p>
-          <a:p>
-            <a:pPr marL="180000" lvl="3">
-              <a:lnSpc>
-                <a:spcPct val="150000"/>
-              </a:lnSpc>
-            </a:pPr>
-            <a:r>
-              <a:rPr lang="en-US" b="1" dirty="0">
-                <a:solidFill>
-                  <a:schemeClr val="bg1"/>
-                </a:solidFill>
-              </a:rPr>
-              <a:t>2. </a:t>
-            </a:r>
-            <a:r>
-              <a:rPr lang="ru-RU" b="1" dirty="0">
-                <a:solidFill>
-                  <a:schemeClr val="bg1"/>
-                </a:solidFill>
-              </a:rPr>
-              <a:t>Сервис</a:t>
-            </a:r>
-            <a:endParaRPr lang="en-US" b="1" dirty="0">
-              <a:solidFill>
-                <a:schemeClr val="bg1"/>
-              </a:solidFill>
-            </a:endParaRPr>
-          </a:p>
-          <a:p>
-            <a:pPr marL="180000" lvl="3">
-              <a:lnSpc>
-                <a:spcPct val="150000"/>
-              </a:lnSpc>
-            </a:pPr>
-            <a:r>
-              <a:rPr lang="en-US" b="1" dirty="0">
-                <a:solidFill>
-                  <a:schemeClr val="bg1"/>
-                </a:solidFill>
-              </a:rPr>
-              <a:t>3. </a:t>
-            </a:r>
-            <a:r>
-              <a:rPr lang="ru-RU" b="1" dirty="0">
-                <a:solidFill>
-                  <a:schemeClr val="bg1"/>
-                </a:solidFill>
-              </a:rPr>
-              <a:t>Передача</a:t>
-            </a:r>
-          </a:p>
-          <a:p>
-            <a:pPr lvl="3">
-              <a:lnSpc>
-                <a:spcPct val="150000"/>
-              </a:lnSpc>
-            </a:pPr>
-            <a:r>
-              <a:rPr lang="ru-RU" b="1" dirty="0">
-                <a:solidFill>
-                  <a:schemeClr val="bg1"/>
-                </a:solidFill>
-              </a:rPr>
-              <a:t>Показывает последовательность каждого слоя. </a:t>
-            </a:r>
-          </a:p>
-          <a:p>
-            <a:pPr lvl="3">
-              <a:lnSpc>
-                <a:spcPct val="150000"/>
-              </a:lnSpc>
-            </a:pPr>
-            <a:endParaRPr lang="ru-RU" b="1" dirty="0">
-              <a:solidFill>
-                <a:schemeClr val="bg1"/>
-              </a:solidFill>
-            </a:endParaRPr>
-          </a:p>
-        </p:txBody>
-      </p:sp>
-      <p:grpSp>
-        <p:nvGrpSpPr>
-          <p:cNvPr id="8" name="Рисунок 4">
-            <a:extLst>
-              <a:ext uri="{FF2B5EF4-FFF2-40B4-BE49-F238E27FC236}">
-                <a16:creationId xmlns:a16="http://schemas.microsoft.com/office/drawing/2014/main" id="{8734ACFF-6F65-54CE-4ABC-BF9927655FFD}"/>
-              </a:ext>
-            </a:extLst>
-          </p:cNvPr>
-          <p:cNvGrpSpPr/>
-          <p:nvPr/>
-        </p:nvGrpSpPr>
-        <p:grpSpPr>
-          <a:xfrm>
-            <a:off x="4247775" y="1269772"/>
-            <a:ext cx="3744275" cy="2568275"/>
-            <a:chOff x="4450222" y="1269771"/>
-            <a:chExt cx="3744275" cy="2568275"/>
-          </a:xfrm>
-          <a:solidFill>
-            <a:schemeClr val="tx1"/>
-          </a:solidFill>
-        </p:grpSpPr>
-        <p:grpSp>
-          <p:nvGrpSpPr>
-            <p:cNvPr id="9" name="Рисунок 4">
-              <a:extLst>
-                <a:ext uri="{FF2B5EF4-FFF2-40B4-BE49-F238E27FC236}">
-                  <a16:creationId xmlns:a16="http://schemas.microsoft.com/office/drawing/2014/main" id="{26AA9A62-2989-AC39-E763-401586C047D2}"/>
-                </a:ext>
-              </a:extLst>
-            </p:cNvPr>
-            <p:cNvGrpSpPr/>
-            <p:nvPr/>
-          </p:nvGrpSpPr>
-          <p:grpSpPr>
-            <a:xfrm>
-              <a:off x="6072290" y="1425219"/>
-              <a:ext cx="484998" cy="94620"/>
-              <a:chOff x="6072290" y="1425219"/>
-              <a:chExt cx="484998" cy="94620"/>
-            </a:xfrm>
-            <a:solidFill>
-              <a:schemeClr val="tx1"/>
-            </a:solidFill>
-          </p:grpSpPr>
-          <p:sp>
-            <p:nvSpPr>
-              <p:cNvPr id="10" name="Полилиния: фигура 9">
-                <a:extLst>
-                  <a:ext uri="{FF2B5EF4-FFF2-40B4-BE49-F238E27FC236}">
-                    <a16:creationId xmlns:a16="http://schemas.microsoft.com/office/drawing/2014/main" id="{E858CFBC-2519-C3DE-0A83-46AB3B60C664}"/>
-                  </a:ext>
-                </a:extLst>
-              </p:cNvPr>
-              <p:cNvSpPr/>
-              <p:nvPr/>
-            </p:nvSpPr>
-            <p:spPr>
-              <a:xfrm>
-                <a:off x="6072290" y="1472529"/>
-                <a:ext cx="414033" cy="13517"/>
-              </a:xfrm>
-              <a:custGeom>
-                <a:avLst/>
-                <a:gdLst>
-                  <a:gd name="csX0" fmla="*/ 0 w 414033"/>
-                  <a:gd name="csY0" fmla="*/ 0 h 13517"/>
-                  <a:gd name="csX1" fmla="*/ 270345 w 414033"/>
-                  <a:gd name="csY1" fmla="*/ 0 h 13517"/>
-                  <a:gd name="csX2" fmla="*/ 229793 w 414033"/>
-                  <a:gd name="csY2" fmla="*/ 0 h 13517"/>
-                  <a:gd name="csX3" fmla="*/ 414033 w 414033"/>
-                  <a:gd name="csY3" fmla="*/ 0 h 13517"/>
-                </a:gdLst>
-                <a:ahLst/>
-                <a:cxnLst>
-                  <a:cxn ang="0">
-                    <a:pos x="csX0" y="csY0"/>
-                  </a:cxn>
-                  <a:cxn ang="0">
-                    <a:pos x="csX1" y="csY1"/>
-                  </a:cxn>
-                  <a:cxn ang="0">
-                    <a:pos x="csX2" y="csY2"/>
-                  </a:cxn>
-                  <a:cxn ang="0">
-                    <a:pos x="csX3" y="csY3"/>
-                  </a:cxn>
-                </a:cxnLst>
-                <a:rect l="l" t="t" r="r" b="b"/>
-                <a:pathLst>
-                  <a:path w="414033" h="13517">
-                    <a:moveTo>
-                      <a:pt x="0" y="0"/>
-                    </a:moveTo>
-                    <a:lnTo>
-                      <a:pt x="270345" y="0"/>
-                    </a:lnTo>
-                    <a:lnTo>
-                      <a:pt x="229793" y="0"/>
-                    </a:lnTo>
-                    <a:lnTo>
-                      <a:pt x="414033" y="0"/>
-                    </a:lnTo>
-                  </a:path>
-                </a:pathLst>
-              </a:custGeom>
-              <a:solidFill>
-                <a:schemeClr val="tx1"/>
-              </a:solidFill>
-              <a:ln w="13499" cap="flat">
-                <a:solidFill>
-                  <a:schemeClr val="bg1"/>
-                </a:solidFill>
-                <a:prstDash val="solid"/>
-                <a:miter/>
-              </a:ln>
-            </p:spPr>
-          </p:sp>
-          <p:sp>
-            <p:nvSpPr>
-              <p:cNvPr id="11" name="Полилиния: фигура 10">
-                <a:extLst>
-                  <a:ext uri="{FF2B5EF4-FFF2-40B4-BE49-F238E27FC236}">
-                    <a16:creationId xmlns:a16="http://schemas.microsoft.com/office/drawing/2014/main" id="{1A8F62B7-F624-7258-A0F6-7EAA1E3D50A8}"/>
-                  </a:ext>
-                </a:extLst>
-              </p:cNvPr>
-              <p:cNvSpPr/>
-              <p:nvPr/>
-            </p:nvSpPr>
-            <p:spPr>
-              <a:xfrm>
-                <a:off x="6462668" y="1425219"/>
-                <a:ext cx="94620" cy="94620"/>
-              </a:xfrm>
-              <a:custGeom>
-                <a:avLst/>
-                <a:gdLst>
-                  <a:gd name="csX0" fmla="*/ 94621 w 94620"/>
-                  <a:gd name="csY0" fmla="*/ 47310 h 94620"/>
-                  <a:gd name="csX1" fmla="*/ 0 w 94620"/>
-                  <a:gd name="csY1" fmla="*/ 94621 h 94620"/>
-                  <a:gd name="csX2" fmla="*/ 23655 w 94620"/>
-                  <a:gd name="csY2" fmla="*/ 47310 h 94620"/>
-                  <a:gd name="csX3" fmla="*/ 0 w 94620"/>
-                  <a:gd name="csY3" fmla="*/ 0 h 94620"/>
-                </a:gdLst>
-                <a:ahLst/>
-                <a:cxnLst>
-                  <a:cxn ang="0">
-                    <a:pos x="csX0" y="csY0"/>
-                  </a:cxn>
-                  <a:cxn ang="0">
-                    <a:pos x="csX1" y="csY1"/>
-                  </a:cxn>
-                  <a:cxn ang="0">
-                    <a:pos x="csX2" y="csY2"/>
-                  </a:cxn>
-                  <a:cxn ang="0">
-                    <a:pos x="csX3" y="csY3"/>
-                  </a:cxn>
-                </a:cxnLst>
-                <a:rect l="l" t="t" r="r" b="b"/>
-                <a:pathLst>
-                  <a:path w="94620" h="94620">
-                    <a:moveTo>
-                      <a:pt x="94621" y="47310"/>
-                    </a:moveTo>
-                    <a:lnTo>
-                      <a:pt x="0" y="94621"/>
-                    </a:lnTo>
-                    <a:lnTo>
-                      <a:pt x="23655" y="47310"/>
-                    </a:lnTo>
-                    <a:lnTo>
-                      <a:pt x="0" y="0"/>
-                    </a:lnTo>
-                    <a:close/>
-                  </a:path>
-                </a:pathLst>
-              </a:custGeom>
-              <a:solidFill>
-                <a:schemeClr val="tx1"/>
-              </a:solidFill>
-              <a:ln w="13499" cap="flat">
-                <a:solidFill>
-                  <a:schemeClr val="bg1"/>
-                </a:solidFill>
-                <a:prstDash val="solid"/>
-                <a:miter/>
-              </a:ln>
-            </p:spPr>
-          </p:sp>
-        </p:grpSp>
-        <p:grpSp>
-          <p:nvGrpSpPr>
-            <p:cNvPr id="12" name="Рисунок 4">
-              <a:extLst>
-                <a:ext uri="{FF2B5EF4-FFF2-40B4-BE49-F238E27FC236}">
-                  <a16:creationId xmlns:a16="http://schemas.microsoft.com/office/drawing/2014/main" id="{A251B359-C3E0-0C98-B584-54BC9CA69A09}"/>
-                </a:ext>
-              </a:extLst>
-            </p:cNvPr>
-            <p:cNvGrpSpPr/>
-            <p:nvPr/>
-          </p:nvGrpSpPr>
-          <p:grpSpPr>
-            <a:xfrm>
-              <a:off x="5213946" y="1675288"/>
-              <a:ext cx="94620" cy="660722"/>
-              <a:chOff x="5213946" y="1675288"/>
-              <a:chExt cx="94620" cy="660722"/>
-            </a:xfrm>
-            <a:solidFill>
-              <a:schemeClr val="tx1"/>
-            </a:solidFill>
-          </p:grpSpPr>
-          <p:sp>
-            <p:nvSpPr>
-              <p:cNvPr id="13" name="Полилиния: фигура 12">
-                <a:extLst>
-                  <a:ext uri="{FF2B5EF4-FFF2-40B4-BE49-F238E27FC236}">
-                    <a16:creationId xmlns:a16="http://schemas.microsoft.com/office/drawing/2014/main" id="{BAEF7ECA-1F7C-96A1-753B-0B570D4F315A}"/>
-                  </a:ext>
-                </a:extLst>
-              </p:cNvPr>
-              <p:cNvSpPr/>
-              <p:nvPr/>
-            </p:nvSpPr>
-            <p:spPr>
-              <a:xfrm>
-                <a:off x="5261256" y="1675288"/>
-                <a:ext cx="13517" cy="589757"/>
-              </a:xfrm>
-              <a:custGeom>
-                <a:avLst/>
-                <a:gdLst>
-                  <a:gd name="csX0" fmla="*/ 0 w 13517"/>
-                  <a:gd name="csY0" fmla="*/ 0 h 589757"/>
-                  <a:gd name="csX1" fmla="*/ 0 w 13517"/>
-                  <a:gd name="csY1" fmla="*/ 589757 h 589757"/>
-                </a:gdLst>
-                <a:ahLst/>
-                <a:cxnLst>
-                  <a:cxn ang="0">
-                    <a:pos x="csX0" y="csY0"/>
-                  </a:cxn>
-                  <a:cxn ang="0">
-                    <a:pos x="csX1" y="csY1"/>
-                  </a:cxn>
-                </a:cxnLst>
-                <a:rect l="l" t="t" r="r" b="b"/>
-                <a:pathLst>
-                  <a:path w="13517" h="589757">
-                    <a:moveTo>
-                      <a:pt x="0" y="0"/>
-                    </a:moveTo>
-                    <a:lnTo>
-                      <a:pt x="0" y="589757"/>
-                    </a:lnTo>
-                  </a:path>
-                </a:pathLst>
-              </a:custGeom>
-              <a:solidFill>
-                <a:schemeClr val="tx1"/>
-              </a:solidFill>
-              <a:ln w="13499" cap="flat">
-                <a:solidFill>
-                  <a:schemeClr val="bg1"/>
-                </a:solidFill>
-                <a:prstDash val="solid"/>
-                <a:miter/>
-              </a:ln>
-            </p:spPr>
-          </p:sp>
-          <p:sp>
-            <p:nvSpPr>
-              <p:cNvPr id="14" name="Полилиния: фигура 13">
-                <a:extLst>
-                  <a:ext uri="{FF2B5EF4-FFF2-40B4-BE49-F238E27FC236}">
-                    <a16:creationId xmlns:a16="http://schemas.microsoft.com/office/drawing/2014/main" id="{290B6FDB-B4D7-C088-6436-E33226FD8D05}"/>
-                  </a:ext>
-                </a:extLst>
-              </p:cNvPr>
-              <p:cNvSpPr/>
-              <p:nvPr/>
-            </p:nvSpPr>
-            <p:spPr>
-              <a:xfrm>
-                <a:off x="5213946" y="2241390"/>
-                <a:ext cx="94620" cy="94620"/>
-              </a:xfrm>
-              <a:custGeom>
-                <a:avLst/>
-                <a:gdLst>
-                  <a:gd name="csX0" fmla="*/ 47310 w 94620"/>
-                  <a:gd name="csY0" fmla="*/ 94621 h 94620"/>
-                  <a:gd name="csX1" fmla="*/ 0 w 94620"/>
-                  <a:gd name="csY1" fmla="*/ 0 h 94620"/>
-                  <a:gd name="csX2" fmla="*/ 47310 w 94620"/>
-                  <a:gd name="csY2" fmla="*/ 23655 h 94620"/>
-                  <a:gd name="csX3" fmla="*/ 94621 w 94620"/>
-                  <a:gd name="csY3" fmla="*/ 0 h 94620"/>
-                </a:gdLst>
-                <a:ahLst/>
-                <a:cxnLst>
-                  <a:cxn ang="0">
-                    <a:pos x="csX0" y="csY0"/>
-                  </a:cxn>
-                  <a:cxn ang="0">
-                    <a:pos x="csX1" y="csY1"/>
-                  </a:cxn>
-                  <a:cxn ang="0">
-                    <a:pos x="csX2" y="csY2"/>
-                  </a:cxn>
-                  <a:cxn ang="0">
-                    <a:pos x="csX3" y="csY3"/>
-                  </a:cxn>
-                </a:cxnLst>
-                <a:rect l="l" t="t" r="r" b="b"/>
-                <a:pathLst>
-                  <a:path w="94620" h="94620">
-                    <a:moveTo>
-                      <a:pt x="47310" y="94621"/>
-                    </a:moveTo>
-                    <a:lnTo>
-                      <a:pt x="0" y="0"/>
-                    </a:lnTo>
-                    <a:lnTo>
-                      <a:pt x="47310" y="23655"/>
-                    </a:lnTo>
-                    <a:lnTo>
-                      <a:pt x="94621" y="0"/>
-                    </a:lnTo>
-                    <a:close/>
-                  </a:path>
-                </a:pathLst>
-              </a:custGeom>
-              <a:solidFill>
-                <a:schemeClr val="tx1"/>
-              </a:solidFill>
-              <a:ln w="13499" cap="flat">
-                <a:solidFill>
-                  <a:schemeClr val="bg1"/>
-                </a:solidFill>
-                <a:prstDash val="solid"/>
-                <a:miter/>
-              </a:ln>
-            </p:spPr>
-          </p:sp>
-        </p:grpSp>
-        <p:grpSp>
-          <p:nvGrpSpPr>
-            <p:cNvPr id="15" name="Рисунок 4">
-              <a:extLst>
-                <a:ext uri="{FF2B5EF4-FFF2-40B4-BE49-F238E27FC236}">
-                  <a16:creationId xmlns:a16="http://schemas.microsoft.com/office/drawing/2014/main" id="{5DB6BB11-872C-DB20-2589-EB3AA9BDE4FD}"/>
-                </a:ext>
-              </a:extLst>
-            </p:cNvPr>
-            <p:cNvGrpSpPr/>
-            <p:nvPr/>
-          </p:nvGrpSpPr>
-          <p:grpSpPr>
-            <a:xfrm>
-              <a:off x="4450222" y="1269771"/>
-              <a:ext cx="1622068" cy="405517"/>
-              <a:chOff x="4450222" y="1269771"/>
-              <a:chExt cx="1622068" cy="405517"/>
-            </a:xfrm>
-            <a:solidFill>
-              <a:schemeClr val="tx1"/>
-            </a:solidFill>
-          </p:grpSpPr>
-          <p:sp>
-            <p:nvSpPr>
-              <p:cNvPr id="16" name="Прямоугольник 15">
-                <a:extLst>
-                  <a:ext uri="{FF2B5EF4-FFF2-40B4-BE49-F238E27FC236}">
-                    <a16:creationId xmlns:a16="http://schemas.microsoft.com/office/drawing/2014/main" id="{F08B7EE8-2CFE-AF77-64F9-C5B70ED226DB}"/>
-                  </a:ext>
-                </a:extLst>
-              </p:cNvPr>
-              <p:cNvSpPr/>
-              <p:nvPr/>
-            </p:nvSpPr>
-            <p:spPr>
-              <a:xfrm>
-                <a:off x="4450222" y="1269771"/>
-                <a:ext cx="1622068" cy="405517"/>
-              </a:xfrm>
-              <a:prstGeom prst="rect">
-                <a:avLst/>
-              </a:prstGeom>
-              <a:solidFill>
-                <a:schemeClr val="tx1"/>
-              </a:solidFill>
-              <a:ln w="13499" cap="flat">
-                <a:solidFill>
-                  <a:schemeClr val="bg1"/>
-                </a:solidFill>
-                <a:prstDash val="solid"/>
-                <a:miter/>
-              </a:ln>
-            </p:spPr>
-          </p:sp>
-          <p:pic>
-            <p:nvPicPr>
-              <p:cNvPr id="17" name="Рисунок 16">
-                <a:extLst>
-                  <a:ext uri="{FF2B5EF4-FFF2-40B4-BE49-F238E27FC236}">
-                    <a16:creationId xmlns:a16="http://schemas.microsoft.com/office/drawing/2014/main" id="{90B66BAE-C282-46CB-CD96-D9AD75B1830C}"/>
-                  </a:ext>
-                </a:extLst>
-              </p:cNvPr>
-              <p:cNvPicPr>
-                <a:picLocks noChangeAspect="1"/>
-              </p:cNvPicPr>
-              <p:nvPr/>
-            </p:nvPicPr>
-            <p:blipFill>
-              <a:blip r:embed="rId3">
-                <a:lum bright="70000" contrast="-70000"/>
-              </a:blip>
-              <a:stretch>
-                <a:fillRect/>
-              </a:stretch>
-            </p:blipFill>
-            <p:spPr>
-              <a:xfrm>
-                <a:off x="4463739" y="1384667"/>
-                <a:ext cx="1595034" cy="229793"/>
-              </a:xfrm>
-              <a:custGeom>
-                <a:avLst/>
-                <a:gdLst>
-                  <a:gd name="csX0" fmla="*/ 0 w 1595034"/>
-                  <a:gd name="csY0" fmla="*/ 0 h 229793"/>
-                  <a:gd name="csX1" fmla="*/ 1595035 w 1595034"/>
-                  <a:gd name="csY1" fmla="*/ 0 h 229793"/>
-                  <a:gd name="csX2" fmla="*/ 1595035 w 1595034"/>
-                  <a:gd name="csY2" fmla="*/ 229793 h 229793"/>
-                  <a:gd name="csX3" fmla="*/ 0 w 1595034"/>
-                  <a:gd name="csY3" fmla="*/ 229793 h 229793"/>
-                </a:gdLst>
-                <a:ahLst/>
-                <a:cxnLst>
-                  <a:cxn ang="0">
-                    <a:pos x="csX0" y="csY0"/>
-                  </a:cxn>
-                  <a:cxn ang="0">
-                    <a:pos x="csX1" y="csY1"/>
-                  </a:cxn>
-                  <a:cxn ang="0">
-                    <a:pos x="csX2" y="csY2"/>
-                  </a:cxn>
-                  <a:cxn ang="0">
-                    <a:pos x="csX3" y="csY3"/>
-                  </a:cxn>
-                </a:cxnLst>
-                <a:rect l="l" t="t" r="r" b="b"/>
-                <a:pathLst>
-                  <a:path w="1595034" h="229793">
-                    <a:moveTo>
-                      <a:pt x="0" y="0"/>
-                    </a:moveTo>
-                    <a:lnTo>
-                      <a:pt x="1595035" y="0"/>
-                    </a:lnTo>
-                    <a:lnTo>
-                      <a:pt x="1595035" y="229793"/>
-                    </a:lnTo>
-                    <a:lnTo>
-                      <a:pt x="0" y="229793"/>
-                    </a:lnTo>
-                    <a:close/>
-                  </a:path>
-                </a:pathLst>
-              </a:custGeom>
-            </p:spPr>
-          </p:pic>
-        </p:grpSp>
-        <p:grpSp>
-          <p:nvGrpSpPr>
-            <p:cNvPr id="18" name="Рисунок 4">
-              <a:extLst>
-                <a:ext uri="{FF2B5EF4-FFF2-40B4-BE49-F238E27FC236}">
-                  <a16:creationId xmlns:a16="http://schemas.microsoft.com/office/drawing/2014/main" id="{6E8152F4-54EB-0008-A691-85EE76C6899C}"/>
-                </a:ext>
-              </a:extLst>
-            </p:cNvPr>
-            <p:cNvGrpSpPr/>
-            <p:nvPr/>
-          </p:nvGrpSpPr>
-          <p:grpSpPr>
-            <a:xfrm>
-              <a:off x="6572428" y="1269771"/>
-              <a:ext cx="1622068" cy="405517"/>
-              <a:chOff x="6572428" y="1269771"/>
-              <a:chExt cx="1622068" cy="405517"/>
-            </a:xfrm>
-            <a:solidFill>
-              <a:schemeClr val="tx1"/>
-            </a:solidFill>
-          </p:grpSpPr>
-          <p:sp>
-            <p:nvSpPr>
-              <p:cNvPr id="19" name="Прямоугольник 18">
-                <a:extLst>
-                  <a:ext uri="{FF2B5EF4-FFF2-40B4-BE49-F238E27FC236}">
-                    <a16:creationId xmlns:a16="http://schemas.microsoft.com/office/drawing/2014/main" id="{05667585-9F51-043D-1AAA-A3AF7348FFE9}"/>
-                  </a:ext>
-                </a:extLst>
-              </p:cNvPr>
-              <p:cNvSpPr/>
-              <p:nvPr/>
-            </p:nvSpPr>
-            <p:spPr>
-              <a:xfrm>
-                <a:off x="6572428" y="1269771"/>
-                <a:ext cx="1622068" cy="405517"/>
-              </a:xfrm>
-              <a:prstGeom prst="rect">
-                <a:avLst/>
-              </a:prstGeom>
-              <a:solidFill>
-                <a:schemeClr val="tx1"/>
-              </a:solidFill>
-              <a:ln w="13499" cap="flat">
-                <a:solidFill>
-                  <a:schemeClr val="bg1"/>
-                </a:solidFill>
-                <a:prstDash val="solid"/>
-                <a:miter/>
-              </a:ln>
-            </p:spPr>
-          </p:sp>
-          <p:pic>
-            <p:nvPicPr>
-              <p:cNvPr id="20" name="Рисунок 19">
-                <a:extLst>
-                  <a:ext uri="{FF2B5EF4-FFF2-40B4-BE49-F238E27FC236}">
-                    <a16:creationId xmlns:a16="http://schemas.microsoft.com/office/drawing/2014/main" id="{1600F375-635E-8C70-655A-CCA6283B8EC3}"/>
-                  </a:ext>
-                </a:extLst>
-              </p:cNvPr>
-              <p:cNvPicPr>
-                <a:picLocks noChangeAspect="1"/>
-              </p:cNvPicPr>
-              <p:nvPr/>
-            </p:nvPicPr>
-            <p:blipFill>
-              <a:blip r:embed="rId4">
-                <a:lum bright="70000" contrast="-70000"/>
-              </a:blip>
-              <a:stretch>
-                <a:fillRect/>
-              </a:stretch>
-            </p:blipFill>
-            <p:spPr>
-              <a:xfrm>
-                <a:off x="6585946" y="1384667"/>
-                <a:ext cx="1595034" cy="229793"/>
-              </a:xfrm>
-              <a:custGeom>
-                <a:avLst/>
-                <a:gdLst>
-                  <a:gd name="csX0" fmla="*/ 0 w 1595034"/>
-                  <a:gd name="csY0" fmla="*/ 0 h 229793"/>
-                  <a:gd name="csX1" fmla="*/ 1595035 w 1595034"/>
-                  <a:gd name="csY1" fmla="*/ 0 h 229793"/>
-                  <a:gd name="csX2" fmla="*/ 1595035 w 1595034"/>
-                  <a:gd name="csY2" fmla="*/ 229793 h 229793"/>
-                  <a:gd name="csX3" fmla="*/ 0 w 1595034"/>
-                  <a:gd name="csY3" fmla="*/ 229793 h 229793"/>
-                </a:gdLst>
-                <a:ahLst/>
-                <a:cxnLst>
-                  <a:cxn ang="0">
-                    <a:pos x="csX0" y="csY0"/>
-                  </a:cxn>
-                  <a:cxn ang="0">
-                    <a:pos x="csX1" y="csY1"/>
-                  </a:cxn>
-                  <a:cxn ang="0">
-                    <a:pos x="csX2" y="csY2"/>
-                  </a:cxn>
-                  <a:cxn ang="0">
-                    <a:pos x="csX3" y="csY3"/>
-                  </a:cxn>
-                </a:cxnLst>
-                <a:rect l="l" t="t" r="r" b="b"/>
-                <a:pathLst>
-                  <a:path w="1595034" h="229793">
-                    <a:moveTo>
-                      <a:pt x="0" y="0"/>
-                    </a:moveTo>
-                    <a:lnTo>
-                      <a:pt x="1595035" y="0"/>
-                    </a:lnTo>
-                    <a:lnTo>
-                      <a:pt x="1595035" y="229793"/>
-                    </a:lnTo>
-                    <a:lnTo>
-                      <a:pt x="0" y="229793"/>
-                    </a:lnTo>
-                    <a:close/>
-                  </a:path>
-                </a:pathLst>
-              </a:custGeom>
-            </p:spPr>
-          </p:pic>
-        </p:grpSp>
-        <p:grpSp>
-          <p:nvGrpSpPr>
-            <p:cNvPr id="21" name="Рисунок 4">
-              <a:extLst>
-                <a:ext uri="{FF2B5EF4-FFF2-40B4-BE49-F238E27FC236}">
-                  <a16:creationId xmlns:a16="http://schemas.microsoft.com/office/drawing/2014/main" id="{4C199138-FAD0-7BD0-91AE-DF8D6B8719BB}"/>
-                </a:ext>
-              </a:extLst>
-            </p:cNvPr>
-            <p:cNvGrpSpPr/>
-            <p:nvPr/>
-          </p:nvGrpSpPr>
-          <p:grpSpPr>
-            <a:xfrm>
-              <a:off x="6072290" y="2506598"/>
-              <a:ext cx="484998" cy="94620"/>
-              <a:chOff x="6072290" y="2506598"/>
-              <a:chExt cx="484998" cy="94620"/>
-            </a:xfrm>
-            <a:solidFill>
-              <a:schemeClr val="tx1"/>
-            </a:solidFill>
-          </p:grpSpPr>
-          <p:sp>
-            <p:nvSpPr>
-              <p:cNvPr id="22" name="Полилиния: фигура 21">
-                <a:extLst>
-                  <a:ext uri="{FF2B5EF4-FFF2-40B4-BE49-F238E27FC236}">
-                    <a16:creationId xmlns:a16="http://schemas.microsoft.com/office/drawing/2014/main" id="{FB8AEB86-367D-5C21-CA1C-F83E6BD0F51B}"/>
-                  </a:ext>
-                </a:extLst>
-              </p:cNvPr>
-              <p:cNvSpPr/>
-              <p:nvPr/>
-            </p:nvSpPr>
-            <p:spPr>
-              <a:xfrm>
-                <a:off x="6072290" y="2553908"/>
-                <a:ext cx="414033" cy="13517"/>
-              </a:xfrm>
-              <a:custGeom>
-                <a:avLst/>
-                <a:gdLst>
-                  <a:gd name="csX0" fmla="*/ 0 w 414033"/>
-                  <a:gd name="csY0" fmla="*/ 0 h 13517"/>
-                  <a:gd name="csX1" fmla="*/ 270345 w 414033"/>
-                  <a:gd name="csY1" fmla="*/ 0 h 13517"/>
-                  <a:gd name="csX2" fmla="*/ 229793 w 414033"/>
-                  <a:gd name="csY2" fmla="*/ 0 h 13517"/>
-                  <a:gd name="csX3" fmla="*/ 414033 w 414033"/>
-                  <a:gd name="csY3" fmla="*/ 0 h 13517"/>
-                </a:gdLst>
-                <a:ahLst/>
-                <a:cxnLst>
-                  <a:cxn ang="0">
-                    <a:pos x="csX0" y="csY0"/>
-                  </a:cxn>
-                  <a:cxn ang="0">
-                    <a:pos x="csX1" y="csY1"/>
-                  </a:cxn>
-                  <a:cxn ang="0">
-                    <a:pos x="csX2" y="csY2"/>
-                  </a:cxn>
-                  <a:cxn ang="0">
-                    <a:pos x="csX3" y="csY3"/>
-                  </a:cxn>
-                </a:cxnLst>
-                <a:rect l="l" t="t" r="r" b="b"/>
-                <a:pathLst>
-                  <a:path w="414033" h="13517">
-                    <a:moveTo>
-                      <a:pt x="0" y="0"/>
-                    </a:moveTo>
-                    <a:lnTo>
-                      <a:pt x="270345" y="0"/>
-                    </a:lnTo>
-                    <a:lnTo>
-                      <a:pt x="229793" y="0"/>
-                    </a:lnTo>
-                    <a:lnTo>
-                      <a:pt x="414033" y="0"/>
-                    </a:lnTo>
-                  </a:path>
-                </a:pathLst>
-              </a:custGeom>
-              <a:solidFill>
-                <a:schemeClr val="tx1"/>
-              </a:solidFill>
-              <a:ln w="13499" cap="flat">
-                <a:solidFill>
-                  <a:schemeClr val="bg1"/>
-                </a:solidFill>
-                <a:prstDash val="solid"/>
-                <a:miter/>
-              </a:ln>
-            </p:spPr>
-          </p:sp>
-          <p:sp>
-            <p:nvSpPr>
-              <p:cNvPr id="23" name="Полилиния: фигура 22">
-                <a:extLst>
-                  <a:ext uri="{FF2B5EF4-FFF2-40B4-BE49-F238E27FC236}">
-                    <a16:creationId xmlns:a16="http://schemas.microsoft.com/office/drawing/2014/main" id="{F993A54C-7A81-7CA9-5B5A-4E32E784E77B}"/>
-                  </a:ext>
-                </a:extLst>
-              </p:cNvPr>
-              <p:cNvSpPr/>
-              <p:nvPr/>
-            </p:nvSpPr>
-            <p:spPr>
-              <a:xfrm>
-                <a:off x="6462668" y="2506598"/>
-                <a:ext cx="94620" cy="94620"/>
-              </a:xfrm>
-              <a:custGeom>
-                <a:avLst/>
-                <a:gdLst>
-                  <a:gd name="csX0" fmla="*/ 94621 w 94620"/>
-                  <a:gd name="csY0" fmla="*/ 47310 h 94620"/>
-                  <a:gd name="csX1" fmla="*/ 0 w 94620"/>
-                  <a:gd name="csY1" fmla="*/ 94621 h 94620"/>
-                  <a:gd name="csX2" fmla="*/ 23655 w 94620"/>
-                  <a:gd name="csY2" fmla="*/ 47310 h 94620"/>
-                  <a:gd name="csX3" fmla="*/ 0 w 94620"/>
-                  <a:gd name="csY3" fmla="*/ 0 h 94620"/>
-                </a:gdLst>
-                <a:ahLst/>
-                <a:cxnLst>
-                  <a:cxn ang="0">
-                    <a:pos x="csX0" y="csY0"/>
-                  </a:cxn>
-                  <a:cxn ang="0">
-                    <a:pos x="csX1" y="csY1"/>
-                  </a:cxn>
-                  <a:cxn ang="0">
-                    <a:pos x="csX2" y="csY2"/>
-                  </a:cxn>
-                  <a:cxn ang="0">
-                    <a:pos x="csX3" y="csY3"/>
-                  </a:cxn>
-                </a:cxnLst>
-                <a:rect l="l" t="t" r="r" b="b"/>
-                <a:pathLst>
-                  <a:path w="94620" h="94620">
-                    <a:moveTo>
-                      <a:pt x="94621" y="47310"/>
-                    </a:moveTo>
-                    <a:lnTo>
-                      <a:pt x="0" y="94621"/>
-                    </a:lnTo>
-                    <a:lnTo>
-                      <a:pt x="23655" y="47310"/>
-                    </a:lnTo>
-                    <a:lnTo>
-                      <a:pt x="0" y="0"/>
-                    </a:lnTo>
-                    <a:close/>
-                  </a:path>
-                </a:pathLst>
-              </a:custGeom>
-              <a:solidFill>
-                <a:schemeClr val="tx1"/>
-              </a:solidFill>
-              <a:ln w="13499" cap="flat">
-                <a:solidFill>
-                  <a:schemeClr val="bg1"/>
-                </a:solidFill>
-                <a:prstDash val="solid"/>
-                <a:miter/>
-              </a:ln>
-            </p:spPr>
-          </p:sp>
-        </p:grpSp>
-        <p:grpSp>
-          <p:nvGrpSpPr>
-            <p:cNvPr id="24" name="Рисунок 4">
-              <a:extLst>
-                <a:ext uri="{FF2B5EF4-FFF2-40B4-BE49-F238E27FC236}">
-                  <a16:creationId xmlns:a16="http://schemas.microsoft.com/office/drawing/2014/main" id="{3A1B196D-3F8F-FF76-A22C-8DE9751FD7C2}"/>
-                </a:ext>
-              </a:extLst>
-            </p:cNvPr>
-            <p:cNvGrpSpPr/>
-            <p:nvPr/>
-          </p:nvGrpSpPr>
-          <p:grpSpPr>
-            <a:xfrm>
-              <a:off x="5213946" y="2756667"/>
-              <a:ext cx="94620" cy="660722"/>
-              <a:chOff x="5213946" y="2756667"/>
-              <a:chExt cx="94620" cy="660722"/>
-            </a:xfrm>
-            <a:solidFill>
-              <a:schemeClr val="tx1"/>
-            </a:solidFill>
-          </p:grpSpPr>
-          <p:sp>
-            <p:nvSpPr>
-              <p:cNvPr id="25" name="Полилиния: фигура 24">
-                <a:extLst>
-                  <a:ext uri="{FF2B5EF4-FFF2-40B4-BE49-F238E27FC236}">
-                    <a16:creationId xmlns:a16="http://schemas.microsoft.com/office/drawing/2014/main" id="{0A55060D-F886-65C3-0DB0-23CC72FB517C}"/>
-                  </a:ext>
-                </a:extLst>
-              </p:cNvPr>
-              <p:cNvSpPr/>
-              <p:nvPr/>
-            </p:nvSpPr>
-            <p:spPr>
-              <a:xfrm>
-                <a:off x="5261256" y="2756667"/>
-                <a:ext cx="13517" cy="589757"/>
-              </a:xfrm>
-              <a:custGeom>
-                <a:avLst/>
-                <a:gdLst>
-                  <a:gd name="csX0" fmla="*/ 0 w 13517"/>
-                  <a:gd name="csY0" fmla="*/ 0 h 589757"/>
-                  <a:gd name="csX1" fmla="*/ 0 w 13517"/>
-                  <a:gd name="csY1" fmla="*/ 589757 h 589757"/>
-                </a:gdLst>
-                <a:ahLst/>
-                <a:cxnLst>
-                  <a:cxn ang="0">
-                    <a:pos x="csX0" y="csY0"/>
-                  </a:cxn>
-                  <a:cxn ang="0">
-                    <a:pos x="csX1" y="csY1"/>
-                  </a:cxn>
-                </a:cxnLst>
-                <a:rect l="l" t="t" r="r" b="b"/>
-                <a:pathLst>
-                  <a:path w="13517" h="589757">
-                    <a:moveTo>
-                      <a:pt x="0" y="0"/>
-                    </a:moveTo>
-                    <a:lnTo>
-                      <a:pt x="0" y="589757"/>
-                    </a:lnTo>
-                  </a:path>
-                </a:pathLst>
-              </a:custGeom>
-              <a:solidFill>
-                <a:schemeClr val="tx1"/>
-              </a:solidFill>
-              <a:ln w="13499" cap="flat">
-                <a:solidFill>
-                  <a:schemeClr val="bg1"/>
-                </a:solidFill>
-                <a:prstDash val="solid"/>
-                <a:miter/>
-              </a:ln>
-            </p:spPr>
-          </p:sp>
-          <p:sp>
-            <p:nvSpPr>
-              <p:cNvPr id="26" name="Полилиния: фигура 25">
-                <a:extLst>
-                  <a:ext uri="{FF2B5EF4-FFF2-40B4-BE49-F238E27FC236}">
-                    <a16:creationId xmlns:a16="http://schemas.microsoft.com/office/drawing/2014/main" id="{8D2169E3-2735-E820-722E-101AF12D8BB3}"/>
-                  </a:ext>
-                </a:extLst>
-              </p:cNvPr>
-              <p:cNvSpPr/>
-              <p:nvPr/>
-            </p:nvSpPr>
-            <p:spPr>
-              <a:xfrm>
-                <a:off x="5213946" y="3322769"/>
-                <a:ext cx="94620" cy="94620"/>
-              </a:xfrm>
-              <a:custGeom>
-                <a:avLst/>
-                <a:gdLst>
-                  <a:gd name="csX0" fmla="*/ 47310 w 94620"/>
-                  <a:gd name="csY0" fmla="*/ 94621 h 94620"/>
-                  <a:gd name="csX1" fmla="*/ 0 w 94620"/>
-                  <a:gd name="csY1" fmla="*/ 0 h 94620"/>
-                  <a:gd name="csX2" fmla="*/ 47310 w 94620"/>
-                  <a:gd name="csY2" fmla="*/ 23655 h 94620"/>
-                  <a:gd name="csX3" fmla="*/ 94621 w 94620"/>
-                  <a:gd name="csY3" fmla="*/ 0 h 94620"/>
-                </a:gdLst>
-                <a:ahLst/>
-                <a:cxnLst>
-                  <a:cxn ang="0">
-                    <a:pos x="csX0" y="csY0"/>
-                  </a:cxn>
-                  <a:cxn ang="0">
-                    <a:pos x="csX1" y="csY1"/>
-                  </a:cxn>
-                  <a:cxn ang="0">
-                    <a:pos x="csX2" y="csY2"/>
-                  </a:cxn>
-                  <a:cxn ang="0">
-                    <a:pos x="csX3" y="csY3"/>
-                  </a:cxn>
-                </a:cxnLst>
-                <a:rect l="l" t="t" r="r" b="b"/>
-                <a:pathLst>
-                  <a:path w="94620" h="94620">
-                    <a:moveTo>
-                      <a:pt x="47310" y="94621"/>
-                    </a:moveTo>
-                    <a:lnTo>
-                      <a:pt x="0" y="0"/>
-                    </a:lnTo>
-                    <a:lnTo>
-                      <a:pt x="47310" y="23655"/>
-                    </a:lnTo>
-                    <a:lnTo>
-                      <a:pt x="94621" y="0"/>
-                    </a:lnTo>
-                    <a:close/>
-                  </a:path>
-                </a:pathLst>
-              </a:custGeom>
-              <a:solidFill>
-                <a:schemeClr val="tx1"/>
-              </a:solidFill>
-              <a:ln w="13499" cap="flat">
-                <a:solidFill>
-                  <a:schemeClr val="bg1"/>
-                </a:solidFill>
-                <a:prstDash val="solid"/>
-                <a:miter/>
-              </a:ln>
-            </p:spPr>
-          </p:sp>
-        </p:grpSp>
-        <p:grpSp>
-          <p:nvGrpSpPr>
-            <p:cNvPr id="27" name="Рисунок 4">
-              <a:extLst>
-                <a:ext uri="{FF2B5EF4-FFF2-40B4-BE49-F238E27FC236}">
-                  <a16:creationId xmlns:a16="http://schemas.microsoft.com/office/drawing/2014/main" id="{3D7A1024-D548-EE02-560A-41BC9D6A6507}"/>
-                </a:ext>
-              </a:extLst>
-            </p:cNvPr>
-            <p:cNvGrpSpPr/>
-            <p:nvPr/>
-          </p:nvGrpSpPr>
-          <p:grpSpPr>
-            <a:xfrm>
-              <a:off x="4450222" y="2351150"/>
-              <a:ext cx="1622068" cy="405517"/>
-              <a:chOff x="4450222" y="2351150"/>
-              <a:chExt cx="1622068" cy="405517"/>
-            </a:xfrm>
-            <a:solidFill>
-              <a:schemeClr val="tx1"/>
-            </a:solidFill>
-          </p:grpSpPr>
-          <p:sp>
-            <p:nvSpPr>
-              <p:cNvPr id="28" name="Прямоугольник 27">
-                <a:extLst>
-                  <a:ext uri="{FF2B5EF4-FFF2-40B4-BE49-F238E27FC236}">
-                    <a16:creationId xmlns:a16="http://schemas.microsoft.com/office/drawing/2014/main" id="{C9185BDF-1C5E-8708-699C-FA0B8868032C}"/>
-                  </a:ext>
-                </a:extLst>
-              </p:cNvPr>
-              <p:cNvSpPr/>
-              <p:nvPr/>
-            </p:nvSpPr>
-            <p:spPr>
-              <a:xfrm>
-                <a:off x="4450222" y="2351150"/>
-                <a:ext cx="1622068" cy="405517"/>
-              </a:xfrm>
-              <a:prstGeom prst="rect">
-                <a:avLst/>
-              </a:prstGeom>
-              <a:solidFill>
-                <a:schemeClr val="tx1"/>
-              </a:solidFill>
-              <a:ln w="13499" cap="flat">
-                <a:solidFill>
-                  <a:schemeClr val="bg1"/>
-                </a:solidFill>
-                <a:prstDash val="solid"/>
-                <a:miter/>
-              </a:ln>
-            </p:spPr>
-          </p:sp>
-          <p:pic>
-            <p:nvPicPr>
-              <p:cNvPr id="29" name="Рисунок 28">
-                <a:extLst>
-                  <a:ext uri="{FF2B5EF4-FFF2-40B4-BE49-F238E27FC236}">
-                    <a16:creationId xmlns:a16="http://schemas.microsoft.com/office/drawing/2014/main" id="{8BCB02D4-5E02-5C77-D024-93DB583B032F}"/>
-                  </a:ext>
-                </a:extLst>
-              </p:cNvPr>
-              <p:cNvPicPr>
-                <a:picLocks noChangeAspect="1"/>
-              </p:cNvPicPr>
-              <p:nvPr/>
-            </p:nvPicPr>
-            <p:blipFill>
-              <a:blip r:embed="rId5">
-                <a:lum bright="70000" contrast="-70000"/>
-              </a:blip>
-              <a:stretch>
-                <a:fillRect/>
-              </a:stretch>
-            </p:blipFill>
-            <p:spPr>
-              <a:xfrm>
-                <a:off x="4463739" y="2466046"/>
-                <a:ext cx="1595034" cy="229793"/>
-              </a:xfrm>
-              <a:custGeom>
-                <a:avLst/>
-                <a:gdLst>
-                  <a:gd name="csX0" fmla="*/ 0 w 1595034"/>
-                  <a:gd name="csY0" fmla="*/ 0 h 229793"/>
-                  <a:gd name="csX1" fmla="*/ 1595035 w 1595034"/>
-                  <a:gd name="csY1" fmla="*/ 0 h 229793"/>
-                  <a:gd name="csX2" fmla="*/ 1595035 w 1595034"/>
-                  <a:gd name="csY2" fmla="*/ 229793 h 229793"/>
-                  <a:gd name="csX3" fmla="*/ 0 w 1595034"/>
-                  <a:gd name="csY3" fmla="*/ 229793 h 229793"/>
-                </a:gdLst>
-                <a:ahLst/>
-                <a:cxnLst>
-                  <a:cxn ang="0">
-                    <a:pos x="csX0" y="csY0"/>
-                  </a:cxn>
-                  <a:cxn ang="0">
-                    <a:pos x="csX1" y="csY1"/>
-                  </a:cxn>
-                  <a:cxn ang="0">
-                    <a:pos x="csX2" y="csY2"/>
-                  </a:cxn>
-                  <a:cxn ang="0">
-                    <a:pos x="csX3" y="csY3"/>
-                  </a:cxn>
-                </a:cxnLst>
-                <a:rect l="l" t="t" r="r" b="b"/>
-                <a:pathLst>
-                  <a:path w="1595034" h="229793">
-                    <a:moveTo>
-                      <a:pt x="0" y="0"/>
-                    </a:moveTo>
-                    <a:lnTo>
-                      <a:pt x="1595035" y="0"/>
-                    </a:lnTo>
-                    <a:lnTo>
-                      <a:pt x="1595035" y="229793"/>
-                    </a:lnTo>
-                    <a:lnTo>
-                      <a:pt x="0" y="229793"/>
-                    </a:lnTo>
-                    <a:close/>
-                  </a:path>
-                </a:pathLst>
-              </a:custGeom>
-            </p:spPr>
-          </p:pic>
-        </p:grpSp>
-        <p:grpSp>
-          <p:nvGrpSpPr>
-            <p:cNvPr id="30" name="Рисунок 4">
-              <a:extLst>
-                <a:ext uri="{FF2B5EF4-FFF2-40B4-BE49-F238E27FC236}">
-                  <a16:creationId xmlns:a16="http://schemas.microsoft.com/office/drawing/2014/main" id="{B0E904C1-203D-A26E-0861-12702E161659}"/>
-                </a:ext>
-              </a:extLst>
-            </p:cNvPr>
-            <p:cNvGrpSpPr/>
-            <p:nvPr/>
-          </p:nvGrpSpPr>
-          <p:grpSpPr>
-            <a:xfrm>
-              <a:off x="6072290" y="3587977"/>
-              <a:ext cx="484998" cy="94620"/>
-              <a:chOff x="6072290" y="3587977"/>
-              <a:chExt cx="484998" cy="94620"/>
-            </a:xfrm>
-            <a:solidFill>
-              <a:schemeClr val="tx1"/>
-            </a:solidFill>
-          </p:grpSpPr>
-          <p:sp>
-            <p:nvSpPr>
-              <p:cNvPr id="31" name="Полилиния: фигура 30">
-                <a:extLst>
-                  <a:ext uri="{FF2B5EF4-FFF2-40B4-BE49-F238E27FC236}">
-                    <a16:creationId xmlns:a16="http://schemas.microsoft.com/office/drawing/2014/main" id="{F61322D2-CF22-98AB-DF3D-3F153B6D0CFB}"/>
-                  </a:ext>
-                </a:extLst>
-              </p:cNvPr>
-              <p:cNvSpPr/>
-              <p:nvPr/>
-            </p:nvSpPr>
-            <p:spPr>
-              <a:xfrm>
-                <a:off x="6072290" y="3635288"/>
-                <a:ext cx="414033" cy="13517"/>
-              </a:xfrm>
-              <a:custGeom>
-                <a:avLst/>
-                <a:gdLst>
-                  <a:gd name="csX0" fmla="*/ 0 w 414033"/>
-                  <a:gd name="csY0" fmla="*/ 0 h 13517"/>
-                  <a:gd name="csX1" fmla="*/ 270345 w 414033"/>
-                  <a:gd name="csY1" fmla="*/ 0 h 13517"/>
-                  <a:gd name="csX2" fmla="*/ 229793 w 414033"/>
-                  <a:gd name="csY2" fmla="*/ 0 h 13517"/>
-                  <a:gd name="csX3" fmla="*/ 414033 w 414033"/>
-                  <a:gd name="csY3" fmla="*/ 0 h 13517"/>
-                </a:gdLst>
-                <a:ahLst/>
-                <a:cxnLst>
-                  <a:cxn ang="0">
-                    <a:pos x="csX0" y="csY0"/>
-                  </a:cxn>
-                  <a:cxn ang="0">
-                    <a:pos x="csX1" y="csY1"/>
-                  </a:cxn>
-                  <a:cxn ang="0">
-                    <a:pos x="csX2" y="csY2"/>
-                  </a:cxn>
-                  <a:cxn ang="0">
-                    <a:pos x="csX3" y="csY3"/>
-                  </a:cxn>
-                </a:cxnLst>
-                <a:rect l="l" t="t" r="r" b="b"/>
-                <a:pathLst>
-                  <a:path w="414033" h="13517">
-                    <a:moveTo>
-                      <a:pt x="0" y="0"/>
-                    </a:moveTo>
-                    <a:lnTo>
-                      <a:pt x="270345" y="0"/>
-                    </a:lnTo>
-                    <a:lnTo>
-                      <a:pt x="229793" y="0"/>
-                    </a:lnTo>
-                    <a:lnTo>
-                      <a:pt x="414033" y="0"/>
-                    </a:lnTo>
-                  </a:path>
-                </a:pathLst>
-              </a:custGeom>
-              <a:solidFill>
-                <a:schemeClr val="tx1"/>
-              </a:solidFill>
-              <a:ln w="13499" cap="flat">
-                <a:solidFill>
-                  <a:schemeClr val="bg1"/>
-                </a:solidFill>
-                <a:prstDash val="solid"/>
-                <a:miter/>
-              </a:ln>
-            </p:spPr>
-          </p:sp>
-          <p:sp>
-            <p:nvSpPr>
-              <p:cNvPr id="224" name="Полилиния: фигура 223">
-                <a:extLst>
-                  <a:ext uri="{FF2B5EF4-FFF2-40B4-BE49-F238E27FC236}">
-                    <a16:creationId xmlns:a16="http://schemas.microsoft.com/office/drawing/2014/main" id="{52EC0D95-A91D-0766-348E-B365C6AEE9EC}"/>
-                  </a:ext>
-                </a:extLst>
-              </p:cNvPr>
-              <p:cNvSpPr/>
-              <p:nvPr/>
-            </p:nvSpPr>
-            <p:spPr>
-              <a:xfrm>
-                <a:off x="6462668" y="3587977"/>
-                <a:ext cx="94620" cy="94620"/>
-              </a:xfrm>
-              <a:custGeom>
-                <a:avLst/>
-                <a:gdLst>
-                  <a:gd name="csX0" fmla="*/ 94621 w 94620"/>
-                  <a:gd name="csY0" fmla="*/ 47310 h 94620"/>
-                  <a:gd name="csX1" fmla="*/ 0 w 94620"/>
-                  <a:gd name="csY1" fmla="*/ 94621 h 94620"/>
-                  <a:gd name="csX2" fmla="*/ 23655 w 94620"/>
-                  <a:gd name="csY2" fmla="*/ 47310 h 94620"/>
-                  <a:gd name="csX3" fmla="*/ 0 w 94620"/>
-                  <a:gd name="csY3" fmla="*/ 0 h 94620"/>
-                </a:gdLst>
-                <a:ahLst/>
-                <a:cxnLst>
-                  <a:cxn ang="0">
-                    <a:pos x="csX0" y="csY0"/>
-                  </a:cxn>
-                  <a:cxn ang="0">
-                    <a:pos x="csX1" y="csY1"/>
-                  </a:cxn>
-                  <a:cxn ang="0">
-                    <a:pos x="csX2" y="csY2"/>
-                  </a:cxn>
-                  <a:cxn ang="0">
-                    <a:pos x="csX3" y="csY3"/>
-                  </a:cxn>
-                </a:cxnLst>
-                <a:rect l="l" t="t" r="r" b="b"/>
-                <a:pathLst>
-                  <a:path w="94620" h="94620">
-                    <a:moveTo>
-                      <a:pt x="94621" y="47310"/>
-                    </a:moveTo>
-                    <a:lnTo>
-                      <a:pt x="0" y="94621"/>
-                    </a:lnTo>
-                    <a:lnTo>
-                      <a:pt x="23655" y="47310"/>
-                    </a:lnTo>
-                    <a:lnTo>
-                      <a:pt x="0" y="0"/>
-                    </a:lnTo>
-                    <a:close/>
-                  </a:path>
-                </a:pathLst>
-              </a:custGeom>
-              <a:solidFill>
-                <a:schemeClr val="tx1"/>
-              </a:solidFill>
-              <a:ln w="13499" cap="flat">
-                <a:solidFill>
-                  <a:schemeClr val="bg1"/>
-                </a:solidFill>
-                <a:prstDash val="solid"/>
-                <a:miter/>
-              </a:ln>
-            </p:spPr>
-          </p:sp>
-        </p:grpSp>
-        <p:grpSp>
-          <p:nvGrpSpPr>
-            <p:cNvPr id="235" name="Рисунок 4">
-              <a:extLst>
-                <a:ext uri="{FF2B5EF4-FFF2-40B4-BE49-F238E27FC236}">
-                  <a16:creationId xmlns:a16="http://schemas.microsoft.com/office/drawing/2014/main" id="{686A739E-2B7D-720B-8A08-C54267A53FD4}"/>
-                </a:ext>
-              </a:extLst>
-            </p:cNvPr>
-            <p:cNvGrpSpPr/>
-            <p:nvPr/>
-          </p:nvGrpSpPr>
-          <p:grpSpPr>
-            <a:xfrm>
-              <a:off x="4450222" y="3432529"/>
-              <a:ext cx="1622068" cy="405517"/>
-              <a:chOff x="4450222" y="3432529"/>
-              <a:chExt cx="1622068" cy="405517"/>
-            </a:xfrm>
-            <a:solidFill>
-              <a:schemeClr val="tx1"/>
-            </a:solidFill>
-          </p:grpSpPr>
-          <p:sp>
-            <p:nvSpPr>
-              <p:cNvPr id="236" name="Прямоугольник 235">
-                <a:extLst>
-                  <a:ext uri="{FF2B5EF4-FFF2-40B4-BE49-F238E27FC236}">
-                    <a16:creationId xmlns:a16="http://schemas.microsoft.com/office/drawing/2014/main" id="{1CAB4276-21CA-AA3A-9D2F-6AB57DC573A1}"/>
-                  </a:ext>
-                </a:extLst>
-              </p:cNvPr>
-              <p:cNvSpPr/>
-              <p:nvPr/>
-            </p:nvSpPr>
-            <p:spPr>
-              <a:xfrm>
-                <a:off x="4450222" y="3432529"/>
-                <a:ext cx="1622068" cy="405517"/>
-              </a:xfrm>
-              <a:prstGeom prst="rect">
-                <a:avLst/>
-              </a:prstGeom>
-              <a:solidFill>
-                <a:schemeClr val="tx1"/>
-              </a:solidFill>
-              <a:ln w="13499" cap="flat">
-                <a:solidFill>
-                  <a:schemeClr val="bg1"/>
-                </a:solidFill>
-                <a:prstDash val="solid"/>
-                <a:miter/>
-              </a:ln>
-            </p:spPr>
-          </p:sp>
-          <p:pic>
-            <p:nvPicPr>
-              <p:cNvPr id="237" name="Рисунок 236">
-                <a:extLst>
-                  <a:ext uri="{FF2B5EF4-FFF2-40B4-BE49-F238E27FC236}">
-                    <a16:creationId xmlns:a16="http://schemas.microsoft.com/office/drawing/2014/main" id="{D7132DAB-8300-F0AB-E53B-8E3B3B66BDB4}"/>
-                  </a:ext>
-                </a:extLst>
-              </p:cNvPr>
-              <p:cNvPicPr>
-                <a:picLocks noChangeAspect="1"/>
-              </p:cNvPicPr>
-              <p:nvPr/>
-            </p:nvPicPr>
-            <p:blipFill>
-              <a:blip r:embed="rId6">
-                <a:lum bright="70000" contrast="-70000"/>
-              </a:blip>
-              <a:stretch>
-                <a:fillRect/>
-              </a:stretch>
-            </p:blipFill>
-            <p:spPr>
-              <a:xfrm>
-                <a:off x="4463739" y="3547426"/>
-                <a:ext cx="1595034" cy="229793"/>
-              </a:xfrm>
-              <a:custGeom>
-                <a:avLst/>
-                <a:gdLst>
-                  <a:gd name="csX0" fmla="*/ 0 w 1595034"/>
-                  <a:gd name="csY0" fmla="*/ 0 h 229793"/>
-                  <a:gd name="csX1" fmla="*/ 1595035 w 1595034"/>
-                  <a:gd name="csY1" fmla="*/ 0 h 229793"/>
-                  <a:gd name="csX2" fmla="*/ 1595035 w 1595034"/>
-                  <a:gd name="csY2" fmla="*/ 229793 h 229793"/>
-                  <a:gd name="csX3" fmla="*/ 0 w 1595034"/>
-                  <a:gd name="csY3" fmla="*/ 229793 h 229793"/>
-                </a:gdLst>
-                <a:ahLst/>
-                <a:cxnLst>
-                  <a:cxn ang="0">
-                    <a:pos x="csX0" y="csY0"/>
-                  </a:cxn>
-                  <a:cxn ang="0">
-                    <a:pos x="csX1" y="csY1"/>
-                  </a:cxn>
-                  <a:cxn ang="0">
-                    <a:pos x="csX2" y="csY2"/>
-                  </a:cxn>
-                  <a:cxn ang="0">
-                    <a:pos x="csX3" y="csY3"/>
-                  </a:cxn>
-                </a:cxnLst>
-                <a:rect l="l" t="t" r="r" b="b"/>
-                <a:pathLst>
-                  <a:path w="1595034" h="229793">
-                    <a:moveTo>
-                      <a:pt x="0" y="0"/>
-                    </a:moveTo>
-                    <a:lnTo>
-                      <a:pt x="1595035" y="0"/>
-                    </a:lnTo>
-                    <a:lnTo>
-                      <a:pt x="1595035" y="229793"/>
-                    </a:lnTo>
-                    <a:lnTo>
-                      <a:pt x="0" y="229793"/>
-                    </a:lnTo>
-                    <a:close/>
-                  </a:path>
-                </a:pathLst>
-              </a:custGeom>
-            </p:spPr>
-          </p:pic>
-        </p:grpSp>
-        <p:grpSp>
-          <p:nvGrpSpPr>
-            <p:cNvPr id="238" name="Рисунок 4">
-              <a:extLst>
-                <a:ext uri="{FF2B5EF4-FFF2-40B4-BE49-F238E27FC236}">
-                  <a16:creationId xmlns:a16="http://schemas.microsoft.com/office/drawing/2014/main" id="{FC0B59C0-AF81-AB27-1B0C-25C85882E856}"/>
-                </a:ext>
-              </a:extLst>
-            </p:cNvPr>
-            <p:cNvGrpSpPr/>
-            <p:nvPr/>
-          </p:nvGrpSpPr>
-          <p:grpSpPr>
-            <a:xfrm>
-              <a:off x="6572428" y="3432529"/>
-              <a:ext cx="1622068" cy="405517"/>
-              <a:chOff x="6572428" y="3432529"/>
-              <a:chExt cx="1622068" cy="405517"/>
-            </a:xfrm>
-            <a:solidFill>
-              <a:schemeClr val="tx1"/>
-            </a:solidFill>
-          </p:grpSpPr>
-          <p:sp>
-            <p:nvSpPr>
-              <p:cNvPr id="239" name="Прямоугольник 238">
-                <a:extLst>
-                  <a:ext uri="{FF2B5EF4-FFF2-40B4-BE49-F238E27FC236}">
-                    <a16:creationId xmlns:a16="http://schemas.microsoft.com/office/drawing/2014/main" id="{A2FB7D4D-B107-FC3B-D4C5-EAD7F3F80ADB}"/>
-                  </a:ext>
-                </a:extLst>
-              </p:cNvPr>
-              <p:cNvSpPr/>
-              <p:nvPr/>
-            </p:nvSpPr>
-            <p:spPr>
-              <a:xfrm>
-                <a:off x="6572428" y="3432529"/>
-                <a:ext cx="1622068" cy="405517"/>
-              </a:xfrm>
-              <a:prstGeom prst="rect">
-                <a:avLst/>
-              </a:prstGeom>
-              <a:solidFill>
-                <a:schemeClr val="tx1"/>
-              </a:solidFill>
-              <a:ln w="13499" cap="flat">
-                <a:solidFill>
-                  <a:schemeClr val="bg1"/>
-                </a:solidFill>
-                <a:prstDash val="solid"/>
-                <a:miter/>
-              </a:ln>
-            </p:spPr>
-          </p:sp>
-          <p:pic>
-            <p:nvPicPr>
-              <p:cNvPr id="240" name="Рисунок 239">
-                <a:extLst>
-                  <a:ext uri="{FF2B5EF4-FFF2-40B4-BE49-F238E27FC236}">
-                    <a16:creationId xmlns:a16="http://schemas.microsoft.com/office/drawing/2014/main" id="{8EF55C7B-FD57-46F1-0882-8AC3154BC6ED}"/>
-                  </a:ext>
-                </a:extLst>
-              </p:cNvPr>
-              <p:cNvPicPr>
-                <a:picLocks noChangeAspect="1"/>
-              </p:cNvPicPr>
-              <p:nvPr/>
-            </p:nvPicPr>
-            <p:blipFill>
-              <a:blip r:embed="rId7">
-                <a:lum bright="70000" contrast="-70000"/>
-              </a:blip>
-              <a:stretch>
-                <a:fillRect/>
-              </a:stretch>
-            </p:blipFill>
-            <p:spPr>
-              <a:xfrm>
-                <a:off x="6585946" y="3547426"/>
-                <a:ext cx="1595034" cy="229793"/>
-              </a:xfrm>
-              <a:custGeom>
-                <a:avLst/>
-                <a:gdLst>
-                  <a:gd name="csX0" fmla="*/ 0 w 1595034"/>
-                  <a:gd name="csY0" fmla="*/ 0 h 229793"/>
-                  <a:gd name="csX1" fmla="*/ 1595035 w 1595034"/>
-                  <a:gd name="csY1" fmla="*/ 0 h 229793"/>
-                  <a:gd name="csX2" fmla="*/ 1595035 w 1595034"/>
-                  <a:gd name="csY2" fmla="*/ 229793 h 229793"/>
-                  <a:gd name="csX3" fmla="*/ 0 w 1595034"/>
-                  <a:gd name="csY3" fmla="*/ 229793 h 229793"/>
-                </a:gdLst>
-                <a:ahLst/>
-                <a:cxnLst>
-                  <a:cxn ang="0">
-                    <a:pos x="csX0" y="csY0"/>
-                  </a:cxn>
-                  <a:cxn ang="0">
-                    <a:pos x="csX1" y="csY1"/>
-                  </a:cxn>
-                  <a:cxn ang="0">
-                    <a:pos x="csX2" y="csY2"/>
-                  </a:cxn>
-                  <a:cxn ang="0">
-                    <a:pos x="csX3" y="csY3"/>
-                  </a:cxn>
-                </a:cxnLst>
-                <a:rect l="l" t="t" r="r" b="b"/>
-                <a:pathLst>
-                  <a:path w="1595034" h="229793">
-                    <a:moveTo>
-                      <a:pt x="0" y="0"/>
-                    </a:moveTo>
-                    <a:lnTo>
-                      <a:pt x="1595035" y="0"/>
-                    </a:lnTo>
-                    <a:lnTo>
-                      <a:pt x="1595035" y="229793"/>
-                    </a:lnTo>
-                    <a:lnTo>
-                      <a:pt x="0" y="229793"/>
-                    </a:lnTo>
-                    <a:close/>
-                  </a:path>
-                </a:pathLst>
-              </a:custGeom>
-            </p:spPr>
-          </p:pic>
-        </p:grpSp>
-        <p:grpSp>
-          <p:nvGrpSpPr>
-            <p:cNvPr id="241" name="Рисунок 4">
-              <a:extLst>
-                <a:ext uri="{FF2B5EF4-FFF2-40B4-BE49-F238E27FC236}">
-                  <a16:creationId xmlns:a16="http://schemas.microsoft.com/office/drawing/2014/main" id="{E55DA817-141C-568F-5B52-1015DADD20D3}"/>
-                </a:ext>
-              </a:extLst>
-            </p:cNvPr>
-            <p:cNvGrpSpPr/>
-            <p:nvPr/>
-          </p:nvGrpSpPr>
-          <p:grpSpPr>
-            <a:xfrm>
-              <a:off x="6572428" y="2351150"/>
-              <a:ext cx="1622068" cy="405517"/>
-              <a:chOff x="6572428" y="2351150"/>
-              <a:chExt cx="1622068" cy="405517"/>
-            </a:xfrm>
-            <a:solidFill>
-              <a:schemeClr val="tx1"/>
-            </a:solidFill>
-          </p:grpSpPr>
-          <p:sp>
-            <p:nvSpPr>
-              <p:cNvPr id="242" name="Прямоугольник 241">
-                <a:extLst>
-                  <a:ext uri="{FF2B5EF4-FFF2-40B4-BE49-F238E27FC236}">
-                    <a16:creationId xmlns:a16="http://schemas.microsoft.com/office/drawing/2014/main" id="{454DC0D7-B130-019E-7F3C-71802EDDA2F1}"/>
-                  </a:ext>
-                </a:extLst>
-              </p:cNvPr>
-              <p:cNvSpPr/>
-              <p:nvPr/>
-            </p:nvSpPr>
-            <p:spPr>
-              <a:xfrm>
-                <a:off x="6572428" y="2351150"/>
-                <a:ext cx="1622068" cy="405517"/>
-              </a:xfrm>
-              <a:prstGeom prst="rect">
-                <a:avLst/>
-              </a:prstGeom>
-              <a:solidFill>
-                <a:schemeClr val="tx1"/>
-              </a:solidFill>
-              <a:ln w="13499" cap="flat">
-                <a:solidFill>
-                  <a:schemeClr val="bg1"/>
-                </a:solidFill>
-                <a:prstDash val="solid"/>
-                <a:miter/>
-              </a:ln>
-            </p:spPr>
-          </p:sp>
-          <p:pic>
-            <p:nvPicPr>
-              <p:cNvPr id="243" name="Рисунок 242">
-                <a:extLst>
-                  <a:ext uri="{FF2B5EF4-FFF2-40B4-BE49-F238E27FC236}">
-                    <a16:creationId xmlns:a16="http://schemas.microsoft.com/office/drawing/2014/main" id="{33A91369-EA0E-1B6D-5169-3E74A2805D20}"/>
-                  </a:ext>
-                </a:extLst>
-              </p:cNvPr>
-              <p:cNvPicPr>
-                <a:picLocks noChangeAspect="1"/>
-              </p:cNvPicPr>
-              <p:nvPr/>
-            </p:nvPicPr>
-            <p:blipFill>
-              <a:blip r:embed="rId8">
-                <a:lum bright="70000" contrast="-70000"/>
-              </a:blip>
-              <a:stretch>
-                <a:fillRect/>
-              </a:stretch>
-            </p:blipFill>
-            <p:spPr>
-              <a:xfrm>
-                <a:off x="6585946" y="2466046"/>
-                <a:ext cx="1595034" cy="229793"/>
-              </a:xfrm>
-              <a:custGeom>
-                <a:avLst/>
-                <a:gdLst>
-                  <a:gd name="csX0" fmla="*/ 0 w 1595034"/>
-                  <a:gd name="csY0" fmla="*/ 0 h 229793"/>
-                  <a:gd name="csX1" fmla="*/ 1595035 w 1595034"/>
-                  <a:gd name="csY1" fmla="*/ 0 h 229793"/>
-                  <a:gd name="csX2" fmla="*/ 1595035 w 1595034"/>
-                  <a:gd name="csY2" fmla="*/ 229793 h 229793"/>
-                  <a:gd name="csX3" fmla="*/ 0 w 1595034"/>
-                  <a:gd name="csY3" fmla="*/ 229793 h 229793"/>
-                </a:gdLst>
-                <a:ahLst/>
-                <a:cxnLst>
-                  <a:cxn ang="0">
-                    <a:pos x="csX0" y="csY0"/>
-                  </a:cxn>
-                  <a:cxn ang="0">
-                    <a:pos x="csX1" y="csY1"/>
-                  </a:cxn>
-                  <a:cxn ang="0">
-                    <a:pos x="csX2" y="csY2"/>
-                  </a:cxn>
-                  <a:cxn ang="0">
-                    <a:pos x="csX3" y="csY3"/>
-                  </a:cxn>
-                </a:cxnLst>
-                <a:rect l="l" t="t" r="r" b="b"/>
-                <a:pathLst>
-                  <a:path w="1595034" h="229793">
-                    <a:moveTo>
-                      <a:pt x="0" y="0"/>
-                    </a:moveTo>
-                    <a:lnTo>
-                      <a:pt x="1595035" y="0"/>
-                    </a:lnTo>
-                    <a:lnTo>
-                      <a:pt x="1595035" y="229793"/>
-                    </a:lnTo>
-                    <a:lnTo>
-                      <a:pt x="0" y="229793"/>
-                    </a:lnTo>
-                    <a:close/>
-                  </a:path>
-                </a:pathLst>
-              </a:custGeom>
-            </p:spPr>
-          </p:pic>
-        </p:grpSp>
-      </p:grpSp>
-      <p:grpSp>
-        <p:nvGrpSpPr>
-          <p:cNvPr id="245" name="Google Shape;9766;p77">
-            <a:extLst>
-              <a:ext uri="{FF2B5EF4-FFF2-40B4-BE49-F238E27FC236}">
-                <a16:creationId xmlns:a16="http://schemas.microsoft.com/office/drawing/2014/main" id="{5F566D07-FD7F-943C-2877-C9B53D1FA0F8}"/>
-              </a:ext>
-            </a:extLst>
-          </p:cNvPr>
-          <p:cNvGrpSpPr/>
-          <p:nvPr/>
-        </p:nvGrpSpPr>
-        <p:grpSpPr>
-          <a:xfrm>
-            <a:off x="8205500" y="81111"/>
-            <a:ext cx="849315" cy="834614"/>
-            <a:chOff x="4206459" y="1191441"/>
-            <a:chExt cx="712557" cy="785901"/>
-          </a:xfrm>
-        </p:grpSpPr>
-        <p:sp>
-          <p:nvSpPr>
-            <p:cNvPr id="246" name="Google Shape;9767;p77">
-              <a:extLst>
-                <a:ext uri="{FF2B5EF4-FFF2-40B4-BE49-F238E27FC236}">
-                  <a16:creationId xmlns:a16="http://schemas.microsoft.com/office/drawing/2014/main" id="{E3759354-E581-5A93-5126-229DB4B5EF1E}"/>
-                </a:ext>
-              </a:extLst>
-            </p:cNvPr>
-            <p:cNvSpPr/>
-            <p:nvPr/>
-          </p:nvSpPr>
-          <p:spPr>
-            <a:xfrm>
-              <a:off x="4548248" y="1328649"/>
-              <a:ext cx="325201" cy="322547"/>
-            </a:xfrm>
-            <a:custGeom>
-              <a:avLst/>
-              <a:gdLst/>
-              <a:ahLst/>
-              <a:cxnLst/>
-              <a:rect l="l" t="t" r="r" b="b"/>
-              <a:pathLst>
-                <a:path w="25486" h="25278" extrusionOk="0">
-                  <a:moveTo>
-                    <a:pt x="12746" y="4905"/>
-                  </a:moveTo>
-                  <a:cubicBezTo>
-                    <a:pt x="13701" y="4905"/>
-                    <a:pt x="14672" y="5083"/>
-                    <a:pt x="15613" y="5460"/>
-                  </a:cubicBezTo>
-                  <a:cubicBezTo>
-                    <a:pt x="19580" y="7047"/>
-                    <a:pt x="21508" y="11545"/>
-                    <a:pt x="19923" y="15511"/>
-                  </a:cubicBezTo>
-                  <a:cubicBezTo>
-                    <a:pt x="18714" y="18534"/>
-                    <a:pt x="15811" y="20374"/>
-                    <a:pt x="12742" y="20374"/>
-                  </a:cubicBezTo>
-                  <a:cubicBezTo>
-                    <a:pt x="11786" y="20374"/>
-                    <a:pt x="10814" y="20196"/>
-                    <a:pt x="9873" y="19819"/>
-                  </a:cubicBezTo>
-                  <a:cubicBezTo>
-                    <a:pt x="5908" y="18234"/>
-                    <a:pt x="3978" y="13734"/>
-                    <a:pt x="5563" y="9769"/>
-                  </a:cubicBezTo>
-                  <a:cubicBezTo>
-                    <a:pt x="6772" y="6745"/>
-                    <a:pt x="9676" y="4905"/>
-                    <a:pt x="12746" y="4905"/>
-                  </a:cubicBezTo>
-                  <a:close/>
-                  <a:moveTo>
-                    <a:pt x="15551" y="1"/>
-                  </a:moveTo>
-                  <a:cubicBezTo>
-                    <a:pt x="15240" y="1"/>
-                    <a:pt x="14946" y="187"/>
-                    <a:pt x="14824" y="492"/>
-                  </a:cubicBezTo>
-                  <a:lnTo>
-                    <a:pt x="14047" y="2435"/>
-                  </a:lnTo>
-                  <a:cubicBezTo>
-                    <a:pt x="13612" y="2378"/>
-                    <a:pt x="13174" y="2350"/>
-                    <a:pt x="12736" y="2350"/>
-                  </a:cubicBezTo>
-                  <a:cubicBezTo>
-                    <a:pt x="12218" y="2350"/>
-                    <a:pt x="11700" y="2390"/>
-                    <a:pt x="11187" y="2469"/>
-                  </a:cubicBezTo>
-                  <a:lnTo>
-                    <a:pt x="10364" y="547"/>
-                  </a:lnTo>
-                  <a:cubicBezTo>
-                    <a:pt x="10238" y="251"/>
-                    <a:pt x="9949" y="73"/>
-                    <a:pt x="9646" y="73"/>
-                  </a:cubicBezTo>
-                  <a:cubicBezTo>
-                    <a:pt x="9543" y="73"/>
-                    <a:pt x="9438" y="93"/>
-                    <a:pt x="9338" y="137"/>
-                  </a:cubicBezTo>
-                  <a:lnTo>
-                    <a:pt x="6036" y="1553"/>
-                  </a:lnTo>
-                  <a:cubicBezTo>
-                    <a:pt x="5640" y="1722"/>
-                    <a:pt x="5456" y="2182"/>
-                    <a:pt x="5626" y="2579"/>
-                  </a:cubicBezTo>
-                  <a:lnTo>
-                    <a:pt x="6449" y="4501"/>
-                  </a:lnTo>
-                  <a:cubicBezTo>
-                    <a:pt x="5690" y="5085"/>
-                    <a:pt x="5019" y="5775"/>
-                    <a:pt x="4452" y="6549"/>
-                  </a:cubicBezTo>
-                  <a:lnTo>
-                    <a:pt x="2510" y="5772"/>
-                  </a:lnTo>
-                  <a:cubicBezTo>
-                    <a:pt x="2414" y="5734"/>
-                    <a:pt x="2316" y="5716"/>
-                    <a:pt x="2219" y="5716"/>
-                  </a:cubicBezTo>
-                  <a:cubicBezTo>
-                    <a:pt x="1910" y="5716"/>
-                    <a:pt x="1616" y="5901"/>
-                    <a:pt x="1493" y="6208"/>
-                  </a:cubicBezTo>
-                  <a:lnTo>
-                    <a:pt x="161" y="9542"/>
-                  </a:lnTo>
-                  <a:cubicBezTo>
-                    <a:pt x="0" y="9944"/>
-                    <a:pt x="194" y="10398"/>
-                    <a:pt x="596" y="10558"/>
-                  </a:cubicBezTo>
-                  <a:lnTo>
-                    <a:pt x="2537" y="11335"/>
-                  </a:lnTo>
-                  <a:cubicBezTo>
-                    <a:pt x="2415" y="12285"/>
-                    <a:pt x="2426" y="13249"/>
-                    <a:pt x="2572" y="14195"/>
-                  </a:cubicBezTo>
-                  <a:lnTo>
-                    <a:pt x="651" y="15018"/>
-                  </a:lnTo>
-                  <a:cubicBezTo>
-                    <a:pt x="253" y="15189"/>
-                    <a:pt x="71" y="15649"/>
-                    <a:pt x="241" y="16046"/>
-                  </a:cubicBezTo>
-                  <a:lnTo>
-                    <a:pt x="1655" y="19347"/>
-                  </a:lnTo>
-                  <a:cubicBezTo>
-                    <a:pt x="1781" y="19643"/>
-                    <a:pt x="2070" y="19821"/>
-                    <a:pt x="2373" y="19821"/>
-                  </a:cubicBezTo>
-                  <a:cubicBezTo>
-                    <a:pt x="2476" y="19821"/>
-                    <a:pt x="2581" y="19800"/>
-                    <a:pt x="2681" y="19756"/>
-                  </a:cubicBezTo>
-                  <a:lnTo>
-                    <a:pt x="4603" y="18933"/>
-                  </a:lnTo>
-                  <a:cubicBezTo>
-                    <a:pt x="5189" y="19692"/>
-                    <a:pt x="5879" y="20365"/>
-                    <a:pt x="6651" y="20930"/>
-                  </a:cubicBezTo>
-                  <a:lnTo>
-                    <a:pt x="5874" y="22873"/>
-                  </a:lnTo>
-                  <a:cubicBezTo>
-                    <a:pt x="5714" y="23273"/>
-                    <a:pt x="5909" y="23728"/>
-                    <a:pt x="6310" y="23888"/>
-                  </a:cubicBezTo>
-                  <a:lnTo>
-                    <a:pt x="9645" y="25222"/>
-                  </a:lnTo>
-                  <a:cubicBezTo>
-                    <a:pt x="9740" y="25260"/>
-                    <a:pt x="9838" y="25278"/>
-                    <a:pt x="9935" y="25278"/>
-                  </a:cubicBezTo>
-                  <a:cubicBezTo>
-                    <a:pt x="10245" y="25278"/>
-                    <a:pt x="10538" y="25092"/>
-                    <a:pt x="10660" y="24786"/>
-                  </a:cubicBezTo>
-                  <a:lnTo>
-                    <a:pt x="11437" y="22845"/>
-                  </a:lnTo>
-                  <a:cubicBezTo>
-                    <a:pt x="11871" y="22901"/>
-                    <a:pt x="12308" y="22929"/>
-                    <a:pt x="12745" y="22929"/>
-                  </a:cubicBezTo>
-                  <a:cubicBezTo>
-                    <a:pt x="13264" y="22929"/>
-                    <a:pt x="13784" y="22889"/>
-                    <a:pt x="14299" y="22810"/>
-                  </a:cubicBezTo>
-                  <a:lnTo>
-                    <a:pt x="15122" y="24732"/>
-                  </a:lnTo>
-                  <a:cubicBezTo>
-                    <a:pt x="15248" y="25028"/>
-                    <a:pt x="15536" y="25206"/>
-                    <a:pt x="15839" y="25206"/>
-                  </a:cubicBezTo>
-                  <a:cubicBezTo>
-                    <a:pt x="15943" y="25206"/>
-                    <a:pt x="16047" y="25185"/>
-                    <a:pt x="16148" y="25142"/>
-                  </a:cubicBezTo>
-                  <a:lnTo>
-                    <a:pt x="19449" y="23728"/>
-                  </a:lnTo>
-                  <a:cubicBezTo>
-                    <a:pt x="19846" y="23558"/>
-                    <a:pt x="20030" y="23098"/>
-                    <a:pt x="19860" y="22701"/>
-                  </a:cubicBezTo>
-                  <a:lnTo>
-                    <a:pt x="19037" y="20780"/>
-                  </a:lnTo>
-                  <a:cubicBezTo>
-                    <a:pt x="19794" y="20194"/>
-                    <a:pt x="20467" y="19503"/>
-                    <a:pt x="21034" y="18732"/>
-                  </a:cubicBezTo>
-                  <a:lnTo>
-                    <a:pt x="22975" y="19508"/>
-                  </a:lnTo>
-                  <a:cubicBezTo>
-                    <a:pt x="23070" y="19546"/>
-                    <a:pt x="23168" y="19564"/>
-                    <a:pt x="23265" y="19564"/>
-                  </a:cubicBezTo>
-                  <a:cubicBezTo>
-                    <a:pt x="23576" y="19564"/>
-                    <a:pt x="23869" y="19378"/>
-                    <a:pt x="23992" y="19073"/>
-                  </a:cubicBezTo>
-                  <a:lnTo>
-                    <a:pt x="25326" y="15737"/>
-                  </a:lnTo>
-                  <a:cubicBezTo>
-                    <a:pt x="25486" y="15337"/>
-                    <a:pt x="25290" y="14882"/>
-                    <a:pt x="24890" y="14722"/>
-                  </a:cubicBezTo>
-                  <a:lnTo>
-                    <a:pt x="22948" y="13945"/>
-                  </a:lnTo>
-                  <a:cubicBezTo>
-                    <a:pt x="23071" y="12994"/>
-                    <a:pt x="23060" y="12032"/>
-                    <a:pt x="22914" y="11084"/>
-                  </a:cubicBezTo>
-                  <a:lnTo>
-                    <a:pt x="24835" y="10261"/>
-                  </a:lnTo>
-                  <a:cubicBezTo>
-                    <a:pt x="25231" y="10091"/>
-                    <a:pt x="25415" y="9631"/>
-                    <a:pt x="25245" y="9234"/>
-                  </a:cubicBezTo>
-                  <a:lnTo>
-                    <a:pt x="23830" y="5934"/>
-                  </a:lnTo>
-                  <a:cubicBezTo>
-                    <a:pt x="23703" y="5637"/>
-                    <a:pt x="23414" y="5459"/>
-                    <a:pt x="23111" y="5459"/>
-                  </a:cubicBezTo>
-                  <a:cubicBezTo>
-                    <a:pt x="23008" y="5459"/>
-                    <a:pt x="22904" y="5479"/>
-                    <a:pt x="22803" y="5522"/>
-                  </a:cubicBezTo>
-                  <a:lnTo>
-                    <a:pt x="20882" y="6347"/>
-                  </a:lnTo>
-                  <a:cubicBezTo>
-                    <a:pt x="20297" y="5588"/>
-                    <a:pt x="19607" y="4915"/>
-                    <a:pt x="18835" y="4348"/>
-                  </a:cubicBezTo>
-                  <a:lnTo>
-                    <a:pt x="19610" y="2408"/>
-                  </a:lnTo>
-                  <a:cubicBezTo>
-                    <a:pt x="19770" y="2006"/>
-                    <a:pt x="19577" y="1551"/>
-                    <a:pt x="19175" y="1391"/>
-                  </a:cubicBezTo>
-                  <a:lnTo>
-                    <a:pt x="15841" y="57"/>
-                  </a:lnTo>
-                  <a:cubicBezTo>
-                    <a:pt x="15745" y="19"/>
-                    <a:pt x="15647" y="1"/>
-                    <a:pt x="15551" y="1"/>
-                  </a:cubicBezTo>
-                  <a:close/>
-                </a:path>
-              </a:pathLst>
-            </a:custGeom>
-            <a:noFill/>
-            <a:ln w="9525" cap="flat" cmpd="sng">
-              <a:solidFill>
-                <a:srgbClr val="445D73"/>
-              </a:solidFill>
-              <a:prstDash val="solid"/>
-              <a:round/>
-              <a:headEnd type="none" w="sm" len="sm"/>
-              <a:tailEnd type="none" w="sm" len="sm"/>
-            </a:ln>
-          </p:spPr>
-          <p:txBody>
-            <a:bodyPr spcFirstLastPara="1" wrap="square" lIns="91425" tIns="91425" rIns="91425" bIns="91425" anchor="ctr" anchorCtr="0">
-              <a:noAutofit/>
-            </a:bodyPr>
-            <a:lstStyle/>
-            <a:p>
-              <a:pPr marL="0" lvl="0" indent="0" algn="l" rtl="0">
-                <a:spcBef>
-                  <a:spcPts val="0"/>
-                </a:spcBef>
-                <a:spcAft>
-                  <a:spcPts val="0"/>
-                </a:spcAft>
-                <a:buNone/>
-              </a:pPr>
-              <a:endParaRPr/>
-            </a:p>
-          </p:txBody>
-        </p:sp>
-        <p:sp>
-          <p:nvSpPr>
-            <p:cNvPr id="247" name="Google Shape;9768;p77">
-              <a:extLst>
-                <a:ext uri="{FF2B5EF4-FFF2-40B4-BE49-F238E27FC236}">
-                  <a16:creationId xmlns:a16="http://schemas.microsoft.com/office/drawing/2014/main" id="{379EFC38-48F1-1182-C2FB-094B65168FF1}"/>
-                </a:ext>
-              </a:extLst>
-            </p:cNvPr>
-            <p:cNvSpPr/>
-            <p:nvPr/>
-          </p:nvSpPr>
-          <p:spPr>
-            <a:xfrm>
-              <a:off x="4557499" y="1656607"/>
-              <a:ext cx="306674" cy="306648"/>
-            </a:xfrm>
-            <a:custGeom>
-              <a:avLst/>
-              <a:gdLst/>
-              <a:ahLst/>
-              <a:cxnLst/>
-              <a:rect l="l" t="t" r="r" b="b"/>
-              <a:pathLst>
-                <a:path w="24034" h="24032" extrusionOk="0">
-                  <a:moveTo>
-                    <a:pt x="12017" y="4775"/>
-                  </a:moveTo>
-                  <a:cubicBezTo>
-                    <a:pt x="16016" y="4775"/>
-                    <a:pt x="19258" y="8018"/>
-                    <a:pt x="19258" y="12017"/>
-                  </a:cubicBezTo>
-                  <a:cubicBezTo>
-                    <a:pt x="19258" y="16015"/>
-                    <a:pt x="16016" y="19256"/>
-                    <a:pt x="12019" y="19256"/>
-                  </a:cubicBezTo>
-                  <a:lnTo>
-                    <a:pt x="12017" y="19256"/>
-                  </a:lnTo>
-                  <a:cubicBezTo>
-                    <a:pt x="8019" y="19256"/>
-                    <a:pt x="4778" y="16015"/>
-                    <a:pt x="4778" y="12017"/>
-                  </a:cubicBezTo>
-                  <a:cubicBezTo>
-                    <a:pt x="4778" y="8018"/>
-                    <a:pt x="8019" y="4775"/>
-                    <a:pt x="12017" y="4775"/>
-                  </a:cubicBezTo>
-                  <a:close/>
-                  <a:moveTo>
-                    <a:pt x="10336" y="0"/>
-                  </a:moveTo>
-                  <a:cubicBezTo>
-                    <a:pt x="9932" y="0"/>
-                    <a:pt x="9604" y="327"/>
-                    <a:pt x="9604" y="732"/>
-                  </a:cubicBezTo>
-                  <a:lnTo>
-                    <a:pt x="9604" y="2689"/>
-                  </a:lnTo>
-                  <a:cubicBezTo>
-                    <a:pt x="8734" y="2913"/>
-                    <a:pt x="7902" y="3259"/>
-                    <a:pt x="7128" y="3714"/>
-                  </a:cubicBezTo>
-                  <a:lnTo>
-                    <a:pt x="5745" y="2330"/>
-                  </a:lnTo>
-                  <a:cubicBezTo>
-                    <a:pt x="5602" y="2187"/>
-                    <a:pt x="5415" y="2115"/>
-                    <a:pt x="5228" y="2115"/>
-                  </a:cubicBezTo>
-                  <a:cubicBezTo>
-                    <a:pt x="5040" y="2115"/>
-                    <a:pt x="4853" y="2187"/>
-                    <a:pt x="4710" y="2330"/>
-                  </a:cubicBezTo>
-                  <a:lnTo>
-                    <a:pt x="2332" y="4708"/>
-                  </a:lnTo>
-                  <a:cubicBezTo>
-                    <a:pt x="2046" y="4995"/>
-                    <a:pt x="2046" y="5457"/>
-                    <a:pt x="2332" y="5744"/>
-                  </a:cubicBezTo>
-                  <a:lnTo>
-                    <a:pt x="3716" y="7128"/>
-                  </a:lnTo>
-                  <a:cubicBezTo>
-                    <a:pt x="3260" y="7900"/>
-                    <a:pt x="2915" y="8734"/>
-                    <a:pt x="2691" y="9602"/>
-                  </a:cubicBezTo>
-                  <a:lnTo>
-                    <a:pt x="734" y="9602"/>
-                  </a:lnTo>
-                  <a:cubicBezTo>
-                    <a:pt x="329" y="9602"/>
-                    <a:pt x="1" y="9930"/>
-                    <a:pt x="1" y="10335"/>
-                  </a:cubicBezTo>
-                  <a:lnTo>
-                    <a:pt x="1" y="13698"/>
-                  </a:lnTo>
-                  <a:cubicBezTo>
-                    <a:pt x="1" y="14101"/>
-                    <a:pt x="329" y="14430"/>
-                    <a:pt x="734" y="14430"/>
-                  </a:cubicBezTo>
-                  <a:lnTo>
-                    <a:pt x="2691" y="14430"/>
-                  </a:lnTo>
-                  <a:cubicBezTo>
-                    <a:pt x="2915" y="15298"/>
-                    <a:pt x="3260" y="16132"/>
-                    <a:pt x="3716" y="16904"/>
-                  </a:cubicBezTo>
-                  <a:lnTo>
-                    <a:pt x="2332" y="18289"/>
-                  </a:lnTo>
-                  <a:cubicBezTo>
-                    <a:pt x="2046" y="18574"/>
-                    <a:pt x="2046" y="19038"/>
-                    <a:pt x="2332" y="19323"/>
-                  </a:cubicBezTo>
-                  <a:lnTo>
-                    <a:pt x="4710" y="21701"/>
-                  </a:lnTo>
-                  <a:cubicBezTo>
-                    <a:pt x="4853" y="21845"/>
-                    <a:pt x="5040" y="21916"/>
-                    <a:pt x="5228" y="21916"/>
-                  </a:cubicBezTo>
-                  <a:cubicBezTo>
-                    <a:pt x="5415" y="21916"/>
-                    <a:pt x="5602" y="21845"/>
-                    <a:pt x="5745" y="21701"/>
-                  </a:cubicBezTo>
-                  <a:lnTo>
-                    <a:pt x="7128" y="20318"/>
-                  </a:lnTo>
-                  <a:cubicBezTo>
-                    <a:pt x="7902" y="20774"/>
-                    <a:pt x="8736" y="21118"/>
-                    <a:pt x="9604" y="21343"/>
-                  </a:cubicBezTo>
-                  <a:lnTo>
-                    <a:pt x="9604" y="23299"/>
-                  </a:lnTo>
-                  <a:cubicBezTo>
-                    <a:pt x="9604" y="23705"/>
-                    <a:pt x="9932" y="24031"/>
-                    <a:pt x="10336" y="24031"/>
-                  </a:cubicBezTo>
-                  <a:lnTo>
-                    <a:pt x="13699" y="24031"/>
-                  </a:lnTo>
-                  <a:cubicBezTo>
-                    <a:pt x="14104" y="24031"/>
-                    <a:pt x="14432" y="23705"/>
-                    <a:pt x="14432" y="23299"/>
-                  </a:cubicBezTo>
-                  <a:lnTo>
-                    <a:pt x="14432" y="21343"/>
-                  </a:lnTo>
-                  <a:cubicBezTo>
-                    <a:pt x="15300" y="21118"/>
-                    <a:pt x="16134" y="20773"/>
-                    <a:pt x="16906" y="20318"/>
-                  </a:cubicBezTo>
-                  <a:lnTo>
-                    <a:pt x="18290" y="21701"/>
-                  </a:lnTo>
-                  <a:cubicBezTo>
-                    <a:pt x="18433" y="21844"/>
-                    <a:pt x="18620" y="21915"/>
-                    <a:pt x="18808" y="21915"/>
-                  </a:cubicBezTo>
-                  <a:cubicBezTo>
-                    <a:pt x="18995" y="21915"/>
-                    <a:pt x="19182" y="21844"/>
-                    <a:pt x="19326" y="21701"/>
-                  </a:cubicBezTo>
-                  <a:lnTo>
-                    <a:pt x="21704" y="19323"/>
-                  </a:lnTo>
-                  <a:cubicBezTo>
-                    <a:pt x="21989" y="19037"/>
-                    <a:pt x="21989" y="18574"/>
-                    <a:pt x="21704" y="18287"/>
-                  </a:cubicBezTo>
-                  <a:lnTo>
-                    <a:pt x="20320" y="16904"/>
-                  </a:lnTo>
-                  <a:cubicBezTo>
-                    <a:pt x="20775" y="16130"/>
-                    <a:pt x="21121" y="15298"/>
-                    <a:pt x="21345" y="14430"/>
-                  </a:cubicBezTo>
-                  <a:lnTo>
-                    <a:pt x="23302" y="14430"/>
-                  </a:lnTo>
-                  <a:cubicBezTo>
-                    <a:pt x="23705" y="14430"/>
-                    <a:pt x="24034" y="14101"/>
-                    <a:pt x="24034" y="13696"/>
-                  </a:cubicBezTo>
-                  <a:lnTo>
-                    <a:pt x="24034" y="10334"/>
-                  </a:lnTo>
-                  <a:cubicBezTo>
-                    <a:pt x="24034" y="9930"/>
-                    <a:pt x="23705" y="9602"/>
-                    <a:pt x="23302" y="9602"/>
-                  </a:cubicBezTo>
-                  <a:lnTo>
-                    <a:pt x="21343" y="9602"/>
-                  </a:lnTo>
-                  <a:cubicBezTo>
-                    <a:pt x="21121" y="8734"/>
-                    <a:pt x="20775" y="7900"/>
-                    <a:pt x="20320" y="7128"/>
-                  </a:cubicBezTo>
-                  <a:lnTo>
-                    <a:pt x="21704" y="5744"/>
-                  </a:lnTo>
-                  <a:cubicBezTo>
-                    <a:pt x="21989" y="5457"/>
-                    <a:pt x="21989" y="4995"/>
-                    <a:pt x="21704" y="4708"/>
-                  </a:cubicBezTo>
-                  <a:lnTo>
-                    <a:pt x="19326" y="2330"/>
-                  </a:lnTo>
-                  <a:cubicBezTo>
-                    <a:pt x="19182" y="2187"/>
-                    <a:pt x="18995" y="2115"/>
-                    <a:pt x="18808" y="2115"/>
-                  </a:cubicBezTo>
-                  <a:cubicBezTo>
-                    <a:pt x="18620" y="2115"/>
-                    <a:pt x="18433" y="2187"/>
-                    <a:pt x="18290" y="2330"/>
-                  </a:cubicBezTo>
-                  <a:lnTo>
-                    <a:pt x="16906" y="3714"/>
-                  </a:lnTo>
-                  <a:cubicBezTo>
-                    <a:pt x="16133" y="3259"/>
-                    <a:pt x="15300" y="2913"/>
-                    <a:pt x="14430" y="2689"/>
-                  </a:cubicBezTo>
-                  <a:lnTo>
-                    <a:pt x="14430" y="732"/>
-                  </a:lnTo>
-                  <a:cubicBezTo>
-                    <a:pt x="14430" y="327"/>
-                    <a:pt x="14104" y="0"/>
-                    <a:pt x="13699" y="0"/>
-                  </a:cubicBezTo>
-                  <a:close/>
-                </a:path>
-              </a:pathLst>
-            </a:custGeom>
-            <a:noFill/>
-            <a:ln w="9525" cap="flat" cmpd="sng">
-              <a:solidFill>
-                <a:srgbClr val="869FB2"/>
-              </a:solidFill>
-              <a:prstDash val="solid"/>
-              <a:round/>
-              <a:headEnd type="none" w="sm" len="sm"/>
-              <a:tailEnd type="none" w="sm" len="sm"/>
-            </a:ln>
-          </p:spPr>
-          <p:txBody>
-            <a:bodyPr spcFirstLastPara="1" wrap="square" lIns="91425" tIns="91425" rIns="91425" bIns="91425" anchor="ctr" anchorCtr="0">
-              <a:noAutofit/>
-            </a:bodyPr>
-            <a:lstStyle/>
-            <a:p>
-              <a:pPr marL="0" lvl="0" indent="0" algn="l" rtl="0">
-                <a:spcBef>
-                  <a:spcPts val="0"/>
-                </a:spcBef>
-                <a:spcAft>
-                  <a:spcPts val="0"/>
-                </a:spcAft>
-                <a:buNone/>
-              </a:pPr>
-              <a:endParaRPr/>
-            </a:p>
-          </p:txBody>
-        </p:sp>
-        <p:sp>
-          <p:nvSpPr>
-            <p:cNvPr id="248" name="Google Shape;9769;p77">
-              <a:extLst>
-                <a:ext uri="{FF2B5EF4-FFF2-40B4-BE49-F238E27FC236}">
-                  <a16:creationId xmlns:a16="http://schemas.microsoft.com/office/drawing/2014/main" id="{26FFB6EA-2DB5-E278-91EB-D443D996C75B}"/>
-                </a:ext>
-              </a:extLst>
-            </p:cNvPr>
-            <p:cNvSpPr/>
-            <p:nvPr/>
-          </p:nvSpPr>
-          <p:spPr>
-            <a:xfrm>
-              <a:off x="4251067" y="1523035"/>
-              <a:ext cx="327536" cy="325023"/>
-            </a:xfrm>
-            <a:custGeom>
-              <a:avLst/>
-              <a:gdLst/>
-              <a:ahLst/>
-              <a:cxnLst/>
-              <a:rect l="l" t="t" r="r" b="b"/>
-              <a:pathLst>
-                <a:path w="25669" h="25472" extrusionOk="0">
-                  <a:moveTo>
-                    <a:pt x="12840" y="5002"/>
-                  </a:moveTo>
-                  <a:cubicBezTo>
-                    <a:pt x="13949" y="5002"/>
-                    <a:pt x="15075" y="5242"/>
-                    <a:pt x="16144" y="5747"/>
-                  </a:cubicBezTo>
-                  <a:cubicBezTo>
-                    <a:pt x="20003" y="7575"/>
-                    <a:pt x="21651" y="12185"/>
-                    <a:pt x="19822" y="16044"/>
-                  </a:cubicBezTo>
-                  <a:cubicBezTo>
-                    <a:pt x="18501" y="18836"/>
-                    <a:pt x="15726" y="20470"/>
-                    <a:pt x="12830" y="20470"/>
-                  </a:cubicBezTo>
-                  <a:cubicBezTo>
-                    <a:pt x="11721" y="20470"/>
-                    <a:pt x="10595" y="20230"/>
-                    <a:pt x="9525" y="19724"/>
-                  </a:cubicBezTo>
-                  <a:cubicBezTo>
-                    <a:pt x="5666" y="17897"/>
-                    <a:pt x="4018" y="13286"/>
-                    <a:pt x="5845" y="9427"/>
-                  </a:cubicBezTo>
-                  <a:cubicBezTo>
-                    <a:pt x="7167" y="6636"/>
-                    <a:pt x="9944" y="5002"/>
-                    <a:pt x="12840" y="5002"/>
-                  </a:cubicBezTo>
-                  <a:close/>
-                  <a:moveTo>
-                    <a:pt x="10471" y="1"/>
-                  </a:moveTo>
-                  <a:cubicBezTo>
-                    <a:pt x="10383" y="1"/>
-                    <a:pt x="10294" y="16"/>
-                    <a:pt x="10208" y="47"/>
-                  </a:cubicBezTo>
-                  <a:lnTo>
-                    <a:pt x="6824" y="1256"/>
-                  </a:lnTo>
-                  <a:cubicBezTo>
-                    <a:pt x="6417" y="1401"/>
-                    <a:pt x="6206" y="1848"/>
-                    <a:pt x="6351" y="2255"/>
-                  </a:cubicBezTo>
-                  <a:lnTo>
-                    <a:pt x="7054" y="4223"/>
-                  </a:lnTo>
-                  <a:cubicBezTo>
-                    <a:pt x="6262" y="4761"/>
-                    <a:pt x="5548" y="5408"/>
-                    <a:pt x="4934" y="6145"/>
-                  </a:cubicBezTo>
-                  <a:lnTo>
-                    <a:pt x="3045" y="5249"/>
-                  </a:lnTo>
-                  <a:cubicBezTo>
-                    <a:pt x="2937" y="5199"/>
-                    <a:pt x="2823" y="5174"/>
-                    <a:pt x="2711" y="5174"/>
-                  </a:cubicBezTo>
-                  <a:cubicBezTo>
-                    <a:pt x="2418" y="5174"/>
-                    <a:pt x="2137" y="5340"/>
-                    <a:pt x="2004" y="5623"/>
-                  </a:cubicBezTo>
-                  <a:lnTo>
-                    <a:pt x="467" y="8868"/>
-                  </a:lnTo>
-                  <a:cubicBezTo>
-                    <a:pt x="282" y="9259"/>
-                    <a:pt x="449" y="9725"/>
-                    <a:pt x="840" y="9909"/>
-                  </a:cubicBezTo>
-                  <a:lnTo>
-                    <a:pt x="2729" y="10804"/>
-                  </a:lnTo>
-                  <a:cubicBezTo>
-                    <a:pt x="2548" y="11744"/>
-                    <a:pt x="2500" y="12707"/>
-                    <a:pt x="2587" y="13661"/>
-                  </a:cubicBezTo>
-                  <a:lnTo>
-                    <a:pt x="619" y="14364"/>
-                  </a:lnTo>
-                  <a:cubicBezTo>
-                    <a:pt x="212" y="14510"/>
-                    <a:pt x="1" y="14957"/>
-                    <a:pt x="145" y="15363"/>
-                  </a:cubicBezTo>
-                  <a:lnTo>
-                    <a:pt x="1354" y="18747"/>
-                  </a:lnTo>
-                  <a:cubicBezTo>
-                    <a:pt x="1467" y="19067"/>
-                    <a:pt x="1768" y="19265"/>
-                    <a:pt x="2089" y="19265"/>
-                  </a:cubicBezTo>
-                  <a:cubicBezTo>
-                    <a:pt x="2177" y="19265"/>
-                    <a:pt x="2266" y="19251"/>
-                    <a:pt x="2353" y="19219"/>
-                  </a:cubicBezTo>
-                  <a:lnTo>
-                    <a:pt x="4321" y="18516"/>
-                  </a:lnTo>
-                  <a:cubicBezTo>
-                    <a:pt x="4859" y="19309"/>
-                    <a:pt x="5506" y="20023"/>
-                    <a:pt x="6243" y="20637"/>
-                  </a:cubicBezTo>
-                  <a:lnTo>
-                    <a:pt x="5347" y="22526"/>
-                  </a:lnTo>
-                  <a:cubicBezTo>
-                    <a:pt x="5163" y="22917"/>
-                    <a:pt x="5330" y="23383"/>
-                    <a:pt x="5721" y="23567"/>
-                  </a:cubicBezTo>
-                  <a:lnTo>
-                    <a:pt x="8966" y="25104"/>
-                  </a:lnTo>
-                  <a:cubicBezTo>
-                    <a:pt x="9074" y="25155"/>
-                    <a:pt x="9188" y="25179"/>
-                    <a:pt x="9300" y="25179"/>
-                  </a:cubicBezTo>
-                  <a:cubicBezTo>
-                    <a:pt x="9593" y="25179"/>
-                    <a:pt x="9874" y="25014"/>
-                    <a:pt x="10007" y="24731"/>
-                  </a:cubicBezTo>
-                  <a:lnTo>
-                    <a:pt x="10902" y="22842"/>
-                  </a:lnTo>
-                  <a:cubicBezTo>
-                    <a:pt x="11540" y="22964"/>
-                    <a:pt x="12187" y="23026"/>
-                    <a:pt x="12836" y="23026"/>
-                  </a:cubicBezTo>
-                  <a:cubicBezTo>
-                    <a:pt x="13144" y="23026"/>
-                    <a:pt x="13452" y="23012"/>
-                    <a:pt x="13759" y="22984"/>
-                  </a:cubicBezTo>
-                  <a:lnTo>
-                    <a:pt x="14462" y="24952"/>
-                  </a:lnTo>
-                  <a:cubicBezTo>
-                    <a:pt x="14577" y="25272"/>
-                    <a:pt x="14878" y="25471"/>
-                    <a:pt x="15200" y="25471"/>
-                  </a:cubicBezTo>
-                  <a:cubicBezTo>
-                    <a:pt x="15286" y="25471"/>
-                    <a:pt x="15375" y="25457"/>
-                    <a:pt x="15461" y="25426"/>
-                  </a:cubicBezTo>
-                  <a:lnTo>
-                    <a:pt x="18845" y="24217"/>
-                  </a:lnTo>
-                  <a:cubicBezTo>
-                    <a:pt x="19252" y="24071"/>
-                    <a:pt x="19463" y="23625"/>
-                    <a:pt x="19318" y="23218"/>
-                  </a:cubicBezTo>
-                  <a:lnTo>
-                    <a:pt x="18615" y="21250"/>
-                  </a:lnTo>
-                  <a:cubicBezTo>
-                    <a:pt x="19407" y="20712"/>
-                    <a:pt x="20121" y="20065"/>
-                    <a:pt x="20735" y="19328"/>
-                  </a:cubicBezTo>
-                  <a:lnTo>
-                    <a:pt x="22624" y="20223"/>
-                  </a:lnTo>
-                  <a:cubicBezTo>
-                    <a:pt x="22732" y="20274"/>
-                    <a:pt x="22846" y="20298"/>
-                    <a:pt x="22958" y="20298"/>
-                  </a:cubicBezTo>
-                  <a:cubicBezTo>
-                    <a:pt x="23251" y="20298"/>
-                    <a:pt x="23532" y="20133"/>
-                    <a:pt x="23665" y="19850"/>
-                  </a:cubicBezTo>
-                  <a:lnTo>
-                    <a:pt x="25202" y="16604"/>
-                  </a:lnTo>
-                  <a:cubicBezTo>
-                    <a:pt x="25387" y="16214"/>
-                    <a:pt x="25220" y="15748"/>
-                    <a:pt x="24829" y="15564"/>
-                  </a:cubicBezTo>
-                  <a:lnTo>
-                    <a:pt x="22940" y="14668"/>
-                  </a:lnTo>
-                  <a:cubicBezTo>
-                    <a:pt x="23121" y="13727"/>
-                    <a:pt x="23169" y="12766"/>
-                    <a:pt x="23082" y="11812"/>
-                  </a:cubicBezTo>
-                  <a:lnTo>
-                    <a:pt x="25050" y="11107"/>
-                  </a:lnTo>
-                  <a:cubicBezTo>
-                    <a:pt x="25457" y="10963"/>
-                    <a:pt x="25668" y="10515"/>
-                    <a:pt x="25523" y="10108"/>
-                  </a:cubicBezTo>
-                  <a:lnTo>
-                    <a:pt x="24315" y="6726"/>
-                  </a:lnTo>
-                  <a:cubicBezTo>
-                    <a:pt x="24201" y="6406"/>
-                    <a:pt x="23898" y="6207"/>
-                    <a:pt x="23577" y="6207"/>
-                  </a:cubicBezTo>
-                  <a:cubicBezTo>
-                    <a:pt x="23491" y="6207"/>
-                    <a:pt x="23402" y="6221"/>
-                    <a:pt x="23316" y="6252"/>
-                  </a:cubicBezTo>
-                  <a:lnTo>
-                    <a:pt x="21348" y="6956"/>
-                  </a:lnTo>
-                  <a:cubicBezTo>
-                    <a:pt x="20810" y="6162"/>
-                    <a:pt x="20163" y="5450"/>
-                    <a:pt x="19426" y="4836"/>
-                  </a:cubicBezTo>
-                  <a:lnTo>
-                    <a:pt x="20320" y="2947"/>
-                  </a:lnTo>
-                  <a:cubicBezTo>
-                    <a:pt x="20506" y="2556"/>
-                    <a:pt x="20339" y="2090"/>
-                    <a:pt x="19948" y="1906"/>
-                  </a:cubicBezTo>
-                  <a:lnTo>
-                    <a:pt x="16703" y="369"/>
-                  </a:lnTo>
-                  <a:cubicBezTo>
-                    <a:pt x="16595" y="318"/>
-                    <a:pt x="16481" y="294"/>
-                    <a:pt x="16369" y="294"/>
-                  </a:cubicBezTo>
-                  <a:cubicBezTo>
-                    <a:pt x="16076" y="294"/>
-                    <a:pt x="15795" y="459"/>
-                    <a:pt x="15662" y="742"/>
-                  </a:cubicBezTo>
-                  <a:lnTo>
-                    <a:pt x="14767" y="2631"/>
-                  </a:lnTo>
-                  <a:cubicBezTo>
-                    <a:pt x="14130" y="2508"/>
-                    <a:pt x="13485" y="2447"/>
-                    <a:pt x="12839" y="2447"/>
-                  </a:cubicBezTo>
-                  <a:cubicBezTo>
-                    <a:pt x="12529" y="2447"/>
-                    <a:pt x="12219" y="2461"/>
-                    <a:pt x="11910" y="2489"/>
-                  </a:cubicBezTo>
-                  <a:lnTo>
-                    <a:pt x="11207" y="521"/>
-                  </a:lnTo>
-                  <a:cubicBezTo>
-                    <a:pt x="11092" y="200"/>
-                    <a:pt x="10791" y="1"/>
-                    <a:pt x="10471" y="1"/>
-                  </a:cubicBezTo>
-                  <a:close/>
-                </a:path>
-              </a:pathLst>
-            </a:custGeom>
-            <a:noFill/>
-            <a:ln w="9525" cap="flat" cmpd="sng">
-              <a:solidFill>
-                <a:srgbClr val="E3E9ED"/>
-              </a:solidFill>
-              <a:prstDash val="solid"/>
-              <a:round/>
-              <a:headEnd type="none" w="sm" len="sm"/>
-              <a:tailEnd type="none" w="sm" len="sm"/>
-            </a:ln>
-          </p:spPr>
-          <p:txBody>
-            <a:bodyPr spcFirstLastPara="1" wrap="square" lIns="91425" tIns="91425" rIns="91425" bIns="91425" anchor="ctr" anchorCtr="0">
-              <a:noAutofit/>
-            </a:bodyPr>
-            <a:lstStyle/>
-            <a:p>
-              <a:pPr marL="0" lvl="0" indent="0" algn="l" rtl="0">
-                <a:spcBef>
-                  <a:spcPts val="0"/>
-                </a:spcBef>
-                <a:spcAft>
-                  <a:spcPts val="0"/>
-                </a:spcAft>
-                <a:buNone/>
-              </a:pPr>
-              <a:endParaRPr/>
-            </a:p>
-          </p:txBody>
-        </p:sp>
-        <p:sp>
-          <p:nvSpPr>
-            <p:cNvPr id="249" name="Google Shape;9770;p77">
-              <a:extLst>
-                <a:ext uri="{FF2B5EF4-FFF2-40B4-BE49-F238E27FC236}">
-                  <a16:creationId xmlns:a16="http://schemas.microsoft.com/office/drawing/2014/main" id="{ABD9B535-4E71-A2DA-0EF6-2903536CAB80}"/>
-                </a:ext>
-              </a:extLst>
-            </p:cNvPr>
-            <p:cNvSpPr/>
-            <p:nvPr/>
-          </p:nvSpPr>
-          <p:spPr>
-            <a:xfrm>
-              <a:off x="4277366" y="1220917"/>
-              <a:ext cx="292242" cy="292217"/>
-            </a:xfrm>
-            <a:custGeom>
-              <a:avLst/>
-              <a:gdLst/>
-              <a:ahLst/>
-              <a:cxnLst/>
-              <a:rect l="l" t="t" r="r" b="b"/>
-              <a:pathLst>
-                <a:path w="22903" h="22901" extrusionOk="0">
-                  <a:moveTo>
-                    <a:pt x="11452" y="4551"/>
-                  </a:moveTo>
-                  <a:cubicBezTo>
-                    <a:pt x="15263" y="4551"/>
-                    <a:pt x="18352" y="7640"/>
-                    <a:pt x="18352" y="11451"/>
-                  </a:cubicBezTo>
-                  <a:cubicBezTo>
-                    <a:pt x="18352" y="15262"/>
-                    <a:pt x="15263" y="18350"/>
-                    <a:pt x="11452" y="18350"/>
-                  </a:cubicBezTo>
-                  <a:lnTo>
-                    <a:pt x="11452" y="18351"/>
-                  </a:lnTo>
-                  <a:cubicBezTo>
-                    <a:pt x="7640" y="18351"/>
-                    <a:pt x="4552" y="15262"/>
-                    <a:pt x="4552" y="11451"/>
-                  </a:cubicBezTo>
-                  <a:cubicBezTo>
-                    <a:pt x="4552" y="7640"/>
-                    <a:pt x="7640" y="4551"/>
-                    <a:pt x="11452" y="4551"/>
-                  </a:cubicBezTo>
-                  <a:close/>
-                  <a:moveTo>
-                    <a:pt x="9850" y="0"/>
-                  </a:moveTo>
-                  <a:cubicBezTo>
-                    <a:pt x="9464" y="0"/>
-                    <a:pt x="9152" y="312"/>
-                    <a:pt x="9152" y="698"/>
-                  </a:cubicBezTo>
-                  <a:lnTo>
-                    <a:pt x="9152" y="2564"/>
-                  </a:lnTo>
-                  <a:cubicBezTo>
-                    <a:pt x="8324" y="2777"/>
-                    <a:pt x="7530" y="3105"/>
-                    <a:pt x="6793" y="3539"/>
-                  </a:cubicBezTo>
-                  <a:lnTo>
-                    <a:pt x="5474" y="2221"/>
-                  </a:lnTo>
-                  <a:cubicBezTo>
-                    <a:pt x="5338" y="2085"/>
-                    <a:pt x="5159" y="2017"/>
-                    <a:pt x="4981" y="2017"/>
-                  </a:cubicBezTo>
-                  <a:cubicBezTo>
-                    <a:pt x="4802" y="2017"/>
-                    <a:pt x="4624" y="2085"/>
-                    <a:pt x="4487" y="2221"/>
-                  </a:cubicBezTo>
-                  <a:lnTo>
-                    <a:pt x="2222" y="4487"/>
-                  </a:lnTo>
-                  <a:cubicBezTo>
-                    <a:pt x="1949" y="4759"/>
-                    <a:pt x="1949" y="5201"/>
-                    <a:pt x="2222" y="5473"/>
-                  </a:cubicBezTo>
-                  <a:lnTo>
-                    <a:pt x="3541" y="6791"/>
-                  </a:lnTo>
-                  <a:cubicBezTo>
-                    <a:pt x="3107" y="7528"/>
-                    <a:pt x="2777" y="8322"/>
-                    <a:pt x="2564" y="9150"/>
-                  </a:cubicBezTo>
-                  <a:lnTo>
-                    <a:pt x="699" y="9150"/>
-                  </a:lnTo>
-                  <a:cubicBezTo>
-                    <a:pt x="313" y="9150"/>
-                    <a:pt x="1" y="9462"/>
-                    <a:pt x="1" y="9848"/>
-                  </a:cubicBezTo>
-                  <a:lnTo>
-                    <a:pt x="1" y="13053"/>
-                  </a:lnTo>
-                  <a:cubicBezTo>
-                    <a:pt x="1" y="13438"/>
-                    <a:pt x="313" y="13751"/>
-                    <a:pt x="699" y="13751"/>
-                  </a:cubicBezTo>
-                  <a:lnTo>
-                    <a:pt x="2564" y="13751"/>
-                  </a:lnTo>
-                  <a:cubicBezTo>
-                    <a:pt x="2777" y="14579"/>
-                    <a:pt x="3106" y="15373"/>
-                    <a:pt x="3541" y="16109"/>
-                  </a:cubicBezTo>
-                  <a:lnTo>
-                    <a:pt x="2222" y="17427"/>
-                  </a:lnTo>
-                  <a:cubicBezTo>
-                    <a:pt x="1949" y="17701"/>
-                    <a:pt x="1949" y="18142"/>
-                    <a:pt x="2222" y="18415"/>
-                  </a:cubicBezTo>
-                  <a:lnTo>
-                    <a:pt x="4487" y="20681"/>
-                  </a:lnTo>
-                  <a:cubicBezTo>
-                    <a:pt x="4624" y="20817"/>
-                    <a:pt x="4802" y="20885"/>
-                    <a:pt x="4981" y="20885"/>
-                  </a:cubicBezTo>
-                  <a:cubicBezTo>
-                    <a:pt x="5159" y="20885"/>
-                    <a:pt x="5338" y="20817"/>
-                    <a:pt x="5474" y="20681"/>
-                  </a:cubicBezTo>
-                  <a:lnTo>
-                    <a:pt x="6793" y="19362"/>
-                  </a:lnTo>
-                  <a:cubicBezTo>
-                    <a:pt x="7530" y="19796"/>
-                    <a:pt x="8324" y="20124"/>
-                    <a:pt x="9152" y="20339"/>
-                  </a:cubicBezTo>
-                  <a:lnTo>
-                    <a:pt x="9152" y="22204"/>
-                  </a:lnTo>
-                  <a:cubicBezTo>
-                    <a:pt x="9152" y="22588"/>
-                    <a:pt x="9464" y="22901"/>
-                    <a:pt x="9850" y="22901"/>
-                  </a:cubicBezTo>
-                  <a:lnTo>
-                    <a:pt x="13055" y="22901"/>
-                  </a:lnTo>
-                  <a:cubicBezTo>
-                    <a:pt x="13439" y="22901"/>
-                    <a:pt x="13751" y="22588"/>
-                    <a:pt x="13751" y="22204"/>
-                  </a:cubicBezTo>
-                  <a:lnTo>
-                    <a:pt x="13751" y="20339"/>
-                  </a:lnTo>
-                  <a:cubicBezTo>
-                    <a:pt x="14581" y="20124"/>
-                    <a:pt x="15373" y="19796"/>
-                    <a:pt x="16110" y="19362"/>
-                  </a:cubicBezTo>
-                  <a:lnTo>
-                    <a:pt x="17429" y="20680"/>
-                  </a:lnTo>
-                  <a:cubicBezTo>
-                    <a:pt x="17566" y="20816"/>
-                    <a:pt x="17744" y="20884"/>
-                    <a:pt x="17923" y="20884"/>
-                  </a:cubicBezTo>
-                  <a:cubicBezTo>
-                    <a:pt x="18101" y="20884"/>
-                    <a:pt x="18280" y="20816"/>
-                    <a:pt x="18416" y="20680"/>
-                  </a:cubicBezTo>
-                  <a:lnTo>
-                    <a:pt x="20682" y="18414"/>
-                  </a:lnTo>
-                  <a:cubicBezTo>
-                    <a:pt x="20954" y="18142"/>
-                    <a:pt x="20954" y="17700"/>
-                    <a:pt x="20682" y="17427"/>
-                  </a:cubicBezTo>
-                  <a:lnTo>
-                    <a:pt x="19364" y="16109"/>
-                  </a:lnTo>
-                  <a:cubicBezTo>
-                    <a:pt x="19798" y="15373"/>
-                    <a:pt x="20126" y="14579"/>
-                    <a:pt x="20339" y="13751"/>
-                  </a:cubicBezTo>
-                  <a:lnTo>
-                    <a:pt x="22205" y="13751"/>
-                  </a:lnTo>
-                  <a:cubicBezTo>
-                    <a:pt x="22591" y="13751"/>
-                    <a:pt x="22903" y="13438"/>
-                    <a:pt x="22903" y="13053"/>
-                  </a:cubicBezTo>
-                  <a:lnTo>
-                    <a:pt x="22903" y="9850"/>
-                  </a:lnTo>
-                  <a:cubicBezTo>
-                    <a:pt x="22903" y="9465"/>
-                    <a:pt x="22592" y="9152"/>
-                    <a:pt x="22208" y="9152"/>
-                  </a:cubicBezTo>
-                  <a:cubicBezTo>
-                    <a:pt x="22207" y="9152"/>
-                    <a:pt x="22206" y="9152"/>
-                    <a:pt x="22205" y="9152"/>
-                  </a:cubicBezTo>
-                  <a:lnTo>
-                    <a:pt x="20339" y="9152"/>
-                  </a:lnTo>
-                  <a:cubicBezTo>
-                    <a:pt x="20126" y="8322"/>
-                    <a:pt x="19798" y="7530"/>
-                    <a:pt x="19364" y="6793"/>
-                  </a:cubicBezTo>
-                  <a:lnTo>
-                    <a:pt x="20682" y="5473"/>
-                  </a:lnTo>
-                  <a:cubicBezTo>
-                    <a:pt x="20954" y="5201"/>
-                    <a:pt x="20954" y="4759"/>
-                    <a:pt x="20682" y="4487"/>
-                  </a:cubicBezTo>
-                  <a:lnTo>
-                    <a:pt x="18416" y="2221"/>
-                  </a:lnTo>
-                  <a:cubicBezTo>
-                    <a:pt x="18280" y="2085"/>
-                    <a:pt x="18101" y="2017"/>
-                    <a:pt x="17923" y="2017"/>
-                  </a:cubicBezTo>
-                  <a:cubicBezTo>
-                    <a:pt x="17744" y="2017"/>
-                    <a:pt x="17566" y="2085"/>
-                    <a:pt x="17429" y="2221"/>
-                  </a:cubicBezTo>
-                  <a:lnTo>
-                    <a:pt x="16110" y="3541"/>
-                  </a:lnTo>
-                  <a:cubicBezTo>
-                    <a:pt x="15373" y="3105"/>
-                    <a:pt x="14581" y="2777"/>
-                    <a:pt x="13751" y="2564"/>
-                  </a:cubicBezTo>
-                  <a:lnTo>
-                    <a:pt x="13751" y="698"/>
-                  </a:lnTo>
-                  <a:cubicBezTo>
-                    <a:pt x="13751" y="312"/>
-                    <a:pt x="13439" y="0"/>
-                    <a:pt x="13055" y="0"/>
-                  </a:cubicBezTo>
-                  <a:close/>
-                </a:path>
-              </a:pathLst>
-            </a:custGeom>
-            <a:noFill/>
-            <a:ln w="9525" cap="flat" cmpd="sng">
-              <a:solidFill>
-                <a:srgbClr val="A5B7C5"/>
-              </a:solidFill>
-              <a:prstDash val="solid"/>
-              <a:round/>
-              <a:headEnd type="none" w="sm" len="sm"/>
-              <a:tailEnd type="none" w="sm" len="sm"/>
-            </a:ln>
-          </p:spPr>
-          <p:txBody>
-            <a:bodyPr spcFirstLastPara="1" wrap="square" lIns="91425" tIns="91425" rIns="91425" bIns="91425" anchor="ctr" anchorCtr="0">
-              <a:noAutofit/>
-            </a:bodyPr>
-            <a:lstStyle/>
-            <a:p>
-              <a:pPr marL="0" lvl="0" indent="0" algn="l" rtl="0">
-                <a:spcBef>
-                  <a:spcPts val="0"/>
-                </a:spcBef>
-                <a:spcAft>
-                  <a:spcPts val="0"/>
-                </a:spcAft>
-                <a:buNone/>
-              </a:pPr>
-              <a:endParaRPr/>
-            </a:p>
-          </p:txBody>
-        </p:sp>
-        <p:grpSp>
-          <p:nvGrpSpPr>
-            <p:cNvPr id="250" name="Google Shape;9771;p77">
-              <a:extLst>
-                <a:ext uri="{FF2B5EF4-FFF2-40B4-BE49-F238E27FC236}">
-                  <a16:creationId xmlns:a16="http://schemas.microsoft.com/office/drawing/2014/main" id="{1C387ED3-7CBE-AAAC-F410-71D3B0DFF947}"/>
-                </a:ext>
-              </a:extLst>
-            </p:cNvPr>
-            <p:cNvGrpSpPr/>
-            <p:nvPr/>
-          </p:nvGrpSpPr>
-          <p:grpSpPr>
-            <a:xfrm>
-              <a:off x="4644280" y="1290523"/>
-              <a:ext cx="143716" cy="29463"/>
-              <a:chOff x="4644280" y="1290523"/>
-              <a:chExt cx="143716" cy="29463"/>
-            </a:xfrm>
-          </p:grpSpPr>
-          <p:sp>
-            <p:nvSpPr>
-              <p:cNvPr id="316" name="Google Shape;9772;p77">
-                <a:extLst>
-                  <a:ext uri="{FF2B5EF4-FFF2-40B4-BE49-F238E27FC236}">
-                    <a16:creationId xmlns:a16="http://schemas.microsoft.com/office/drawing/2014/main" id="{146D59A5-D51E-4FE2-9BFA-8F1DC755A938}"/>
-                  </a:ext>
-                </a:extLst>
-              </p:cNvPr>
-              <p:cNvSpPr/>
-              <p:nvPr/>
-            </p:nvSpPr>
-            <p:spPr>
-              <a:xfrm>
-                <a:off x="4736292" y="1294223"/>
-                <a:ext cx="51704" cy="25762"/>
-              </a:xfrm>
-              <a:custGeom>
-                <a:avLst/>
-                <a:gdLst/>
-                <a:ahLst/>
-                <a:cxnLst/>
-                <a:rect l="l" t="t" r="r" b="b"/>
-                <a:pathLst>
-                  <a:path w="4052" h="2019" extrusionOk="0">
-                    <a:moveTo>
-                      <a:pt x="273" y="0"/>
-                    </a:moveTo>
-                    <a:cubicBezTo>
-                      <a:pt x="158" y="0"/>
-                      <a:pt x="53" y="81"/>
-                      <a:pt x="29" y="199"/>
-                    </a:cubicBezTo>
-                    <a:cubicBezTo>
-                      <a:pt x="0" y="339"/>
-                      <a:pt x="87" y="475"/>
-                      <a:pt x="225" y="507"/>
-                    </a:cubicBezTo>
-                    <a:cubicBezTo>
-                      <a:pt x="1077" y="720"/>
-                      <a:pt x="1895" y="1048"/>
-                      <a:pt x="2655" y="1487"/>
-                    </a:cubicBezTo>
-                    <a:lnTo>
-                      <a:pt x="2505" y="1740"/>
-                    </a:lnTo>
-                    <a:cubicBezTo>
-                      <a:pt x="2459" y="1818"/>
-                      <a:pt x="2511" y="1919"/>
-                      <a:pt x="2603" y="1925"/>
-                    </a:cubicBezTo>
-                    <a:lnTo>
-                      <a:pt x="3885" y="2018"/>
-                    </a:lnTo>
-                    <a:cubicBezTo>
-                      <a:pt x="3889" y="2019"/>
-                      <a:pt x="3892" y="2019"/>
-                      <a:pt x="3896" y="2019"/>
-                    </a:cubicBezTo>
-                    <a:cubicBezTo>
-                      <a:pt x="3991" y="2019"/>
-                      <a:pt x="4052" y="1911"/>
-                      <a:pt x="3999" y="1829"/>
-                    </a:cubicBezTo>
-                    <a:lnTo>
-                      <a:pt x="3302" y="747"/>
-                    </a:lnTo>
-                    <a:cubicBezTo>
-                      <a:pt x="3278" y="709"/>
-                      <a:pt x="3238" y="690"/>
-                      <a:pt x="3198" y="690"/>
-                    </a:cubicBezTo>
-                    <a:cubicBezTo>
-                      <a:pt x="3157" y="690"/>
-                      <a:pt x="3116" y="710"/>
-                      <a:pt x="3093" y="750"/>
-                    </a:cubicBezTo>
-                    <a:lnTo>
-                      <a:pt x="2917" y="1048"/>
-                    </a:lnTo>
-                    <a:cubicBezTo>
-                      <a:pt x="2108" y="582"/>
-                      <a:pt x="1237" y="231"/>
-                      <a:pt x="330" y="7"/>
-                    </a:cubicBezTo>
-                    <a:cubicBezTo>
-                      <a:pt x="311" y="3"/>
-                      <a:pt x="292" y="0"/>
-                      <a:pt x="273" y="0"/>
-                    </a:cubicBezTo>
-                    <a:close/>
-                  </a:path>
-                </a:pathLst>
-              </a:custGeom>
-              <a:solidFill>
-                <a:srgbClr val="667E92"/>
-              </a:solidFill>
-              <a:ln>
-                <a:noFill/>
-              </a:ln>
-            </p:spPr>
-            <p:txBody>
-              <a:bodyPr spcFirstLastPara="1" wrap="square" lIns="91425" tIns="91425" rIns="91425" bIns="91425" anchor="ctr" anchorCtr="0">
-                <a:noAutofit/>
-              </a:bodyPr>
-              <a:lstStyle/>
-              <a:p>
-                <a:pPr marL="0" lvl="0" indent="0" algn="l" rtl="0">
-                  <a:spcBef>
-                    <a:spcPts val="0"/>
-                  </a:spcBef>
-                  <a:spcAft>
-                    <a:spcPts val="0"/>
-                  </a:spcAft>
-                  <a:buNone/>
-                </a:pPr>
-                <a:endParaRPr/>
-              </a:p>
-            </p:txBody>
-          </p:sp>
-          <p:sp>
-            <p:nvSpPr>
-              <p:cNvPr id="317" name="Google Shape;9773;p77">
-                <a:extLst>
-                  <a:ext uri="{FF2B5EF4-FFF2-40B4-BE49-F238E27FC236}">
-                    <a16:creationId xmlns:a16="http://schemas.microsoft.com/office/drawing/2014/main" id="{4CA89674-8E0D-0E88-0876-BEE203C5C025}"/>
-                  </a:ext>
-                </a:extLst>
-              </p:cNvPr>
-              <p:cNvSpPr/>
-              <p:nvPr/>
-            </p:nvSpPr>
-            <p:spPr>
-              <a:xfrm>
-                <a:off x="4700066" y="1290523"/>
-                <a:ext cx="32206" cy="7988"/>
-              </a:xfrm>
-              <a:custGeom>
-                <a:avLst/>
-                <a:gdLst/>
-                <a:ahLst/>
-                <a:cxnLst/>
-                <a:rect l="l" t="t" r="r" b="b"/>
-                <a:pathLst>
-                  <a:path w="2524" h="626" extrusionOk="0">
-                    <a:moveTo>
-                      <a:pt x="787" y="1"/>
-                    </a:moveTo>
-                    <a:cubicBezTo>
-                      <a:pt x="606" y="1"/>
-                      <a:pt x="423" y="7"/>
-                      <a:pt x="242" y="18"/>
-                    </a:cubicBezTo>
-                    <a:cubicBezTo>
-                      <a:pt x="104" y="31"/>
-                      <a:pt x="0" y="151"/>
-                      <a:pt x="10" y="291"/>
-                    </a:cubicBezTo>
-                    <a:cubicBezTo>
-                      <a:pt x="21" y="425"/>
-                      <a:pt x="131" y="526"/>
-                      <a:pt x="264" y="526"/>
-                    </a:cubicBezTo>
-                    <a:cubicBezTo>
-                      <a:pt x="269" y="526"/>
-                      <a:pt x="274" y="526"/>
-                      <a:pt x="279" y="526"/>
-                    </a:cubicBezTo>
-                    <a:cubicBezTo>
-                      <a:pt x="447" y="516"/>
-                      <a:pt x="617" y="510"/>
-                      <a:pt x="787" y="510"/>
-                    </a:cubicBezTo>
-                    <a:cubicBezTo>
-                      <a:pt x="1261" y="512"/>
-                      <a:pt x="1735" y="548"/>
-                      <a:pt x="2204" y="622"/>
-                    </a:cubicBezTo>
-                    <a:cubicBezTo>
-                      <a:pt x="2218" y="624"/>
-                      <a:pt x="2232" y="626"/>
-                      <a:pt x="2246" y="626"/>
-                    </a:cubicBezTo>
-                    <a:cubicBezTo>
-                      <a:pt x="2364" y="626"/>
-                      <a:pt x="2469" y="542"/>
-                      <a:pt x="2495" y="422"/>
-                    </a:cubicBezTo>
-                    <a:cubicBezTo>
-                      <a:pt x="2524" y="281"/>
-                      <a:pt x="2430" y="145"/>
-                      <a:pt x="2289" y="121"/>
-                    </a:cubicBezTo>
-                    <a:cubicBezTo>
-                      <a:pt x="1792" y="41"/>
-                      <a:pt x="1289" y="1"/>
-                      <a:pt x="787" y="1"/>
-                    </a:cubicBezTo>
-                    <a:close/>
-                  </a:path>
-                </a:pathLst>
-              </a:custGeom>
-              <a:solidFill>
-                <a:srgbClr val="667E92"/>
-              </a:solidFill>
-              <a:ln>
-                <a:noFill/>
-              </a:ln>
-            </p:spPr>
-            <p:txBody>
-              <a:bodyPr spcFirstLastPara="1" wrap="square" lIns="91425" tIns="91425" rIns="91425" bIns="91425" anchor="ctr" anchorCtr="0">
-                <a:noAutofit/>
-              </a:bodyPr>
-              <a:lstStyle/>
-              <a:p>
-                <a:pPr marL="0" lvl="0" indent="0" algn="l" rtl="0">
-                  <a:spcBef>
-                    <a:spcPts val="0"/>
-                  </a:spcBef>
-                  <a:spcAft>
-                    <a:spcPts val="0"/>
-                  </a:spcAft>
-                  <a:buNone/>
-                </a:pPr>
-                <a:endParaRPr/>
-              </a:p>
-            </p:txBody>
-          </p:sp>
-          <p:sp>
-            <p:nvSpPr>
-              <p:cNvPr id="318" name="Google Shape;9774;p77">
-                <a:extLst>
-                  <a:ext uri="{FF2B5EF4-FFF2-40B4-BE49-F238E27FC236}">
-                    <a16:creationId xmlns:a16="http://schemas.microsoft.com/office/drawing/2014/main" id="{049B3E3E-FAAE-641F-2279-DC760A52CBFB}"/>
-                  </a:ext>
-                </a:extLst>
-              </p:cNvPr>
-              <p:cNvSpPr/>
-              <p:nvPr/>
-            </p:nvSpPr>
-            <p:spPr>
-              <a:xfrm>
-                <a:off x="4644280" y="1300641"/>
-                <a:ext cx="20225" cy="13283"/>
-              </a:xfrm>
-              <a:custGeom>
-                <a:avLst/>
-                <a:gdLst/>
-                <a:ahLst/>
-                <a:cxnLst/>
-                <a:rect l="l" t="t" r="r" b="b"/>
-                <a:pathLst>
-                  <a:path w="1585" h="1041" extrusionOk="0">
-                    <a:moveTo>
-                      <a:pt x="1331" y="0"/>
-                    </a:moveTo>
-                    <a:cubicBezTo>
-                      <a:pt x="1304" y="0"/>
-                      <a:pt x="1277" y="6"/>
-                      <a:pt x="1251" y="16"/>
-                    </a:cubicBezTo>
-                    <a:cubicBezTo>
-                      <a:pt x="880" y="175"/>
-                      <a:pt x="518" y="356"/>
-                      <a:pt x="170" y="558"/>
-                    </a:cubicBezTo>
-                    <a:cubicBezTo>
-                      <a:pt x="60" y="622"/>
-                      <a:pt x="1" y="758"/>
-                      <a:pt x="47" y="876"/>
-                    </a:cubicBezTo>
-                    <a:cubicBezTo>
-                      <a:pt x="87" y="979"/>
-                      <a:pt x="185" y="1040"/>
-                      <a:pt x="287" y="1040"/>
-                    </a:cubicBezTo>
-                    <a:cubicBezTo>
-                      <a:pt x="330" y="1040"/>
-                      <a:pt x="373" y="1029"/>
-                      <a:pt x="414" y="1006"/>
-                    </a:cubicBezTo>
-                    <a:cubicBezTo>
-                      <a:pt x="729" y="822"/>
-                      <a:pt x="1056" y="657"/>
-                      <a:pt x="1391" y="513"/>
-                    </a:cubicBezTo>
-                    <a:cubicBezTo>
-                      <a:pt x="1520" y="457"/>
-                      <a:pt x="1584" y="311"/>
-                      <a:pt x="1540" y="178"/>
-                    </a:cubicBezTo>
-                    <a:lnTo>
-                      <a:pt x="1527" y="141"/>
-                    </a:lnTo>
-                    <a:cubicBezTo>
-                      <a:pt x="1497" y="55"/>
-                      <a:pt x="1417" y="0"/>
-                      <a:pt x="1331" y="0"/>
-                    </a:cubicBezTo>
-                    <a:close/>
-                  </a:path>
-                </a:pathLst>
-              </a:custGeom>
-              <a:solidFill>
-                <a:srgbClr val="667E92"/>
-              </a:solidFill>
-              <a:ln>
-                <a:noFill/>
-              </a:ln>
-            </p:spPr>
-            <p:txBody>
-              <a:bodyPr spcFirstLastPara="1" wrap="square" lIns="91425" tIns="91425" rIns="91425" bIns="91425" anchor="ctr" anchorCtr="0">
-                <a:noAutofit/>
-              </a:bodyPr>
-              <a:lstStyle/>
-              <a:p>
-                <a:pPr marL="0" lvl="0" indent="0" algn="l" rtl="0">
-                  <a:spcBef>
-                    <a:spcPts val="0"/>
-                  </a:spcBef>
-                  <a:spcAft>
-                    <a:spcPts val="0"/>
-                  </a:spcAft>
-                  <a:buNone/>
-                </a:pPr>
-                <a:endParaRPr/>
-              </a:p>
-            </p:txBody>
-          </p:sp>
-          <p:sp>
-            <p:nvSpPr>
-              <p:cNvPr id="319" name="Google Shape;9775;p77">
-                <a:extLst>
-                  <a:ext uri="{FF2B5EF4-FFF2-40B4-BE49-F238E27FC236}">
-                    <a16:creationId xmlns:a16="http://schemas.microsoft.com/office/drawing/2014/main" id="{830AA998-6048-649A-03D8-E8F0FF0A07D0}"/>
-                  </a:ext>
-                </a:extLst>
-              </p:cNvPr>
-              <p:cNvSpPr/>
-              <p:nvPr/>
-            </p:nvSpPr>
-            <p:spPr>
-              <a:xfrm>
-                <a:off x="4667822" y="1291888"/>
-                <a:ext cx="27779" cy="11433"/>
-              </a:xfrm>
-              <a:custGeom>
-                <a:avLst/>
-                <a:gdLst/>
-                <a:ahLst/>
-                <a:cxnLst/>
-                <a:rect l="l" t="t" r="r" b="b"/>
-                <a:pathLst>
-                  <a:path w="2177" h="896" extrusionOk="0">
-                    <a:moveTo>
-                      <a:pt x="1906" y="0"/>
-                    </a:moveTo>
-                    <a:cubicBezTo>
-                      <a:pt x="1894" y="0"/>
-                      <a:pt x="1883" y="1"/>
-                      <a:pt x="1871" y="3"/>
-                    </a:cubicBezTo>
-                    <a:lnTo>
-                      <a:pt x="1871" y="4"/>
-                    </a:lnTo>
-                    <a:cubicBezTo>
-                      <a:pt x="1306" y="88"/>
-                      <a:pt x="748" y="220"/>
-                      <a:pt x="205" y="400"/>
-                    </a:cubicBezTo>
-                    <a:cubicBezTo>
-                      <a:pt x="71" y="446"/>
-                      <a:pt x="0" y="592"/>
-                      <a:pt x="47" y="725"/>
-                    </a:cubicBezTo>
-                    <a:cubicBezTo>
-                      <a:pt x="84" y="830"/>
-                      <a:pt x="182" y="896"/>
-                      <a:pt x="288" y="896"/>
-                    </a:cubicBezTo>
-                    <a:cubicBezTo>
-                      <a:pt x="315" y="896"/>
-                      <a:pt x="343" y="891"/>
-                      <a:pt x="370" y="882"/>
-                    </a:cubicBezTo>
-                    <a:cubicBezTo>
-                      <a:pt x="881" y="714"/>
-                      <a:pt x="1406" y="587"/>
-                      <a:pt x="1940" y="509"/>
-                    </a:cubicBezTo>
-                    <a:cubicBezTo>
-                      <a:pt x="2079" y="490"/>
-                      <a:pt x="2177" y="360"/>
-                      <a:pt x="2157" y="220"/>
-                    </a:cubicBezTo>
-                    <a:cubicBezTo>
-                      <a:pt x="2140" y="93"/>
-                      <a:pt x="2031" y="0"/>
-                      <a:pt x="1906" y="0"/>
-                    </a:cubicBezTo>
-                    <a:close/>
-                  </a:path>
-                </a:pathLst>
-              </a:custGeom>
-              <a:solidFill>
-                <a:srgbClr val="667E92"/>
-              </a:solidFill>
-              <a:ln>
-                <a:noFill/>
-              </a:ln>
-            </p:spPr>
-            <p:txBody>
-              <a:bodyPr spcFirstLastPara="1" wrap="square" lIns="91425" tIns="91425" rIns="91425" bIns="91425" anchor="ctr" anchorCtr="0">
-                <a:noAutofit/>
-              </a:bodyPr>
-              <a:lstStyle/>
-              <a:p>
-                <a:pPr marL="0" lvl="0" indent="0" algn="l" rtl="0">
-                  <a:spcBef>
-                    <a:spcPts val="0"/>
-                  </a:spcBef>
-                  <a:spcAft>
-                    <a:spcPts val="0"/>
-                  </a:spcAft>
-                  <a:buNone/>
-                </a:pPr>
-                <a:endParaRPr/>
-              </a:p>
-            </p:txBody>
-          </p:sp>
-        </p:grpSp>
-        <p:grpSp>
-          <p:nvGrpSpPr>
-            <p:cNvPr id="251" name="Google Shape;9776;p77">
-              <a:extLst>
-                <a:ext uri="{FF2B5EF4-FFF2-40B4-BE49-F238E27FC236}">
-                  <a16:creationId xmlns:a16="http://schemas.microsoft.com/office/drawing/2014/main" id="{56321EFA-FD87-53EE-62A0-CD92EFFB49D8}"/>
-                </a:ext>
-              </a:extLst>
-            </p:cNvPr>
-            <p:cNvGrpSpPr/>
-            <p:nvPr/>
-          </p:nvGrpSpPr>
-          <p:grpSpPr>
-            <a:xfrm>
-              <a:off x="4356567" y="1191441"/>
-              <a:ext cx="143690" cy="29488"/>
-              <a:chOff x="4356567" y="1191441"/>
-              <a:chExt cx="143690" cy="29488"/>
-            </a:xfrm>
-          </p:grpSpPr>
-          <p:sp>
-            <p:nvSpPr>
-              <p:cNvPr id="312" name="Google Shape;9777;p77">
-                <a:extLst>
-                  <a:ext uri="{FF2B5EF4-FFF2-40B4-BE49-F238E27FC236}">
-                    <a16:creationId xmlns:a16="http://schemas.microsoft.com/office/drawing/2014/main" id="{714548C5-0BF0-9366-7ADB-6C0D66CA44B4}"/>
-                  </a:ext>
-                </a:extLst>
-              </p:cNvPr>
-              <p:cNvSpPr/>
-              <p:nvPr/>
-            </p:nvSpPr>
-            <p:spPr>
-              <a:xfrm>
-                <a:off x="4448554" y="1195154"/>
-                <a:ext cx="51704" cy="25775"/>
-              </a:xfrm>
-              <a:custGeom>
-                <a:avLst/>
-                <a:gdLst/>
-                <a:ahLst/>
-                <a:cxnLst/>
-                <a:rect l="l" t="t" r="r" b="b"/>
-                <a:pathLst>
-                  <a:path w="4052" h="2020" extrusionOk="0">
-                    <a:moveTo>
-                      <a:pt x="272" y="1"/>
-                    </a:moveTo>
-                    <a:cubicBezTo>
-                      <a:pt x="157" y="1"/>
-                      <a:pt x="54" y="82"/>
-                      <a:pt x="29" y="200"/>
-                    </a:cubicBezTo>
-                    <a:cubicBezTo>
-                      <a:pt x="0" y="338"/>
-                      <a:pt x="87" y="474"/>
-                      <a:pt x="225" y="507"/>
-                    </a:cubicBezTo>
-                    <a:cubicBezTo>
-                      <a:pt x="1077" y="719"/>
-                      <a:pt x="1895" y="1049"/>
-                      <a:pt x="2657" y="1486"/>
-                    </a:cubicBezTo>
-                    <a:lnTo>
-                      <a:pt x="2505" y="1740"/>
-                    </a:lnTo>
-                    <a:cubicBezTo>
-                      <a:pt x="2459" y="1819"/>
-                      <a:pt x="2511" y="1918"/>
-                      <a:pt x="2603" y="1926"/>
-                    </a:cubicBezTo>
-                    <a:lnTo>
-                      <a:pt x="3887" y="2019"/>
-                    </a:lnTo>
-                    <a:cubicBezTo>
-                      <a:pt x="3890" y="2019"/>
-                      <a:pt x="3893" y="2019"/>
-                      <a:pt x="3895" y="2019"/>
-                    </a:cubicBezTo>
-                    <a:cubicBezTo>
-                      <a:pt x="3991" y="2019"/>
-                      <a:pt x="4052" y="1913"/>
-                      <a:pt x="3999" y="1830"/>
-                    </a:cubicBezTo>
-                    <a:lnTo>
-                      <a:pt x="3302" y="746"/>
-                    </a:lnTo>
-                    <a:cubicBezTo>
-                      <a:pt x="3278" y="709"/>
-                      <a:pt x="3239" y="690"/>
-                      <a:pt x="3200" y="690"/>
-                    </a:cubicBezTo>
-                    <a:cubicBezTo>
-                      <a:pt x="3159" y="690"/>
-                      <a:pt x="3118" y="711"/>
-                      <a:pt x="3094" y="751"/>
-                    </a:cubicBezTo>
-                    <a:lnTo>
-                      <a:pt x="2917" y="1047"/>
-                    </a:lnTo>
-                    <a:cubicBezTo>
-                      <a:pt x="2108" y="581"/>
-                      <a:pt x="1237" y="230"/>
-                      <a:pt x="330" y="8"/>
-                    </a:cubicBezTo>
-                    <a:cubicBezTo>
-                      <a:pt x="311" y="3"/>
-                      <a:pt x="291" y="1"/>
-                      <a:pt x="272" y="1"/>
-                    </a:cubicBezTo>
-                    <a:close/>
-                  </a:path>
-                </a:pathLst>
-              </a:custGeom>
-              <a:solidFill>
-                <a:srgbClr val="667E92"/>
-              </a:solidFill>
-              <a:ln>
-                <a:noFill/>
-              </a:ln>
-            </p:spPr>
-            <p:txBody>
-              <a:bodyPr spcFirstLastPara="1" wrap="square" lIns="91425" tIns="91425" rIns="91425" bIns="91425" anchor="ctr" anchorCtr="0">
-                <a:noAutofit/>
-              </a:bodyPr>
-              <a:lstStyle/>
-              <a:p>
-                <a:pPr marL="0" lvl="0" indent="0" algn="l" rtl="0">
-                  <a:spcBef>
-                    <a:spcPts val="0"/>
-                  </a:spcBef>
-                  <a:spcAft>
-                    <a:spcPts val="0"/>
-                  </a:spcAft>
-                  <a:buNone/>
-                </a:pPr>
-                <a:endParaRPr/>
-              </a:p>
-            </p:txBody>
-          </p:sp>
-          <p:sp>
-            <p:nvSpPr>
-              <p:cNvPr id="313" name="Google Shape;9778;p77">
-                <a:extLst>
-                  <a:ext uri="{FF2B5EF4-FFF2-40B4-BE49-F238E27FC236}">
-                    <a16:creationId xmlns:a16="http://schemas.microsoft.com/office/drawing/2014/main" id="{79570B87-8855-4A58-92AE-C3A5369BC1CD}"/>
-                  </a:ext>
-                </a:extLst>
-              </p:cNvPr>
-              <p:cNvSpPr/>
-              <p:nvPr/>
-            </p:nvSpPr>
-            <p:spPr>
-              <a:xfrm>
-                <a:off x="4412341" y="1191441"/>
-                <a:ext cx="32206" cy="8013"/>
-              </a:xfrm>
-              <a:custGeom>
-                <a:avLst/>
-                <a:gdLst/>
-                <a:ahLst/>
-                <a:cxnLst/>
-                <a:rect l="l" t="t" r="r" b="b"/>
-                <a:pathLst>
-                  <a:path w="2524" h="628" extrusionOk="0">
-                    <a:moveTo>
-                      <a:pt x="787" y="1"/>
-                    </a:moveTo>
-                    <a:cubicBezTo>
-                      <a:pt x="605" y="1"/>
-                      <a:pt x="424" y="7"/>
-                      <a:pt x="241" y="19"/>
-                    </a:cubicBezTo>
-                    <a:cubicBezTo>
-                      <a:pt x="103" y="31"/>
-                      <a:pt x="1" y="153"/>
-                      <a:pt x="11" y="291"/>
-                    </a:cubicBezTo>
-                    <a:cubicBezTo>
-                      <a:pt x="20" y="425"/>
-                      <a:pt x="132" y="528"/>
-                      <a:pt x="263" y="528"/>
-                    </a:cubicBezTo>
-                    <a:cubicBezTo>
-                      <a:pt x="268" y="528"/>
-                      <a:pt x="273" y="528"/>
-                      <a:pt x="278" y="528"/>
-                    </a:cubicBezTo>
-                    <a:cubicBezTo>
-                      <a:pt x="448" y="518"/>
-                      <a:pt x="617" y="512"/>
-                      <a:pt x="787" y="512"/>
-                    </a:cubicBezTo>
-                    <a:cubicBezTo>
-                      <a:pt x="1261" y="512"/>
-                      <a:pt x="1734" y="550"/>
-                      <a:pt x="2203" y="624"/>
-                    </a:cubicBezTo>
-                    <a:cubicBezTo>
-                      <a:pt x="2217" y="626"/>
-                      <a:pt x="2231" y="627"/>
-                      <a:pt x="2245" y="627"/>
-                    </a:cubicBezTo>
-                    <a:cubicBezTo>
-                      <a:pt x="2363" y="627"/>
-                      <a:pt x="2470" y="544"/>
-                      <a:pt x="2494" y="424"/>
-                    </a:cubicBezTo>
-                    <a:cubicBezTo>
-                      <a:pt x="2523" y="283"/>
-                      <a:pt x="2430" y="145"/>
-                      <a:pt x="2288" y="121"/>
-                    </a:cubicBezTo>
-                    <a:cubicBezTo>
-                      <a:pt x="1791" y="43"/>
-                      <a:pt x="1288" y="3"/>
-                      <a:pt x="787" y="1"/>
-                    </a:cubicBezTo>
-                    <a:close/>
-                  </a:path>
-                </a:pathLst>
-              </a:custGeom>
-              <a:solidFill>
-                <a:srgbClr val="667E92"/>
-              </a:solidFill>
-              <a:ln>
-                <a:noFill/>
-              </a:ln>
-            </p:spPr>
-            <p:txBody>
-              <a:bodyPr spcFirstLastPara="1" wrap="square" lIns="91425" tIns="91425" rIns="91425" bIns="91425" anchor="ctr" anchorCtr="0">
-                <a:noAutofit/>
-              </a:bodyPr>
-              <a:lstStyle/>
-              <a:p>
-                <a:pPr marL="0" lvl="0" indent="0" algn="l" rtl="0">
-                  <a:spcBef>
-                    <a:spcPts val="0"/>
-                  </a:spcBef>
-                  <a:spcAft>
-                    <a:spcPts val="0"/>
-                  </a:spcAft>
-                  <a:buNone/>
-                </a:pPr>
-                <a:endParaRPr/>
-              </a:p>
-            </p:txBody>
-          </p:sp>
-          <p:sp>
-            <p:nvSpPr>
-              <p:cNvPr id="314" name="Google Shape;9779;p77">
-                <a:extLst>
-                  <a:ext uri="{FF2B5EF4-FFF2-40B4-BE49-F238E27FC236}">
-                    <a16:creationId xmlns:a16="http://schemas.microsoft.com/office/drawing/2014/main" id="{D14E9EEA-1959-2DA2-64DB-105D74034239}"/>
-                  </a:ext>
-                </a:extLst>
-              </p:cNvPr>
-              <p:cNvSpPr/>
-              <p:nvPr/>
-            </p:nvSpPr>
-            <p:spPr>
-              <a:xfrm>
-                <a:off x="4356567" y="1201573"/>
-                <a:ext cx="20212" cy="13270"/>
-              </a:xfrm>
-              <a:custGeom>
-                <a:avLst/>
-                <a:gdLst/>
-                <a:ahLst/>
-                <a:cxnLst/>
-                <a:rect l="l" t="t" r="r" b="b"/>
-                <a:pathLst>
-                  <a:path w="1584" h="1040" extrusionOk="0">
-                    <a:moveTo>
-                      <a:pt x="1330" y="1"/>
-                    </a:moveTo>
-                    <a:cubicBezTo>
-                      <a:pt x="1303" y="1"/>
-                      <a:pt x="1276" y="6"/>
-                      <a:pt x="1249" y="17"/>
-                    </a:cubicBezTo>
-                    <a:cubicBezTo>
-                      <a:pt x="878" y="174"/>
-                      <a:pt x="518" y="355"/>
-                      <a:pt x="168" y="557"/>
-                    </a:cubicBezTo>
-                    <a:cubicBezTo>
-                      <a:pt x="58" y="621"/>
-                      <a:pt x="0" y="757"/>
-                      <a:pt x="47" y="876"/>
-                    </a:cubicBezTo>
-                    <a:cubicBezTo>
-                      <a:pt x="86" y="979"/>
-                      <a:pt x="183" y="1040"/>
-                      <a:pt x="284" y="1040"/>
-                    </a:cubicBezTo>
-                    <a:cubicBezTo>
-                      <a:pt x="327" y="1040"/>
-                      <a:pt x="371" y="1029"/>
-                      <a:pt x="412" y="1005"/>
-                    </a:cubicBezTo>
-                    <a:cubicBezTo>
-                      <a:pt x="727" y="823"/>
-                      <a:pt x="1054" y="658"/>
-                      <a:pt x="1389" y="512"/>
-                    </a:cubicBezTo>
-                    <a:cubicBezTo>
-                      <a:pt x="1518" y="458"/>
-                      <a:pt x="1584" y="312"/>
-                      <a:pt x="1538" y="177"/>
-                    </a:cubicBezTo>
-                    <a:lnTo>
-                      <a:pt x="1525" y="141"/>
-                    </a:lnTo>
-                    <a:cubicBezTo>
-                      <a:pt x="1496" y="54"/>
-                      <a:pt x="1415" y="1"/>
-                      <a:pt x="1330" y="1"/>
-                    </a:cubicBezTo>
-                    <a:close/>
-                  </a:path>
-                </a:pathLst>
-              </a:custGeom>
-              <a:solidFill>
-                <a:srgbClr val="667E92"/>
-              </a:solidFill>
-              <a:ln>
-                <a:noFill/>
-              </a:ln>
-            </p:spPr>
-            <p:txBody>
-              <a:bodyPr spcFirstLastPara="1" wrap="square" lIns="91425" tIns="91425" rIns="91425" bIns="91425" anchor="ctr" anchorCtr="0">
-                <a:noAutofit/>
-              </a:bodyPr>
-              <a:lstStyle/>
-              <a:p>
-                <a:pPr marL="0" lvl="0" indent="0" algn="l" rtl="0">
-                  <a:spcBef>
-                    <a:spcPts val="0"/>
-                  </a:spcBef>
-                  <a:spcAft>
-                    <a:spcPts val="0"/>
-                  </a:spcAft>
-                  <a:buNone/>
-                </a:pPr>
-                <a:endParaRPr/>
-              </a:p>
-            </p:txBody>
-          </p:sp>
-          <p:sp>
-            <p:nvSpPr>
-              <p:cNvPr id="315" name="Google Shape;9780;p77">
-                <a:extLst>
-                  <a:ext uri="{FF2B5EF4-FFF2-40B4-BE49-F238E27FC236}">
-                    <a16:creationId xmlns:a16="http://schemas.microsoft.com/office/drawing/2014/main" id="{4C6F8314-1BE1-083E-FDC5-5E3094EA075D}"/>
-                  </a:ext>
-                </a:extLst>
-              </p:cNvPr>
-              <p:cNvSpPr/>
-              <p:nvPr/>
-            </p:nvSpPr>
-            <p:spPr>
-              <a:xfrm>
-                <a:off x="4380084" y="1192832"/>
-                <a:ext cx="27779" cy="11433"/>
-              </a:xfrm>
-              <a:custGeom>
-                <a:avLst/>
-                <a:gdLst/>
-                <a:ahLst/>
-                <a:cxnLst/>
-                <a:rect l="l" t="t" r="r" b="b"/>
-                <a:pathLst>
-                  <a:path w="2177" h="896" extrusionOk="0">
-                    <a:moveTo>
-                      <a:pt x="1906" y="0"/>
-                    </a:moveTo>
-                    <a:cubicBezTo>
-                      <a:pt x="1894" y="0"/>
-                      <a:pt x="1883" y="1"/>
-                      <a:pt x="1871" y="2"/>
-                    </a:cubicBezTo>
-                    <a:cubicBezTo>
-                      <a:pt x="1306" y="87"/>
-                      <a:pt x="748" y="220"/>
-                      <a:pt x="205" y="400"/>
-                    </a:cubicBezTo>
-                    <a:cubicBezTo>
-                      <a:pt x="71" y="444"/>
-                      <a:pt x="0" y="590"/>
-                      <a:pt x="47" y="725"/>
-                    </a:cubicBezTo>
-                    <a:cubicBezTo>
-                      <a:pt x="84" y="829"/>
-                      <a:pt x="183" y="895"/>
-                      <a:pt x="288" y="895"/>
-                    </a:cubicBezTo>
-                    <a:cubicBezTo>
-                      <a:pt x="316" y="895"/>
-                      <a:pt x="343" y="891"/>
-                      <a:pt x="370" y="882"/>
-                    </a:cubicBezTo>
-                    <a:cubicBezTo>
-                      <a:pt x="883" y="712"/>
-                      <a:pt x="1408" y="587"/>
-                      <a:pt x="1941" y="507"/>
-                    </a:cubicBezTo>
-                    <a:cubicBezTo>
-                      <a:pt x="2081" y="488"/>
-                      <a:pt x="2177" y="360"/>
-                      <a:pt x="2157" y="220"/>
-                    </a:cubicBezTo>
-                    <a:cubicBezTo>
-                      <a:pt x="2140" y="93"/>
-                      <a:pt x="2031" y="0"/>
-                      <a:pt x="1906" y="0"/>
-                    </a:cubicBezTo>
-                    <a:close/>
-                  </a:path>
-                </a:pathLst>
-              </a:custGeom>
-              <a:solidFill>
-                <a:srgbClr val="667E92"/>
-              </a:solidFill>
-              <a:ln>
-                <a:noFill/>
-              </a:ln>
-            </p:spPr>
-            <p:txBody>
-              <a:bodyPr spcFirstLastPara="1" wrap="square" lIns="91425" tIns="91425" rIns="91425" bIns="91425" anchor="ctr" anchorCtr="0">
-                <a:noAutofit/>
-              </a:bodyPr>
-              <a:lstStyle/>
-              <a:p>
-                <a:pPr marL="0" lvl="0" indent="0" algn="l" rtl="0">
-                  <a:spcBef>
-                    <a:spcPts val="0"/>
-                  </a:spcBef>
-                  <a:spcAft>
-                    <a:spcPts val="0"/>
-                  </a:spcAft>
-                  <a:buNone/>
-                </a:pPr>
-                <a:endParaRPr/>
-              </a:p>
-            </p:txBody>
-          </p:sp>
-        </p:grpSp>
-        <p:grpSp>
-          <p:nvGrpSpPr>
-            <p:cNvPr id="252" name="Google Shape;9781;p77">
-              <a:extLst>
-                <a:ext uri="{FF2B5EF4-FFF2-40B4-BE49-F238E27FC236}">
-                  <a16:creationId xmlns:a16="http://schemas.microsoft.com/office/drawing/2014/main" id="{097B744F-F94D-530A-CEB0-4FB2FB3DA77C}"/>
-                </a:ext>
-              </a:extLst>
-            </p:cNvPr>
-            <p:cNvGrpSpPr/>
-            <p:nvPr/>
-          </p:nvGrpSpPr>
-          <p:grpSpPr>
-            <a:xfrm>
-              <a:off x="4339009" y="1863727"/>
-              <a:ext cx="143703" cy="29476"/>
-              <a:chOff x="4339009" y="1863727"/>
-              <a:chExt cx="143703" cy="29476"/>
-            </a:xfrm>
-          </p:grpSpPr>
-          <p:sp>
-            <p:nvSpPr>
-              <p:cNvPr id="308" name="Google Shape;9782;p77">
-                <a:extLst>
-                  <a:ext uri="{FF2B5EF4-FFF2-40B4-BE49-F238E27FC236}">
-                    <a16:creationId xmlns:a16="http://schemas.microsoft.com/office/drawing/2014/main" id="{17DD081F-8FC9-D9C9-E07D-D63C139B297B}"/>
-                  </a:ext>
-                </a:extLst>
-              </p:cNvPr>
-              <p:cNvSpPr/>
-              <p:nvPr/>
-            </p:nvSpPr>
-            <p:spPr>
-              <a:xfrm>
-                <a:off x="4339009" y="1863727"/>
-                <a:ext cx="51691" cy="25762"/>
-              </a:xfrm>
-              <a:custGeom>
-                <a:avLst/>
-                <a:gdLst/>
-                <a:ahLst/>
-                <a:cxnLst/>
-                <a:rect l="l" t="t" r="r" b="b"/>
-                <a:pathLst>
-                  <a:path w="4051" h="2019" extrusionOk="0">
-                    <a:moveTo>
-                      <a:pt x="157" y="1"/>
-                    </a:moveTo>
-                    <a:cubicBezTo>
-                      <a:pt x="61" y="1"/>
-                      <a:pt x="1" y="107"/>
-                      <a:pt x="54" y="190"/>
-                    </a:cubicBezTo>
-                    <a:lnTo>
-                      <a:pt x="750" y="1274"/>
-                    </a:lnTo>
-                    <a:cubicBezTo>
-                      <a:pt x="774" y="1311"/>
-                      <a:pt x="813" y="1330"/>
-                      <a:pt x="852" y="1330"/>
-                    </a:cubicBezTo>
-                    <a:cubicBezTo>
-                      <a:pt x="893" y="1330"/>
-                      <a:pt x="935" y="1309"/>
-                      <a:pt x="958" y="1269"/>
-                    </a:cubicBezTo>
-                    <a:lnTo>
-                      <a:pt x="1136" y="973"/>
-                    </a:lnTo>
-                    <a:cubicBezTo>
-                      <a:pt x="1945" y="1439"/>
-                      <a:pt x="2816" y="1788"/>
-                      <a:pt x="3722" y="2012"/>
-                    </a:cubicBezTo>
-                    <a:cubicBezTo>
-                      <a:pt x="3741" y="2017"/>
-                      <a:pt x="3761" y="2019"/>
-                      <a:pt x="3779" y="2019"/>
-                    </a:cubicBezTo>
-                    <a:cubicBezTo>
-                      <a:pt x="3895" y="2019"/>
-                      <a:pt x="3999" y="1938"/>
-                      <a:pt x="4023" y="1820"/>
-                    </a:cubicBezTo>
-                    <a:cubicBezTo>
-                      <a:pt x="4051" y="1682"/>
-                      <a:pt x="3964" y="1546"/>
-                      <a:pt x="3828" y="1512"/>
-                    </a:cubicBezTo>
-                    <a:cubicBezTo>
-                      <a:pt x="2976" y="1301"/>
-                      <a:pt x="2158" y="971"/>
-                      <a:pt x="1396" y="534"/>
-                    </a:cubicBezTo>
-                    <a:lnTo>
-                      <a:pt x="1548" y="279"/>
-                    </a:lnTo>
-                    <a:cubicBezTo>
-                      <a:pt x="1594" y="201"/>
-                      <a:pt x="1541" y="100"/>
-                      <a:pt x="1450" y="94"/>
-                    </a:cubicBezTo>
-                    <a:lnTo>
-                      <a:pt x="166" y="1"/>
-                    </a:lnTo>
-                    <a:cubicBezTo>
-                      <a:pt x="163" y="1"/>
-                      <a:pt x="160" y="1"/>
-                      <a:pt x="157" y="1"/>
-                    </a:cubicBezTo>
-                    <a:close/>
-                  </a:path>
-                </a:pathLst>
-              </a:custGeom>
-              <a:solidFill>
-                <a:srgbClr val="667E92"/>
-              </a:solidFill>
-              <a:ln>
-                <a:noFill/>
-              </a:ln>
-            </p:spPr>
-            <p:txBody>
-              <a:bodyPr spcFirstLastPara="1" wrap="square" lIns="91425" tIns="91425" rIns="91425" bIns="91425" anchor="ctr" anchorCtr="0">
-                <a:noAutofit/>
-              </a:bodyPr>
-              <a:lstStyle/>
-              <a:p>
-                <a:pPr marL="0" lvl="0" indent="0" algn="l" rtl="0">
-                  <a:spcBef>
-                    <a:spcPts val="0"/>
-                  </a:spcBef>
-                  <a:spcAft>
-                    <a:spcPts val="0"/>
-                  </a:spcAft>
-                  <a:buNone/>
-                </a:pPr>
-                <a:endParaRPr/>
-              </a:p>
-            </p:txBody>
-          </p:sp>
-          <p:sp>
-            <p:nvSpPr>
-              <p:cNvPr id="309" name="Google Shape;9783;p77">
-                <a:extLst>
-                  <a:ext uri="{FF2B5EF4-FFF2-40B4-BE49-F238E27FC236}">
-                    <a16:creationId xmlns:a16="http://schemas.microsoft.com/office/drawing/2014/main" id="{1BBC0639-2ACE-D972-82C7-D227C8466FA9}"/>
-                  </a:ext>
-                </a:extLst>
-              </p:cNvPr>
-              <p:cNvSpPr/>
-              <p:nvPr/>
-            </p:nvSpPr>
-            <p:spPr>
-              <a:xfrm>
-                <a:off x="4394732" y="1885202"/>
-                <a:ext cx="32193" cy="8001"/>
-              </a:xfrm>
-              <a:custGeom>
-                <a:avLst/>
-                <a:gdLst/>
-                <a:ahLst/>
-                <a:cxnLst/>
-                <a:rect l="l" t="t" r="r" b="b"/>
-                <a:pathLst>
-                  <a:path w="2523" h="627" extrusionOk="0">
-                    <a:moveTo>
-                      <a:pt x="279" y="1"/>
-                    </a:moveTo>
-                    <a:cubicBezTo>
-                      <a:pt x="160" y="1"/>
-                      <a:pt x="54" y="84"/>
-                      <a:pt x="29" y="204"/>
-                    </a:cubicBezTo>
-                    <a:cubicBezTo>
-                      <a:pt x="1" y="345"/>
-                      <a:pt x="93" y="483"/>
-                      <a:pt x="236" y="507"/>
-                    </a:cubicBezTo>
-                    <a:cubicBezTo>
-                      <a:pt x="732" y="585"/>
-                      <a:pt x="1235" y="625"/>
-                      <a:pt x="1738" y="627"/>
-                    </a:cubicBezTo>
-                    <a:cubicBezTo>
-                      <a:pt x="1919" y="627"/>
-                      <a:pt x="2102" y="621"/>
-                      <a:pt x="2282" y="609"/>
-                    </a:cubicBezTo>
-                    <a:cubicBezTo>
-                      <a:pt x="2420" y="596"/>
-                      <a:pt x="2523" y="475"/>
-                      <a:pt x="2513" y="337"/>
-                    </a:cubicBezTo>
-                    <a:cubicBezTo>
-                      <a:pt x="2504" y="203"/>
-                      <a:pt x="2392" y="100"/>
-                      <a:pt x="2260" y="100"/>
-                    </a:cubicBezTo>
-                    <a:cubicBezTo>
-                      <a:pt x="2255" y="100"/>
-                      <a:pt x="2251" y="100"/>
-                      <a:pt x="2246" y="100"/>
-                    </a:cubicBezTo>
-                    <a:cubicBezTo>
-                      <a:pt x="2076" y="110"/>
-                      <a:pt x="1908" y="116"/>
-                      <a:pt x="1738" y="116"/>
-                    </a:cubicBezTo>
-                    <a:cubicBezTo>
-                      <a:pt x="1262" y="116"/>
-                      <a:pt x="790" y="78"/>
-                      <a:pt x="321" y="4"/>
-                    </a:cubicBezTo>
-                    <a:cubicBezTo>
-                      <a:pt x="307" y="2"/>
-                      <a:pt x="293" y="1"/>
-                      <a:pt x="279" y="1"/>
-                    </a:cubicBezTo>
-                    <a:close/>
-                  </a:path>
-                </a:pathLst>
-              </a:custGeom>
-              <a:solidFill>
-                <a:srgbClr val="667E92"/>
-              </a:solidFill>
-              <a:ln>
-                <a:noFill/>
-              </a:ln>
-            </p:spPr>
-            <p:txBody>
-              <a:bodyPr spcFirstLastPara="1" wrap="square" lIns="91425" tIns="91425" rIns="91425" bIns="91425" anchor="ctr" anchorCtr="0">
-                <a:noAutofit/>
-              </a:bodyPr>
-              <a:lstStyle/>
-              <a:p>
-                <a:pPr marL="0" lvl="0" indent="0" algn="l" rtl="0">
-                  <a:spcBef>
-                    <a:spcPts val="0"/>
-                  </a:spcBef>
-                  <a:spcAft>
-                    <a:spcPts val="0"/>
-                  </a:spcAft>
-                  <a:buNone/>
-                </a:pPr>
-                <a:endParaRPr/>
-              </a:p>
-            </p:txBody>
-          </p:sp>
-          <p:sp>
-            <p:nvSpPr>
-              <p:cNvPr id="310" name="Google Shape;9784;p77">
-                <a:extLst>
-                  <a:ext uri="{FF2B5EF4-FFF2-40B4-BE49-F238E27FC236}">
-                    <a16:creationId xmlns:a16="http://schemas.microsoft.com/office/drawing/2014/main" id="{90DF8CFC-351A-3D63-A4DF-E2DEB40B5537}"/>
-                  </a:ext>
-                </a:extLst>
-              </p:cNvPr>
-              <p:cNvSpPr/>
-              <p:nvPr/>
-            </p:nvSpPr>
-            <p:spPr>
-              <a:xfrm>
-                <a:off x="4462488" y="1869814"/>
-                <a:ext cx="20225" cy="13258"/>
-              </a:xfrm>
-              <a:custGeom>
-                <a:avLst/>
-                <a:gdLst/>
-                <a:ahLst/>
-                <a:cxnLst/>
-                <a:rect l="l" t="t" r="r" b="b"/>
-                <a:pathLst>
-                  <a:path w="1585" h="1039" extrusionOk="0">
-                    <a:moveTo>
-                      <a:pt x="1300" y="0"/>
-                    </a:moveTo>
-                    <a:cubicBezTo>
-                      <a:pt x="1257" y="0"/>
-                      <a:pt x="1213" y="11"/>
-                      <a:pt x="1173" y="35"/>
-                    </a:cubicBezTo>
-                    <a:cubicBezTo>
-                      <a:pt x="857" y="217"/>
-                      <a:pt x="531" y="382"/>
-                      <a:pt x="196" y="528"/>
-                    </a:cubicBezTo>
-                    <a:cubicBezTo>
-                      <a:pt x="66" y="582"/>
-                      <a:pt x="1" y="728"/>
-                      <a:pt x="47" y="863"/>
-                    </a:cubicBezTo>
-                    <a:lnTo>
-                      <a:pt x="60" y="899"/>
-                    </a:lnTo>
-                    <a:cubicBezTo>
-                      <a:pt x="89" y="986"/>
-                      <a:pt x="169" y="1039"/>
-                      <a:pt x="255" y="1039"/>
-                    </a:cubicBezTo>
-                    <a:cubicBezTo>
-                      <a:pt x="282" y="1039"/>
-                      <a:pt x="309" y="1034"/>
-                      <a:pt x="335" y="1023"/>
-                    </a:cubicBezTo>
-                    <a:cubicBezTo>
-                      <a:pt x="707" y="866"/>
-                      <a:pt x="1067" y="685"/>
-                      <a:pt x="1416" y="483"/>
-                    </a:cubicBezTo>
-                    <a:cubicBezTo>
-                      <a:pt x="1527" y="419"/>
-                      <a:pt x="1584" y="283"/>
-                      <a:pt x="1538" y="164"/>
-                    </a:cubicBezTo>
-                    <a:cubicBezTo>
-                      <a:pt x="1499" y="61"/>
-                      <a:pt x="1401" y="0"/>
-                      <a:pt x="1300" y="0"/>
-                    </a:cubicBezTo>
-                    <a:close/>
-                  </a:path>
-                </a:pathLst>
-              </a:custGeom>
-              <a:solidFill>
-                <a:srgbClr val="667E92"/>
-              </a:solidFill>
-              <a:ln>
-                <a:noFill/>
-              </a:ln>
-            </p:spPr>
-            <p:txBody>
-              <a:bodyPr spcFirstLastPara="1" wrap="square" lIns="91425" tIns="91425" rIns="91425" bIns="91425" anchor="ctr" anchorCtr="0">
-                <a:noAutofit/>
-              </a:bodyPr>
-              <a:lstStyle/>
-              <a:p>
-                <a:pPr marL="0" lvl="0" indent="0" algn="l" rtl="0">
-                  <a:spcBef>
-                    <a:spcPts val="0"/>
-                  </a:spcBef>
-                  <a:spcAft>
-                    <a:spcPts val="0"/>
-                  </a:spcAft>
-                  <a:buNone/>
-                </a:pPr>
-                <a:endParaRPr/>
-              </a:p>
-            </p:txBody>
-          </p:sp>
-          <p:sp>
-            <p:nvSpPr>
-              <p:cNvPr id="311" name="Google Shape;9785;p77">
-                <a:extLst>
-                  <a:ext uri="{FF2B5EF4-FFF2-40B4-BE49-F238E27FC236}">
-                    <a16:creationId xmlns:a16="http://schemas.microsoft.com/office/drawing/2014/main" id="{0EBB5B9A-35DC-4D2A-B6DE-2D9DE0B1F724}"/>
-                  </a:ext>
-                </a:extLst>
-              </p:cNvPr>
-              <p:cNvSpPr/>
-              <p:nvPr/>
-            </p:nvSpPr>
-            <p:spPr>
-              <a:xfrm>
-                <a:off x="4431392" y="1880392"/>
-                <a:ext cx="27804" cy="11433"/>
-              </a:xfrm>
-              <a:custGeom>
-                <a:avLst/>
-                <a:gdLst/>
-                <a:ahLst/>
-                <a:cxnLst/>
-                <a:rect l="l" t="t" r="r" b="b"/>
-                <a:pathLst>
-                  <a:path w="2179" h="896" extrusionOk="0">
-                    <a:moveTo>
-                      <a:pt x="1890" y="1"/>
-                    </a:moveTo>
-                    <a:cubicBezTo>
-                      <a:pt x="1863" y="1"/>
-                      <a:pt x="1835" y="5"/>
-                      <a:pt x="1808" y="14"/>
-                    </a:cubicBezTo>
-                    <a:cubicBezTo>
-                      <a:pt x="1296" y="184"/>
-                      <a:pt x="771" y="309"/>
-                      <a:pt x="237" y="389"/>
-                    </a:cubicBezTo>
-                    <a:cubicBezTo>
-                      <a:pt x="98" y="408"/>
-                      <a:pt x="0" y="536"/>
-                      <a:pt x="20" y="676"/>
-                    </a:cubicBezTo>
-                    <a:cubicBezTo>
-                      <a:pt x="37" y="803"/>
-                      <a:pt x="147" y="896"/>
-                      <a:pt x="273" y="896"/>
-                    </a:cubicBezTo>
-                    <a:cubicBezTo>
-                      <a:pt x="284" y="896"/>
-                      <a:pt x="296" y="895"/>
-                      <a:pt x="308" y="893"/>
-                    </a:cubicBezTo>
-                    <a:cubicBezTo>
-                      <a:pt x="873" y="809"/>
-                      <a:pt x="1430" y="676"/>
-                      <a:pt x="1973" y="496"/>
-                    </a:cubicBezTo>
-                    <a:cubicBezTo>
-                      <a:pt x="2106" y="451"/>
-                      <a:pt x="2178" y="306"/>
-                      <a:pt x="2132" y="171"/>
-                    </a:cubicBezTo>
-                    <a:cubicBezTo>
-                      <a:pt x="2095" y="67"/>
-                      <a:pt x="1996" y="1"/>
-                      <a:pt x="1890" y="1"/>
-                    </a:cubicBezTo>
-                    <a:close/>
-                  </a:path>
-                </a:pathLst>
-              </a:custGeom>
-              <a:solidFill>
-                <a:srgbClr val="667E92"/>
-              </a:solidFill>
-              <a:ln>
-                <a:noFill/>
-              </a:ln>
-            </p:spPr>
-            <p:txBody>
-              <a:bodyPr spcFirstLastPara="1" wrap="square" lIns="91425" tIns="91425" rIns="91425" bIns="91425" anchor="ctr" anchorCtr="0">
-                <a:noAutofit/>
-              </a:bodyPr>
-              <a:lstStyle/>
-              <a:p>
-                <a:pPr marL="0" lvl="0" indent="0" algn="l" rtl="0">
-                  <a:spcBef>
-                    <a:spcPts val="0"/>
-                  </a:spcBef>
-                  <a:spcAft>
-                    <a:spcPts val="0"/>
-                  </a:spcAft>
-                  <a:buNone/>
-                </a:pPr>
-                <a:endParaRPr/>
-              </a:p>
-            </p:txBody>
-          </p:sp>
-        </p:grpSp>
-        <p:grpSp>
-          <p:nvGrpSpPr>
-            <p:cNvPr id="253" name="Google Shape;9786;p77">
-              <a:extLst>
-                <a:ext uri="{FF2B5EF4-FFF2-40B4-BE49-F238E27FC236}">
-                  <a16:creationId xmlns:a16="http://schemas.microsoft.com/office/drawing/2014/main" id="{45EA1ABE-D609-04CA-CFF8-842F0C8DFAF0}"/>
-                </a:ext>
-              </a:extLst>
-            </p:cNvPr>
-            <p:cNvGrpSpPr/>
-            <p:nvPr/>
-          </p:nvGrpSpPr>
-          <p:grpSpPr>
-            <a:xfrm>
-              <a:off x="4206459" y="1607315"/>
-              <a:ext cx="29539" cy="142899"/>
-              <a:chOff x="4206459" y="1607315"/>
-              <a:chExt cx="29539" cy="142899"/>
-            </a:xfrm>
-          </p:grpSpPr>
-          <p:sp>
-            <p:nvSpPr>
-              <p:cNvPr id="304" name="Google Shape;9787;p77">
-                <a:extLst>
-                  <a:ext uri="{FF2B5EF4-FFF2-40B4-BE49-F238E27FC236}">
-                    <a16:creationId xmlns:a16="http://schemas.microsoft.com/office/drawing/2014/main" id="{C7610453-5AEA-7832-AB74-472AD61A47BC}"/>
-                  </a:ext>
-                </a:extLst>
-              </p:cNvPr>
-              <p:cNvSpPr/>
-              <p:nvPr/>
-            </p:nvSpPr>
-            <p:spPr>
-              <a:xfrm>
-                <a:off x="4209840" y="1607315"/>
-                <a:ext cx="26158" cy="50989"/>
-              </a:xfrm>
-              <a:custGeom>
-                <a:avLst/>
-                <a:gdLst/>
-                <a:ahLst/>
-                <a:cxnLst/>
-                <a:rect l="l" t="t" r="r" b="b"/>
-                <a:pathLst>
-                  <a:path w="2050" h="3996" extrusionOk="0">
-                    <a:moveTo>
-                      <a:pt x="1920" y="0"/>
-                    </a:moveTo>
-                    <a:cubicBezTo>
-                      <a:pt x="1898" y="0"/>
-                      <a:pt x="1876" y="6"/>
-                      <a:pt x="1854" y="20"/>
-                    </a:cubicBezTo>
-                    <a:lnTo>
-                      <a:pt x="772" y="717"/>
-                    </a:lnTo>
-                    <a:cubicBezTo>
-                      <a:pt x="695" y="766"/>
-                      <a:pt x="697" y="878"/>
-                      <a:pt x="775" y="926"/>
-                    </a:cubicBezTo>
-                    <a:lnTo>
-                      <a:pt x="1073" y="1102"/>
-                    </a:lnTo>
-                    <a:cubicBezTo>
-                      <a:pt x="607" y="1911"/>
-                      <a:pt x="256" y="2782"/>
-                      <a:pt x="32" y="3689"/>
-                    </a:cubicBezTo>
-                    <a:cubicBezTo>
-                      <a:pt x="0" y="3825"/>
-                      <a:pt x="87" y="3962"/>
-                      <a:pt x="224" y="3990"/>
-                    </a:cubicBezTo>
-                    <a:cubicBezTo>
-                      <a:pt x="242" y="3993"/>
-                      <a:pt x="260" y="3995"/>
-                      <a:pt x="278" y="3995"/>
-                    </a:cubicBezTo>
-                    <a:cubicBezTo>
-                      <a:pt x="397" y="3995"/>
-                      <a:pt x="502" y="3914"/>
-                      <a:pt x="532" y="3794"/>
-                    </a:cubicBezTo>
-                    <a:cubicBezTo>
-                      <a:pt x="743" y="2942"/>
-                      <a:pt x="1073" y="2124"/>
-                      <a:pt x="1512" y="1363"/>
-                    </a:cubicBezTo>
-                    <a:lnTo>
-                      <a:pt x="1765" y="1514"/>
-                    </a:lnTo>
-                    <a:cubicBezTo>
-                      <a:pt x="1785" y="1526"/>
-                      <a:pt x="1806" y="1531"/>
-                      <a:pt x="1827" y="1531"/>
-                    </a:cubicBezTo>
-                    <a:cubicBezTo>
-                      <a:pt x="1888" y="1531"/>
-                      <a:pt x="1946" y="1484"/>
-                      <a:pt x="1951" y="1416"/>
-                    </a:cubicBezTo>
-                    <a:lnTo>
-                      <a:pt x="2043" y="134"/>
-                    </a:lnTo>
-                    <a:cubicBezTo>
-                      <a:pt x="2049" y="57"/>
-                      <a:pt x="1988" y="0"/>
-                      <a:pt x="1920" y="0"/>
-                    </a:cubicBezTo>
-                    <a:close/>
-                  </a:path>
-                </a:pathLst>
-              </a:custGeom>
-              <a:solidFill>
-                <a:srgbClr val="667E92"/>
-              </a:solidFill>
-              <a:ln>
-                <a:noFill/>
-              </a:ln>
-            </p:spPr>
-            <p:txBody>
-              <a:bodyPr spcFirstLastPara="1" wrap="square" lIns="91425" tIns="91425" rIns="91425" bIns="91425" anchor="ctr" anchorCtr="0">
-                <a:noAutofit/>
-              </a:bodyPr>
-              <a:lstStyle/>
-              <a:p>
-                <a:pPr marL="0" lvl="0" indent="0" algn="l" rtl="0">
-                  <a:spcBef>
-                    <a:spcPts val="0"/>
-                  </a:spcBef>
-                  <a:spcAft>
-                    <a:spcPts val="0"/>
-                  </a:spcAft>
-                  <a:buNone/>
-                </a:pPr>
-                <a:endParaRPr/>
-              </a:p>
-            </p:txBody>
-          </p:sp>
-          <p:sp>
-            <p:nvSpPr>
-              <p:cNvPr id="305" name="Google Shape;9788;p77">
-                <a:extLst>
-                  <a:ext uri="{FF2B5EF4-FFF2-40B4-BE49-F238E27FC236}">
-                    <a16:creationId xmlns:a16="http://schemas.microsoft.com/office/drawing/2014/main" id="{B70FD73C-D873-1CD4-4F74-F57FE0A93B1A}"/>
-                  </a:ext>
-                </a:extLst>
-              </p:cNvPr>
-              <p:cNvSpPr/>
-              <p:nvPr/>
-            </p:nvSpPr>
-            <p:spPr>
-              <a:xfrm>
-                <a:off x="4206459" y="1662910"/>
-                <a:ext cx="8230" cy="31785"/>
-              </a:xfrm>
-              <a:custGeom>
-                <a:avLst/>
-                <a:gdLst/>
-                <a:ahLst/>
-                <a:cxnLst/>
-                <a:rect l="l" t="t" r="r" b="b"/>
-                <a:pathLst>
-                  <a:path w="645" h="2491" extrusionOk="0">
-                    <a:moveTo>
-                      <a:pt x="371" y="1"/>
-                    </a:moveTo>
-                    <a:cubicBezTo>
-                      <a:pt x="249" y="1"/>
-                      <a:pt x="141" y="89"/>
-                      <a:pt x="121" y="212"/>
-                    </a:cubicBezTo>
-                    <a:cubicBezTo>
-                      <a:pt x="41" y="709"/>
-                      <a:pt x="1" y="1212"/>
-                      <a:pt x="1" y="1714"/>
-                    </a:cubicBezTo>
-                    <a:cubicBezTo>
-                      <a:pt x="1" y="1895"/>
-                      <a:pt x="7" y="2078"/>
-                      <a:pt x="19" y="2259"/>
-                    </a:cubicBezTo>
-                    <a:cubicBezTo>
-                      <a:pt x="31" y="2390"/>
-                      <a:pt x="140" y="2490"/>
-                      <a:pt x="270" y="2490"/>
-                    </a:cubicBezTo>
-                    <a:cubicBezTo>
-                      <a:pt x="277" y="2490"/>
-                      <a:pt x="284" y="2490"/>
-                      <a:pt x="291" y="2489"/>
-                    </a:cubicBezTo>
-                    <a:cubicBezTo>
-                      <a:pt x="428" y="2480"/>
-                      <a:pt x="534" y="2361"/>
-                      <a:pt x="526" y="2222"/>
-                    </a:cubicBezTo>
-                    <a:cubicBezTo>
-                      <a:pt x="517" y="2054"/>
-                      <a:pt x="510" y="1884"/>
-                      <a:pt x="510" y="1714"/>
-                    </a:cubicBezTo>
-                    <a:cubicBezTo>
-                      <a:pt x="512" y="1240"/>
-                      <a:pt x="549" y="766"/>
-                      <a:pt x="622" y="297"/>
-                    </a:cubicBezTo>
-                    <a:cubicBezTo>
-                      <a:pt x="645" y="163"/>
-                      <a:pt x="557" y="35"/>
-                      <a:pt x="422" y="6"/>
-                    </a:cubicBezTo>
-                    <a:cubicBezTo>
-                      <a:pt x="405" y="2"/>
-                      <a:pt x="388" y="1"/>
-                      <a:pt x="371" y="1"/>
-                    </a:cubicBezTo>
-                    <a:close/>
-                  </a:path>
-                </a:pathLst>
-              </a:custGeom>
-              <a:solidFill>
-                <a:srgbClr val="667E92"/>
-              </a:solidFill>
-              <a:ln>
-                <a:noFill/>
-              </a:ln>
-            </p:spPr>
-            <p:txBody>
-              <a:bodyPr spcFirstLastPara="1" wrap="square" lIns="91425" tIns="91425" rIns="91425" bIns="91425" anchor="ctr" anchorCtr="0">
-                <a:noAutofit/>
-              </a:bodyPr>
-              <a:lstStyle/>
-              <a:p>
-                <a:pPr marL="0" lvl="0" indent="0" algn="l" rtl="0">
-                  <a:spcBef>
-                    <a:spcPts val="0"/>
-                  </a:spcBef>
-                  <a:spcAft>
-                    <a:spcPts val="0"/>
-                  </a:spcAft>
-                  <a:buNone/>
-                </a:pPr>
-                <a:endParaRPr/>
-              </a:p>
-            </p:txBody>
-          </p:sp>
-          <p:sp>
-            <p:nvSpPr>
-              <p:cNvPr id="306" name="Google Shape;9789;p77">
-                <a:extLst>
-                  <a:ext uri="{FF2B5EF4-FFF2-40B4-BE49-F238E27FC236}">
-                    <a16:creationId xmlns:a16="http://schemas.microsoft.com/office/drawing/2014/main" id="{F9E4EE8D-4BB7-282F-3BB3-D6439B05AA4A}"/>
-                  </a:ext>
-                </a:extLst>
-              </p:cNvPr>
-              <p:cNvSpPr/>
-              <p:nvPr/>
-            </p:nvSpPr>
-            <p:spPr>
-              <a:xfrm>
-                <a:off x="4216194" y="1730768"/>
-                <a:ext cx="14227" cy="19446"/>
-              </a:xfrm>
-              <a:custGeom>
-                <a:avLst/>
-                <a:gdLst/>
-                <a:ahLst/>
-                <a:cxnLst/>
-                <a:rect l="l" t="t" r="r" b="b"/>
-                <a:pathLst>
-                  <a:path w="1115" h="1524" extrusionOk="0">
-                    <a:moveTo>
-                      <a:pt x="296" y="1"/>
-                    </a:moveTo>
-                    <a:cubicBezTo>
-                      <a:pt x="267" y="1"/>
-                      <a:pt x="237" y="5"/>
-                      <a:pt x="208" y="15"/>
-                    </a:cubicBezTo>
-                    <a:lnTo>
-                      <a:pt x="171" y="28"/>
-                    </a:lnTo>
-                    <a:cubicBezTo>
-                      <a:pt x="58" y="67"/>
-                      <a:pt x="0" y="193"/>
-                      <a:pt x="47" y="304"/>
-                    </a:cubicBezTo>
-                    <a:cubicBezTo>
-                      <a:pt x="205" y="675"/>
-                      <a:pt x="384" y="1035"/>
-                      <a:pt x="588" y="1385"/>
-                    </a:cubicBezTo>
-                    <a:cubicBezTo>
-                      <a:pt x="637" y="1469"/>
-                      <a:pt x="728" y="1524"/>
-                      <a:pt x="822" y="1524"/>
-                    </a:cubicBezTo>
-                    <a:cubicBezTo>
-                      <a:pt x="850" y="1524"/>
-                      <a:pt x="879" y="1519"/>
-                      <a:pt x="906" y="1508"/>
-                    </a:cubicBezTo>
-                    <a:cubicBezTo>
-                      <a:pt x="1052" y="1450"/>
-                      <a:pt x="1115" y="1277"/>
-                      <a:pt x="1036" y="1141"/>
-                    </a:cubicBezTo>
-                    <a:cubicBezTo>
-                      <a:pt x="852" y="826"/>
-                      <a:pt x="687" y="499"/>
-                      <a:pt x="543" y="164"/>
-                    </a:cubicBezTo>
-                    <a:cubicBezTo>
-                      <a:pt x="499" y="63"/>
-                      <a:pt x="400" y="1"/>
-                      <a:pt x="296" y="1"/>
-                    </a:cubicBezTo>
-                    <a:close/>
-                  </a:path>
-                </a:pathLst>
-              </a:custGeom>
-              <a:solidFill>
-                <a:srgbClr val="667E92"/>
-              </a:solidFill>
-              <a:ln>
-                <a:noFill/>
-              </a:ln>
-            </p:spPr>
-            <p:txBody>
-              <a:bodyPr spcFirstLastPara="1" wrap="square" lIns="91425" tIns="91425" rIns="91425" bIns="91425" anchor="ctr" anchorCtr="0">
-                <a:noAutofit/>
-              </a:bodyPr>
-              <a:lstStyle/>
-              <a:p>
-                <a:pPr marL="0" lvl="0" indent="0" algn="l" rtl="0">
-                  <a:spcBef>
-                    <a:spcPts val="0"/>
-                  </a:spcBef>
-                  <a:spcAft>
-                    <a:spcPts val="0"/>
-                  </a:spcAft>
-                  <a:buNone/>
-                </a:pPr>
-                <a:endParaRPr/>
-              </a:p>
-            </p:txBody>
-          </p:sp>
-          <p:sp>
-            <p:nvSpPr>
-              <p:cNvPr id="307" name="Google Shape;9790;p77">
-                <a:extLst>
-                  <a:ext uri="{FF2B5EF4-FFF2-40B4-BE49-F238E27FC236}">
-                    <a16:creationId xmlns:a16="http://schemas.microsoft.com/office/drawing/2014/main" id="{0F562BCB-2B5A-BC5F-53F9-0EEB3979E9E1}"/>
-                  </a:ext>
-                </a:extLst>
-              </p:cNvPr>
-              <p:cNvSpPr/>
-              <p:nvPr/>
-            </p:nvSpPr>
-            <p:spPr>
-              <a:xfrm>
-                <a:off x="4207607" y="1699506"/>
-                <a:ext cx="12045" cy="27153"/>
-              </a:xfrm>
-              <a:custGeom>
-                <a:avLst/>
-                <a:gdLst/>
-                <a:ahLst/>
-                <a:cxnLst/>
-                <a:rect l="l" t="t" r="r" b="b"/>
-                <a:pathLst>
-                  <a:path w="944" h="2128" extrusionOk="0">
-                    <a:moveTo>
-                      <a:pt x="273" y="0"/>
-                    </a:moveTo>
-                    <a:cubicBezTo>
-                      <a:pt x="261" y="0"/>
-                      <a:pt x="249" y="1"/>
-                      <a:pt x="238" y="3"/>
-                    </a:cubicBezTo>
-                    <a:cubicBezTo>
-                      <a:pt x="98" y="22"/>
-                      <a:pt x="1" y="150"/>
-                      <a:pt x="20" y="289"/>
-                    </a:cubicBezTo>
-                    <a:lnTo>
-                      <a:pt x="21" y="289"/>
-                    </a:lnTo>
-                    <a:cubicBezTo>
-                      <a:pt x="105" y="854"/>
-                      <a:pt x="238" y="1412"/>
-                      <a:pt x="417" y="1955"/>
-                    </a:cubicBezTo>
-                    <a:cubicBezTo>
-                      <a:pt x="454" y="2061"/>
-                      <a:pt x="553" y="2127"/>
-                      <a:pt x="658" y="2127"/>
-                    </a:cubicBezTo>
-                    <a:cubicBezTo>
-                      <a:pt x="686" y="2127"/>
-                      <a:pt x="714" y="2123"/>
-                      <a:pt x="742" y="2113"/>
-                    </a:cubicBezTo>
-                    <a:cubicBezTo>
-                      <a:pt x="875" y="2067"/>
-                      <a:pt x="944" y="1923"/>
-                      <a:pt x="899" y="1790"/>
-                    </a:cubicBezTo>
-                    <a:cubicBezTo>
-                      <a:pt x="731" y="1279"/>
-                      <a:pt x="604" y="754"/>
-                      <a:pt x="526" y="220"/>
-                    </a:cubicBezTo>
-                    <a:cubicBezTo>
-                      <a:pt x="508" y="93"/>
-                      <a:pt x="398" y="0"/>
-                      <a:pt x="273" y="0"/>
-                    </a:cubicBezTo>
-                    <a:close/>
-                  </a:path>
-                </a:pathLst>
-              </a:custGeom>
-              <a:solidFill>
-                <a:srgbClr val="667E92"/>
-              </a:solidFill>
-              <a:ln>
-                <a:noFill/>
-              </a:ln>
-            </p:spPr>
-            <p:txBody>
-              <a:bodyPr spcFirstLastPara="1" wrap="square" lIns="91425" tIns="91425" rIns="91425" bIns="91425" anchor="ctr" anchorCtr="0">
-                <a:noAutofit/>
-              </a:bodyPr>
-              <a:lstStyle/>
-              <a:p>
-                <a:pPr marL="0" lvl="0" indent="0" algn="l" rtl="0">
-                  <a:spcBef>
-                    <a:spcPts val="0"/>
-                  </a:spcBef>
-                  <a:spcAft>
-                    <a:spcPts val="0"/>
-                  </a:spcAft>
-                  <a:buNone/>
-                </a:pPr>
-                <a:endParaRPr/>
-              </a:p>
-            </p:txBody>
-          </p:sp>
-        </p:grpSp>
-        <p:sp>
-          <p:nvSpPr>
-            <p:cNvPr id="254" name="Google Shape;9791;p77">
-              <a:extLst>
-                <a:ext uri="{FF2B5EF4-FFF2-40B4-BE49-F238E27FC236}">
-                  <a16:creationId xmlns:a16="http://schemas.microsoft.com/office/drawing/2014/main" id="{2E07EE1C-BFA7-C68E-9709-499801F8E5AF}"/>
-                </a:ext>
-              </a:extLst>
-            </p:cNvPr>
-            <p:cNvSpPr/>
-            <p:nvPr/>
-          </p:nvSpPr>
-          <p:spPr>
-            <a:xfrm>
-              <a:off x="4250519" y="1416170"/>
-              <a:ext cx="26783" cy="52303"/>
-            </a:xfrm>
-            <a:custGeom>
-              <a:avLst/>
-              <a:gdLst/>
-              <a:ahLst/>
-              <a:cxnLst/>
-              <a:rect l="l" t="t" r="r" b="b"/>
-              <a:pathLst>
-                <a:path w="2099" h="4099" extrusionOk="0">
-                  <a:moveTo>
-                    <a:pt x="412" y="1"/>
-                  </a:moveTo>
-                  <a:cubicBezTo>
-                    <a:pt x="358" y="1"/>
-                    <a:pt x="305" y="37"/>
-                    <a:pt x="292" y="98"/>
-                  </a:cubicBezTo>
-                  <a:lnTo>
-                    <a:pt x="18" y="1357"/>
-                  </a:lnTo>
-                  <a:cubicBezTo>
-                    <a:pt x="1" y="1436"/>
-                    <a:pt x="62" y="1506"/>
-                    <a:pt x="139" y="1506"/>
-                  </a:cubicBezTo>
-                  <a:cubicBezTo>
-                    <a:pt x="149" y="1506"/>
-                    <a:pt x="158" y="1505"/>
-                    <a:pt x="169" y="1502"/>
-                  </a:cubicBezTo>
-                  <a:lnTo>
-                    <a:pt x="503" y="1416"/>
-                  </a:lnTo>
-                  <a:cubicBezTo>
-                    <a:pt x="745" y="2317"/>
-                    <a:pt x="1113" y="3181"/>
-                    <a:pt x="1597" y="3981"/>
-                  </a:cubicBezTo>
-                  <a:cubicBezTo>
-                    <a:pt x="1644" y="4057"/>
-                    <a:pt x="1725" y="4099"/>
-                    <a:pt x="1809" y="4099"/>
-                  </a:cubicBezTo>
-                  <a:cubicBezTo>
-                    <a:pt x="1856" y="4099"/>
-                    <a:pt x="1903" y="4086"/>
-                    <a:pt x="1946" y="4058"/>
-                  </a:cubicBezTo>
-                  <a:cubicBezTo>
-                    <a:pt x="2063" y="3980"/>
-                    <a:pt x="2098" y="3823"/>
-                    <a:pt x="2024" y="3703"/>
-                  </a:cubicBezTo>
-                  <a:cubicBezTo>
-                    <a:pt x="1571" y="2950"/>
-                    <a:pt x="1225" y="2138"/>
-                    <a:pt x="998" y="1291"/>
-                  </a:cubicBezTo>
-                  <a:lnTo>
-                    <a:pt x="1283" y="1217"/>
-                  </a:lnTo>
-                  <a:cubicBezTo>
-                    <a:pt x="1373" y="1195"/>
-                    <a:pt x="1406" y="1086"/>
-                    <a:pt x="1347" y="1017"/>
-                  </a:cubicBezTo>
-                  <a:lnTo>
-                    <a:pt x="505" y="44"/>
-                  </a:lnTo>
-                  <a:cubicBezTo>
-                    <a:pt x="479" y="14"/>
-                    <a:pt x="445" y="1"/>
-                    <a:pt x="412" y="1"/>
-                  </a:cubicBezTo>
-                  <a:close/>
-                </a:path>
-              </a:pathLst>
-            </a:custGeom>
-            <a:solidFill>
-              <a:srgbClr val="667E92"/>
-            </a:solidFill>
-            <a:ln>
-              <a:noFill/>
-            </a:ln>
-          </p:spPr>
-          <p:txBody>
-            <a:bodyPr spcFirstLastPara="1" wrap="square" lIns="91425" tIns="91425" rIns="91425" bIns="91425" anchor="ctr" anchorCtr="0">
-              <a:noAutofit/>
-            </a:bodyPr>
-            <a:lstStyle/>
-            <a:p>
-              <a:pPr marL="0" lvl="0" indent="0" algn="l" rtl="0">
-                <a:spcBef>
-                  <a:spcPts val="0"/>
-                </a:spcBef>
-                <a:spcAft>
-                  <a:spcPts val="0"/>
-                </a:spcAft>
-                <a:buNone/>
-              </a:pPr>
-              <a:endParaRPr/>
-            </a:p>
-          </p:txBody>
-        </p:sp>
-        <p:sp>
-          <p:nvSpPr>
-            <p:cNvPr id="266" name="Google Shape;9792;p77">
-              <a:extLst>
-                <a:ext uri="{FF2B5EF4-FFF2-40B4-BE49-F238E27FC236}">
-                  <a16:creationId xmlns:a16="http://schemas.microsoft.com/office/drawing/2014/main" id="{D609D740-BE34-F9B7-83EA-FE252AFF2628}"/>
-                </a:ext>
-              </a:extLst>
-            </p:cNvPr>
-            <p:cNvSpPr/>
-            <p:nvPr/>
-          </p:nvSpPr>
-          <p:spPr>
-            <a:xfrm>
-              <a:off x="4276166" y="1471370"/>
-              <a:ext cx="24359" cy="25290"/>
-            </a:xfrm>
-            <a:custGeom>
-              <a:avLst/>
-              <a:gdLst/>
-              <a:ahLst/>
-              <a:cxnLst/>
-              <a:rect l="l" t="t" r="r" b="b"/>
-              <a:pathLst>
-                <a:path w="1909" h="1982" extrusionOk="0">
-                  <a:moveTo>
-                    <a:pt x="291" y="0"/>
-                  </a:moveTo>
-                  <a:cubicBezTo>
-                    <a:pt x="243" y="0"/>
-                    <a:pt x="195" y="14"/>
-                    <a:pt x="152" y="41"/>
-                  </a:cubicBezTo>
-                  <a:cubicBezTo>
-                    <a:pt x="30" y="121"/>
-                    <a:pt x="0" y="285"/>
-                    <a:pt x="85" y="403"/>
-                  </a:cubicBezTo>
-                  <a:cubicBezTo>
-                    <a:pt x="380" y="810"/>
-                    <a:pt x="706" y="1193"/>
-                    <a:pt x="1062" y="1548"/>
-                  </a:cubicBezTo>
-                  <a:cubicBezTo>
-                    <a:pt x="1190" y="1678"/>
-                    <a:pt x="1323" y="1801"/>
-                    <a:pt x="1459" y="1921"/>
-                  </a:cubicBezTo>
-                  <a:cubicBezTo>
-                    <a:pt x="1507" y="1962"/>
-                    <a:pt x="1566" y="1981"/>
-                    <a:pt x="1624" y="1981"/>
-                  </a:cubicBezTo>
-                  <a:cubicBezTo>
-                    <a:pt x="1695" y="1981"/>
-                    <a:pt x="1766" y="1952"/>
-                    <a:pt x="1816" y="1894"/>
-                  </a:cubicBezTo>
-                  <a:cubicBezTo>
-                    <a:pt x="1909" y="1788"/>
-                    <a:pt x="1898" y="1628"/>
-                    <a:pt x="1794" y="1535"/>
-                  </a:cubicBezTo>
-                  <a:cubicBezTo>
-                    <a:pt x="1665" y="1423"/>
-                    <a:pt x="1542" y="1308"/>
-                    <a:pt x="1422" y="1188"/>
-                  </a:cubicBezTo>
-                  <a:cubicBezTo>
-                    <a:pt x="1087" y="851"/>
-                    <a:pt x="778" y="490"/>
-                    <a:pt x="500" y="107"/>
-                  </a:cubicBezTo>
-                  <a:cubicBezTo>
-                    <a:pt x="449" y="38"/>
-                    <a:pt x="371" y="0"/>
-                    <a:pt x="291" y="0"/>
-                  </a:cubicBezTo>
-                  <a:close/>
-                </a:path>
-              </a:pathLst>
-            </a:custGeom>
-            <a:solidFill>
-              <a:srgbClr val="667E92"/>
-            </a:solidFill>
-            <a:ln>
-              <a:noFill/>
-            </a:ln>
-          </p:spPr>
-          <p:txBody>
-            <a:bodyPr spcFirstLastPara="1" wrap="square" lIns="91425" tIns="91425" rIns="91425" bIns="91425" anchor="ctr" anchorCtr="0">
-              <a:noAutofit/>
-            </a:bodyPr>
-            <a:lstStyle/>
-            <a:p>
-              <a:pPr marL="0" lvl="0" indent="0" algn="l" rtl="0">
-                <a:spcBef>
-                  <a:spcPts val="0"/>
-                </a:spcBef>
-                <a:spcAft>
-                  <a:spcPts val="0"/>
-                </a:spcAft>
-                <a:buNone/>
-              </a:pPr>
-              <a:endParaRPr/>
-            </a:p>
-          </p:txBody>
-        </p:sp>
-        <p:sp>
-          <p:nvSpPr>
-            <p:cNvPr id="267" name="Google Shape;9793;p77">
-              <a:extLst>
-                <a:ext uri="{FF2B5EF4-FFF2-40B4-BE49-F238E27FC236}">
-                  <a16:creationId xmlns:a16="http://schemas.microsoft.com/office/drawing/2014/main" id="{93FE9F56-D287-DBF4-2752-8F48FC6C3B3F}"/>
-                </a:ext>
-              </a:extLst>
-            </p:cNvPr>
-            <p:cNvSpPr/>
-            <p:nvPr/>
-          </p:nvSpPr>
-          <p:spPr>
-            <a:xfrm>
-              <a:off x="4330231" y="1513121"/>
-              <a:ext cx="21462" cy="10986"/>
-            </a:xfrm>
-            <a:custGeom>
-              <a:avLst/>
-              <a:gdLst/>
-              <a:ahLst/>
-              <a:cxnLst/>
-              <a:rect l="l" t="t" r="r" b="b"/>
-              <a:pathLst>
-                <a:path w="1682" h="861" extrusionOk="0">
-                  <a:moveTo>
-                    <a:pt x="311" y="0"/>
-                  </a:moveTo>
-                  <a:cubicBezTo>
-                    <a:pt x="211" y="0"/>
-                    <a:pt x="116" y="56"/>
-                    <a:pt x="69" y="151"/>
-                  </a:cubicBezTo>
-                  <a:lnTo>
-                    <a:pt x="53" y="185"/>
-                  </a:lnTo>
-                  <a:cubicBezTo>
-                    <a:pt x="0" y="292"/>
-                    <a:pt x="48" y="423"/>
-                    <a:pt x="160" y="468"/>
-                  </a:cubicBezTo>
-                  <a:cubicBezTo>
-                    <a:pt x="533" y="619"/>
-                    <a:pt x="916" y="747"/>
-                    <a:pt x="1307" y="851"/>
-                  </a:cubicBezTo>
-                  <a:cubicBezTo>
-                    <a:pt x="1331" y="857"/>
-                    <a:pt x="1355" y="861"/>
-                    <a:pt x="1379" y="861"/>
-                  </a:cubicBezTo>
-                  <a:cubicBezTo>
-                    <a:pt x="1480" y="861"/>
-                    <a:pt x="1576" y="806"/>
-                    <a:pt x="1618" y="713"/>
-                  </a:cubicBezTo>
-                  <a:cubicBezTo>
-                    <a:pt x="1682" y="569"/>
-                    <a:pt x="1602" y="403"/>
-                    <a:pt x="1451" y="363"/>
-                  </a:cubicBezTo>
-                  <a:cubicBezTo>
-                    <a:pt x="1097" y="268"/>
-                    <a:pt x="751" y="154"/>
-                    <a:pt x="412" y="20"/>
-                  </a:cubicBezTo>
-                  <a:cubicBezTo>
-                    <a:pt x="379" y="7"/>
-                    <a:pt x="345" y="0"/>
-                    <a:pt x="311" y="0"/>
-                  </a:cubicBezTo>
-                  <a:close/>
-                </a:path>
-              </a:pathLst>
-            </a:custGeom>
-            <a:solidFill>
-              <a:srgbClr val="667E92"/>
-            </a:solidFill>
-            <a:ln>
-              <a:noFill/>
-            </a:ln>
-          </p:spPr>
-          <p:txBody>
-            <a:bodyPr spcFirstLastPara="1" wrap="square" lIns="91425" tIns="91425" rIns="91425" bIns="91425" anchor="ctr" anchorCtr="0">
-              <a:noAutofit/>
-            </a:bodyPr>
-            <a:lstStyle/>
-            <a:p>
-              <a:pPr marL="0" lvl="0" indent="0" algn="l" rtl="0">
-                <a:spcBef>
-                  <a:spcPts val="0"/>
-                </a:spcBef>
-                <a:spcAft>
-                  <a:spcPts val="0"/>
-                </a:spcAft>
-                <a:buNone/>
-              </a:pPr>
-              <a:endParaRPr/>
-            </a:p>
-          </p:txBody>
-        </p:sp>
-        <p:sp>
-          <p:nvSpPr>
-            <p:cNvPr id="268" name="Google Shape;9794;p77">
-              <a:extLst>
-                <a:ext uri="{FF2B5EF4-FFF2-40B4-BE49-F238E27FC236}">
-                  <a16:creationId xmlns:a16="http://schemas.microsoft.com/office/drawing/2014/main" id="{CF6F4F2F-B99E-5745-2DC9-5384DA1228F8}"/>
-                </a:ext>
-              </a:extLst>
-            </p:cNvPr>
-            <p:cNvSpPr/>
-            <p:nvPr/>
-          </p:nvSpPr>
-          <p:spPr>
-            <a:xfrm>
-              <a:off x="4302005" y="1497298"/>
-              <a:ext cx="25469" cy="17647"/>
-            </a:xfrm>
-            <a:custGeom>
-              <a:avLst/>
-              <a:gdLst/>
-              <a:ahLst/>
-              <a:cxnLst/>
-              <a:rect l="l" t="t" r="r" b="b"/>
-              <a:pathLst>
-                <a:path w="1996" h="1383" extrusionOk="0">
-                  <a:moveTo>
-                    <a:pt x="289" y="1"/>
-                  </a:moveTo>
-                  <a:cubicBezTo>
-                    <a:pt x="212" y="1"/>
-                    <a:pt x="136" y="36"/>
-                    <a:pt x="86" y="102"/>
-                  </a:cubicBezTo>
-                  <a:cubicBezTo>
-                    <a:pt x="1" y="214"/>
-                    <a:pt x="23" y="374"/>
-                    <a:pt x="135" y="459"/>
-                  </a:cubicBezTo>
-                  <a:cubicBezTo>
-                    <a:pt x="595" y="800"/>
-                    <a:pt x="1082" y="1100"/>
-                    <a:pt x="1592" y="1356"/>
-                  </a:cubicBezTo>
-                  <a:cubicBezTo>
-                    <a:pt x="1629" y="1374"/>
-                    <a:pt x="1667" y="1382"/>
-                    <a:pt x="1705" y="1382"/>
-                  </a:cubicBezTo>
-                  <a:cubicBezTo>
-                    <a:pt x="1799" y="1382"/>
-                    <a:pt x="1891" y="1329"/>
-                    <a:pt x="1935" y="1239"/>
-                  </a:cubicBezTo>
-                  <a:cubicBezTo>
-                    <a:pt x="1996" y="1113"/>
-                    <a:pt x="1943" y="960"/>
-                    <a:pt x="1817" y="898"/>
-                  </a:cubicBezTo>
-                  <a:cubicBezTo>
-                    <a:pt x="1336" y="656"/>
-                    <a:pt x="875" y="373"/>
-                    <a:pt x="443" y="52"/>
-                  </a:cubicBezTo>
-                  <a:cubicBezTo>
-                    <a:pt x="397" y="18"/>
-                    <a:pt x="343" y="1"/>
-                    <a:pt x="289" y="1"/>
-                  </a:cubicBezTo>
-                  <a:close/>
-                </a:path>
-              </a:pathLst>
-            </a:custGeom>
-            <a:solidFill>
-              <a:srgbClr val="667E92"/>
-            </a:solidFill>
-            <a:ln>
-              <a:noFill/>
-            </a:ln>
-          </p:spPr>
-          <p:txBody>
-            <a:bodyPr spcFirstLastPara="1" wrap="square" lIns="91425" tIns="91425" rIns="91425" bIns="91425" anchor="ctr" anchorCtr="0">
-              <a:noAutofit/>
-            </a:bodyPr>
-            <a:lstStyle/>
-            <a:p>
-              <a:pPr marL="0" lvl="0" indent="0" algn="l" rtl="0">
-                <a:spcBef>
-                  <a:spcPts val="0"/>
-                </a:spcBef>
-                <a:spcAft>
-                  <a:spcPts val="0"/>
-                </a:spcAft>
-                <a:buNone/>
-              </a:pPr>
-              <a:endParaRPr/>
-            </a:p>
-          </p:txBody>
-        </p:sp>
-        <p:grpSp>
-          <p:nvGrpSpPr>
-            <p:cNvPr id="272" name="Google Shape;9795;p77">
-              <a:extLst>
-                <a:ext uri="{FF2B5EF4-FFF2-40B4-BE49-F238E27FC236}">
-                  <a16:creationId xmlns:a16="http://schemas.microsoft.com/office/drawing/2014/main" id="{4E3A90A1-215E-6AAB-5C8B-1F318A1A3A46}"/>
-                </a:ext>
-              </a:extLst>
-            </p:cNvPr>
-            <p:cNvGrpSpPr/>
-            <p:nvPr/>
-          </p:nvGrpSpPr>
-          <p:grpSpPr>
-            <a:xfrm>
-              <a:off x="4889463" y="1423737"/>
-              <a:ext cx="29552" cy="142899"/>
-              <a:chOff x="4889463" y="1423737"/>
-              <a:chExt cx="29552" cy="142899"/>
-            </a:xfrm>
-          </p:grpSpPr>
-          <p:sp>
-            <p:nvSpPr>
-              <p:cNvPr id="298" name="Google Shape;9796;p77">
-                <a:extLst>
-                  <a:ext uri="{FF2B5EF4-FFF2-40B4-BE49-F238E27FC236}">
-                    <a16:creationId xmlns:a16="http://schemas.microsoft.com/office/drawing/2014/main" id="{53283124-5020-F049-6FF1-BB2C7A12DDD8}"/>
-                  </a:ext>
-                </a:extLst>
-              </p:cNvPr>
-              <p:cNvSpPr/>
-              <p:nvPr/>
-            </p:nvSpPr>
-            <p:spPr>
-              <a:xfrm>
-                <a:off x="4889463" y="1515647"/>
-                <a:ext cx="26158" cy="50989"/>
-              </a:xfrm>
-              <a:custGeom>
-                <a:avLst/>
-                <a:gdLst/>
-                <a:ahLst/>
-                <a:cxnLst/>
-                <a:rect l="l" t="t" r="r" b="b"/>
-                <a:pathLst>
-                  <a:path w="2050" h="3996" extrusionOk="0">
-                    <a:moveTo>
-                      <a:pt x="1772" y="0"/>
-                    </a:moveTo>
-                    <a:cubicBezTo>
-                      <a:pt x="1653" y="0"/>
-                      <a:pt x="1547" y="82"/>
-                      <a:pt x="1518" y="201"/>
-                    </a:cubicBezTo>
-                    <a:cubicBezTo>
-                      <a:pt x="1307" y="1053"/>
-                      <a:pt x="977" y="1872"/>
-                      <a:pt x="540" y="2634"/>
-                    </a:cubicBezTo>
-                    <a:lnTo>
-                      <a:pt x="285" y="2482"/>
-                    </a:lnTo>
-                    <a:cubicBezTo>
-                      <a:pt x="265" y="2470"/>
-                      <a:pt x="244" y="2465"/>
-                      <a:pt x="223" y="2465"/>
-                    </a:cubicBezTo>
-                    <a:cubicBezTo>
-                      <a:pt x="162" y="2465"/>
-                      <a:pt x="104" y="2511"/>
-                      <a:pt x="99" y="2579"/>
-                    </a:cubicBezTo>
-                    <a:lnTo>
-                      <a:pt x="6" y="3864"/>
-                    </a:lnTo>
-                    <a:cubicBezTo>
-                      <a:pt x="0" y="3939"/>
-                      <a:pt x="62" y="3995"/>
-                      <a:pt x="129" y="3995"/>
-                    </a:cubicBezTo>
-                    <a:cubicBezTo>
-                      <a:pt x="152" y="3995"/>
-                      <a:pt x="174" y="3989"/>
-                      <a:pt x="195" y="3976"/>
-                    </a:cubicBezTo>
-                    <a:lnTo>
-                      <a:pt x="1278" y="3279"/>
-                    </a:lnTo>
-                    <a:cubicBezTo>
-                      <a:pt x="1355" y="3229"/>
-                      <a:pt x="1353" y="3117"/>
-                      <a:pt x="1275" y="3071"/>
-                    </a:cubicBezTo>
-                    <a:lnTo>
-                      <a:pt x="978" y="2893"/>
-                    </a:lnTo>
-                    <a:cubicBezTo>
-                      <a:pt x="1444" y="2085"/>
-                      <a:pt x="1794" y="1213"/>
-                      <a:pt x="2018" y="307"/>
-                    </a:cubicBezTo>
-                    <a:cubicBezTo>
-                      <a:pt x="2050" y="171"/>
-                      <a:pt x="1963" y="35"/>
-                      <a:pt x="1826" y="6"/>
-                    </a:cubicBezTo>
-                    <a:cubicBezTo>
-                      <a:pt x="1808" y="2"/>
-                      <a:pt x="1790" y="0"/>
-                      <a:pt x="1772" y="0"/>
-                    </a:cubicBezTo>
-                    <a:close/>
-                  </a:path>
-                </a:pathLst>
-              </a:custGeom>
-              <a:solidFill>
-                <a:srgbClr val="667E92"/>
-              </a:solidFill>
-              <a:ln>
-                <a:noFill/>
-              </a:ln>
-            </p:spPr>
-            <p:txBody>
-              <a:bodyPr spcFirstLastPara="1" wrap="square" lIns="91425" tIns="91425" rIns="91425" bIns="91425" anchor="ctr" anchorCtr="0">
-                <a:noAutofit/>
-              </a:bodyPr>
-              <a:lstStyle/>
-              <a:p>
-                <a:pPr marL="0" lvl="0" indent="0" algn="l" rtl="0">
-                  <a:spcBef>
-                    <a:spcPts val="0"/>
-                  </a:spcBef>
-                  <a:spcAft>
-                    <a:spcPts val="0"/>
-                  </a:spcAft>
-                  <a:buNone/>
-                </a:pPr>
-                <a:endParaRPr/>
-              </a:p>
-            </p:txBody>
-          </p:sp>
-          <p:sp>
-            <p:nvSpPr>
-              <p:cNvPr id="300" name="Google Shape;9797;p77">
-                <a:extLst>
-                  <a:ext uri="{FF2B5EF4-FFF2-40B4-BE49-F238E27FC236}">
-                    <a16:creationId xmlns:a16="http://schemas.microsoft.com/office/drawing/2014/main" id="{EDCE140B-193F-8484-2F8D-362F33632E6D}"/>
-                  </a:ext>
-                </a:extLst>
-              </p:cNvPr>
-              <p:cNvSpPr/>
-              <p:nvPr/>
-            </p:nvSpPr>
-            <p:spPr>
-              <a:xfrm>
-                <a:off x="4910772" y="1479256"/>
-                <a:ext cx="8243" cy="31785"/>
-              </a:xfrm>
-              <a:custGeom>
-                <a:avLst/>
-                <a:gdLst/>
-                <a:ahLst/>
-                <a:cxnLst/>
-                <a:rect l="l" t="t" r="r" b="b"/>
-                <a:pathLst>
-                  <a:path w="646" h="2491" extrusionOk="0">
-                    <a:moveTo>
-                      <a:pt x="375" y="0"/>
-                    </a:moveTo>
-                    <a:cubicBezTo>
-                      <a:pt x="368" y="0"/>
-                      <a:pt x="361" y="1"/>
-                      <a:pt x="354" y="1"/>
-                    </a:cubicBezTo>
-                    <a:cubicBezTo>
-                      <a:pt x="216" y="11"/>
-                      <a:pt x="111" y="129"/>
-                      <a:pt x="119" y="269"/>
-                    </a:cubicBezTo>
-                    <a:cubicBezTo>
-                      <a:pt x="128" y="438"/>
-                      <a:pt x="135" y="607"/>
-                      <a:pt x="135" y="776"/>
-                    </a:cubicBezTo>
-                    <a:cubicBezTo>
-                      <a:pt x="135" y="1252"/>
-                      <a:pt x="96" y="1724"/>
-                      <a:pt x="23" y="2193"/>
-                    </a:cubicBezTo>
-                    <a:cubicBezTo>
-                      <a:pt x="0" y="2328"/>
-                      <a:pt x="88" y="2458"/>
-                      <a:pt x="223" y="2485"/>
-                    </a:cubicBezTo>
-                    <a:cubicBezTo>
-                      <a:pt x="240" y="2488"/>
-                      <a:pt x="257" y="2490"/>
-                      <a:pt x="274" y="2490"/>
-                    </a:cubicBezTo>
-                    <a:cubicBezTo>
-                      <a:pt x="396" y="2490"/>
-                      <a:pt x="504" y="2403"/>
-                      <a:pt x="526" y="2278"/>
-                    </a:cubicBezTo>
-                    <a:cubicBezTo>
-                      <a:pt x="604" y="1782"/>
-                      <a:pt x="644" y="1279"/>
-                      <a:pt x="646" y="776"/>
-                    </a:cubicBezTo>
-                    <a:cubicBezTo>
-                      <a:pt x="646" y="595"/>
-                      <a:pt x="638" y="413"/>
-                      <a:pt x="626" y="232"/>
-                    </a:cubicBezTo>
-                    <a:cubicBezTo>
-                      <a:pt x="616" y="101"/>
-                      <a:pt x="505" y="0"/>
-                      <a:pt x="375" y="0"/>
-                    </a:cubicBezTo>
-                    <a:close/>
-                  </a:path>
-                </a:pathLst>
-              </a:custGeom>
-              <a:solidFill>
-                <a:srgbClr val="667E92"/>
-              </a:solidFill>
-              <a:ln>
-                <a:noFill/>
-              </a:ln>
-            </p:spPr>
-            <p:txBody>
-              <a:bodyPr spcFirstLastPara="1" wrap="square" lIns="91425" tIns="91425" rIns="91425" bIns="91425" anchor="ctr" anchorCtr="0">
-                <a:noAutofit/>
-              </a:bodyPr>
-              <a:lstStyle/>
-              <a:p>
-                <a:pPr marL="0" lvl="0" indent="0" algn="l" rtl="0">
-                  <a:spcBef>
-                    <a:spcPts val="0"/>
-                  </a:spcBef>
-                  <a:spcAft>
-                    <a:spcPts val="0"/>
-                  </a:spcAft>
-                  <a:buNone/>
-                </a:pPr>
-                <a:endParaRPr/>
-              </a:p>
-            </p:txBody>
-          </p:sp>
-          <p:sp>
-            <p:nvSpPr>
-              <p:cNvPr id="302" name="Google Shape;9798;p77">
-                <a:extLst>
-                  <a:ext uri="{FF2B5EF4-FFF2-40B4-BE49-F238E27FC236}">
-                    <a16:creationId xmlns:a16="http://schemas.microsoft.com/office/drawing/2014/main" id="{EBE29ABC-D7E6-AD84-0CEC-AD37178234F7}"/>
-                  </a:ext>
-                </a:extLst>
-              </p:cNvPr>
-              <p:cNvSpPr/>
-              <p:nvPr/>
-            </p:nvSpPr>
-            <p:spPr>
-              <a:xfrm>
-                <a:off x="4895052" y="1423737"/>
-                <a:ext cx="14215" cy="19446"/>
-              </a:xfrm>
-              <a:custGeom>
-                <a:avLst/>
-                <a:gdLst/>
-                <a:ahLst/>
-                <a:cxnLst/>
-                <a:rect l="l" t="t" r="r" b="b"/>
-                <a:pathLst>
-                  <a:path w="1114" h="1524" extrusionOk="0">
-                    <a:moveTo>
-                      <a:pt x="293" y="1"/>
-                    </a:moveTo>
-                    <a:cubicBezTo>
-                      <a:pt x="265" y="1"/>
-                      <a:pt x="236" y="5"/>
-                      <a:pt x="209" y="16"/>
-                    </a:cubicBezTo>
-                    <a:cubicBezTo>
-                      <a:pt x="62" y="74"/>
-                      <a:pt x="1" y="246"/>
-                      <a:pt x="79" y="383"/>
-                    </a:cubicBezTo>
-                    <a:cubicBezTo>
-                      <a:pt x="262" y="698"/>
-                      <a:pt x="427" y="1025"/>
-                      <a:pt x="573" y="1359"/>
-                    </a:cubicBezTo>
-                    <a:cubicBezTo>
-                      <a:pt x="615" y="1461"/>
-                      <a:pt x="714" y="1523"/>
-                      <a:pt x="819" y="1523"/>
-                    </a:cubicBezTo>
-                    <a:cubicBezTo>
-                      <a:pt x="848" y="1523"/>
-                      <a:pt x="878" y="1518"/>
-                      <a:pt x="907" y="1508"/>
-                    </a:cubicBezTo>
-                    <a:lnTo>
-                      <a:pt x="942" y="1495"/>
-                    </a:lnTo>
-                    <a:cubicBezTo>
-                      <a:pt x="1056" y="1457"/>
-                      <a:pt x="1114" y="1331"/>
-                      <a:pt x="1067" y="1220"/>
-                    </a:cubicBezTo>
-                    <a:cubicBezTo>
-                      <a:pt x="910" y="849"/>
-                      <a:pt x="729" y="488"/>
-                      <a:pt x="528" y="139"/>
-                    </a:cubicBezTo>
-                    <a:cubicBezTo>
-                      <a:pt x="478" y="54"/>
-                      <a:pt x="387" y="1"/>
-                      <a:pt x="293" y="1"/>
-                    </a:cubicBezTo>
-                    <a:close/>
-                  </a:path>
-                </a:pathLst>
-              </a:custGeom>
-              <a:solidFill>
-                <a:srgbClr val="667E92"/>
-              </a:solidFill>
-              <a:ln>
-                <a:noFill/>
-              </a:ln>
-            </p:spPr>
-            <p:txBody>
-              <a:bodyPr spcFirstLastPara="1" wrap="square" lIns="91425" tIns="91425" rIns="91425" bIns="91425" anchor="ctr" anchorCtr="0">
-                <a:noAutofit/>
-              </a:bodyPr>
-              <a:lstStyle/>
-              <a:p>
-                <a:pPr marL="0" lvl="0" indent="0" algn="l" rtl="0">
-                  <a:spcBef>
-                    <a:spcPts val="0"/>
-                  </a:spcBef>
-                  <a:spcAft>
-                    <a:spcPts val="0"/>
-                  </a:spcAft>
-                  <a:buNone/>
-                </a:pPr>
-                <a:endParaRPr/>
-              </a:p>
-            </p:txBody>
-          </p:sp>
-          <p:sp>
-            <p:nvSpPr>
-              <p:cNvPr id="303" name="Google Shape;9799;p77">
-                <a:extLst>
-                  <a:ext uri="{FF2B5EF4-FFF2-40B4-BE49-F238E27FC236}">
-                    <a16:creationId xmlns:a16="http://schemas.microsoft.com/office/drawing/2014/main" id="{F829C06A-B451-0670-E70D-885D61DC2084}"/>
-                  </a:ext>
-                </a:extLst>
-              </p:cNvPr>
-              <p:cNvSpPr/>
-              <p:nvPr/>
-            </p:nvSpPr>
-            <p:spPr>
-              <a:xfrm>
-                <a:off x="4905783" y="1447292"/>
-                <a:ext cx="12071" cy="27153"/>
-              </a:xfrm>
-              <a:custGeom>
-                <a:avLst/>
-                <a:gdLst/>
-                <a:ahLst/>
-                <a:cxnLst/>
-                <a:rect l="l" t="t" r="r" b="b"/>
-                <a:pathLst>
-                  <a:path w="946" h="2128" extrusionOk="0">
-                    <a:moveTo>
-                      <a:pt x="288" y="0"/>
-                    </a:moveTo>
-                    <a:cubicBezTo>
-                      <a:pt x="260" y="0"/>
-                      <a:pt x="232" y="5"/>
-                      <a:pt x="204" y="15"/>
-                    </a:cubicBezTo>
-                    <a:cubicBezTo>
-                      <a:pt x="71" y="61"/>
-                      <a:pt x="1" y="205"/>
-                      <a:pt x="47" y="338"/>
-                    </a:cubicBezTo>
-                    <a:cubicBezTo>
-                      <a:pt x="215" y="850"/>
-                      <a:pt x="342" y="1376"/>
-                      <a:pt x="420" y="1909"/>
-                    </a:cubicBezTo>
-                    <a:cubicBezTo>
-                      <a:pt x="438" y="2036"/>
-                      <a:pt x="548" y="2128"/>
-                      <a:pt x="673" y="2128"/>
-                    </a:cubicBezTo>
-                    <a:cubicBezTo>
-                      <a:pt x="685" y="2128"/>
-                      <a:pt x="696" y="2127"/>
-                      <a:pt x="708" y="2125"/>
-                    </a:cubicBezTo>
-                    <a:cubicBezTo>
-                      <a:pt x="848" y="2106"/>
-                      <a:pt x="945" y="1978"/>
-                      <a:pt x="926" y="1839"/>
-                    </a:cubicBezTo>
-                    <a:lnTo>
-                      <a:pt x="925" y="1839"/>
-                    </a:lnTo>
-                    <a:cubicBezTo>
-                      <a:pt x="841" y="1273"/>
-                      <a:pt x="708" y="716"/>
-                      <a:pt x="529" y="173"/>
-                    </a:cubicBezTo>
-                    <a:cubicBezTo>
-                      <a:pt x="492" y="67"/>
-                      <a:pt x="393" y="0"/>
-                      <a:pt x="288" y="0"/>
-                    </a:cubicBezTo>
-                    <a:close/>
-                  </a:path>
-                </a:pathLst>
-              </a:custGeom>
-              <a:solidFill>
-                <a:srgbClr val="667E92"/>
-              </a:solidFill>
-              <a:ln>
-                <a:noFill/>
-              </a:ln>
-            </p:spPr>
-            <p:txBody>
-              <a:bodyPr spcFirstLastPara="1" wrap="square" lIns="91425" tIns="91425" rIns="91425" bIns="91425" anchor="ctr" anchorCtr="0">
-                <a:noAutofit/>
-              </a:bodyPr>
-              <a:lstStyle/>
-              <a:p>
-                <a:pPr marL="0" lvl="0" indent="0" algn="l" rtl="0">
-                  <a:spcBef>
-                    <a:spcPts val="0"/>
-                  </a:spcBef>
-                  <a:spcAft>
-                    <a:spcPts val="0"/>
-                  </a:spcAft>
-                  <a:buNone/>
-                </a:pPr>
-                <a:endParaRPr/>
-              </a:p>
-            </p:txBody>
-          </p:sp>
-        </p:grpSp>
-        <p:grpSp>
-          <p:nvGrpSpPr>
-            <p:cNvPr id="273" name="Google Shape;9800;p77">
-              <a:extLst>
-                <a:ext uri="{FF2B5EF4-FFF2-40B4-BE49-F238E27FC236}">
-                  <a16:creationId xmlns:a16="http://schemas.microsoft.com/office/drawing/2014/main" id="{24ACB4F6-15B0-B479-9B78-0078FAAEDF2A}"/>
-                </a:ext>
-              </a:extLst>
-            </p:cNvPr>
-            <p:cNvGrpSpPr/>
-            <p:nvPr/>
-          </p:nvGrpSpPr>
-          <p:grpSpPr>
-            <a:xfrm>
-              <a:off x="4771663" y="1876896"/>
-              <a:ext cx="108651" cy="100447"/>
-              <a:chOff x="4771663" y="1876896"/>
-              <a:chExt cx="108651" cy="100447"/>
-            </a:xfrm>
-          </p:grpSpPr>
-          <p:sp>
-            <p:nvSpPr>
-              <p:cNvPr id="274" name="Google Shape;9801;p77">
-                <a:extLst>
-                  <a:ext uri="{FF2B5EF4-FFF2-40B4-BE49-F238E27FC236}">
-                    <a16:creationId xmlns:a16="http://schemas.microsoft.com/office/drawing/2014/main" id="{0B089C04-8DB7-1ED2-4CE8-B4B948FE2883}"/>
-                  </a:ext>
-                </a:extLst>
-              </p:cNvPr>
-              <p:cNvSpPr/>
-              <p:nvPr/>
-            </p:nvSpPr>
-            <p:spPr>
-              <a:xfrm>
-                <a:off x="4771663" y="1951210"/>
-                <a:ext cx="53184" cy="26132"/>
-              </a:xfrm>
-              <a:custGeom>
-                <a:avLst/>
-                <a:gdLst/>
-                <a:ahLst/>
-                <a:cxnLst/>
-                <a:rect l="l" t="t" r="r" b="b"/>
-                <a:pathLst>
-                  <a:path w="4168" h="2048" extrusionOk="0">
-                    <a:moveTo>
-                      <a:pt x="3871" y="0"/>
-                    </a:moveTo>
-                    <a:cubicBezTo>
-                      <a:pt x="3824" y="0"/>
-                      <a:pt x="3777" y="13"/>
-                      <a:pt x="3735" y="39"/>
-                    </a:cubicBezTo>
-                    <a:cubicBezTo>
-                      <a:pt x="2982" y="492"/>
-                      <a:pt x="2170" y="838"/>
-                      <a:pt x="1323" y="1067"/>
-                    </a:cubicBezTo>
-                    <a:lnTo>
-                      <a:pt x="1249" y="780"/>
-                    </a:lnTo>
-                    <a:cubicBezTo>
-                      <a:pt x="1235" y="721"/>
-                      <a:pt x="1183" y="687"/>
-                      <a:pt x="1130" y="687"/>
-                    </a:cubicBezTo>
-                    <a:cubicBezTo>
-                      <a:pt x="1102" y="687"/>
-                      <a:pt x="1073" y="696"/>
-                      <a:pt x="1049" y="717"/>
-                    </a:cubicBezTo>
-                    <a:lnTo>
-                      <a:pt x="76" y="1560"/>
-                    </a:lnTo>
-                    <a:cubicBezTo>
-                      <a:pt x="0" y="1625"/>
-                      <a:pt x="32" y="1750"/>
-                      <a:pt x="130" y="1773"/>
-                    </a:cubicBezTo>
-                    <a:lnTo>
-                      <a:pt x="1389" y="2045"/>
-                    </a:lnTo>
-                    <a:cubicBezTo>
-                      <a:pt x="1398" y="2047"/>
-                      <a:pt x="1407" y="2048"/>
-                      <a:pt x="1416" y="2048"/>
-                    </a:cubicBezTo>
-                    <a:cubicBezTo>
-                      <a:pt x="1493" y="2048"/>
-                      <a:pt x="1555" y="1975"/>
-                      <a:pt x="1534" y="1894"/>
-                    </a:cubicBezTo>
-                    <a:lnTo>
-                      <a:pt x="1450" y="1561"/>
-                    </a:lnTo>
-                    <a:cubicBezTo>
-                      <a:pt x="2351" y="1318"/>
-                      <a:pt x="3214" y="950"/>
-                      <a:pt x="4013" y="466"/>
-                    </a:cubicBezTo>
-                    <a:cubicBezTo>
-                      <a:pt x="4132" y="392"/>
-                      <a:pt x="4167" y="235"/>
-                      <a:pt x="4090" y="119"/>
-                    </a:cubicBezTo>
-                    <a:cubicBezTo>
-                      <a:pt x="4039" y="42"/>
-                      <a:pt x="3956" y="0"/>
-                      <a:pt x="3871" y="0"/>
-                    </a:cubicBezTo>
-                    <a:close/>
-                  </a:path>
-                </a:pathLst>
-              </a:custGeom>
-              <a:solidFill>
-                <a:srgbClr val="667E92"/>
-              </a:solidFill>
-              <a:ln>
-                <a:noFill/>
-              </a:ln>
-            </p:spPr>
-            <p:txBody>
-              <a:bodyPr spcFirstLastPara="1" wrap="square" lIns="91425" tIns="91425" rIns="91425" bIns="91425" anchor="ctr" anchorCtr="0">
-                <a:noAutofit/>
-              </a:bodyPr>
-              <a:lstStyle/>
-              <a:p>
-                <a:pPr marL="0" lvl="0" indent="0" algn="l" rtl="0">
-                  <a:spcBef>
-                    <a:spcPts val="0"/>
-                  </a:spcBef>
-                  <a:spcAft>
-                    <a:spcPts val="0"/>
-                  </a:spcAft>
-                  <a:buNone/>
-                </a:pPr>
-                <a:endParaRPr/>
-              </a:p>
-            </p:txBody>
-          </p:sp>
-          <p:sp>
-            <p:nvSpPr>
-              <p:cNvPr id="294" name="Google Shape;9802;p77">
-                <a:extLst>
-                  <a:ext uri="{FF2B5EF4-FFF2-40B4-BE49-F238E27FC236}">
-                    <a16:creationId xmlns:a16="http://schemas.microsoft.com/office/drawing/2014/main" id="{B7F35391-4E7D-A0F0-593C-A8E995AEFA4C}"/>
-                  </a:ext>
-                </a:extLst>
-              </p:cNvPr>
-              <p:cNvSpPr/>
-              <p:nvPr/>
-            </p:nvSpPr>
-            <p:spPr>
-              <a:xfrm>
-                <a:off x="4826850" y="1927897"/>
-                <a:ext cx="26081" cy="23529"/>
-              </a:xfrm>
-              <a:custGeom>
-                <a:avLst/>
-                <a:gdLst/>
-                <a:ahLst/>
-                <a:cxnLst/>
-                <a:rect l="l" t="t" r="r" b="b"/>
-                <a:pathLst>
-                  <a:path w="2044" h="1844" extrusionOk="0">
-                    <a:moveTo>
-                      <a:pt x="1760" y="1"/>
-                    </a:moveTo>
-                    <a:cubicBezTo>
-                      <a:pt x="1689" y="1"/>
-                      <a:pt x="1619" y="31"/>
-                      <a:pt x="1568" y="88"/>
-                    </a:cubicBezTo>
-                    <a:cubicBezTo>
-                      <a:pt x="1456" y="215"/>
-                      <a:pt x="1341" y="338"/>
-                      <a:pt x="1221" y="458"/>
-                    </a:cubicBezTo>
-                    <a:cubicBezTo>
-                      <a:pt x="885" y="793"/>
-                      <a:pt x="524" y="1102"/>
-                      <a:pt x="140" y="1380"/>
-                    </a:cubicBezTo>
-                    <a:cubicBezTo>
-                      <a:pt x="29" y="1460"/>
-                      <a:pt x="1" y="1612"/>
-                      <a:pt x="74" y="1728"/>
-                    </a:cubicBezTo>
-                    <a:cubicBezTo>
-                      <a:pt x="124" y="1803"/>
-                      <a:pt x="205" y="1844"/>
-                      <a:pt x="288" y="1844"/>
-                    </a:cubicBezTo>
-                    <a:cubicBezTo>
-                      <a:pt x="339" y="1844"/>
-                      <a:pt x="391" y="1828"/>
-                      <a:pt x="436" y="1797"/>
-                    </a:cubicBezTo>
-                    <a:cubicBezTo>
-                      <a:pt x="843" y="1500"/>
-                      <a:pt x="1226" y="1174"/>
-                      <a:pt x="1581" y="820"/>
-                    </a:cubicBezTo>
-                    <a:cubicBezTo>
-                      <a:pt x="1711" y="690"/>
-                      <a:pt x="1834" y="557"/>
-                      <a:pt x="1954" y="421"/>
-                    </a:cubicBezTo>
-                    <a:cubicBezTo>
-                      <a:pt x="2044" y="315"/>
-                      <a:pt x="2033" y="155"/>
-                      <a:pt x="1927" y="64"/>
-                    </a:cubicBezTo>
-                    <a:cubicBezTo>
-                      <a:pt x="1879" y="22"/>
-                      <a:pt x="1819" y="1"/>
-                      <a:pt x="1760" y="1"/>
-                    </a:cubicBezTo>
-                    <a:close/>
-                  </a:path>
-                </a:pathLst>
-              </a:custGeom>
-              <a:solidFill>
-                <a:srgbClr val="667E92"/>
-              </a:solidFill>
-              <a:ln>
-                <a:noFill/>
-              </a:ln>
-            </p:spPr>
-            <p:txBody>
-              <a:bodyPr spcFirstLastPara="1" wrap="square" lIns="91425" tIns="91425" rIns="91425" bIns="91425" anchor="ctr" anchorCtr="0">
-                <a:noAutofit/>
-              </a:bodyPr>
-              <a:lstStyle/>
-              <a:p>
-                <a:pPr marL="0" lvl="0" indent="0" algn="l" rtl="0">
-                  <a:spcBef>
-                    <a:spcPts val="0"/>
-                  </a:spcBef>
-                  <a:spcAft>
-                    <a:spcPts val="0"/>
-                  </a:spcAft>
-                  <a:buNone/>
-                </a:pPr>
-                <a:endParaRPr/>
-              </a:p>
-            </p:txBody>
-          </p:sp>
-          <p:sp>
-            <p:nvSpPr>
-              <p:cNvPr id="295" name="Google Shape;9803;p77">
-                <a:extLst>
-                  <a:ext uri="{FF2B5EF4-FFF2-40B4-BE49-F238E27FC236}">
-                    <a16:creationId xmlns:a16="http://schemas.microsoft.com/office/drawing/2014/main" id="{57822FEB-821A-9988-9DD2-C9B5E91441EF}"/>
-                  </a:ext>
-                </a:extLst>
-              </p:cNvPr>
-              <p:cNvSpPr/>
-              <p:nvPr/>
-            </p:nvSpPr>
-            <p:spPr>
-              <a:xfrm>
-                <a:off x="4868600" y="1876896"/>
-                <a:ext cx="11714" cy="20531"/>
-              </a:xfrm>
-              <a:custGeom>
-                <a:avLst/>
-                <a:gdLst/>
-                <a:ahLst/>
-                <a:cxnLst/>
-                <a:rect l="l" t="t" r="r" b="b"/>
-                <a:pathLst>
-                  <a:path w="918" h="1609" extrusionOk="0">
-                    <a:moveTo>
-                      <a:pt x="642" y="0"/>
-                    </a:moveTo>
-                    <a:cubicBezTo>
-                      <a:pt x="531" y="0"/>
-                      <a:pt x="426" y="74"/>
-                      <a:pt x="396" y="189"/>
-                    </a:cubicBezTo>
-                    <a:cubicBezTo>
-                      <a:pt x="301" y="543"/>
-                      <a:pt x="187" y="889"/>
-                      <a:pt x="53" y="1228"/>
-                    </a:cubicBezTo>
-                    <a:cubicBezTo>
-                      <a:pt x="0" y="1360"/>
-                      <a:pt x="58" y="1509"/>
-                      <a:pt x="184" y="1571"/>
-                    </a:cubicBezTo>
-                    <a:lnTo>
-                      <a:pt x="218" y="1587"/>
-                    </a:lnTo>
-                    <a:cubicBezTo>
-                      <a:pt x="248" y="1602"/>
-                      <a:pt x="280" y="1608"/>
-                      <a:pt x="311" y="1608"/>
-                    </a:cubicBezTo>
-                    <a:cubicBezTo>
-                      <a:pt x="392" y="1608"/>
-                      <a:pt x="469" y="1561"/>
-                      <a:pt x="501" y="1480"/>
-                    </a:cubicBezTo>
-                    <a:cubicBezTo>
-                      <a:pt x="653" y="1107"/>
-                      <a:pt x="780" y="724"/>
-                      <a:pt x="886" y="333"/>
-                    </a:cubicBezTo>
-                    <a:cubicBezTo>
-                      <a:pt x="918" y="210"/>
-                      <a:pt x="862" y="74"/>
-                      <a:pt x="746" y="22"/>
-                    </a:cubicBezTo>
-                    <a:cubicBezTo>
-                      <a:pt x="712" y="7"/>
-                      <a:pt x="677" y="0"/>
-                      <a:pt x="642" y="0"/>
-                    </a:cubicBezTo>
-                    <a:close/>
-                  </a:path>
-                </a:pathLst>
-              </a:custGeom>
-              <a:solidFill>
-                <a:srgbClr val="667E92"/>
-              </a:solidFill>
-              <a:ln>
-                <a:noFill/>
-              </a:ln>
-            </p:spPr>
-            <p:txBody>
-              <a:bodyPr spcFirstLastPara="1" wrap="square" lIns="91425" tIns="91425" rIns="91425" bIns="91425" anchor="ctr" anchorCtr="0">
-                <a:noAutofit/>
-              </a:bodyPr>
-              <a:lstStyle/>
-              <a:p>
-                <a:pPr marL="0" lvl="0" indent="0" algn="l" rtl="0">
-                  <a:spcBef>
-                    <a:spcPts val="0"/>
-                  </a:spcBef>
-                  <a:spcAft>
-                    <a:spcPts val="0"/>
-                  </a:spcAft>
-                  <a:buNone/>
-                </a:pPr>
-                <a:endParaRPr/>
-              </a:p>
-            </p:txBody>
-          </p:sp>
-          <p:sp>
-            <p:nvSpPr>
-              <p:cNvPr id="297" name="Google Shape;9804;p77">
-                <a:extLst>
-                  <a:ext uri="{FF2B5EF4-FFF2-40B4-BE49-F238E27FC236}">
-                    <a16:creationId xmlns:a16="http://schemas.microsoft.com/office/drawing/2014/main" id="{6A4E5FD3-9038-D165-5557-F18C91AA2669}"/>
-                  </a:ext>
-                </a:extLst>
-              </p:cNvPr>
-              <p:cNvSpPr/>
-              <p:nvPr/>
-            </p:nvSpPr>
-            <p:spPr>
-              <a:xfrm>
-                <a:off x="4852804" y="1901038"/>
-                <a:ext cx="18528" cy="24589"/>
-              </a:xfrm>
-              <a:custGeom>
-                <a:avLst/>
-                <a:gdLst/>
-                <a:ahLst/>
-                <a:cxnLst/>
-                <a:rect l="l" t="t" r="r" b="b"/>
-                <a:pathLst>
-                  <a:path w="1452" h="1927" extrusionOk="0">
-                    <a:moveTo>
-                      <a:pt x="1159" y="1"/>
-                    </a:moveTo>
-                    <a:cubicBezTo>
-                      <a:pt x="1064" y="1"/>
-                      <a:pt x="974" y="53"/>
-                      <a:pt x="931" y="143"/>
-                    </a:cubicBezTo>
-                    <a:cubicBezTo>
-                      <a:pt x="689" y="625"/>
-                      <a:pt x="405" y="1085"/>
-                      <a:pt x="85" y="1519"/>
-                    </a:cubicBezTo>
-                    <a:cubicBezTo>
-                      <a:pt x="0" y="1631"/>
-                      <a:pt x="21" y="1790"/>
-                      <a:pt x="135" y="1874"/>
-                    </a:cubicBezTo>
-                    <a:cubicBezTo>
-                      <a:pt x="181" y="1909"/>
-                      <a:pt x="235" y="1926"/>
-                      <a:pt x="289" y="1926"/>
-                    </a:cubicBezTo>
-                    <a:cubicBezTo>
-                      <a:pt x="366" y="1926"/>
-                      <a:pt x="441" y="1892"/>
-                      <a:pt x="492" y="1826"/>
-                    </a:cubicBezTo>
-                    <a:cubicBezTo>
-                      <a:pt x="831" y="1367"/>
-                      <a:pt x="1132" y="878"/>
-                      <a:pt x="1389" y="368"/>
-                    </a:cubicBezTo>
-                    <a:cubicBezTo>
-                      <a:pt x="1451" y="241"/>
-                      <a:pt x="1398" y="87"/>
-                      <a:pt x="1270" y="26"/>
-                    </a:cubicBezTo>
-                    <a:cubicBezTo>
-                      <a:pt x="1234" y="9"/>
-                      <a:pt x="1196" y="1"/>
-                      <a:pt x="1159" y="1"/>
-                    </a:cubicBezTo>
-                    <a:close/>
-                  </a:path>
-                </a:pathLst>
-              </a:custGeom>
-              <a:solidFill>
-                <a:srgbClr val="667E92"/>
-              </a:solidFill>
-              <a:ln>
-                <a:noFill/>
-              </a:ln>
-            </p:spPr>
-            <p:txBody>
-              <a:bodyPr spcFirstLastPara="1" wrap="square" lIns="91425" tIns="91425" rIns="91425" bIns="91425" anchor="ctr" anchorCtr="0">
-                <a:noAutofit/>
-              </a:bodyPr>
-              <a:lstStyle/>
-              <a:p>
-                <a:pPr marL="0" lvl="0" indent="0" algn="l" rtl="0">
-                  <a:spcBef>
-                    <a:spcPts val="0"/>
-                  </a:spcBef>
-                  <a:spcAft>
-                    <a:spcPts val="0"/>
-                  </a:spcAft>
-                  <a:buNone/>
-                </a:pPr>
-                <a:endParaRPr/>
-              </a:p>
-            </p:txBody>
-          </p:sp>
-        </p:grpSp>
-      </p:grpSp>
-    </p:spTree>
-    <p:extLst>
-      <p:ext uri="{BB962C8B-B14F-4D97-AF65-F5344CB8AC3E}">
-        <p14:creationId xmlns:p14="http://schemas.microsoft.com/office/powerpoint/2010/main" val="1450412324"/>
-      </p:ext>
-    </p:extLst>
-  </p:cSld>
-  <p:clrMapOvr>
-    <a:masterClrMapping/>
-  </p:clrMapOvr>
-</p:sld>
-</file>
-
-<file path=ppt/slides/slide9.xml><?xml version="1.0" encoding="utf-8"?>
-<p:sld xmlns:a="http://schemas.openxmlformats.org/drawingml/2006/main" xmlns:r="http://schemas.openxmlformats.org/officeDocument/2006/relationships" xmlns:p="http://schemas.openxmlformats.org/presentationml/2006/main">
-  <p:cSld>
-    <p:spTree>
-      <p:nvGrpSpPr>
         <p:cNvPr id="1" name=""/>
         <p:cNvGrpSpPr/>
         <p:nvPr/>
@@ -35072,7 +27504,7 @@
         </p:nvSpPr>
         <p:spPr>
           <a:xfrm>
-            <a:off x="304800" y="1756420"/>
+            <a:off x="1355879" y="1693712"/>
             <a:ext cx="2810647" cy="663230"/>
           </a:xfrm>
         </p:spPr>
@@ -35105,7 +27537,7 @@
         </p:nvSpPr>
         <p:spPr>
           <a:xfrm>
-            <a:off x="449359" y="2419650"/>
+            <a:off x="1465345" y="2405795"/>
             <a:ext cx="2591713" cy="2417618"/>
           </a:xfrm>
         </p:spPr>
@@ -35128,7 +27560,7 @@
             </a:r>
             <a:r>
               <a:rPr lang="ru-RU" dirty="0"/>
-              <a:t>серверу (GET, POST) с</a:t>
+              <a:t>серверу с</a:t>
             </a:r>
             <a:r>
               <a:rPr lang="en-US" dirty="0"/>
@@ -35136,608 +27568,7 @@
             </a:r>
             <a:r>
               <a:rPr lang="ru-RU" dirty="0"/>
-              <a:t>проверкой статус-кодов (200 OK, 400 </a:t>
-            </a:r>
-            <a:r>
-              <a:rPr lang="ru-RU" dirty="0" err="1"/>
-              <a:t>BadRequest</a:t>
-            </a:r>
-            <a:r>
-              <a:rPr lang="ru-RU" dirty="0"/>
-              <a:t>).</a:t>
-            </a:r>
-          </a:p>
-          <a:p>
-            <a:pPr marL="0" indent="0" algn="l">
-              <a:lnSpc>
-                <a:spcPct val="150000"/>
-              </a:lnSpc>
-            </a:pPr>
-            <a:r>
-              <a:rPr lang="ru-RU" dirty="0"/>
-              <a:t>И сравнение данных</a:t>
-            </a:r>
-          </a:p>
-        </p:txBody>
-      </p:sp>
-      <p:sp>
-        <p:nvSpPr>
-          <p:cNvPr id="18" name="Заголовок 13">
-            <a:extLst>
-              <a:ext uri="{FF2B5EF4-FFF2-40B4-BE49-F238E27FC236}">
-                <a16:creationId xmlns:a16="http://schemas.microsoft.com/office/drawing/2014/main" id="{3DA145F6-DD86-8F7F-5C1A-F6640080D3DA}"/>
-              </a:ext>
-            </a:extLst>
-          </p:cNvPr>
-          <p:cNvSpPr txBox="1">
-            <a:spLocks/>
-          </p:cNvSpPr>
-          <p:nvPr/>
-        </p:nvSpPr>
-        <p:spPr>
-          <a:xfrm>
-            <a:off x="3115446" y="1738383"/>
-            <a:ext cx="2810647" cy="663230"/>
-          </a:xfrm>
-          <a:prstGeom prst="rect">
-            <a:avLst/>
-          </a:prstGeom>
-          <a:noFill/>
-          <a:ln>
-            <a:noFill/>
-          </a:ln>
-        </p:spPr>
-        <p:txBody>
-          <a:bodyPr spcFirstLastPara="1" wrap="square" lIns="91425" tIns="91425" rIns="91425" bIns="91425" anchor="b" anchorCtr="0">
-            <a:noAutofit/>
-          </a:bodyPr>
-          <a:lstStyle>
-            <a:defPPr marR="0" lvl="0" algn="l" rtl="0">
-              <a:lnSpc>
-                <a:spcPct val="100000"/>
-              </a:lnSpc>
-              <a:spcBef>
-                <a:spcPts val="0"/>
-              </a:spcBef>
-              <a:spcAft>
-                <a:spcPts val="0"/>
-              </a:spcAft>
-            </a:defPPr>
-            <a:lvl1pPr marR="0" lvl="0" algn="ctr" rtl="0" eaLnBrk="1" hangingPunct="1">
-              <a:lnSpc>
-                <a:spcPct val="100000"/>
-              </a:lnSpc>
-              <a:spcBef>
-                <a:spcPts val="0"/>
-              </a:spcBef>
-              <a:spcAft>
-                <a:spcPts val="0"/>
-              </a:spcAft>
-              <a:buClr>
-                <a:schemeClr val="lt1"/>
-              </a:buClr>
-              <a:buSzPts val="1800"/>
-              <a:buFont typeface="Montserrat ExtraBold"/>
-              <a:buNone/>
-              <a:defRPr sz="1800" b="0" i="0" u="none" strike="noStrike" cap="none">
-                <a:solidFill>
-                  <a:schemeClr val="lt1"/>
-                </a:solidFill>
-                <a:latin typeface="Montserrat ExtraBold"/>
-                <a:ea typeface="Montserrat ExtraBold"/>
-                <a:cs typeface="Montserrat ExtraBold"/>
-                <a:sym typeface="Montserrat ExtraBold"/>
-              </a:defRPr>
-            </a:lvl1pPr>
-            <a:lvl2pPr marR="0" lvl="1" algn="ctr" rtl="0" eaLnBrk="1" hangingPunct="1">
-              <a:lnSpc>
-                <a:spcPct val="100000"/>
-              </a:lnSpc>
-              <a:spcBef>
-                <a:spcPts val="0"/>
-              </a:spcBef>
-              <a:spcAft>
-                <a:spcPts val="0"/>
-              </a:spcAft>
-              <a:buClr>
-                <a:schemeClr val="lt1"/>
-              </a:buClr>
-              <a:buSzPts val="4200"/>
-              <a:buFont typeface="Montserrat"/>
-              <a:buNone/>
-              <a:defRPr sz="4200" b="0" i="0" u="none" strike="noStrike" cap="none">
-                <a:solidFill>
-                  <a:schemeClr val="lt1"/>
-                </a:solidFill>
-                <a:latin typeface="Montserrat"/>
-                <a:ea typeface="Montserrat"/>
-                <a:cs typeface="Montserrat"/>
-                <a:sym typeface="Montserrat"/>
-              </a:defRPr>
-            </a:lvl2pPr>
-            <a:lvl3pPr marR="0" lvl="2" algn="ctr" rtl="0" eaLnBrk="1" hangingPunct="1">
-              <a:lnSpc>
-                <a:spcPct val="100000"/>
-              </a:lnSpc>
-              <a:spcBef>
-                <a:spcPts val="0"/>
-              </a:spcBef>
-              <a:spcAft>
-                <a:spcPts val="0"/>
-              </a:spcAft>
-              <a:buClr>
-                <a:schemeClr val="lt1"/>
-              </a:buClr>
-              <a:buSzPts val="4200"/>
-              <a:buFont typeface="Montserrat"/>
-              <a:buNone/>
-              <a:defRPr sz="4200" b="0" i="0" u="none" strike="noStrike" cap="none">
-                <a:solidFill>
-                  <a:schemeClr val="lt1"/>
-                </a:solidFill>
-                <a:latin typeface="Montserrat"/>
-                <a:ea typeface="Montserrat"/>
-                <a:cs typeface="Montserrat"/>
-                <a:sym typeface="Montserrat"/>
-              </a:defRPr>
-            </a:lvl3pPr>
-            <a:lvl4pPr marR="0" lvl="3" algn="ctr" rtl="0" eaLnBrk="1" hangingPunct="1">
-              <a:lnSpc>
-                <a:spcPct val="100000"/>
-              </a:lnSpc>
-              <a:spcBef>
-                <a:spcPts val="0"/>
-              </a:spcBef>
-              <a:spcAft>
-                <a:spcPts val="0"/>
-              </a:spcAft>
-              <a:buClr>
-                <a:schemeClr val="lt1"/>
-              </a:buClr>
-              <a:buSzPts val="4200"/>
-              <a:buFont typeface="Montserrat"/>
-              <a:buNone/>
-              <a:defRPr sz="4200" b="0" i="0" u="none" strike="noStrike" cap="none">
-                <a:solidFill>
-                  <a:schemeClr val="lt1"/>
-                </a:solidFill>
-                <a:latin typeface="Montserrat"/>
-                <a:ea typeface="Montserrat"/>
-                <a:cs typeface="Montserrat"/>
-                <a:sym typeface="Montserrat"/>
-              </a:defRPr>
-            </a:lvl4pPr>
-            <a:lvl5pPr marR="0" lvl="4" algn="ctr" rtl="0" eaLnBrk="1" hangingPunct="1">
-              <a:lnSpc>
-                <a:spcPct val="100000"/>
-              </a:lnSpc>
-              <a:spcBef>
-                <a:spcPts val="0"/>
-              </a:spcBef>
-              <a:spcAft>
-                <a:spcPts val="0"/>
-              </a:spcAft>
-              <a:buClr>
-                <a:schemeClr val="lt1"/>
-              </a:buClr>
-              <a:buSzPts val="4200"/>
-              <a:buFont typeface="Montserrat"/>
-              <a:buNone/>
-              <a:defRPr sz="4200" b="0" i="0" u="none" strike="noStrike" cap="none">
-                <a:solidFill>
-                  <a:schemeClr val="lt1"/>
-                </a:solidFill>
-                <a:latin typeface="Montserrat"/>
-                <a:ea typeface="Montserrat"/>
-                <a:cs typeface="Montserrat"/>
-                <a:sym typeface="Montserrat"/>
-              </a:defRPr>
-            </a:lvl5pPr>
-            <a:lvl6pPr marR="0" lvl="5" algn="ctr" rtl="0" eaLnBrk="1" hangingPunct="1">
-              <a:lnSpc>
-                <a:spcPct val="100000"/>
-              </a:lnSpc>
-              <a:spcBef>
-                <a:spcPts val="0"/>
-              </a:spcBef>
-              <a:spcAft>
-                <a:spcPts val="0"/>
-              </a:spcAft>
-              <a:buClr>
-                <a:schemeClr val="lt1"/>
-              </a:buClr>
-              <a:buSzPts val="4200"/>
-              <a:buFont typeface="Montserrat"/>
-              <a:buNone/>
-              <a:defRPr sz="4200" b="0" i="0" u="none" strike="noStrike" cap="none">
-                <a:solidFill>
-                  <a:schemeClr val="lt1"/>
-                </a:solidFill>
-                <a:latin typeface="Montserrat"/>
-                <a:ea typeface="Montserrat"/>
-                <a:cs typeface="Montserrat"/>
-                <a:sym typeface="Montserrat"/>
-              </a:defRPr>
-            </a:lvl6pPr>
-            <a:lvl7pPr marR="0" lvl="6" algn="ctr" rtl="0" eaLnBrk="1" hangingPunct="1">
-              <a:lnSpc>
-                <a:spcPct val="100000"/>
-              </a:lnSpc>
-              <a:spcBef>
-                <a:spcPts val="0"/>
-              </a:spcBef>
-              <a:spcAft>
-                <a:spcPts val="0"/>
-              </a:spcAft>
-              <a:buClr>
-                <a:schemeClr val="lt1"/>
-              </a:buClr>
-              <a:buSzPts val="4200"/>
-              <a:buFont typeface="Montserrat"/>
-              <a:buNone/>
-              <a:defRPr sz="4200" b="0" i="0" u="none" strike="noStrike" cap="none">
-                <a:solidFill>
-                  <a:schemeClr val="lt1"/>
-                </a:solidFill>
-                <a:latin typeface="Montserrat"/>
-                <a:ea typeface="Montserrat"/>
-                <a:cs typeface="Montserrat"/>
-                <a:sym typeface="Montserrat"/>
-              </a:defRPr>
-            </a:lvl7pPr>
-            <a:lvl8pPr marR="0" lvl="7" algn="ctr" rtl="0" eaLnBrk="1" hangingPunct="1">
-              <a:lnSpc>
-                <a:spcPct val="100000"/>
-              </a:lnSpc>
-              <a:spcBef>
-                <a:spcPts val="0"/>
-              </a:spcBef>
-              <a:spcAft>
-                <a:spcPts val="0"/>
-              </a:spcAft>
-              <a:buClr>
-                <a:schemeClr val="lt1"/>
-              </a:buClr>
-              <a:buSzPts val="4200"/>
-              <a:buFont typeface="Montserrat"/>
-              <a:buNone/>
-              <a:defRPr sz="4200" b="0" i="0" u="none" strike="noStrike" cap="none">
-                <a:solidFill>
-                  <a:schemeClr val="lt1"/>
-                </a:solidFill>
-                <a:latin typeface="Montserrat"/>
-                <a:ea typeface="Montserrat"/>
-                <a:cs typeface="Montserrat"/>
-                <a:sym typeface="Montserrat"/>
-              </a:defRPr>
-            </a:lvl8pPr>
-            <a:lvl9pPr marR="0" lvl="8" algn="ctr" rtl="0" eaLnBrk="1" hangingPunct="1">
-              <a:lnSpc>
-                <a:spcPct val="100000"/>
-              </a:lnSpc>
-              <a:spcBef>
-                <a:spcPts val="0"/>
-              </a:spcBef>
-              <a:spcAft>
-                <a:spcPts val="0"/>
-              </a:spcAft>
-              <a:buClr>
-                <a:schemeClr val="lt1"/>
-              </a:buClr>
-              <a:buSzPts val="4200"/>
-              <a:buFont typeface="Montserrat"/>
-              <a:buNone/>
-              <a:defRPr sz="4200" b="0" i="0" u="none" strike="noStrike" cap="none">
-                <a:solidFill>
-                  <a:schemeClr val="lt1"/>
-                </a:solidFill>
-                <a:latin typeface="Montserrat"/>
-                <a:ea typeface="Montserrat"/>
-                <a:cs typeface="Montserrat"/>
-                <a:sym typeface="Montserrat"/>
-              </a:defRPr>
-            </a:lvl9pPr>
-          </a:lstStyle>
-          <a:p>
-            <a:pPr>
-              <a:lnSpc>
-                <a:spcPct val="300000"/>
-              </a:lnSpc>
-            </a:pPr>
-            <a:r>
-              <a:rPr lang="ru-RU" dirty="0"/>
-              <a:t>Изоляция среды</a:t>
-            </a:r>
-          </a:p>
-        </p:txBody>
-      </p:sp>
-      <p:sp>
-        <p:nvSpPr>
-          <p:cNvPr id="19" name="Подзаголовок 14">
-            <a:extLst>
-              <a:ext uri="{FF2B5EF4-FFF2-40B4-BE49-F238E27FC236}">
-                <a16:creationId xmlns:a16="http://schemas.microsoft.com/office/drawing/2014/main" id="{CBD86E2C-D97F-6CE4-57B1-67F6698E427E}"/>
-              </a:ext>
-            </a:extLst>
-          </p:cNvPr>
-          <p:cNvSpPr txBox="1">
-            <a:spLocks/>
-          </p:cNvSpPr>
-          <p:nvPr/>
-        </p:nvSpPr>
-        <p:spPr>
-          <a:xfrm>
-            <a:off x="3348424" y="2401613"/>
-            <a:ext cx="2591713" cy="2417618"/>
-          </a:xfrm>
-          <a:prstGeom prst="rect">
-            <a:avLst/>
-          </a:prstGeom>
-          <a:noFill/>
-          <a:ln>
-            <a:noFill/>
-          </a:ln>
-        </p:spPr>
-        <p:txBody>
-          <a:bodyPr spcFirstLastPara="1" wrap="square" lIns="91425" tIns="91425" rIns="91425" bIns="91425" anchor="t" anchorCtr="0">
-            <a:noAutofit/>
-          </a:bodyPr>
-          <a:lstStyle>
-            <a:defPPr marR="0" lvl="0" algn="l" rtl="0">
-              <a:lnSpc>
-                <a:spcPct val="100000"/>
-              </a:lnSpc>
-              <a:spcBef>
-                <a:spcPts val="0"/>
-              </a:spcBef>
-              <a:spcAft>
-                <a:spcPts val="0"/>
-              </a:spcAft>
-            </a:defPPr>
-            <a:lvl1pPr marL="457200" marR="0" lvl="0" indent="-342900" algn="ctr" rtl="0" eaLnBrk="1" hangingPunct="1">
-              <a:lnSpc>
-                <a:spcPct val="100000"/>
-              </a:lnSpc>
-              <a:spcBef>
-                <a:spcPts val="0"/>
-              </a:spcBef>
-              <a:spcAft>
-                <a:spcPts val="0"/>
-              </a:spcAft>
-              <a:buClr>
-                <a:schemeClr val="lt1"/>
-              </a:buClr>
-              <a:buSzPts val="1400"/>
-              <a:buFont typeface="Montserrat"/>
-              <a:buNone/>
-              <a:defRPr sz="1400" b="0" i="0" u="none" strike="noStrike" cap="none">
-                <a:solidFill>
-                  <a:schemeClr val="lt1"/>
-                </a:solidFill>
-                <a:latin typeface="Montserrat"/>
-                <a:ea typeface="Montserrat"/>
-                <a:cs typeface="Montserrat"/>
-                <a:sym typeface="Montserrat"/>
-              </a:defRPr>
-            </a:lvl1pPr>
-            <a:lvl2pPr marL="914400" marR="0" lvl="1" indent="-317500" algn="ctr" rtl="0" eaLnBrk="1" hangingPunct="1">
-              <a:lnSpc>
-                <a:spcPct val="100000"/>
-              </a:lnSpc>
-              <a:spcBef>
-                <a:spcPts val="0"/>
-              </a:spcBef>
-              <a:spcAft>
-                <a:spcPts val="0"/>
-              </a:spcAft>
-              <a:buClr>
-                <a:schemeClr val="lt1"/>
-              </a:buClr>
-              <a:buSzPts val="2100"/>
-              <a:buFont typeface="Montserrat"/>
-              <a:buNone/>
-              <a:defRPr sz="2100" b="0" i="0" u="none" strike="noStrike" cap="none">
-                <a:solidFill>
-                  <a:schemeClr val="lt1"/>
-                </a:solidFill>
-                <a:latin typeface="Montserrat"/>
-                <a:ea typeface="Montserrat"/>
-                <a:cs typeface="Montserrat"/>
-                <a:sym typeface="Montserrat"/>
-              </a:defRPr>
-            </a:lvl2pPr>
-            <a:lvl3pPr marL="1371600" marR="0" lvl="2" indent="-317500" algn="ctr" rtl="0" eaLnBrk="1" hangingPunct="1">
-              <a:lnSpc>
-                <a:spcPct val="100000"/>
-              </a:lnSpc>
-              <a:spcBef>
-                <a:spcPts val="0"/>
-              </a:spcBef>
-              <a:spcAft>
-                <a:spcPts val="0"/>
-              </a:spcAft>
-              <a:buClr>
-                <a:schemeClr val="lt1"/>
-              </a:buClr>
-              <a:buSzPts val="2100"/>
-              <a:buFont typeface="Montserrat"/>
-              <a:buNone/>
-              <a:defRPr sz="2100" b="0" i="0" u="none" strike="noStrike" cap="none">
-                <a:solidFill>
-                  <a:schemeClr val="lt1"/>
-                </a:solidFill>
-                <a:latin typeface="Montserrat"/>
-                <a:ea typeface="Montserrat"/>
-                <a:cs typeface="Montserrat"/>
-                <a:sym typeface="Montserrat"/>
-              </a:defRPr>
-            </a:lvl3pPr>
-            <a:lvl4pPr marL="1828800" marR="0" lvl="3" indent="-317500" algn="ctr" rtl="0" eaLnBrk="1" hangingPunct="1">
-              <a:lnSpc>
-                <a:spcPct val="100000"/>
-              </a:lnSpc>
-              <a:spcBef>
-                <a:spcPts val="0"/>
-              </a:spcBef>
-              <a:spcAft>
-                <a:spcPts val="0"/>
-              </a:spcAft>
-              <a:buClr>
-                <a:schemeClr val="lt1"/>
-              </a:buClr>
-              <a:buSzPts val="2100"/>
-              <a:buFont typeface="Montserrat"/>
-              <a:buNone/>
-              <a:defRPr sz="2100" b="0" i="0" u="none" strike="noStrike" cap="none">
-                <a:solidFill>
-                  <a:schemeClr val="lt1"/>
-                </a:solidFill>
-                <a:latin typeface="Montserrat"/>
-                <a:ea typeface="Montserrat"/>
-                <a:cs typeface="Montserrat"/>
-                <a:sym typeface="Montserrat"/>
-              </a:defRPr>
-            </a:lvl4pPr>
-            <a:lvl5pPr marL="2286000" marR="0" lvl="4" indent="-317500" algn="ctr" rtl="0" eaLnBrk="1" hangingPunct="1">
-              <a:lnSpc>
-                <a:spcPct val="100000"/>
-              </a:lnSpc>
-              <a:spcBef>
-                <a:spcPts val="0"/>
-              </a:spcBef>
-              <a:spcAft>
-                <a:spcPts val="0"/>
-              </a:spcAft>
-              <a:buClr>
-                <a:schemeClr val="lt1"/>
-              </a:buClr>
-              <a:buSzPts val="2100"/>
-              <a:buFont typeface="Montserrat"/>
-              <a:buNone/>
-              <a:defRPr sz="2100" b="0" i="0" u="none" strike="noStrike" cap="none">
-                <a:solidFill>
-                  <a:schemeClr val="lt1"/>
-                </a:solidFill>
-                <a:latin typeface="Montserrat"/>
-                <a:ea typeface="Montserrat"/>
-                <a:cs typeface="Montserrat"/>
-                <a:sym typeface="Montserrat"/>
-              </a:defRPr>
-            </a:lvl5pPr>
-            <a:lvl6pPr marL="2743200" marR="0" lvl="5" indent="-317500" algn="ctr" rtl="0" eaLnBrk="1" hangingPunct="1">
-              <a:lnSpc>
-                <a:spcPct val="100000"/>
-              </a:lnSpc>
-              <a:spcBef>
-                <a:spcPts val="0"/>
-              </a:spcBef>
-              <a:spcAft>
-                <a:spcPts val="0"/>
-              </a:spcAft>
-              <a:buClr>
-                <a:schemeClr val="lt1"/>
-              </a:buClr>
-              <a:buSzPts val="2100"/>
-              <a:buFont typeface="Montserrat"/>
-              <a:buNone/>
-              <a:defRPr sz="2100" b="0" i="0" u="none" strike="noStrike" cap="none">
-                <a:solidFill>
-                  <a:schemeClr val="lt1"/>
-                </a:solidFill>
-                <a:latin typeface="Montserrat"/>
-                <a:ea typeface="Montserrat"/>
-                <a:cs typeface="Montserrat"/>
-                <a:sym typeface="Montserrat"/>
-              </a:defRPr>
-            </a:lvl6pPr>
-            <a:lvl7pPr marL="3200400" marR="0" lvl="6" indent="-317500" algn="ctr" rtl="0" eaLnBrk="1" hangingPunct="1">
-              <a:lnSpc>
-                <a:spcPct val="100000"/>
-              </a:lnSpc>
-              <a:spcBef>
-                <a:spcPts val="0"/>
-              </a:spcBef>
-              <a:spcAft>
-                <a:spcPts val="0"/>
-              </a:spcAft>
-              <a:buClr>
-                <a:schemeClr val="lt1"/>
-              </a:buClr>
-              <a:buSzPts val="2100"/>
-              <a:buFont typeface="Montserrat"/>
-              <a:buNone/>
-              <a:defRPr sz="2100" b="0" i="0" u="none" strike="noStrike" cap="none">
-                <a:solidFill>
-                  <a:schemeClr val="lt1"/>
-                </a:solidFill>
-                <a:latin typeface="Montserrat"/>
-                <a:ea typeface="Montserrat"/>
-                <a:cs typeface="Montserrat"/>
-                <a:sym typeface="Montserrat"/>
-              </a:defRPr>
-            </a:lvl7pPr>
-            <a:lvl8pPr marL="3657600" marR="0" lvl="7" indent="-317500" algn="ctr" rtl="0" eaLnBrk="1" hangingPunct="1">
-              <a:lnSpc>
-                <a:spcPct val="100000"/>
-              </a:lnSpc>
-              <a:spcBef>
-                <a:spcPts val="0"/>
-              </a:spcBef>
-              <a:spcAft>
-                <a:spcPts val="0"/>
-              </a:spcAft>
-              <a:buClr>
-                <a:schemeClr val="lt1"/>
-              </a:buClr>
-              <a:buSzPts val="2100"/>
-              <a:buFont typeface="Montserrat"/>
-              <a:buNone/>
-              <a:defRPr sz="2100" b="0" i="0" u="none" strike="noStrike" cap="none">
-                <a:solidFill>
-                  <a:schemeClr val="lt1"/>
-                </a:solidFill>
-                <a:latin typeface="Montserrat"/>
-                <a:ea typeface="Montserrat"/>
-                <a:cs typeface="Montserrat"/>
-                <a:sym typeface="Montserrat"/>
-              </a:defRPr>
-            </a:lvl8pPr>
-            <a:lvl9pPr marL="4114800" marR="0" lvl="8" indent="-317500" algn="ctr" rtl="0" eaLnBrk="1" hangingPunct="1">
-              <a:lnSpc>
-                <a:spcPct val="100000"/>
-              </a:lnSpc>
-              <a:spcBef>
-                <a:spcPts val="0"/>
-              </a:spcBef>
-              <a:spcAft>
-                <a:spcPts val="0"/>
-              </a:spcAft>
-              <a:buClr>
-                <a:schemeClr val="lt1"/>
-              </a:buClr>
-              <a:buSzPts val="2100"/>
-              <a:buFont typeface="Montserrat"/>
-              <a:buNone/>
-              <a:defRPr sz="2100" b="0" i="0" u="none" strike="noStrike" cap="none">
-                <a:solidFill>
-                  <a:schemeClr val="lt1"/>
-                </a:solidFill>
-                <a:latin typeface="Montserrat"/>
-                <a:ea typeface="Montserrat"/>
-                <a:cs typeface="Montserrat"/>
-                <a:sym typeface="Montserrat"/>
-              </a:defRPr>
-            </a:lvl9pPr>
-          </a:lstStyle>
-          <a:p>
-            <a:pPr marL="0" indent="0" algn="l">
-              <a:lnSpc>
-                <a:spcPct val="150000"/>
-              </a:lnSpc>
-            </a:pPr>
-            <a:r>
-              <a:rPr lang="ru-RU" dirty="0"/>
-              <a:t>Перед каждым тестом база данных пересоздается в памяти с чистыми данными</a:t>
+              <a:t>проверкой статус-кодов и сравнение данных правильности результатов</a:t>
             </a:r>
           </a:p>
         </p:txBody>
@@ -35758,7 +27589,7 @@
         </p:nvSpPr>
         <p:spPr>
           <a:xfrm>
-            <a:off x="5889551" y="1769912"/>
+            <a:off x="5008417" y="1693712"/>
             <a:ext cx="3158838" cy="663230"/>
           </a:xfrm>
           <a:prstGeom prst="rect">
@@ -36044,7 +27875,7 @@
         </p:nvSpPr>
         <p:spPr>
           <a:xfrm>
-            <a:off x="6173114" y="2419650"/>
+            <a:off x="5291980" y="2343450"/>
             <a:ext cx="2591713" cy="2417618"/>
           </a:xfrm>
           <a:prstGeom prst="rect">
@@ -36314,7 +28145,7 @@
             </a:pPr>
             <a:r>
               <a:rPr lang="ru-RU" dirty="0"/>
-              <a:t>На каждый контроллер есть определенное кол-во тестов на самые главные функции серверного приложения</a:t>
+              <a:t>На каждый контроллер есть определенное кол-во тестов на самые главные функции </a:t>
             </a:r>
           </a:p>
         </p:txBody>
@@ -36325,6 +28156,1151 @@
         <p14:creationId xmlns:p14="http://schemas.microsoft.com/office/powerpoint/2010/main" val="3363185708"/>
       </p:ext>
     </p:extLst>
+  </p:cSld>
+  <p:clrMapOvr>
+    <a:masterClrMapping/>
+  </p:clrMapOvr>
+</p:sld>
+</file>
+
+<file path=ppt/slides/slide9.xml><?xml version="1.0" encoding="utf-8"?>
+<p:sld xmlns:a="http://schemas.openxmlformats.org/drawingml/2006/main" xmlns:r="http://schemas.openxmlformats.org/officeDocument/2006/relationships" xmlns:p="http://schemas.openxmlformats.org/presentationml/2006/main">
+  <p:cSld>
+    <p:spTree>
+      <p:nvGrpSpPr>
+        <p:cNvPr id="1" name="Shape 2002"/>
+        <p:cNvGrpSpPr/>
+        <p:nvPr/>
+      </p:nvGrpSpPr>
+      <p:grpSpPr>
+        <a:xfrm>
+          <a:off x="0" y="0"/>
+          <a:ext cx="0" cy="0"/>
+          <a:chOff x="0" y="0"/>
+          <a:chExt cx="0" cy="0"/>
+        </a:xfrm>
+      </p:grpSpPr>
+      <p:sp>
+        <p:nvSpPr>
+          <p:cNvPr id="2003" name="Google Shape;2003;p58"/>
+          <p:cNvSpPr txBox="1">
+            <a:spLocks noGrp="1"/>
+          </p:cNvSpPr>
+          <p:nvPr>
+            <p:ph type="title"/>
+          </p:nvPr>
+        </p:nvSpPr>
+        <p:spPr>
+          <a:xfrm>
+            <a:off x="938500" y="445025"/>
+            <a:ext cx="4629300" cy="941400"/>
+          </a:xfrm>
+          <a:prstGeom prst="rect">
+            <a:avLst/>
+          </a:prstGeom>
+        </p:spPr>
+        <p:txBody>
+          <a:bodyPr spcFirstLastPara="1" wrap="square" lIns="91425" tIns="91425" rIns="91425" bIns="91425" anchor="t" anchorCtr="0">
+            <a:noAutofit/>
+          </a:bodyPr>
+          <a:lstStyle/>
+          <a:p>
+            <a:pPr lvl="0"/>
+            <a:r>
+              <a:rPr lang="ru-RU" dirty="0"/>
+              <a:t>Безопасность и </a:t>
+            </a:r>
+            <a:r>
+              <a:rPr lang="en-US" dirty="0"/>
+              <a:t>API</a:t>
+            </a:r>
+            <a:endParaRPr dirty="0"/>
+          </a:p>
+        </p:txBody>
+      </p:sp>
+      <p:cxnSp>
+        <p:nvCxnSpPr>
+          <p:cNvPr id="2016" name="Google Shape;2016;p58"/>
+          <p:cNvCxnSpPr/>
+          <p:nvPr/>
+        </p:nvCxnSpPr>
+        <p:spPr>
+          <a:xfrm>
+            <a:off x="1026200" y="414022"/>
+            <a:ext cx="2763000" cy="0"/>
+          </a:xfrm>
+          <a:prstGeom prst="straightConnector1">
+            <a:avLst/>
+          </a:prstGeom>
+          <a:noFill/>
+          <a:ln w="9525" cap="flat" cmpd="sng">
+            <a:solidFill>
+              <a:schemeClr val="accent1"/>
+            </a:solidFill>
+            <a:prstDash val="solid"/>
+            <a:round/>
+            <a:headEnd type="none" w="med" len="med"/>
+            <a:tailEnd type="none" w="med" len="med"/>
+          </a:ln>
+          <a:effectLst>
+            <a:outerShdw blurRad="57150" dist="19050" dir="5400000" algn="bl" rotWithShape="0">
+              <a:srgbClr val="FFFFFF">
+                <a:alpha val="50000"/>
+              </a:srgbClr>
+            </a:outerShdw>
+          </a:effectLst>
+        </p:spPr>
+      </p:cxnSp>
+      <p:sp>
+        <p:nvSpPr>
+          <p:cNvPr id="18" name="Google Shape;2098;p63">
+            <a:extLst>
+              <a:ext uri="{FF2B5EF4-FFF2-40B4-BE49-F238E27FC236}">
+                <a16:creationId xmlns:a16="http://schemas.microsoft.com/office/drawing/2014/main" id="{63D0DE40-08F9-AAE7-FD7D-6AD3A202B343}"/>
+              </a:ext>
+            </a:extLst>
+          </p:cNvPr>
+          <p:cNvSpPr txBox="1">
+            <a:spLocks noGrp="1"/>
+          </p:cNvSpPr>
+          <p:nvPr>
+            <p:ph type="title" idx="2"/>
+          </p:nvPr>
+        </p:nvSpPr>
+        <p:spPr>
+          <a:xfrm>
+            <a:off x="1894670" y="1437831"/>
+            <a:ext cx="2025695" cy="375600"/>
+          </a:xfrm>
+          <a:prstGeom prst="rect">
+            <a:avLst/>
+          </a:prstGeom>
+        </p:spPr>
+        <p:txBody>
+          <a:bodyPr spcFirstLastPara="1" wrap="square" lIns="91425" tIns="91425" rIns="91425" bIns="91425" anchor="t" anchorCtr="0">
+            <a:noAutofit/>
+          </a:bodyPr>
+          <a:lstStyle/>
+          <a:p>
+            <a:pPr lvl="0"/>
+            <a:r>
+              <a:rPr lang="en-US" dirty="0"/>
+              <a:t>JWT-</a:t>
+            </a:r>
+            <a:r>
+              <a:rPr lang="ru-RU" dirty="0"/>
+              <a:t>токены</a:t>
+            </a:r>
+            <a:endParaRPr dirty="0"/>
+          </a:p>
+        </p:txBody>
+      </p:sp>
+      <p:sp>
+        <p:nvSpPr>
+          <p:cNvPr id="19" name="Google Shape;2099;p63">
+            <a:extLst>
+              <a:ext uri="{FF2B5EF4-FFF2-40B4-BE49-F238E27FC236}">
+                <a16:creationId xmlns:a16="http://schemas.microsoft.com/office/drawing/2014/main" id="{FE0FD251-EB6E-5C62-9897-35AB75933E92}"/>
+              </a:ext>
+            </a:extLst>
+          </p:cNvPr>
+          <p:cNvSpPr txBox="1">
+            <a:spLocks/>
+          </p:cNvSpPr>
+          <p:nvPr/>
+        </p:nvSpPr>
+        <p:spPr>
+          <a:xfrm>
+            <a:off x="1424496" y="1885154"/>
+            <a:ext cx="2966042" cy="2492553"/>
+          </a:xfrm>
+          <a:prstGeom prst="rect">
+            <a:avLst/>
+          </a:prstGeom>
+          <a:noFill/>
+          <a:ln>
+            <a:noFill/>
+          </a:ln>
+        </p:spPr>
+        <p:txBody>
+          <a:bodyPr spcFirstLastPara="1" wrap="square" lIns="91425" tIns="91425" rIns="91425" bIns="91425" anchor="t" anchorCtr="0">
+            <a:noAutofit/>
+          </a:bodyPr>
+          <a:lstStyle>
+            <a:defPPr marR="0" lvl="0" algn="l" rtl="0">
+              <a:lnSpc>
+                <a:spcPct val="100000"/>
+              </a:lnSpc>
+              <a:spcBef>
+                <a:spcPts val="0"/>
+              </a:spcBef>
+              <a:spcAft>
+                <a:spcPts val="0"/>
+              </a:spcAft>
+            </a:defPPr>
+            <a:lvl1pPr marL="457200" marR="0" lvl="0" indent="-342900" algn="ctr" rtl="0">
+              <a:lnSpc>
+                <a:spcPct val="100000"/>
+              </a:lnSpc>
+              <a:spcBef>
+                <a:spcPts val="0"/>
+              </a:spcBef>
+              <a:spcAft>
+                <a:spcPts val="0"/>
+              </a:spcAft>
+              <a:buClr>
+                <a:schemeClr val="lt1"/>
+              </a:buClr>
+              <a:buSzPts val="1400"/>
+              <a:buFont typeface="Montserrat"/>
+              <a:buNone/>
+              <a:defRPr sz="1400" b="0" i="0" u="none" strike="noStrike" cap="none">
+                <a:solidFill>
+                  <a:schemeClr val="lt1"/>
+                </a:solidFill>
+                <a:latin typeface="Montserrat"/>
+                <a:ea typeface="Montserrat"/>
+                <a:cs typeface="Montserrat"/>
+                <a:sym typeface="Montserrat"/>
+              </a:defRPr>
+            </a:lvl1pPr>
+            <a:lvl2pPr marL="914400" marR="0" lvl="1" indent="-317500" algn="ctr" rtl="0">
+              <a:lnSpc>
+                <a:spcPct val="100000"/>
+              </a:lnSpc>
+              <a:spcBef>
+                <a:spcPts val="0"/>
+              </a:spcBef>
+              <a:spcAft>
+                <a:spcPts val="0"/>
+              </a:spcAft>
+              <a:buClr>
+                <a:schemeClr val="lt1"/>
+              </a:buClr>
+              <a:buSzPts val="2100"/>
+              <a:buFont typeface="Montserrat"/>
+              <a:buNone/>
+              <a:defRPr sz="2100" b="0" i="0" u="none" strike="noStrike" cap="none">
+                <a:solidFill>
+                  <a:schemeClr val="lt1"/>
+                </a:solidFill>
+                <a:latin typeface="Montserrat"/>
+                <a:ea typeface="Montserrat"/>
+                <a:cs typeface="Montserrat"/>
+                <a:sym typeface="Montserrat"/>
+              </a:defRPr>
+            </a:lvl2pPr>
+            <a:lvl3pPr marL="1371600" marR="0" lvl="2" indent="-317500" algn="ctr" rtl="0">
+              <a:lnSpc>
+                <a:spcPct val="100000"/>
+              </a:lnSpc>
+              <a:spcBef>
+                <a:spcPts val="0"/>
+              </a:spcBef>
+              <a:spcAft>
+                <a:spcPts val="0"/>
+              </a:spcAft>
+              <a:buClr>
+                <a:schemeClr val="lt1"/>
+              </a:buClr>
+              <a:buSzPts val="2100"/>
+              <a:buFont typeface="Montserrat"/>
+              <a:buNone/>
+              <a:defRPr sz="2100" b="0" i="0" u="none" strike="noStrike" cap="none">
+                <a:solidFill>
+                  <a:schemeClr val="lt1"/>
+                </a:solidFill>
+                <a:latin typeface="Montserrat"/>
+                <a:ea typeface="Montserrat"/>
+                <a:cs typeface="Montserrat"/>
+                <a:sym typeface="Montserrat"/>
+              </a:defRPr>
+            </a:lvl3pPr>
+            <a:lvl4pPr marL="1828800" marR="0" lvl="3" indent="-317500" algn="ctr" rtl="0">
+              <a:lnSpc>
+                <a:spcPct val="100000"/>
+              </a:lnSpc>
+              <a:spcBef>
+                <a:spcPts val="0"/>
+              </a:spcBef>
+              <a:spcAft>
+                <a:spcPts val="0"/>
+              </a:spcAft>
+              <a:buClr>
+                <a:schemeClr val="lt1"/>
+              </a:buClr>
+              <a:buSzPts val="2100"/>
+              <a:buFont typeface="Montserrat"/>
+              <a:buNone/>
+              <a:defRPr sz="2100" b="0" i="0" u="none" strike="noStrike" cap="none">
+                <a:solidFill>
+                  <a:schemeClr val="lt1"/>
+                </a:solidFill>
+                <a:latin typeface="Montserrat"/>
+                <a:ea typeface="Montserrat"/>
+                <a:cs typeface="Montserrat"/>
+                <a:sym typeface="Montserrat"/>
+              </a:defRPr>
+            </a:lvl4pPr>
+            <a:lvl5pPr marL="2286000" marR="0" lvl="4" indent="-317500" algn="ctr" rtl="0">
+              <a:lnSpc>
+                <a:spcPct val="100000"/>
+              </a:lnSpc>
+              <a:spcBef>
+                <a:spcPts val="0"/>
+              </a:spcBef>
+              <a:spcAft>
+                <a:spcPts val="0"/>
+              </a:spcAft>
+              <a:buClr>
+                <a:schemeClr val="lt1"/>
+              </a:buClr>
+              <a:buSzPts val="2100"/>
+              <a:buFont typeface="Montserrat"/>
+              <a:buNone/>
+              <a:defRPr sz="2100" b="0" i="0" u="none" strike="noStrike" cap="none">
+                <a:solidFill>
+                  <a:schemeClr val="lt1"/>
+                </a:solidFill>
+                <a:latin typeface="Montserrat"/>
+                <a:ea typeface="Montserrat"/>
+                <a:cs typeface="Montserrat"/>
+                <a:sym typeface="Montserrat"/>
+              </a:defRPr>
+            </a:lvl5pPr>
+            <a:lvl6pPr marL="2743200" marR="0" lvl="5" indent="-317500" algn="ctr" rtl="0">
+              <a:lnSpc>
+                <a:spcPct val="100000"/>
+              </a:lnSpc>
+              <a:spcBef>
+                <a:spcPts val="0"/>
+              </a:spcBef>
+              <a:spcAft>
+                <a:spcPts val="0"/>
+              </a:spcAft>
+              <a:buClr>
+                <a:schemeClr val="lt1"/>
+              </a:buClr>
+              <a:buSzPts val="2100"/>
+              <a:buFont typeface="Montserrat"/>
+              <a:buNone/>
+              <a:defRPr sz="2100" b="0" i="0" u="none" strike="noStrike" cap="none">
+                <a:solidFill>
+                  <a:schemeClr val="lt1"/>
+                </a:solidFill>
+                <a:latin typeface="Montserrat"/>
+                <a:ea typeface="Montserrat"/>
+                <a:cs typeface="Montserrat"/>
+                <a:sym typeface="Montserrat"/>
+              </a:defRPr>
+            </a:lvl6pPr>
+            <a:lvl7pPr marL="3200400" marR="0" lvl="6" indent="-317500" algn="ctr" rtl="0">
+              <a:lnSpc>
+                <a:spcPct val="100000"/>
+              </a:lnSpc>
+              <a:spcBef>
+                <a:spcPts val="0"/>
+              </a:spcBef>
+              <a:spcAft>
+                <a:spcPts val="0"/>
+              </a:spcAft>
+              <a:buClr>
+                <a:schemeClr val="lt1"/>
+              </a:buClr>
+              <a:buSzPts val="2100"/>
+              <a:buFont typeface="Montserrat"/>
+              <a:buNone/>
+              <a:defRPr sz="2100" b="0" i="0" u="none" strike="noStrike" cap="none">
+                <a:solidFill>
+                  <a:schemeClr val="lt1"/>
+                </a:solidFill>
+                <a:latin typeface="Montserrat"/>
+                <a:ea typeface="Montserrat"/>
+                <a:cs typeface="Montserrat"/>
+                <a:sym typeface="Montserrat"/>
+              </a:defRPr>
+            </a:lvl7pPr>
+            <a:lvl8pPr marL="3657600" marR="0" lvl="7" indent="-317500" algn="ctr" rtl="0">
+              <a:lnSpc>
+                <a:spcPct val="100000"/>
+              </a:lnSpc>
+              <a:spcBef>
+                <a:spcPts val="0"/>
+              </a:spcBef>
+              <a:spcAft>
+                <a:spcPts val="0"/>
+              </a:spcAft>
+              <a:buClr>
+                <a:schemeClr val="lt1"/>
+              </a:buClr>
+              <a:buSzPts val="2100"/>
+              <a:buFont typeface="Montserrat"/>
+              <a:buNone/>
+              <a:defRPr sz="2100" b="0" i="0" u="none" strike="noStrike" cap="none">
+                <a:solidFill>
+                  <a:schemeClr val="lt1"/>
+                </a:solidFill>
+                <a:latin typeface="Montserrat"/>
+                <a:ea typeface="Montserrat"/>
+                <a:cs typeface="Montserrat"/>
+                <a:sym typeface="Montserrat"/>
+              </a:defRPr>
+            </a:lvl8pPr>
+            <a:lvl9pPr marL="4114800" marR="0" lvl="8" indent="-317500" algn="ctr" rtl="0">
+              <a:lnSpc>
+                <a:spcPct val="100000"/>
+              </a:lnSpc>
+              <a:spcBef>
+                <a:spcPts val="0"/>
+              </a:spcBef>
+              <a:spcAft>
+                <a:spcPts val="0"/>
+              </a:spcAft>
+              <a:buClr>
+                <a:schemeClr val="lt1"/>
+              </a:buClr>
+              <a:buSzPts val="2100"/>
+              <a:buFont typeface="Montserrat"/>
+              <a:buNone/>
+              <a:defRPr sz="2100" b="0" i="0" u="none" strike="noStrike" cap="none">
+                <a:solidFill>
+                  <a:schemeClr val="lt1"/>
+                </a:solidFill>
+                <a:latin typeface="Montserrat"/>
+                <a:ea typeface="Montserrat"/>
+                <a:cs typeface="Montserrat"/>
+                <a:sym typeface="Montserrat"/>
+              </a:defRPr>
+            </a:lvl9pPr>
+          </a:lstStyle>
+          <a:p>
+            <a:pPr marL="0" indent="0" algn="l">
+              <a:lnSpc>
+                <a:spcPct val="150000"/>
+              </a:lnSpc>
+            </a:pPr>
+            <a:r>
+              <a:rPr lang="ru-RU" dirty="0"/>
+              <a:t>Авторизация осуществляется</a:t>
+            </a:r>
+          </a:p>
+          <a:p>
+            <a:pPr marL="0" indent="0" algn="l">
+              <a:lnSpc>
+                <a:spcPct val="150000"/>
+              </a:lnSpc>
+            </a:pPr>
+            <a:r>
+              <a:rPr lang="ru-RU" dirty="0"/>
+              <a:t>с использованием JWT-токенов, в которые вшиваются необходимые параметры пользователя.</a:t>
+            </a:r>
+          </a:p>
+          <a:p>
+            <a:pPr marL="0" indent="0" algn="l">
+              <a:lnSpc>
+                <a:spcPct val="150000"/>
+              </a:lnSpc>
+            </a:pPr>
+            <a:r>
+              <a:rPr lang="en-US" dirty="0"/>
+              <a:t>(ID, Name, Role)</a:t>
+            </a:r>
+          </a:p>
+        </p:txBody>
+      </p:sp>
+      <p:cxnSp>
+        <p:nvCxnSpPr>
+          <p:cNvPr id="27" name="Google Shape;2108;p63">
+            <a:extLst>
+              <a:ext uri="{FF2B5EF4-FFF2-40B4-BE49-F238E27FC236}">
+                <a16:creationId xmlns:a16="http://schemas.microsoft.com/office/drawing/2014/main" id="{2E5AF290-7A46-CF31-E359-360D9F390530}"/>
+              </a:ext>
+            </a:extLst>
+          </p:cNvPr>
+          <p:cNvCxnSpPr>
+            <a:cxnSpLocks/>
+          </p:cNvCxnSpPr>
+          <p:nvPr/>
+        </p:nvCxnSpPr>
+        <p:spPr>
+          <a:xfrm>
+            <a:off x="4572000" y="1566172"/>
+            <a:ext cx="0" cy="3130519"/>
+          </a:xfrm>
+          <a:prstGeom prst="straightConnector1">
+            <a:avLst/>
+          </a:prstGeom>
+          <a:noFill/>
+          <a:ln w="9525" cap="flat" cmpd="sng">
+            <a:solidFill>
+              <a:schemeClr val="accent1"/>
+            </a:solidFill>
+            <a:prstDash val="solid"/>
+            <a:round/>
+            <a:headEnd type="none" w="med" len="med"/>
+            <a:tailEnd type="none" w="med" len="med"/>
+          </a:ln>
+          <a:effectLst>
+            <a:outerShdw blurRad="57150" dist="19050" dir="5400000" algn="bl" rotWithShape="0">
+              <a:srgbClr val="FFFFFF">
+                <a:alpha val="50000"/>
+              </a:srgbClr>
+            </a:outerShdw>
+          </a:effectLst>
+        </p:spPr>
+      </p:cxnSp>
+      <p:sp>
+        <p:nvSpPr>
+          <p:cNvPr id="2047" name="Google Shape;2098;p63">
+            <a:extLst>
+              <a:ext uri="{FF2B5EF4-FFF2-40B4-BE49-F238E27FC236}">
+                <a16:creationId xmlns:a16="http://schemas.microsoft.com/office/drawing/2014/main" id="{10AC4F83-7C14-7590-D15F-B83DAD5980FC}"/>
+              </a:ext>
+            </a:extLst>
+          </p:cNvPr>
+          <p:cNvSpPr txBox="1">
+            <a:spLocks/>
+          </p:cNvSpPr>
+          <p:nvPr/>
+        </p:nvSpPr>
+        <p:spPr>
+          <a:xfrm>
+            <a:off x="5470819" y="1437831"/>
+            <a:ext cx="1301855" cy="375600"/>
+          </a:xfrm>
+          <a:prstGeom prst="rect">
+            <a:avLst/>
+          </a:prstGeom>
+          <a:noFill/>
+          <a:ln>
+            <a:noFill/>
+          </a:ln>
+        </p:spPr>
+        <p:txBody>
+          <a:bodyPr spcFirstLastPara="1" wrap="square" lIns="91425" tIns="91425" rIns="91425" bIns="91425" anchor="t" anchorCtr="0">
+            <a:noAutofit/>
+          </a:bodyPr>
+          <a:lstStyle>
+            <a:defPPr marR="0" lvl="0" algn="l" rtl="0">
+              <a:lnSpc>
+                <a:spcPct val="100000"/>
+              </a:lnSpc>
+              <a:spcBef>
+                <a:spcPts val="0"/>
+              </a:spcBef>
+              <a:spcAft>
+                <a:spcPts val="0"/>
+              </a:spcAft>
+            </a:defPPr>
+            <a:lvl1pPr marR="0" lvl="0" algn="ctr" rtl="0">
+              <a:lnSpc>
+                <a:spcPct val="100000"/>
+              </a:lnSpc>
+              <a:spcBef>
+                <a:spcPts val="0"/>
+              </a:spcBef>
+              <a:spcAft>
+                <a:spcPts val="0"/>
+              </a:spcAft>
+              <a:buClr>
+                <a:schemeClr val="lt1"/>
+              </a:buClr>
+              <a:buSzPts val="1800"/>
+              <a:buFont typeface="Montserrat ExtraBold"/>
+              <a:buNone/>
+              <a:defRPr sz="1800" b="0" i="0" u="none" strike="noStrike" cap="none">
+                <a:solidFill>
+                  <a:schemeClr val="lt1"/>
+                </a:solidFill>
+                <a:latin typeface="Montserrat ExtraBold"/>
+                <a:ea typeface="Montserrat ExtraBold"/>
+                <a:cs typeface="Montserrat ExtraBold"/>
+                <a:sym typeface="Montserrat ExtraBold"/>
+              </a:defRPr>
+            </a:lvl1pPr>
+            <a:lvl2pPr marR="0" lvl="1" algn="ctr" rtl="0">
+              <a:lnSpc>
+                <a:spcPct val="100000"/>
+              </a:lnSpc>
+              <a:spcBef>
+                <a:spcPts val="0"/>
+              </a:spcBef>
+              <a:spcAft>
+                <a:spcPts val="0"/>
+              </a:spcAft>
+              <a:buClr>
+                <a:schemeClr val="lt1"/>
+              </a:buClr>
+              <a:buSzPts val="4200"/>
+              <a:buFont typeface="Montserrat"/>
+              <a:buNone/>
+              <a:defRPr sz="4200" b="0" i="0" u="none" strike="noStrike" cap="none">
+                <a:solidFill>
+                  <a:schemeClr val="lt1"/>
+                </a:solidFill>
+                <a:latin typeface="Montserrat"/>
+                <a:ea typeface="Montserrat"/>
+                <a:cs typeface="Montserrat"/>
+                <a:sym typeface="Montserrat"/>
+              </a:defRPr>
+            </a:lvl2pPr>
+            <a:lvl3pPr marR="0" lvl="2" algn="ctr" rtl="0">
+              <a:lnSpc>
+                <a:spcPct val="100000"/>
+              </a:lnSpc>
+              <a:spcBef>
+                <a:spcPts val="0"/>
+              </a:spcBef>
+              <a:spcAft>
+                <a:spcPts val="0"/>
+              </a:spcAft>
+              <a:buClr>
+                <a:schemeClr val="lt1"/>
+              </a:buClr>
+              <a:buSzPts val="4200"/>
+              <a:buFont typeface="Montserrat"/>
+              <a:buNone/>
+              <a:defRPr sz="4200" b="0" i="0" u="none" strike="noStrike" cap="none">
+                <a:solidFill>
+                  <a:schemeClr val="lt1"/>
+                </a:solidFill>
+                <a:latin typeface="Montserrat"/>
+                <a:ea typeface="Montserrat"/>
+                <a:cs typeface="Montserrat"/>
+                <a:sym typeface="Montserrat"/>
+              </a:defRPr>
+            </a:lvl3pPr>
+            <a:lvl4pPr marR="0" lvl="3" algn="ctr" rtl="0">
+              <a:lnSpc>
+                <a:spcPct val="100000"/>
+              </a:lnSpc>
+              <a:spcBef>
+                <a:spcPts val="0"/>
+              </a:spcBef>
+              <a:spcAft>
+                <a:spcPts val="0"/>
+              </a:spcAft>
+              <a:buClr>
+                <a:schemeClr val="lt1"/>
+              </a:buClr>
+              <a:buSzPts val="4200"/>
+              <a:buFont typeface="Montserrat"/>
+              <a:buNone/>
+              <a:defRPr sz="4200" b="0" i="0" u="none" strike="noStrike" cap="none">
+                <a:solidFill>
+                  <a:schemeClr val="lt1"/>
+                </a:solidFill>
+                <a:latin typeface="Montserrat"/>
+                <a:ea typeface="Montserrat"/>
+                <a:cs typeface="Montserrat"/>
+                <a:sym typeface="Montserrat"/>
+              </a:defRPr>
+            </a:lvl4pPr>
+            <a:lvl5pPr marR="0" lvl="4" algn="ctr" rtl="0">
+              <a:lnSpc>
+                <a:spcPct val="100000"/>
+              </a:lnSpc>
+              <a:spcBef>
+                <a:spcPts val="0"/>
+              </a:spcBef>
+              <a:spcAft>
+                <a:spcPts val="0"/>
+              </a:spcAft>
+              <a:buClr>
+                <a:schemeClr val="lt1"/>
+              </a:buClr>
+              <a:buSzPts val="4200"/>
+              <a:buFont typeface="Montserrat"/>
+              <a:buNone/>
+              <a:defRPr sz="4200" b="0" i="0" u="none" strike="noStrike" cap="none">
+                <a:solidFill>
+                  <a:schemeClr val="lt1"/>
+                </a:solidFill>
+                <a:latin typeface="Montserrat"/>
+                <a:ea typeface="Montserrat"/>
+                <a:cs typeface="Montserrat"/>
+                <a:sym typeface="Montserrat"/>
+              </a:defRPr>
+            </a:lvl5pPr>
+            <a:lvl6pPr marR="0" lvl="5" algn="ctr" rtl="0">
+              <a:lnSpc>
+                <a:spcPct val="100000"/>
+              </a:lnSpc>
+              <a:spcBef>
+                <a:spcPts val="0"/>
+              </a:spcBef>
+              <a:spcAft>
+                <a:spcPts val="0"/>
+              </a:spcAft>
+              <a:buClr>
+                <a:schemeClr val="lt1"/>
+              </a:buClr>
+              <a:buSzPts val="4200"/>
+              <a:buFont typeface="Montserrat"/>
+              <a:buNone/>
+              <a:defRPr sz="4200" b="0" i="0" u="none" strike="noStrike" cap="none">
+                <a:solidFill>
+                  <a:schemeClr val="lt1"/>
+                </a:solidFill>
+                <a:latin typeface="Montserrat"/>
+                <a:ea typeface="Montserrat"/>
+                <a:cs typeface="Montserrat"/>
+                <a:sym typeface="Montserrat"/>
+              </a:defRPr>
+            </a:lvl6pPr>
+            <a:lvl7pPr marR="0" lvl="6" algn="ctr" rtl="0">
+              <a:lnSpc>
+                <a:spcPct val="100000"/>
+              </a:lnSpc>
+              <a:spcBef>
+                <a:spcPts val="0"/>
+              </a:spcBef>
+              <a:spcAft>
+                <a:spcPts val="0"/>
+              </a:spcAft>
+              <a:buClr>
+                <a:schemeClr val="lt1"/>
+              </a:buClr>
+              <a:buSzPts val="4200"/>
+              <a:buFont typeface="Montserrat"/>
+              <a:buNone/>
+              <a:defRPr sz="4200" b="0" i="0" u="none" strike="noStrike" cap="none">
+                <a:solidFill>
+                  <a:schemeClr val="lt1"/>
+                </a:solidFill>
+                <a:latin typeface="Montserrat"/>
+                <a:ea typeface="Montserrat"/>
+                <a:cs typeface="Montserrat"/>
+                <a:sym typeface="Montserrat"/>
+              </a:defRPr>
+            </a:lvl7pPr>
+            <a:lvl8pPr marR="0" lvl="7" algn="ctr" rtl="0">
+              <a:lnSpc>
+                <a:spcPct val="100000"/>
+              </a:lnSpc>
+              <a:spcBef>
+                <a:spcPts val="0"/>
+              </a:spcBef>
+              <a:spcAft>
+                <a:spcPts val="0"/>
+              </a:spcAft>
+              <a:buClr>
+                <a:schemeClr val="lt1"/>
+              </a:buClr>
+              <a:buSzPts val="4200"/>
+              <a:buFont typeface="Montserrat"/>
+              <a:buNone/>
+              <a:defRPr sz="4200" b="0" i="0" u="none" strike="noStrike" cap="none">
+                <a:solidFill>
+                  <a:schemeClr val="lt1"/>
+                </a:solidFill>
+                <a:latin typeface="Montserrat"/>
+                <a:ea typeface="Montserrat"/>
+                <a:cs typeface="Montserrat"/>
+                <a:sym typeface="Montserrat"/>
+              </a:defRPr>
+            </a:lvl8pPr>
+            <a:lvl9pPr marR="0" lvl="8" algn="ctr" rtl="0">
+              <a:lnSpc>
+                <a:spcPct val="100000"/>
+              </a:lnSpc>
+              <a:spcBef>
+                <a:spcPts val="0"/>
+              </a:spcBef>
+              <a:spcAft>
+                <a:spcPts val="0"/>
+              </a:spcAft>
+              <a:buClr>
+                <a:schemeClr val="lt1"/>
+              </a:buClr>
+              <a:buSzPts val="4200"/>
+              <a:buFont typeface="Montserrat"/>
+              <a:buNone/>
+              <a:defRPr sz="4200" b="0" i="0" u="none" strike="noStrike" cap="none">
+                <a:solidFill>
+                  <a:schemeClr val="lt1"/>
+                </a:solidFill>
+                <a:latin typeface="Montserrat"/>
+                <a:ea typeface="Montserrat"/>
+                <a:cs typeface="Montserrat"/>
+                <a:sym typeface="Montserrat"/>
+              </a:defRPr>
+            </a:lvl9pPr>
+          </a:lstStyle>
+          <a:p>
+            <a:pPr algn="r"/>
+            <a:r>
+              <a:rPr lang="en-US" dirty="0"/>
+              <a:t>Swagger</a:t>
+            </a:r>
+            <a:endParaRPr lang="ru-RU" dirty="0"/>
+          </a:p>
+        </p:txBody>
+      </p:sp>
+      <p:sp>
+        <p:nvSpPr>
+          <p:cNvPr id="1984" name="Google Shape;2099;p63">
+            <a:extLst>
+              <a:ext uri="{FF2B5EF4-FFF2-40B4-BE49-F238E27FC236}">
+                <a16:creationId xmlns:a16="http://schemas.microsoft.com/office/drawing/2014/main" id="{B12F3D69-4715-35AA-88C6-B35AAD805FC4}"/>
+              </a:ext>
+            </a:extLst>
+          </p:cNvPr>
+          <p:cNvSpPr txBox="1">
+            <a:spLocks/>
+          </p:cNvSpPr>
+          <p:nvPr/>
+        </p:nvSpPr>
+        <p:spPr>
+          <a:xfrm>
+            <a:off x="5017773" y="1966350"/>
+            <a:ext cx="2727600" cy="605400"/>
+          </a:xfrm>
+          <a:prstGeom prst="rect">
+            <a:avLst/>
+          </a:prstGeom>
+          <a:noFill/>
+          <a:ln>
+            <a:noFill/>
+          </a:ln>
+        </p:spPr>
+        <p:txBody>
+          <a:bodyPr spcFirstLastPara="1" wrap="square" lIns="91425" tIns="91425" rIns="91425" bIns="91425" anchor="t" anchorCtr="0">
+            <a:noAutofit/>
+          </a:bodyPr>
+          <a:lstStyle>
+            <a:defPPr marR="0" lvl="0" algn="l" rtl="0">
+              <a:lnSpc>
+                <a:spcPct val="100000"/>
+              </a:lnSpc>
+              <a:spcBef>
+                <a:spcPts val="0"/>
+              </a:spcBef>
+              <a:spcAft>
+                <a:spcPts val="0"/>
+              </a:spcAft>
+            </a:defPPr>
+            <a:lvl1pPr marL="457200" marR="0" lvl="0" indent="-342900" algn="ctr" rtl="0">
+              <a:lnSpc>
+                <a:spcPct val="100000"/>
+              </a:lnSpc>
+              <a:spcBef>
+                <a:spcPts val="0"/>
+              </a:spcBef>
+              <a:spcAft>
+                <a:spcPts val="0"/>
+              </a:spcAft>
+              <a:buClr>
+                <a:schemeClr val="lt1"/>
+              </a:buClr>
+              <a:buSzPts val="1400"/>
+              <a:buFont typeface="Montserrat"/>
+              <a:buNone/>
+              <a:defRPr sz="1400" b="0" i="0" u="none" strike="noStrike" cap="none">
+                <a:solidFill>
+                  <a:schemeClr val="lt1"/>
+                </a:solidFill>
+                <a:latin typeface="Montserrat"/>
+                <a:ea typeface="Montserrat"/>
+                <a:cs typeface="Montserrat"/>
+                <a:sym typeface="Montserrat"/>
+              </a:defRPr>
+            </a:lvl1pPr>
+            <a:lvl2pPr marL="914400" marR="0" lvl="1" indent="-317500" algn="ctr" rtl="0">
+              <a:lnSpc>
+                <a:spcPct val="100000"/>
+              </a:lnSpc>
+              <a:spcBef>
+                <a:spcPts val="0"/>
+              </a:spcBef>
+              <a:spcAft>
+                <a:spcPts val="0"/>
+              </a:spcAft>
+              <a:buClr>
+                <a:schemeClr val="lt1"/>
+              </a:buClr>
+              <a:buSzPts val="2100"/>
+              <a:buFont typeface="Montserrat"/>
+              <a:buNone/>
+              <a:defRPr sz="2100" b="0" i="0" u="none" strike="noStrike" cap="none">
+                <a:solidFill>
+                  <a:schemeClr val="lt1"/>
+                </a:solidFill>
+                <a:latin typeface="Montserrat"/>
+                <a:ea typeface="Montserrat"/>
+                <a:cs typeface="Montserrat"/>
+                <a:sym typeface="Montserrat"/>
+              </a:defRPr>
+            </a:lvl2pPr>
+            <a:lvl3pPr marL="1371600" marR="0" lvl="2" indent="-317500" algn="ctr" rtl="0">
+              <a:lnSpc>
+                <a:spcPct val="100000"/>
+              </a:lnSpc>
+              <a:spcBef>
+                <a:spcPts val="0"/>
+              </a:spcBef>
+              <a:spcAft>
+                <a:spcPts val="0"/>
+              </a:spcAft>
+              <a:buClr>
+                <a:schemeClr val="lt1"/>
+              </a:buClr>
+              <a:buSzPts val="2100"/>
+              <a:buFont typeface="Montserrat"/>
+              <a:buNone/>
+              <a:defRPr sz="2100" b="0" i="0" u="none" strike="noStrike" cap="none">
+                <a:solidFill>
+                  <a:schemeClr val="lt1"/>
+                </a:solidFill>
+                <a:latin typeface="Montserrat"/>
+                <a:ea typeface="Montserrat"/>
+                <a:cs typeface="Montserrat"/>
+                <a:sym typeface="Montserrat"/>
+              </a:defRPr>
+            </a:lvl3pPr>
+            <a:lvl4pPr marL="1828800" marR="0" lvl="3" indent="-317500" algn="ctr" rtl="0">
+              <a:lnSpc>
+                <a:spcPct val="100000"/>
+              </a:lnSpc>
+              <a:spcBef>
+                <a:spcPts val="0"/>
+              </a:spcBef>
+              <a:spcAft>
+                <a:spcPts val="0"/>
+              </a:spcAft>
+              <a:buClr>
+                <a:schemeClr val="lt1"/>
+              </a:buClr>
+              <a:buSzPts val="2100"/>
+              <a:buFont typeface="Montserrat"/>
+              <a:buNone/>
+              <a:defRPr sz="2100" b="0" i="0" u="none" strike="noStrike" cap="none">
+                <a:solidFill>
+                  <a:schemeClr val="lt1"/>
+                </a:solidFill>
+                <a:latin typeface="Montserrat"/>
+                <a:ea typeface="Montserrat"/>
+                <a:cs typeface="Montserrat"/>
+                <a:sym typeface="Montserrat"/>
+              </a:defRPr>
+            </a:lvl4pPr>
+            <a:lvl5pPr marL="2286000" marR="0" lvl="4" indent="-317500" algn="ctr" rtl="0">
+              <a:lnSpc>
+                <a:spcPct val="100000"/>
+              </a:lnSpc>
+              <a:spcBef>
+                <a:spcPts val="0"/>
+              </a:spcBef>
+              <a:spcAft>
+                <a:spcPts val="0"/>
+              </a:spcAft>
+              <a:buClr>
+                <a:schemeClr val="lt1"/>
+              </a:buClr>
+              <a:buSzPts val="2100"/>
+              <a:buFont typeface="Montserrat"/>
+              <a:buNone/>
+              <a:defRPr sz="2100" b="0" i="0" u="none" strike="noStrike" cap="none">
+                <a:solidFill>
+                  <a:schemeClr val="lt1"/>
+                </a:solidFill>
+                <a:latin typeface="Montserrat"/>
+                <a:ea typeface="Montserrat"/>
+                <a:cs typeface="Montserrat"/>
+                <a:sym typeface="Montserrat"/>
+              </a:defRPr>
+            </a:lvl5pPr>
+            <a:lvl6pPr marL="2743200" marR="0" lvl="5" indent="-317500" algn="ctr" rtl="0">
+              <a:lnSpc>
+                <a:spcPct val="100000"/>
+              </a:lnSpc>
+              <a:spcBef>
+                <a:spcPts val="0"/>
+              </a:spcBef>
+              <a:spcAft>
+                <a:spcPts val="0"/>
+              </a:spcAft>
+              <a:buClr>
+                <a:schemeClr val="lt1"/>
+              </a:buClr>
+              <a:buSzPts val="2100"/>
+              <a:buFont typeface="Montserrat"/>
+              <a:buNone/>
+              <a:defRPr sz="2100" b="0" i="0" u="none" strike="noStrike" cap="none">
+                <a:solidFill>
+                  <a:schemeClr val="lt1"/>
+                </a:solidFill>
+                <a:latin typeface="Montserrat"/>
+                <a:ea typeface="Montserrat"/>
+                <a:cs typeface="Montserrat"/>
+                <a:sym typeface="Montserrat"/>
+              </a:defRPr>
+            </a:lvl6pPr>
+            <a:lvl7pPr marL="3200400" marR="0" lvl="6" indent="-317500" algn="ctr" rtl="0">
+              <a:lnSpc>
+                <a:spcPct val="100000"/>
+              </a:lnSpc>
+              <a:spcBef>
+                <a:spcPts val="0"/>
+              </a:spcBef>
+              <a:spcAft>
+                <a:spcPts val="0"/>
+              </a:spcAft>
+              <a:buClr>
+                <a:schemeClr val="lt1"/>
+              </a:buClr>
+              <a:buSzPts val="2100"/>
+              <a:buFont typeface="Montserrat"/>
+              <a:buNone/>
+              <a:defRPr sz="2100" b="0" i="0" u="none" strike="noStrike" cap="none">
+                <a:solidFill>
+                  <a:schemeClr val="lt1"/>
+                </a:solidFill>
+                <a:latin typeface="Montserrat"/>
+                <a:ea typeface="Montserrat"/>
+                <a:cs typeface="Montserrat"/>
+                <a:sym typeface="Montserrat"/>
+              </a:defRPr>
+            </a:lvl7pPr>
+            <a:lvl8pPr marL="3657600" marR="0" lvl="7" indent="-317500" algn="ctr" rtl="0">
+              <a:lnSpc>
+                <a:spcPct val="100000"/>
+              </a:lnSpc>
+              <a:spcBef>
+                <a:spcPts val="0"/>
+              </a:spcBef>
+              <a:spcAft>
+                <a:spcPts val="0"/>
+              </a:spcAft>
+              <a:buClr>
+                <a:schemeClr val="lt1"/>
+              </a:buClr>
+              <a:buSzPts val="2100"/>
+              <a:buFont typeface="Montserrat"/>
+              <a:buNone/>
+              <a:defRPr sz="2100" b="0" i="0" u="none" strike="noStrike" cap="none">
+                <a:solidFill>
+                  <a:schemeClr val="lt1"/>
+                </a:solidFill>
+                <a:latin typeface="Montserrat"/>
+                <a:ea typeface="Montserrat"/>
+                <a:cs typeface="Montserrat"/>
+                <a:sym typeface="Montserrat"/>
+              </a:defRPr>
+            </a:lvl8pPr>
+            <a:lvl9pPr marL="4114800" marR="0" lvl="8" indent="-317500" algn="ctr" rtl="0">
+              <a:lnSpc>
+                <a:spcPct val="100000"/>
+              </a:lnSpc>
+              <a:spcBef>
+                <a:spcPts val="0"/>
+              </a:spcBef>
+              <a:spcAft>
+                <a:spcPts val="0"/>
+              </a:spcAft>
+              <a:buClr>
+                <a:schemeClr val="lt1"/>
+              </a:buClr>
+              <a:buSzPts val="2100"/>
+              <a:buFont typeface="Montserrat"/>
+              <a:buNone/>
+              <a:defRPr sz="2100" b="0" i="0" u="none" strike="noStrike" cap="none">
+                <a:solidFill>
+                  <a:schemeClr val="lt1"/>
+                </a:solidFill>
+                <a:latin typeface="Montserrat"/>
+                <a:ea typeface="Montserrat"/>
+                <a:cs typeface="Montserrat"/>
+                <a:sym typeface="Montserrat"/>
+              </a:defRPr>
+            </a:lvl9pPr>
+          </a:lstStyle>
+          <a:p>
+            <a:pPr marL="0" indent="0" algn="l"/>
+            <a:r>
+              <a:rPr lang="ru-RU" dirty="0"/>
+              <a:t>Документирование </a:t>
+            </a:r>
+            <a:r>
+              <a:rPr lang="en-US" dirty="0"/>
+              <a:t>API</a:t>
+            </a:r>
+          </a:p>
+        </p:txBody>
+      </p:sp>
+      <p:pic>
+        <p:nvPicPr>
+          <p:cNvPr id="3" name="Рисунок 2">
+            <a:extLst>
+              <a:ext uri="{FF2B5EF4-FFF2-40B4-BE49-F238E27FC236}">
+                <a16:creationId xmlns:a16="http://schemas.microsoft.com/office/drawing/2014/main" id="{B9E1851E-3E99-9F22-01E7-510074DA66C2}"/>
+              </a:ext>
+            </a:extLst>
+          </p:cNvPr>
+          <p:cNvPicPr>
+            <a:picLocks noChangeAspect="1"/>
+          </p:cNvPicPr>
+          <p:nvPr/>
+        </p:nvPicPr>
+        <p:blipFill>
+          <a:blip>
+            <a:extLst>
+              <a:ext uri="{96DAC541-7B7A-43D3-8B79-37D633B846F1}">
+                <asvg:svgBlip xmlns:asvg="http://schemas.microsoft.com/office/drawing/2016/SVG/main" r:embed="rId3"/>
+              </a:ext>
+            </a:extLst>
+          </a:blip>
+          <a:stretch>
+            <a:fillRect/>
+          </a:stretch>
+        </p:blipFill>
+        <p:spPr>
+          <a:xfrm>
+            <a:off x="5091418" y="2393356"/>
+            <a:ext cx="2237634" cy="2237634"/>
+          </a:xfrm>
+          <a:prstGeom prst="rect">
+            <a:avLst/>
+          </a:prstGeom>
+        </p:spPr>
+      </p:pic>
+      <p:pic>
+        <p:nvPicPr>
+          <p:cNvPr id="2" name="Рисунок 1">
+            <a:extLst>
+              <a:ext uri="{FF2B5EF4-FFF2-40B4-BE49-F238E27FC236}">
+                <a16:creationId xmlns:a16="http://schemas.microsoft.com/office/drawing/2014/main" id="{B85F368D-D45F-8F85-4B64-9980E51E913E}"/>
+              </a:ext>
+            </a:extLst>
+          </p:cNvPr>
+          <p:cNvPicPr>
+            <a:picLocks noChangeAspect="1"/>
+          </p:cNvPicPr>
+          <p:nvPr/>
+        </p:nvPicPr>
+        <p:blipFill>
+          <a:blip>
+            <a:extLst>
+              <a:ext uri="{96DAC541-7B7A-43D3-8B79-37D633B846F1}">
+                <asvg:svgBlip xmlns:asvg="http://schemas.microsoft.com/office/drawing/2016/SVG/main" r:embed="rId4"/>
+              </a:ext>
+            </a:extLst>
+          </a:blip>
+          <a:stretch>
+            <a:fillRect/>
+          </a:stretch>
+        </p:blipFill>
+        <p:spPr>
+          <a:xfrm>
+            <a:off x="4572000" y="483939"/>
+            <a:ext cx="460431" cy="460431"/>
+          </a:xfrm>
+          <a:prstGeom prst="rect">
+            <a:avLst/>
+          </a:prstGeom>
+        </p:spPr>
+      </p:pic>
+    </p:spTree>
   </p:cSld>
   <p:clrMapOvr>
     <a:masterClrMapping/>
